--- a/slides/figures_publication_portrait.pptx
+++ b/slides/figures_publication_portrait.pptx
@@ -5,10 +5,12 @@
     <p:sldMasterId id="2147483660" r:id="rId1"/>
   </p:sldMasterIdLst>
   <p:sldIdLst>
-    <p:sldId id="256" r:id="rId2"/>
-    <p:sldId id="258" r:id="rId3"/>
+    <p:sldId id="260" r:id="rId2"/>
+    <p:sldId id="261" r:id="rId3"/>
     <p:sldId id="259" r:id="rId4"/>
-    <p:sldId id="257" r:id="rId5"/>
+    <p:sldId id="256" r:id="rId5"/>
+    <p:sldId id="258" r:id="rId6"/>
+    <p:sldId id="257" r:id="rId7"/>
   </p:sldIdLst>
   <p:sldSz cx="51206400" cy="51206400"/>
   <p:notesSz cx="6799263" cy="9929813"/>
@@ -107,6 +109,11 @@
       </a:defRPr>
     </a:lvl9pPr>
   </p:defaultTextStyle>
+  <p:extLst>
+    <p:ext uri="{EFAFB233-063F-42B5-8137-9DF3F51BA10A}">
+      <p15:sldGuideLst xmlns:p15="http://schemas.microsoft.com/office/powerpoint/2012/main"/>
+    </p:ext>
+  </p:extLst>
 </p:presentation>
 </file>
 
@@ -241,7 +248,7 @@
           <a:p>
             <a:fld id="{DBEC7EBC-4893-4C67-8E48-D69CA1600258}" type="datetimeFigureOut">
               <a:rPr lang="en-US" smtClean="0"/>
-              <a:t>5/4/2026</a:t>
+              <a:t>5/18/2026</a:t>
             </a:fld>
             <a:endParaRPr lang="en-US"/>
           </a:p>
@@ -411,7 +418,7 @@
           <a:p>
             <a:fld id="{DBEC7EBC-4893-4C67-8E48-D69CA1600258}" type="datetimeFigureOut">
               <a:rPr lang="en-US" smtClean="0"/>
-              <a:t>5/4/2026</a:t>
+              <a:t>5/18/2026</a:t>
             </a:fld>
             <a:endParaRPr lang="en-US"/>
           </a:p>
@@ -591,7 +598,7 @@
           <a:p>
             <a:fld id="{DBEC7EBC-4893-4C67-8E48-D69CA1600258}" type="datetimeFigureOut">
               <a:rPr lang="en-US" smtClean="0"/>
-              <a:t>5/4/2026</a:t>
+              <a:t>5/18/2026</a:t>
             </a:fld>
             <a:endParaRPr lang="en-US"/>
           </a:p>
@@ -761,7 +768,7 @@
           <a:p>
             <a:fld id="{DBEC7EBC-4893-4C67-8E48-D69CA1600258}" type="datetimeFigureOut">
               <a:rPr lang="en-US" smtClean="0"/>
-              <a:t>5/4/2026</a:t>
+              <a:t>5/18/2026</a:t>
             </a:fld>
             <a:endParaRPr lang="en-US"/>
           </a:p>
@@ -1007,7 +1014,7 @@
           <a:p>
             <a:fld id="{DBEC7EBC-4893-4C67-8E48-D69CA1600258}" type="datetimeFigureOut">
               <a:rPr lang="en-US" smtClean="0"/>
-              <a:t>5/4/2026</a:t>
+              <a:t>5/18/2026</a:t>
             </a:fld>
             <a:endParaRPr lang="en-US"/>
           </a:p>
@@ -1239,7 +1246,7 @@
           <a:p>
             <a:fld id="{DBEC7EBC-4893-4C67-8E48-D69CA1600258}" type="datetimeFigureOut">
               <a:rPr lang="en-US" smtClean="0"/>
-              <a:t>5/4/2026</a:t>
+              <a:t>5/18/2026</a:t>
             </a:fld>
             <a:endParaRPr lang="en-US"/>
           </a:p>
@@ -1606,7 +1613,7 @@
           <a:p>
             <a:fld id="{DBEC7EBC-4893-4C67-8E48-D69CA1600258}" type="datetimeFigureOut">
               <a:rPr lang="en-US" smtClean="0"/>
-              <a:t>5/4/2026</a:t>
+              <a:t>5/18/2026</a:t>
             </a:fld>
             <a:endParaRPr lang="en-US"/>
           </a:p>
@@ -1724,7 +1731,7 @@
           <a:p>
             <a:fld id="{DBEC7EBC-4893-4C67-8E48-D69CA1600258}" type="datetimeFigureOut">
               <a:rPr lang="en-US" smtClean="0"/>
-              <a:t>5/4/2026</a:t>
+              <a:t>5/18/2026</a:t>
             </a:fld>
             <a:endParaRPr lang="en-US"/>
           </a:p>
@@ -1819,7 +1826,7 @@
           <a:p>
             <a:fld id="{DBEC7EBC-4893-4C67-8E48-D69CA1600258}" type="datetimeFigureOut">
               <a:rPr lang="en-US" smtClean="0"/>
-              <a:t>5/4/2026</a:t>
+              <a:t>5/18/2026</a:t>
             </a:fld>
             <a:endParaRPr lang="en-US"/>
           </a:p>
@@ -2096,7 +2103,7 @@
           <a:p>
             <a:fld id="{DBEC7EBC-4893-4C67-8E48-D69CA1600258}" type="datetimeFigureOut">
               <a:rPr lang="en-US" smtClean="0"/>
-              <a:t>5/4/2026</a:t>
+              <a:t>5/18/2026</a:t>
             </a:fld>
             <a:endParaRPr lang="en-US"/>
           </a:p>
@@ -2353,7 +2360,7 @@
           <a:p>
             <a:fld id="{DBEC7EBC-4893-4C67-8E48-D69CA1600258}" type="datetimeFigureOut">
               <a:rPr lang="en-US" smtClean="0"/>
-              <a:t>5/4/2026</a:t>
+              <a:t>5/18/2026</a:t>
             </a:fld>
             <a:endParaRPr lang="en-US"/>
           </a:p>
@@ -2566,7 +2573,7 @@
           <a:p>
             <a:fld id="{DBEC7EBC-4893-4C67-8E48-D69CA1600258}" type="datetimeFigureOut">
               <a:rPr lang="en-US" smtClean="0"/>
-              <a:t>5/4/2026</a:t>
+              <a:t>5/18/2026</a:t>
             </a:fld>
             <a:endParaRPr lang="en-US"/>
           </a:p>
@@ -2971,47 +2978,12 @@
           <a:chExt cx="0" cy="0"/>
         </a:xfrm>
       </p:grpSpPr>
-      <p:pic>
-        <p:nvPicPr>
-          <p:cNvPr id="25" name="Picture 24" descr="A diagram of a confusion matrix&#10;&#10;AI-generated content may be incorrect.">
+      <p:sp>
+        <p:nvSpPr>
+          <p:cNvPr id="14" name="Rectangle: Rounded Corners 13">
             <a:extLst>
               <a:ext uri="{FF2B5EF4-FFF2-40B4-BE49-F238E27FC236}">
-                <a16:creationId xmlns:a16="http://schemas.microsoft.com/office/drawing/2014/main" id="{35B53DDB-EACD-148B-0EA7-FF3D0B7D55BA}"/>
-              </a:ext>
-            </a:extLst>
-          </p:cNvPr>
-          <p:cNvPicPr>
-            <a:picLocks noChangeAspect="1"/>
-          </p:cNvPicPr>
-          <p:nvPr/>
-        </p:nvPicPr>
-        <p:blipFill>
-          <a:blip r:embed="rId2">
-            <a:extLst>
-              <a:ext uri="{28A0092B-C50C-407E-A947-70E740481C1C}">
-                <a14:useLocalDpi xmlns:a14="http://schemas.microsoft.com/office/drawing/2010/main" val="0"/>
-              </a:ext>
-            </a:extLst>
-          </a:blip>
-          <a:srcRect r="14943"/>
-          <a:stretch/>
-        </p:blipFill>
-        <p:spPr>
-          <a:xfrm>
-            <a:off x="693492" y="19461184"/>
-            <a:ext cx="7978651" cy="8273962"/>
-          </a:xfrm>
-          <a:prstGeom prst="rect">
-            <a:avLst/>
-          </a:prstGeom>
-        </p:spPr>
-      </p:pic>
-      <p:sp>
-        <p:nvSpPr>
-          <p:cNvPr id="28" name="Rectangle: Rounded Corners 27">
-            <a:extLst>
-              <a:ext uri="{FF2B5EF4-FFF2-40B4-BE49-F238E27FC236}">
-                <a16:creationId xmlns:a16="http://schemas.microsoft.com/office/drawing/2014/main" id="{A8D94A47-E16E-5FA6-0A1F-80756C21A4F7}"/>
+                <a16:creationId xmlns:a16="http://schemas.microsoft.com/office/drawing/2014/main" id="{DBF4675B-24DA-ECE6-C51C-65069789A359}"/>
               </a:ext>
             </a:extLst>
           </p:cNvPr>
@@ -3020,55 +2992,8 @@
         </p:nvSpPr>
         <p:spPr>
           <a:xfrm>
-            <a:off x="693491" y="18597830"/>
-            <a:ext cx="22127025" cy="15953137"/>
-          </a:xfrm>
-          <a:prstGeom prst="roundRect">
-            <a:avLst/>
-          </a:prstGeom>
-          <a:noFill/>
-        </p:spPr>
-        <p:style>
-          <a:lnRef idx="2">
-            <a:schemeClr val="accent1">
-              <a:shade val="15000"/>
-            </a:schemeClr>
-          </a:lnRef>
-          <a:fillRef idx="1">
-            <a:schemeClr val="accent1"/>
-          </a:fillRef>
-          <a:effectRef idx="0">
-            <a:schemeClr val="accent1"/>
-          </a:effectRef>
-          <a:fontRef idx="minor">
-            <a:schemeClr val="lt1"/>
-          </a:fontRef>
-        </p:style>
-        <p:txBody>
-          <a:bodyPr rtlCol="0" anchor="ctr"/>
-          <a:lstStyle/>
-          <a:p>
-            <a:pPr algn="ctr"/>
-            <a:endParaRPr lang="en-US" dirty="0"/>
-          </a:p>
-        </p:txBody>
-      </p:sp>
-      <p:sp>
-        <p:nvSpPr>
-          <p:cNvPr id="6" name="Rectangle: Rounded Corners 5">
-            <a:extLst>
-              <a:ext uri="{FF2B5EF4-FFF2-40B4-BE49-F238E27FC236}">
-                <a16:creationId xmlns:a16="http://schemas.microsoft.com/office/drawing/2014/main" id="{9EB25CD5-A017-BD2B-F176-3CA388103295}"/>
-              </a:ext>
-            </a:extLst>
-          </p:cNvPr>
-          <p:cNvSpPr/>
-          <p:nvPr/>
-        </p:nvSpPr>
-        <p:spPr>
-          <a:xfrm>
-            <a:off x="1633447" y="8198389"/>
-            <a:ext cx="17246113" cy="6270664"/>
+            <a:off x="11391508" y="6072480"/>
+            <a:ext cx="29944252" cy="5165792"/>
           </a:xfrm>
           <a:prstGeom prst="roundRect">
             <a:avLst/>
@@ -3099,148 +3024,823 @@
           <a:bodyPr rtlCol="0" anchor="ctr"/>
           <a:lstStyle/>
           <a:p>
-            <a:pPr algn="just"/>
-            <a:endParaRPr lang="en-US" sz="4400" dirty="0">
-              <a:solidFill>
-                <a:schemeClr val="tx1"/>
-              </a:solidFill>
-            </a:endParaRPr>
-          </a:p>
-          <a:p>
-            <a:pPr algn="just"/>
-            <a:r>
-              <a:rPr lang="en-US" sz="4400" dirty="0">
-                <a:solidFill>
-                  <a:schemeClr val="tx1"/>
-                </a:solidFill>
-              </a:rPr>
-              <a:t>You are running a reproducibility study for compound selectivity prediction. The goal is to train a Balanced Random Forest Classifier to distinguish PI3K-delta (</a:t>
-            </a:r>
-            <a:r>
-              <a:rPr lang="en-US" sz="4400" dirty="0" err="1">
-                <a:solidFill>
-                  <a:schemeClr val="tx1"/>
-                </a:solidFill>
-              </a:rPr>
-              <a:t>UniProt</a:t>
-            </a:r>
-            <a:r>
-              <a:rPr lang="en-US" sz="4400" dirty="0">
-                <a:solidFill>
-                  <a:schemeClr val="tx1"/>
-                </a:solidFill>
-              </a:rPr>
-              <a:t>: O00329) vs PI3K-gamma (</a:t>
-            </a:r>
-            <a:r>
-              <a:rPr lang="en-US" sz="4400" dirty="0" err="1">
-                <a:solidFill>
-                  <a:schemeClr val="tx1"/>
-                </a:solidFill>
-              </a:rPr>
-              <a:t>UniProt</a:t>
-            </a:r>
-            <a:r>
-              <a:rPr lang="en-US" sz="4400" dirty="0">
-                <a:solidFill>
-                  <a:schemeClr val="tx1"/>
-                </a:solidFill>
-              </a:rPr>
-              <a:t>:  P48736) selective compounds, evaluate its performance, and identify recurrent molecular anchor fragments that drive the model's correct predictions for each selective class (class 1 &amp; 2) and discuss the chemical insight gained</a:t>
-            </a:r>
-            <a:r>
-              <a:rPr lang="en-US" sz="5400" dirty="0">
-                <a:solidFill>
-                  <a:schemeClr val="tx1"/>
-                </a:solidFill>
-              </a:rPr>
-              <a:t>.</a:t>
-            </a:r>
-          </a:p>
-          <a:p>
             <a:pPr algn="ctr"/>
             <a:endParaRPr lang="en-US" dirty="0"/>
           </a:p>
         </p:txBody>
       </p:sp>
-      <p:pic>
-        <p:nvPicPr>
-          <p:cNvPr id="7" name="Graphic 6" descr="Customer review with solid fill">
+      <p:sp>
+        <p:nvSpPr>
+          <p:cNvPr id="53" name="TextBox 52">
             <a:extLst>
               <a:ext uri="{FF2B5EF4-FFF2-40B4-BE49-F238E27FC236}">
-                <a16:creationId xmlns:a16="http://schemas.microsoft.com/office/drawing/2014/main" id="{D7B0435D-F7B8-934A-EEAB-9AFE4BFF1EDC}"/>
+                <a16:creationId xmlns:a16="http://schemas.microsoft.com/office/drawing/2014/main" id="{4D9CB3D1-7BFC-3386-B306-BDBBA5137ABA}"/>
               </a:ext>
             </a:extLst>
           </p:cNvPr>
-          <p:cNvPicPr>
-            <a:picLocks noChangeAspect="1"/>
-          </p:cNvPicPr>
+          <p:cNvSpPr txBox="1"/>
           <p:nvPr/>
-        </p:nvPicPr>
-        <p:blipFill>
-          <a:blip r:embed="rId3">
-            <a:extLst>
-              <a:ext uri="{96DAC541-7B7A-43D3-8B79-37D633B846F1}">
-                <asvg:svgBlip xmlns:asvg="http://schemas.microsoft.com/office/drawing/2016/SVG/main" r:embed="rId4"/>
-              </a:ext>
-            </a:extLst>
-          </a:blip>
-          <a:stretch>
-            <a:fillRect/>
-          </a:stretch>
-        </p:blipFill>
+        </p:nvSpPr>
         <p:spPr>
           <a:xfrm>
-            <a:off x="8856328" y="5398038"/>
-            <a:ext cx="2800350" cy="2800350"/>
+            <a:off x="17784949" y="11546203"/>
+            <a:ext cx="17157371" cy="923330"/>
           </a:xfrm>
           <a:prstGeom prst="rect">
             <a:avLst/>
           </a:prstGeom>
+          <a:noFill/>
         </p:spPr>
-      </p:pic>
-      <p:pic>
-        <p:nvPicPr>
-          <p:cNvPr id="11" name="Graphic 10" descr="Tools with solid fill">
+        <p:txBody>
+          <a:bodyPr wrap="square">
+            <a:spAutoFit/>
+          </a:bodyPr>
+          <a:lstStyle/>
+          <a:p>
+            <a:pPr algn="ctr"/>
+            <a:r>
+              <a:rPr lang="en-US" sz="5400" b="1" dirty="0">
+                <a:solidFill>
+                  <a:srgbClr val="0F0F0F"/>
+                </a:solidFill>
+                <a:latin typeface="ui-sans-serif"/>
+              </a:rPr>
+              <a:t>R</a:t>
+            </a:r>
+            <a:r>
+              <a:rPr lang="en-US" sz="5400" b="1" i="0" dirty="0">
+                <a:solidFill>
+                  <a:srgbClr val="0F0F0F"/>
+                </a:solidFill>
+                <a:effectLst/>
+                <a:latin typeface="ui-sans-serif"/>
+              </a:rPr>
+              <a:t>ecurrent Molecular Anchor Fragments (Class 1 &amp; 2)</a:t>
+            </a:r>
+          </a:p>
+        </p:txBody>
+      </p:sp>
+      <p:grpSp>
+        <p:nvGrpSpPr>
+          <p:cNvPr id="11" name="Group 10">
             <a:extLst>
               <a:ext uri="{FF2B5EF4-FFF2-40B4-BE49-F238E27FC236}">
-                <a16:creationId xmlns:a16="http://schemas.microsoft.com/office/drawing/2014/main" id="{92D0C0C2-A6A2-3FAB-626E-69F6C32225E8}"/>
+                <a16:creationId xmlns:a16="http://schemas.microsoft.com/office/drawing/2014/main" id="{BA0315A7-24C0-6048-1034-C950CB14E295}"/>
               </a:ext>
             </a:extLst>
           </p:cNvPr>
-          <p:cNvPicPr>
-            <a:picLocks noChangeAspect="1"/>
-          </p:cNvPicPr>
+          <p:cNvGrpSpPr/>
           <p:nvPr/>
-        </p:nvPicPr>
-        <p:blipFill>
-          <a:blip r:embed="rId5">
-            <a:extLst>
-              <a:ext uri="{96DAC541-7B7A-43D3-8B79-37D633B846F1}">
-                <asvg:svgBlip xmlns:asvg="http://schemas.microsoft.com/office/drawing/2016/SVG/main" r:embed="rId6"/>
-              </a:ext>
-            </a:extLst>
-          </a:blip>
-          <a:stretch>
-            <a:fillRect/>
-          </a:stretch>
-        </p:blipFill>
-        <p:spPr>
+        </p:nvGrpSpPr>
+        <p:grpSpPr>
           <a:xfrm>
-            <a:off x="32037765" y="6360459"/>
-            <a:ext cx="2378678" cy="2378678"/>
+            <a:off x="12759929" y="12660924"/>
+            <a:ext cx="27604980" cy="11960823"/>
+            <a:chOff x="12647583" y="12660924"/>
+            <a:chExt cx="27604980" cy="11960823"/>
           </a:xfrm>
-          <a:prstGeom prst="rect">
-            <a:avLst/>
-          </a:prstGeom>
-        </p:spPr>
-      </p:pic>
+        </p:grpSpPr>
+        <p:grpSp>
+          <p:nvGrpSpPr>
+            <p:cNvPr id="69" name="Group 68">
+              <a:extLst>
+                <a:ext uri="{FF2B5EF4-FFF2-40B4-BE49-F238E27FC236}">
+                  <a16:creationId xmlns:a16="http://schemas.microsoft.com/office/drawing/2014/main" id="{7C07ED87-02E6-769C-8522-F7EA43967144}"/>
+                </a:ext>
+              </a:extLst>
+            </p:cNvPr>
+            <p:cNvGrpSpPr/>
+            <p:nvPr/>
+          </p:nvGrpSpPr>
+          <p:grpSpPr>
+            <a:xfrm>
+              <a:off x="25921308" y="12660924"/>
+              <a:ext cx="14331255" cy="10606606"/>
+              <a:chOff x="26016215" y="32690065"/>
+              <a:chExt cx="14331255" cy="10606606"/>
+            </a:xfrm>
+          </p:grpSpPr>
+          <p:pic>
+            <p:nvPicPr>
+              <p:cNvPr id="59" name="Picture 58" descr="A red and black molecule&#10;&#10;AI-generated content may be incorrect.">
+                <a:extLst>
+                  <a:ext uri="{FF2B5EF4-FFF2-40B4-BE49-F238E27FC236}">
+                    <a16:creationId xmlns:a16="http://schemas.microsoft.com/office/drawing/2014/main" id="{FF828C6A-DA1B-1C2D-DF20-B453CD4FBA2B}"/>
+                  </a:ext>
+                </a:extLst>
+              </p:cNvPr>
+              <p:cNvPicPr>
+                <a:picLocks noChangeAspect="1"/>
+              </p:cNvPicPr>
+              <p:nvPr/>
+            </p:nvPicPr>
+            <p:blipFill>
+              <a:blip r:embed="rId2">
+                <a:extLst>
+                  <a:ext uri="{28A0092B-C50C-407E-A947-70E740481C1C}">
+                    <a14:useLocalDpi xmlns:a14="http://schemas.microsoft.com/office/drawing/2010/main" val="0"/>
+                  </a:ext>
+                </a:extLst>
+              </a:blip>
+              <a:srcRect t="9899" r="60477" b="34643"/>
+              <a:stretch/>
+            </p:blipFill>
+            <p:spPr>
+              <a:xfrm>
+                <a:off x="26016215" y="33792057"/>
+                <a:ext cx="14331255" cy="3686730"/>
+              </a:xfrm>
+              <a:prstGeom prst="rect">
+                <a:avLst/>
+              </a:prstGeom>
+            </p:spPr>
+          </p:pic>
+          <p:grpSp>
+            <p:nvGrpSpPr>
+              <p:cNvPr id="56" name="Group 55">
+                <a:extLst>
+                  <a:ext uri="{FF2B5EF4-FFF2-40B4-BE49-F238E27FC236}">
+                    <a16:creationId xmlns:a16="http://schemas.microsoft.com/office/drawing/2014/main" id="{3328C6AB-5D2D-21F5-D316-19C43126EF72}"/>
+                  </a:ext>
+                </a:extLst>
+              </p:cNvPr>
+              <p:cNvGrpSpPr/>
+              <p:nvPr/>
+            </p:nvGrpSpPr>
+            <p:grpSpPr>
+              <a:xfrm>
+                <a:off x="27091192" y="37720664"/>
+                <a:ext cx="12181300" cy="1477328"/>
+                <a:chOff x="27174716" y="37720664"/>
+                <a:chExt cx="12181300" cy="1477328"/>
+              </a:xfrm>
+            </p:grpSpPr>
+            <p:sp>
+              <p:nvSpPr>
+                <p:cNvPr id="61" name="TextBox 60">
+                  <a:extLst>
+                    <a:ext uri="{FF2B5EF4-FFF2-40B4-BE49-F238E27FC236}">
+                      <a16:creationId xmlns:a16="http://schemas.microsoft.com/office/drawing/2014/main" id="{A7D21A72-9214-4047-1740-F895FF59E1E6}"/>
+                    </a:ext>
+                  </a:extLst>
+                </p:cNvPr>
+                <p:cNvSpPr txBox="1"/>
+                <p:nvPr/>
+              </p:nvSpPr>
+              <p:spPr>
+                <a:xfrm>
+                  <a:off x="27174716" y="37720664"/>
+                  <a:ext cx="5323362" cy="1477328"/>
+                </a:xfrm>
+                <a:prstGeom prst="rect">
+                  <a:avLst/>
+                </a:prstGeom>
+                <a:noFill/>
+              </p:spPr>
+              <p:txBody>
+                <a:bodyPr wrap="square" rtlCol="0">
+                  <a:spAutoFit/>
+                </a:bodyPr>
+                <a:lstStyle/>
+                <a:p>
+                  <a:pPr algn="ctr"/>
+                  <a:r>
+                    <a:rPr lang="en-US" sz="3000" b="1" i="0" dirty="0">
+                      <a:solidFill>
+                        <a:srgbClr val="0F0F0F"/>
+                      </a:solidFill>
+                      <a:effectLst/>
+                      <a:latin typeface="ui-sans-serif"/>
+                    </a:rPr>
+                    <a:t>Rank 1</a:t>
+                  </a:r>
+                </a:p>
+                <a:p>
+                  <a:pPr algn="ctr"/>
+                  <a:r>
+                    <a:rPr lang="en-US" sz="3000" b="1" dirty="0">
+                      <a:solidFill>
+                        <a:srgbClr val="0F0F0F"/>
+                      </a:solidFill>
+                      <a:latin typeface="ui-sans-serif"/>
+                    </a:rPr>
+                    <a:t>Anchor occurrence: 0.36</a:t>
+                  </a:r>
+                </a:p>
+                <a:p>
+                  <a:pPr algn="ctr"/>
+                  <a:r>
+                    <a:rPr lang="en-US" sz="3000" b="1" dirty="0">
+                      <a:solidFill>
+                        <a:srgbClr val="0F0F0F"/>
+                      </a:solidFill>
+                      <a:latin typeface="ui-sans-serif"/>
+                    </a:rPr>
+                    <a:t>Substructure occurrence: 0.82</a:t>
+                  </a:r>
+                  <a:endParaRPr lang="en-US" sz="3000" dirty="0"/>
+                </a:p>
+              </p:txBody>
+            </p:sp>
+            <p:sp>
+              <p:nvSpPr>
+                <p:cNvPr id="62" name="TextBox 61">
+                  <a:extLst>
+                    <a:ext uri="{FF2B5EF4-FFF2-40B4-BE49-F238E27FC236}">
+                      <a16:creationId xmlns:a16="http://schemas.microsoft.com/office/drawing/2014/main" id="{9062DABE-6143-0CF6-47EE-82DED9712869}"/>
+                    </a:ext>
+                  </a:extLst>
+                </p:cNvPr>
+                <p:cNvSpPr txBox="1"/>
+                <p:nvPr/>
+              </p:nvSpPr>
+              <p:spPr>
+                <a:xfrm>
+                  <a:off x="34039249" y="37720664"/>
+                  <a:ext cx="5316767" cy="1477328"/>
+                </a:xfrm>
+                <a:prstGeom prst="rect">
+                  <a:avLst/>
+                </a:prstGeom>
+                <a:noFill/>
+              </p:spPr>
+              <p:txBody>
+                <a:bodyPr wrap="square" rtlCol="0">
+                  <a:spAutoFit/>
+                </a:bodyPr>
+                <a:lstStyle/>
+                <a:p>
+                  <a:pPr algn="ctr"/>
+                  <a:r>
+                    <a:rPr lang="en-US" sz="3000" b="1" i="0" dirty="0">
+                      <a:solidFill>
+                        <a:srgbClr val="0F0F0F"/>
+                      </a:solidFill>
+                      <a:effectLst/>
+                      <a:latin typeface="ui-sans-serif"/>
+                    </a:rPr>
+                    <a:t>Rank 2</a:t>
+                  </a:r>
+                </a:p>
+                <a:p>
+                  <a:pPr algn="ctr"/>
+                  <a:r>
+                    <a:rPr lang="en-US" sz="3000" b="1" dirty="0">
+                      <a:solidFill>
+                        <a:srgbClr val="0F0F0F"/>
+                      </a:solidFill>
+                      <a:latin typeface="ui-sans-serif"/>
+                    </a:rPr>
+                    <a:t>Anchor occurrence: 0.18</a:t>
+                  </a:r>
+                </a:p>
+                <a:p>
+                  <a:pPr algn="ctr"/>
+                  <a:r>
+                    <a:rPr lang="en-US" sz="3000" b="1" dirty="0">
+                      <a:solidFill>
+                        <a:srgbClr val="0F0F0F"/>
+                      </a:solidFill>
+                      <a:latin typeface="ui-sans-serif"/>
+                    </a:rPr>
+                    <a:t>Substructure occurrence: 0.36</a:t>
+                  </a:r>
+                  <a:endParaRPr lang="en-US" sz="3000" dirty="0"/>
+                </a:p>
+              </p:txBody>
+            </p:sp>
+          </p:grpSp>
+          <p:sp>
+            <p:nvSpPr>
+              <p:cNvPr id="64" name="TextBox 63">
+                <a:extLst>
+                  <a:ext uri="{FF2B5EF4-FFF2-40B4-BE49-F238E27FC236}">
+                    <a16:creationId xmlns:a16="http://schemas.microsoft.com/office/drawing/2014/main" id="{375CDCAE-E997-6AB6-EE31-7EEA0E2E635E}"/>
+                  </a:ext>
+                </a:extLst>
+              </p:cNvPr>
+              <p:cNvSpPr txBox="1"/>
+              <p:nvPr/>
+            </p:nvSpPr>
+            <p:spPr>
+              <a:xfrm>
+                <a:off x="30026714" y="32690065"/>
+                <a:ext cx="6310257" cy="923330"/>
+              </a:xfrm>
+              <a:prstGeom prst="rect">
+                <a:avLst/>
+              </a:prstGeom>
+              <a:noFill/>
+            </p:spPr>
+            <p:txBody>
+              <a:bodyPr wrap="square" rtlCol="0">
+                <a:spAutoFit/>
+              </a:bodyPr>
+              <a:lstStyle/>
+              <a:p>
+                <a:pPr algn="ctr"/>
+                <a:r>
+                  <a:rPr lang="en-US" sz="5400" b="1" dirty="0"/>
+                  <a:t>Class </a:t>
+                </a:r>
+                <a:r>
+                  <a:rPr lang="en-US" sz="5400" b="1" i="0" dirty="0">
+                    <a:solidFill>
+                      <a:srgbClr val="0F0F0F"/>
+                    </a:solidFill>
+                    <a:effectLst/>
+                    <a:latin typeface="ui-sans-serif"/>
+                  </a:rPr>
+                  <a:t>PI3K-gamma</a:t>
+                </a:r>
+                <a:endParaRPr lang="de-DE" sz="5400" b="1" dirty="0"/>
+              </a:p>
+            </p:txBody>
+          </p:sp>
+          <p:sp>
+            <p:nvSpPr>
+              <p:cNvPr id="65" name="TextBox 64">
+                <a:extLst>
+                  <a:ext uri="{FF2B5EF4-FFF2-40B4-BE49-F238E27FC236}">
+                    <a16:creationId xmlns:a16="http://schemas.microsoft.com/office/drawing/2014/main" id="{F275191B-4583-8146-851D-EA0FC0A427D2}"/>
+                  </a:ext>
+                </a:extLst>
+              </p:cNvPr>
+              <p:cNvSpPr txBox="1"/>
+              <p:nvPr/>
+            </p:nvSpPr>
+            <p:spPr>
+              <a:xfrm>
+                <a:off x="27101081" y="39664908"/>
+                <a:ext cx="12697545" cy="3631763"/>
+              </a:xfrm>
+              <a:prstGeom prst="rect">
+                <a:avLst/>
+              </a:prstGeom>
+              <a:noFill/>
+            </p:spPr>
+            <p:txBody>
+              <a:bodyPr wrap="square" rtlCol="0">
+                <a:spAutoFit/>
+              </a:bodyPr>
+              <a:lstStyle/>
+              <a:p>
+                <a:pPr marL="228600" indent="-228600" algn="just">
+                  <a:spcAft>
+                    <a:spcPts val="1200"/>
+                  </a:spcAft>
+                  <a:buFont typeface="+mj-lt"/>
+                  <a:buAutoNum type="arabicPeriod"/>
+                </a:pPr>
+                <a:r>
+                  <a:rPr lang="en-US" sz="4400" b="1" dirty="0"/>
+                  <a:t> </a:t>
+                </a:r>
+                <a:r>
+                  <a:rPr lang="en-US" sz="4400" dirty="0"/>
+                  <a:t>Occurs in </a:t>
+                </a:r>
+                <a:r>
+                  <a:rPr lang="en-US" sz="4400" b="1" dirty="0"/>
+                  <a:t>36.4% </a:t>
+                </a:r>
+                <a:r>
+                  <a:rPr lang="en-US" sz="4400" dirty="0"/>
+                  <a:t>of anchors. A </a:t>
+                </a:r>
+                <a:r>
+                  <a:rPr lang="en-US" sz="4400" b="1" dirty="0"/>
+                  <a:t>substituted </a:t>
+                </a:r>
+                <a:r>
+                  <a:rPr lang="en-US" sz="4400" b="1" dirty="0" err="1"/>
+                  <a:t>isoquinoline</a:t>
+                </a:r>
+                <a:r>
+                  <a:rPr lang="en-US" sz="4400" b="1" dirty="0"/>
+                  <a:t>/pyrazolo-pyridine core</a:t>
+                </a:r>
+                <a:r>
+                  <a:rPr lang="en-US" sz="4400" dirty="0"/>
+                  <a:t>, highly characteristic of PI3K-gamma selective inhibitors.</a:t>
+                </a:r>
+              </a:p>
+              <a:p>
+                <a:pPr marL="228600" indent="-228600" algn="just">
+                  <a:spcAft>
+                    <a:spcPts val="1200"/>
+                  </a:spcAft>
+                  <a:buFont typeface="+mj-lt"/>
+                  <a:buAutoNum type="arabicPeriod"/>
+                </a:pPr>
+                <a:r>
+                  <a:rPr lang="en-US" sz="4400" b="1" dirty="0"/>
+                  <a:t> </a:t>
+                </a:r>
+                <a:r>
+                  <a:rPr lang="en-US" sz="4400" b="1" dirty="0" err="1"/>
+                  <a:t>Dihydroisoquinolinone</a:t>
+                </a:r>
+                <a:r>
+                  <a:rPr lang="en-US" sz="4400" b="1" dirty="0"/>
+                  <a:t> derivatives</a:t>
+                </a:r>
+                <a:r>
+                  <a:rPr lang="en-US" sz="4400" dirty="0"/>
+                  <a:t>, frequently appearing in gamma-selective chemotypes.</a:t>
+                </a:r>
+              </a:p>
+            </p:txBody>
+          </p:sp>
+        </p:grpSp>
+        <p:grpSp>
+          <p:nvGrpSpPr>
+            <p:cNvPr id="71" name="Group 70">
+              <a:extLst>
+                <a:ext uri="{FF2B5EF4-FFF2-40B4-BE49-F238E27FC236}">
+                  <a16:creationId xmlns:a16="http://schemas.microsoft.com/office/drawing/2014/main" id="{B566DC8D-A751-746E-78CA-6C8E8122C95C}"/>
+                </a:ext>
+              </a:extLst>
+            </p:cNvPr>
+            <p:cNvGrpSpPr/>
+            <p:nvPr/>
+          </p:nvGrpSpPr>
+          <p:grpSpPr>
+            <a:xfrm>
+              <a:off x="12647583" y="12660924"/>
+              <a:ext cx="12161520" cy="11960823"/>
+              <a:chOff x="12742490" y="32690065"/>
+              <a:chExt cx="12161520" cy="11960823"/>
+            </a:xfrm>
+          </p:grpSpPr>
+          <p:pic>
+            <p:nvPicPr>
+              <p:cNvPr id="57" name="Picture 56" descr="A black and red hexagons&#10;&#10;AI-generated content may be incorrect.">
+                <a:extLst>
+                  <a:ext uri="{FF2B5EF4-FFF2-40B4-BE49-F238E27FC236}">
+                    <a16:creationId xmlns:a16="http://schemas.microsoft.com/office/drawing/2014/main" id="{D31C6E93-8769-C043-E3E6-35F8E48F9A7F}"/>
+                  </a:ext>
+                </a:extLst>
+              </p:cNvPr>
+              <p:cNvPicPr>
+                <a:picLocks noChangeAspect="1"/>
+              </p:cNvPicPr>
+              <p:nvPr/>
+            </p:nvPicPr>
+            <p:blipFill>
+              <a:blip r:embed="rId3">
+                <a:extLst>
+                  <a:ext uri="{28A0092B-C50C-407E-A947-70E740481C1C}">
+                    <a14:useLocalDpi xmlns:a14="http://schemas.microsoft.com/office/drawing/2010/main" val="0"/>
+                  </a:ext>
+                </a:extLst>
+              </a:blip>
+              <a:srcRect r="60622" b="25829"/>
+              <a:stretch/>
+            </p:blipFill>
+            <p:spPr>
+              <a:xfrm>
+                <a:off x="12970037" y="33436279"/>
+                <a:ext cx="11706426" cy="4042508"/>
+              </a:xfrm>
+              <a:prstGeom prst="rect">
+                <a:avLst/>
+              </a:prstGeom>
+            </p:spPr>
+          </p:pic>
+          <p:grpSp>
+            <p:nvGrpSpPr>
+              <p:cNvPr id="68" name="Group 67">
+                <a:extLst>
+                  <a:ext uri="{FF2B5EF4-FFF2-40B4-BE49-F238E27FC236}">
+                    <a16:creationId xmlns:a16="http://schemas.microsoft.com/office/drawing/2014/main" id="{3B152157-9CC7-F546-D5E7-974890FB190C}"/>
+                  </a:ext>
+                </a:extLst>
+              </p:cNvPr>
+              <p:cNvGrpSpPr/>
+              <p:nvPr/>
+            </p:nvGrpSpPr>
+            <p:grpSpPr>
+              <a:xfrm>
+                <a:off x="13187768" y="37935654"/>
+                <a:ext cx="11270964" cy="1477328"/>
+                <a:chOff x="13180193" y="37935654"/>
+                <a:chExt cx="11270964" cy="1477328"/>
+              </a:xfrm>
+            </p:grpSpPr>
+            <p:sp>
+              <p:nvSpPr>
+                <p:cNvPr id="58" name="TextBox 57">
+                  <a:extLst>
+                    <a:ext uri="{FF2B5EF4-FFF2-40B4-BE49-F238E27FC236}">
+                      <a16:creationId xmlns:a16="http://schemas.microsoft.com/office/drawing/2014/main" id="{8572CEAB-6935-A767-5441-EE39B0CFE9A6}"/>
+                    </a:ext>
+                  </a:extLst>
+                </p:cNvPr>
+                <p:cNvSpPr txBox="1"/>
+                <p:nvPr/>
+              </p:nvSpPr>
+              <p:spPr>
+                <a:xfrm>
+                  <a:off x="13180193" y="37935654"/>
+                  <a:ext cx="5414457" cy="1477328"/>
+                </a:xfrm>
+                <a:prstGeom prst="rect">
+                  <a:avLst/>
+                </a:prstGeom>
+                <a:noFill/>
+              </p:spPr>
+              <p:txBody>
+                <a:bodyPr wrap="square" rtlCol="0">
+                  <a:spAutoFit/>
+                </a:bodyPr>
+                <a:lstStyle/>
+                <a:p>
+                  <a:pPr algn="ctr"/>
+                  <a:r>
+                    <a:rPr lang="en-US" sz="3000" b="1" i="0" dirty="0">
+                      <a:solidFill>
+                        <a:srgbClr val="0F0F0F"/>
+                      </a:solidFill>
+                      <a:effectLst/>
+                      <a:latin typeface="ui-sans-serif"/>
+                    </a:rPr>
+                    <a:t>Rank 1</a:t>
+                  </a:r>
+                </a:p>
+                <a:p>
+                  <a:pPr algn="ctr"/>
+                  <a:r>
+                    <a:rPr lang="en-US" sz="3000" b="1" dirty="0">
+                      <a:solidFill>
+                        <a:srgbClr val="0F0F0F"/>
+                      </a:solidFill>
+                      <a:latin typeface="ui-sans-serif"/>
+                    </a:rPr>
+                    <a:t>Anchor occurrence: 0.26</a:t>
+                  </a:r>
+                </a:p>
+                <a:p>
+                  <a:pPr algn="ctr"/>
+                  <a:r>
+                    <a:rPr lang="en-US" sz="3000" b="1" dirty="0">
+                      <a:solidFill>
+                        <a:srgbClr val="0F0F0F"/>
+                      </a:solidFill>
+                      <a:latin typeface="ui-sans-serif"/>
+                    </a:rPr>
+                    <a:t>Substructure occurrence: 0.26</a:t>
+                  </a:r>
+                  <a:endParaRPr lang="en-US" sz="3000" dirty="0"/>
+                </a:p>
+              </p:txBody>
+            </p:sp>
+            <p:sp>
+              <p:nvSpPr>
+                <p:cNvPr id="60" name="TextBox 59">
+                  <a:extLst>
+                    <a:ext uri="{FF2B5EF4-FFF2-40B4-BE49-F238E27FC236}">
+                      <a16:creationId xmlns:a16="http://schemas.microsoft.com/office/drawing/2014/main" id="{CB3D1D01-6B66-4EBF-BA63-15E4A614E261}"/>
+                    </a:ext>
+                  </a:extLst>
+                </p:cNvPr>
+                <p:cNvSpPr txBox="1"/>
+                <p:nvPr/>
+              </p:nvSpPr>
+              <p:spPr>
+                <a:xfrm>
+                  <a:off x="18997991" y="37935654"/>
+                  <a:ext cx="5453166" cy="1477328"/>
+                </a:xfrm>
+                <a:prstGeom prst="rect">
+                  <a:avLst/>
+                </a:prstGeom>
+                <a:noFill/>
+              </p:spPr>
+              <p:txBody>
+                <a:bodyPr wrap="square" rtlCol="0">
+                  <a:spAutoFit/>
+                </a:bodyPr>
+                <a:lstStyle/>
+                <a:p>
+                  <a:pPr algn="ctr"/>
+                  <a:r>
+                    <a:rPr lang="en-US" sz="3000" b="1" i="0" dirty="0">
+                      <a:solidFill>
+                        <a:srgbClr val="0F0F0F"/>
+                      </a:solidFill>
+                      <a:effectLst/>
+                      <a:latin typeface="ui-sans-serif"/>
+                    </a:rPr>
+                    <a:t>Rank 2</a:t>
+                  </a:r>
+                </a:p>
+                <a:p>
+                  <a:pPr algn="ctr"/>
+                  <a:r>
+                    <a:rPr lang="en-US" sz="3000" b="1" dirty="0">
+                      <a:solidFill>
+                        <a:srgbClr val="0F0F0F"/>
+                      </a:solidFill>
+                      <a:latin typeface="ui-sans-serif"/>
+                    </a:rPr>
+                    <a:t>Anchor occurrence: 0.25</a:t>
+                  </a:r>
+                </a:p>
+                <a:p>
+                  <a:pPr algn="ctr"/>
+                  <a:r>
+                    <a:rPr lang="en-US" sz="3000" b="1" dirty="0">
+                      <a:solidFill>
+                        <a:srgbClr val="0F0F0F"/>
+                      </a:solidFill>
+                      <a:latin typeface="ui-sans-serif"/>
+                    </a:rPr>
+                    <a:t>Substructure occurrence: 0.25</a:t>
+                  </a:r>
+                  <a:endParaRPr lang="en-US" sz="3000" dirty="0"/>
+                </a:p>
+              </p:txBody>
+            </p:sp>
+          </p:grpSp>
+          <p:sp>
+            <p:nvSpPr>
+              <p:cNvPr id="63" name="TextBox 62">
+                <a:extLst>
+                  <a:ext uri="{FF2B5EF4-FFF2-40B4-BE49-F238E27FC236}">
+                    <a16:creationId xmlns:a16="http://schemas.microsoft.com/office/drawing/2014/main" id="{6A5C72D7-D885-252B-9D5B-8FCC3218E83B}"/>
+                  </a:ext>
+                </a:extLst>
+              </p:cNvPr>
+              <p:cNvSpPr txBox="1"/>
+              <p:nvPr/>
+            </p:nvSpPr>
+            <p:spPr>
+              <a:xfrm>
+                <a:off x="15521521" y="32690065"/>
+                <a:ext cx="6603459" cy="923330"/>
+              </a:xfrm>
+              <a:prstGeom prst="rect">
+                <a:avLst/>
+              </a:prstGeom>
+              <a:noFill/>
+            </p:spPr>
+            <p:txBody>
+              <a:bodyPr wrap="square" rtlCol="0">
+                <a:spAutoFit/>
+              </a:bodyPr>
+              <a:lstStyle/>
+              <a:p>
+                <a:pPr algn="ctr"/>
+                <a:r>
+                  <a:rPr lang="en-US" sz="5400" b="1" dirty="0"/>
+                  <a:t>Class </a:t>
+                </a:r>
+                <a:r>
+                  <a:rPr lang="en-US" sz="5400" b="1" i="0" dirty="0">
+                    <a:solidFill>
+                      <a:srgbClr val="0F0F0F"/>
+                    </a:solidFill>
+                    <a:effectLst/>
+                    <a:latin typeface="ui-sans-serif"/>
+                  </a:rPr>
+                  <a:t>PI3K-delta</a:t>
+                </a:r>
+                <a:endParaRPr lang="de-DE" sz="5400" b="1" dirty="0"/>
+              </a:p>
+            </p:txBody>
+          </p:sp>
+          <p:sp>
+            <p:nvSpPr>
+              <p:cNvPr id="66" name="TextBox 65">
+                <a:extLst>
+                  <a:ext uri="{FF2B5EF4-FFF2-40B4-BE49-F238E27FC236}">
+                    <a16:creationId xmlns:a16="http://schemas.microsoft.com/office/drawing/2014/main" id="{07CA5145-B7E2-1C7C-76AD-CFE78D36AE62}"/>
+                  </a:ext>
+                </a:extLst>
+              </p:cNvPr>
+              <p:cNvSpPr txBox="1"/>
+              <p:nvPr/>
+            </p:nvSpPr>
+            <p:spPr>
+              <a:xfrm>
+                <a:off x="12742490" y="39664908"/>
+                <a:ext cx="12161520" cy="4985980"/>
+              </a:xfrm>
+              <a:prstGeom prst="rect">
+                <a:avLst/>
+              </a:prstGeom>
+              <a:noFill/>
+            </p:spPr>
+            <p:txBody>
+              <a:bodyPr wrap="square" rtlCol="0">
+                <a:spAutoFit/>
+              </a:bodyPr>
+              <a:lstStyle/>
+              <a:p>
+                <a:pPr marL="228600" indent="-228600" algn="just">
+                  <a:spcAft>
+                    <a:spcPts val="1200"/>
+                  </a:spcAft>
+                  <a:buFont typeface="+mj-lt"/>
+                  <a:buAutoNum type="arabicPeriod"/>
+                </a:pPr>
+                <a:r>
+                  <a:rPr lang="en-US" sz="4400" b="1" dirty="0"/>
+                  <a:t> </a:t>
+                </a:r>
+                <a:r>
+                  <a:rPr lang="en-US" sz="4400" dirty="0"/>
+                  <a:t>Occurs in </a:t>
+                </a:r>
+                <a:r>
+                  <a:rPr lang="en-US" sz="4400" b="1" dirty="0"/>
+                  <a:t>26.4% </a:t>
+                </a:r>
+                <a:r>
+                  <a:rPr lang="en-US" sz="4400" dirty="0"/>
+                  <a:t>of correctly predicted Class 1 compounds. This </a:t>
+                </a:r>
+                <a:r>
+                  <a:rPr lang="en-US" sz="4400" b="1" dirty="0"/>
+                  <a:t>cyano-substituted pyrimidine </a:t>
+                </a:r>
+                <a:r>
+                  <a:rPr lang="en-US" sz="4400" dirty="0"/>
+                  <a:t>motif is a classic </a:t>
+                </a:r>
+                <a:r>
+                  <a:rPr lang="en-US" sz="4400" b="1" dirty="0"/>
+                  <a:t>kinase hinge-binder.</a:t>
+                </a:r>
+              </a:p>
+              <a:p>
+                <a:pPr marL="228600" indent="-228600" algn="just">
+                  <a:spcAft>
+                    <a:spcPts val="1200"/>
+                  </a:spcAft>
+                  <a:buFont typeface="+mj-lt"/>
+                  <a:buAutoNum type="arabicPeriod"/>
+                </a:pPr>
+                <a:r>
+                  <a:rPr lang="en-US" sz="4400" b="1" dirty="0"/>
+                  <a:t> </a:t>
+                </a:r>
+                <a:r>
+                  <a:rPr lang="en-US" sz="4400" dirty="0"/>
+                  <a:t>Occurs in </a:t>
+                </a:r>
+                <a:r>
+                  <a:rPr lang="en-US" sz="4400" b="1" dirty="0"/>
+                  <a:t>25.0% </a:t>
+                </a:r>
+                <a:r>
+                  <a:rPr lang="en-US" sz="4400" dirty="0"/>
+                  <a:t>of cases. A </a:t>
+                </a:r>
+                <a:r>
+                  <a:rPr lang="en-US" sz="4400" b="1" dirty="0"/>
+                  <a:t>diamino-</a:t>
+                </a:r>
+                <a:r>
+                  <a:rPr lang="en-US" sz="4400" b="1" dirty="0" err="1"/>
+                  <a:t>cyano</a:t>
+                </a:r>
+                <a:r>
+                  <a:rPr lang="en-US" sz="4400" b="1" dirty="0"/>
+                  <a:t> pyrimidine derivative</a:t>
+                </a:r>
+                <a:r>
+                  <a:rPr lang="en-US" sz="4400" dirty="0"/>
+                  <a:t>, strongly indicating </a:t>
+                </a:r>
+                <a:r>
+                  <a:rPr lang="en-US" sz="4400" b="1" dirty="0"/>
+                  <a:t>hydrogen-bonding interactions </a:t>
+                </a:r>
+                <a:r>
+                  <a:rPr lang="en-US" sz="4400" dirty="0"/>
+                  <a:t>with the </a:t>
+                </a:r>
+                <a:r>
+                  <a:rPr lang="en-US" sz="4400" b="1" dirty="0"/>
+                  <a:t>hinge region</a:t>
+                </a:r>
+                <a:r>
+                  <a:rPr lang="en-US" sz="4400" dirty="0"/>
+                  <a:t>.</a:t>
+                </a:r>
+              </a:p>
+            </p:txBody>
+          </p:sp>
+        </p:grpSp>
+      </p:grpSp>
       <p:sp>
         <p:nvSpPr>
-          <p:cNvPr id="14" name="Rectangle: Rounded Corners 13">
+          <p:cNvPr id="2" name="Rectangle: Top Corners Rounded 1">
             <a:extLst>
               <a:ext uri="{FF2B5EF4-FFF2-40B4-BE49-F238E27FC236}">
-                <a16:creationId xmlns:a16="http://schemas.microsoft.com/office/drawing/2014/main" id="{DBF4675B-24DA-ECE6-C51C-65069789A359}"/>
+                <a16:creationId xmlns:a16="http://schemas.microsoft.com/office/drawing/2014/main" id="{6C13FBF4-81B4-461D-A19D-5804EED023DD}"/>
               </a:ext>
             </a:extLst>
           </p:cNvPr>
@@ -3249,16 +3849,16 @@
         </p:nvSpPr>
         <p:spPr>
           <a:xfrm>
-            <a:off x="28854274" y="8802264"/>
-            <a:ext cx="9273325" cy="5165792"/>
+            <a:off x="11457622" y="2072967"/>
+            <a:ext cx="29944252" cy="3590329"/>
           </a:xfrm>
-          <a:prstGeom prst="roundRect">
+          <a:prstGeom prst="round2SameRect">
             <a:avLst/>
           </a:prstGeom>
           <a:solidFill>
-            <a:schemeClr val="accent1">
-              <a:lumMod val="20000"/>
-              <a:lumOff val="80000"/>
+            <a:schemeClr val="tx2">
+              <a:lumMod val="25000"/>
+              <a:lumOff val="75000"/>
             </a:schemeClr>
           </a:solidFill>
         </p:spPr>
@@ -3282,561 +3882,64 @@
           <a:bodyPr rtlCol="0" anchor="ctr"/>
           <a:lstStyle/>
           <a:p>
-            <a:pPr marL="857250" indent="-857250">
-              <a:buFont typeface="Arial" panose="020B0604020202020204" pitchFamily="34" charset="0"/>
-              <a:buChar char="•"/>
-            </a:pPr>
+            <a:pPr algn="just"/>
+            <a:endParaRPr lang="en-US" dirty="0">
+              <a:solidFill>
+                <a:schemeClr val="tx1"/>
+              </a:solidFill>
+            </a:endParaRPr>
+          </a:p>
+          <a:p>
+            <a:pPr algn="just"/>
             <a:r>
               <a:rPr lang="en-US" sz="4400" dirty="0">
                 <a:solidFill>
                   <a:schemeClr val="tx1"/>
                 </a:solidFill>
               </a:rPr>
-              <a:t>Find dataset</a:t>
-            </a:r>
-          </a:p>
-          <a:p>
-            <a:pPr marL="857250" indent="-857250">
-              <a:buFont typeface="Arial" panose="020B0604020202020204" pitchFamily="34" charset="0"/>
-              <a:buChar char="•"/>
-            </a:pPr>
+              <a:t>You are running a reproducibility study for compound selectivity prediction. The goal is to train a Balanced Random Forest Classifier to distinguish PI3K-delta (</a:t>
+            </a:r>
+            <a:r>
+              <a:rPr lang="en-US" sz="4400" dirty="0" err="1">
+                <a:solidFill>
+                  <a:schemeClr val="tx1"/>
+                </a:solidFill>
+              </a:rPr>
+              <a:t>UniProt</a:t>
+            </a:r>
             <a:r>
               <a:rPr lang="en-US" sz="4400" dirty="0">
                 <a:solidFill>
                   <a:schemeClr val="tx1"/>
                 </a:solidFill>
               </a:rPr>
-              <a:t>Load dataset</a:t>
-            </a:r>
-          </a:p>
-          <a:p>
-            <a:pPr marL="857250" indent="-857250">
-              <a:buFont typeface="Arial" panose="020B0604020202020204" pitchFamily="34" charset="0"/>
-              <a:buChar char="•"/>
-            </a:pPr>
+              <a:t>: O00329) vs PI3K-gamma (</a:t>
+            </a:r>
+            <a:r>
+              <a:rPr lang="en-US" sz="4400" dirty="0" err="1">
+                <a:solidFill>
+                  <a:schemeClr val="tx1"/>
+                </a:solidFill>
+              </a:rPr>
+              <a:t>UniProt</a:t>
+            </a:r>
             <a:r>
               <a:rPr lang="en-US" sz="4400" dirty="0">
                 <a:solidFill>
                   <a:schemeClr val="tx1"/>
                 </a:solidFill>
               </a:rPr>
-              <a:t>Compute features</a:t>
-            </a:r>
-          </a:p>
-          <a:p>
-            <a:pPr marL="857250" indent="-857250">
-              <a:buFont typeface="Arial" panose="020B0604020202020204" pitchFamily="34" charset="0"/>
-              <a:buChar char="•"/>
-            </a:pPr>
-            <a:r>
-              <a:rPr lang="en-US" sz="4400" dirty="0">
-                <a:solidFill>
-                  <a:schemeClr val="tx1"/>
-                </a:solidFill>
-              </a:rPr>
-              <a:t>Split dataset</a:t>
-            </a:r>
-          </a:p>
-          <a:p>
-            <a:pPr marL="857250" indent="-857250">
-              <a:buFont typeface="Arial" panose="020B0604020202020204" pitchFamily="34" charset="0"/>
-              <a:buChar char="•"/>
-            </a:pPr>
-            <a:r>
-              <a:rPr lang="en-US" sz="4400" dirty="0">
-                <a:solidFill>
-                  <a:schemeClr val="tx1"/>
-                </a:solidFill>
-              </a:rPr>
-              <a:t>Train model</a:t>
-            </a:r>
-          </a:p>
-          <a:p>
-            <a:pPr marL="857250" indent="-857250">
-              <a:buFont typeface="Arial" panose="020B0604020202020204" pitchFamily="34" charset="0"/>
-              <a:buChar char="•"/>
-            </a:pPr>
-            <a:r>
-              <a:rPr lang="en-US" sz="4400" dirty="0">
-                <a:solidFill>
-                  <a:schemeClr val="tx1"/>
-                </a:solidFill>
-              </a:rPr>
-              <a:t>Plot classification results</a:t>
-            </a:r>
-          </a:p>
-          <a:p>
-            <a:pPr marL="857250" indent="-857250">
-              <a:buFont typeface="Arial" panose="020B0604020202020204" pitchFamily="34" charset="0"/>
-              <a:buChar char="•"/>
-            </a:pPr>
-            <a:r>
-              <a:rPr lang="en-US" sz="4400" dirty="0">
-                <a:solidFill>
-                  <a:schemeClr val="tx1"/>
-                </a:solidFill>
-              </a:rPr>
-              <a:t>Identify recurrent anchor rules</a:t>
-            </a:r>
-          </a:p>
-          <a:p>
-            <a:pPr algn="ctr"/>
-            <a:endParaRPr lang="en-US" dirty="0"/>
-          </a:p>
-        </p:txBody>
-      </p:sp>
-      <p:pic>
-        <p:nvPicPr>
-          <p:cNvPr id="20" name="Graphic 19" descr="Customer review with solid fill">
-            <a:extLst>
-              <a:ext uri="{FF2B5EF4-FFF2-40B4-BE49-F238E27FC236}">
-                <a16:creationId xmlns:a16="http://schemas.microsoft.com/office/drawing/2014/main" id="{CB6AEA3E-2CED-76CE-CC55-238DCE87A382}"/>
-              </a:ext>
-            </a:extLst>
-          </p:cNvPr>
-          <p:cNvPicPr>
-            <a:picLocks noChangeAspect="1"/>
-          </p:cNvPicPr>
-          <p:nvPr/>
-        </p:nvPicPr>
-        <p:blipFill>
-          <a:blip r:embed="rId3">
-            <a:extLst>
-              <a:ext uri="{96DAC541-7B7A-43D3-8B79-37D633B846F1}">
-                <asvg:svgBlip xmlns:asvg="http://schemas.microsoft.com/office/drawing/2016/SVG/main" r:embed="rId4"/>
-              </a:ext>
-            </a:extLst>
-          </a:blip>
-          <a:stretch>
-            <a:fillRect/>
-          </a:stretch>
-        </p:blipFill>
-        <p:spPr>
-          <a:xfrm>
-            <a:off x="1165147" y="43423310"/>
-            <a:ext cx="3110003" cy="3110003"/>
-          </a:xfrm>
-          <a:prstGeom prst="rect">
-            <a:avLst/>
-          </a:prstGeom>
-        </p:spPr>
-      </p:pic>
-      <p:pic>
-        <p:nvPicPr>
-          <p:cNvPr id="21" name="Graphic 20" descr="Tools with solid fill">
-            <a:extLst>
-              <a:ext uri="{FF2B5EF4-FFF2-40B4-BE49-F238E27FC236}">
-                <a16:creationId xmlns:a16="http://schemas.microsoft.com/office/drawing/2014/main" id="{30357586-D891-7B9B-5CE7-CEE2D87E838B}"/>
-              </a:ext>
-            </a:extLst>
-          </p:cNvPr>
-          <p:cNvPicPr>
-            <a:picLocks noChangeAspect="1"/>
-          </p:cNvPicPr>
-          <p:nvPr/>
-        </p:nvPicPr>
-        <p:blipFill>
-          <a:blip r:embed="rId5">
-            <a:extLst>
-              <a:ext uri="{96DAC541-7B7A-43D3-8B79-37D633B846F1}">
-                <asvg:svgBlip xmlns:asvg="http://schemas.microsoft.com/office/drawing/2016/SVG/main" r:embed="rId6"/>
-              </a:ext>
-            </a:extLst>
-          </a:blip>
-          <a:stretch>
-            <a:fillRect/>
-          </a:stretch>
-        </p:blipFill>
-        <p:spPr>
-          <a:xfrm>
-            <a:off x="1633447" y="47095411"/>
-            <a:ext cx="2641703" cy="2641703"/>
-          </a:xfrm>
-          <a:prstGeom prst="rect">
-            <a:avLst/>
-          </a:prstGeom>
-        </p:spPr>
-      </p:pic>
-      <p:sp>
-        <p:nvSpPr>
-          <p:cNvPr id="22" name="TextBox 21">
-            <a:extLst>
-              <a:ext uri="{FF2B5EF4-FFF2-40B4-BE49-F238E27FC236}">
-                <a16:creationId xmlns:a16="http://schemas.microsoft.com/office/drawing/2014/main" id="{9AD7EEF7-AC29-6E82-9961-99B7A43B828C}"/>
-              </a:ext>
-            </a:extLst>
-          </p:cNvPr>
-          <p:cNvSpPr txBox="1"/>
-          <p:nvPr/>
-        </p:nvSpPr>
-        <p:spPr>
-          <a:xfrm>
-            <a:off x="5743575" y="44378146"/>
-            <a:ext cx="14116050" cy="1200329"/>
-          </a:xfrm>
-          <a:prstGeom prst="rect">
-            <a:avLst/>
-          </a:prstGeom>
-          <a:noFill/>
-        </p:spPr>
-        <p:txBody>
-          <a:bodyPr wrap="square" rtlCol="0">
-            <a:spAutoFit/>
-          </a:bodyPr>
-          <a:lstStyle/>
-          <a:p>
-            <a:r>
-              <a:rPr lang="en-US" sz="7200" dirty="0"/>
-              <a:t>User prompt to </a:t>
-            </a:r>
-            <a:r>
-              <a:rPr lang="en-US" sz="7200" dirty="0" err="1"/>
-              <a:t>ChemicHAL</a:t>
-            </a:r>
-            <a:endParaRPr lang="en-US" sz="7200" dirty="0"/>
+              <a:t>:  P48736) selective compounds, evaluate its performance, and identify recurrent molecular anchor fragments that drive the model's correct predictions for each selective class (class 1 &amp; 2) and discuss the chemical insight gained.</a:t>
+            </a:r>
           </a:p>
         </p:txBody>
       </p:sp>
       <p:sp>
         <p:nvSpPr>
-          <p:cNvPr id="23" name="TextBox 22">
+          <p:cNvPr id="3" name="Rectangle: Rounded Corners 2">
             <a:extLst>
               <a:ext uri="{FF2B5EF4-FFF2-40B4-BE49-F238E27FC236}">
-                <a16:creationId xmlns:a16="http://schemas.microsoft.com/office/drawing/2014/main" id="{79C960E6-BF83-97BE-9634-10CAB5F967F9}"/>
-              </a:ext>
-            </a:extLst>
-          </p:cNvPr>
-          <p:cNvSpPr txBox="1"/>
-          <p:nvPr/>
-        </p:nvSpPr>
-        <p:spPr>
-          <a:xfrm>
-            <a:off x="5743575" y="47334044"/>
-            <a:ext cx="14116050" cy="1200329"/>
-          </a:xfrm>
-          <a:prstGeom prst="rect">
-            <a:avLst/>
-          </a:prstGeom>
-          <a:noFill/>
-        </p:spPr>
-        <p:txBody>
-          <a:bodyPr wrap="square" rtlCol="0">
-            <a:spAutoFit/>
-          </a:bodyPr>
-          <a:lstStyle/>
-          <a:p>
-            <a:r>
-              <a:rPr lang="en-US" sz="7200" dirty="0" err="1"/>
-              <a:t>ChemicHAL</a:t>
-            </a:r>
-            <a:r>
-              <a:rPr lang="en-US" sz="7200" dirty="0"/>
-              <a:t> tools called</a:t>
-            </a:r>
-          </a:p>
-        </p:txBody>
-      </p:sp>
-      <p:pic>
-        <p:nvPicPr>
-          <p:cNvPr id="27" name="Picture 26" descr="A bar graph with numbers and text&#10;&#10;AI-generated content may be incorrect.">
-            <a:extLst>
-              <a:ext uri="{FF2B5EF4-FFF2-40B4-BE49-F238E27FC236}">
-                <a16:creationId xmlns:a16="http://schemas.microsoft.com/office/drawing/2014/main" id="{DDA67D64-D306-A0CD-5ECD-8492A850A7F5}"/>
-              </a:ext>
-            </a:extLst>
-          </p:cNvPr>
-          <p:cNvPicPr>
-            <a:picLocks noChangeAspect="1"/>
-          </p:cNvPicPr>
-          <p:nvPr/>
-        </p:nvPicPr>
-        <p:blipFill>
-          <a:blip r:embed="rId7">
-            <a:extLst>
-              <a:ext uri="{28A0092B-C50C-407E-A947-70E740481C1C}">
-                <a14:useLocalDpi xmlns:a14="http://schemas.microsoft.com/office/drawing/2010/main" val="0"/>
-              </a:ext>
-            </a:extLst>
-          </a:blip>
-          <a:srcRect r="10508" b="17689"/>
-          <a:stretch/>
-        </p:blipFill>
-        <p:spPr>
-          <a:xfrm>
-            <a:off x="8463999" y="20397699"/>
-            <a:ext cx="13225524" cy="6400931"/>
-          </a:xfrm>
-          <a:prstGeom prst="rect">
-            <a:avLst/>
-          </a:prstGeom>
-        </p:spPr>
-      </p:pic>
-      <p:sp>
-        <p:nvSpPr>
-          <p:cNvPr id="30" name="TextBox 29">
-            <a:extLst>
-              <a:ext uri="{FF2B5EF4-FFF2-40B4-BE49-F238E27FC236}">
-                <a16:creationId xmlns:a16="http://schemas.microsoft.com/office/drawing/2014/main" id="{5BAA39A6-DC6F-57E4-6567-4545559A0C33}"/>
-              </a:ext>
-            </a:extLst>
-          </p:cNvPr>
-          <p:cNvSpPr txBox="1"/>
-          <p:nvPr/>
-        </p:nvSpPr>
-        <p:spPr>
-          <a:xfrm>
-            <a:off x="1666244" y="28261810"/>
-            <a:ext cx="20023280" cy="5509200"/>
-          </a:xfrm>
-          <a:prstGeom prst="rect">
-            <a:avLst/>
-          </a:prstGeom>
-          <a:noFill/>
-        </p:spPr>
-        <p:txBody>
-          <a:bodyPr wrap="square">
-            <a:spAutoFit/>
-          </a:bodyPr>
-          <a:lstStyle/>
-          <a:p>
-            <a:pPr algn="l"/>
-            <a:r>
-              <a:rPr lang="en-US" sz="4400" b="0" i="0" dirty="0">
-                <a:solidFill>
-                  <a:srgbClr val="0F0F0F"/>
-                </a:solidFill>
-                <a:effectLst/>
-              </a:rPr>
-              <a:t>The Balanced Random Forest model achieved strong performance on the test set:</a:t>
-            </a:r>
-          </a:p>
-          <a:p>
-            <a:pPr algn="l">
-              <a:buFont typeface="Arial" panose="020B0604020202020204" pitchFamily="34" charset="0"/>
-              <a:buChar char="•"/>
-            </a:pPr>
-            <a:r>
-              <a:rPr lang="en-US" sz="4400" b="1" i="0" dirty="0">
-                <a:solidFill>
-                  <a:srgbClr val="0F0F0F"/>
-                </a:solidFill>
-                <a:effectLst/>
-              </a:rPr>
-              <a:t>Accuracy</a:t>
-            </a:r>
-            <a:r>
-              <a:rPr lang="en-US" sz="4400" b="0" i="0" dirty="0">
-                <a:solidFill>
-                  <a:srgbClr val="0F0F0F"/>
-                </a:solidFill>
-                <a:effectLst/>
-              </a:rPr>
-              <a:t>: 89.3%</a:t>
-            </a:r>
-          </a:p>
-          <a:p>
-            <a:pPr algn="l">
-              <a:buFont typeface="Arial" panose="020B0604020202020204" pitchFamily="34" charset="0"/>
-              <a:buChar char="•"/>
-            </a:pPr>
-            <a:r>
-              <a:rPr lang="en-US" sz="4400" b="1" i="0" dirty="0">
-                <a:solidFill>
-                  <a:srgbClr val="0F0F0F"/>
-                </a:solidFill>
-                <a:effectLst/>
-              </a:rPr>
-              <a:t>Balanced Accuracy</a:t>
-            </a:r>
-            <a:r>
-              <a:rPr lang="en-US" sz="4400" b="0" i="0" dirty="0">
-                <a:solidFill>
-                  <a:srgbClr val="0F0F0F"/>
-                </a:solidFill>
-                <a:effectLst/>
-              </a:rPr>
-              <a:t>: 84.7%</a:t>
-            </a:r>
-          </a:p>
-          <a:p>
-            <a:pPr algn="l">
-              <a:buFont typeface="Arial" panose="020B0604020202020204" pitchFamily="34" charset="0"/>
-              <a:buChar char="•"/>
-            </a:pPr>
-            <a:r>
-              <a:rPr lang="en-US" sz="4400" b="1" i="0" dirty="0">
-                <a:solidFill>
-                  <a:srgbClr val="0F0F0F"/>
-                </a:solidFill>
-                <a:effectLst/>
-              </a:rPr>
-              <a:t>MCC</a:t>
-            </a:r>
-            <a:r>
-              <a:rPr lang="en-US" sz="4400" b="0" i="0" dirty="0">
-                <a:solidFill>
-                  <a:srgbClr val="0F0F0F"/>
-                </a:solidFill>
-                <a:effectLst/>
-              </a:rPr>
-              <a:t>: 0.749</a:t>
-            </a:r>
-          </a:p>
-          <a:p>
-            <a:pPr algn="l">
-              <a:buFont typeface="Arial" panose="020B0604020202020204" pitchFamily="34" charset="0"/>
-              <a:buChar char="•"/>
-            </a:pPr>
-            <a:r>
-              <a:rPr lang="en-US" sz="4400" b="1" i="0" dirty="0">
-                <a:solidFill>
-                  <a:srgbClr val="0F0F0F"/>
-                </a:solidFill>
-                <a:effectLst/>
-              </a:rPr>
-              <a:t>F1 Macro</a:t>
-            </a:r>
-            <a:r>
-              <a:rPr lang="en-US" sz="4400" b="0" i="0" dirty="0">
-                <a:solidFill>
-                  <a:srgbClr val="0F0F0F"/>
-                </a:solidFill>
-                <a:effectLst/>
-              </a:rPr>
-              <a:t>: 0.780</a:t>
-            </a:r>
-          </a:p>
-          <a:p>
-            <a:pPr algn="l"/>
-            <a:r>
-              <a:rPr lang="en-US" sz="4400" b="0" i="0" dirty="0">
-                <a:solidFill>
-                  <a:srgbClr val="0F0F0F"/>
-                </a:solidFill>
-                <a:effectLst/>
-              </a:rPr>
-              <a:t>Class 1 (PI3K-delta selective) and Class 2 (PI3K-gamma selective) show good separation, though Class 2 has fewer samples (15 in test set), which is typical for highly specific selectivity data.</a:t>
-            </a:r>
-          </a:p>
-        </p:txBody>
-      </p:sp>
-      <p:pic>
-        <p:nvPicPr>
-          <p:cNvPr id="33" name="Graphic 32" descr="Subtitles with solid fill">
-            <a:extLst>
-              <a:ext uri="{FF2B5EF4-FFF2-40B4-BE49-F238E27FC236}">
-                <a16:creationId xmlns:a16="http://schemas.microsoft.com/office/drawing/2014/main" id="{C52E7A92-5E5B-8D10-F20D-87C226214225}"/>
-              </a:ext>
-            </a:extLst>
-          </p:cNvPr>
-          <p:cNvPicPr>
-            <a:picLocks noChangeAspect="1"/>
-          </p:cNvPicPr>
-          <p:nvPr/>
-        </p:nvPicPr>
-        <p:blipFill>
-          <a:blip r:embed="rId8">
-            <a:extLst>
-              <a:ext uri="{96DAC541-7B7A-43D3-8B79-37D633B846F1}">
-                <asvg:svgBlip xmlns:asvg="http://schemas.microsoft.com/office/drawing/2016/SVG/main" r:embed="rId9"/>
-              </a:ext>
-            </a:extLst>
-          </a:blip>
-          <a:stretch>
-            <a:fillRect/>
-          </a:stretch>
-        </p:blipFill>
-        <p:spPr>
-          <a:xfrm>
-            <a:off x="10030373" y="15977828"/>
-            <a:ext cx="2884975" cy="2884975"/>
-          </a:xfrm>
-          <a:prstGeom prst="rect">
-            <a:avLst/>
-          </a:prstGeom>
-        </p:spPr>
-      </p:pic>
-      <p:pic>
-        <p:nvPicPr>
-          <p:cNvPr id="34" name="Graphic 33" descr="Subtitles with solid fill">
-            <a:extLst>
-              <a:ext uri="{FF2B5EF4-FFF2-40B4-BE49-F238E27FC236}">
-                <a16:creationId xmlns:a16="http://schemas.microsoft.com/office/drawing/2014/main" id="{79762F53-3216-6517-D583-06E345BC8164}"/>
-              </a:ext>
-            </a:extLst>
-          </p:cNvPr>
-          <p:cNvPicPr>
-            <a:picLocks noChangeAspect="1"/>
-          </p:cNvPicPr>
-          <p:nvPr/>
-        </p:nvPicPr>
-        <p:blipFill>
-          <a:blip r:embed="rId8">
-            <a:extLst>
-              <a:ext uri="{96DAC541-7B7A-43D3-8B79-37D633B846F1}">
-                <asvg:svgBlip xmlns:asvg="http://schemas.microsoft.com/office/drawing/2016/SVG/main" r:embed="rId9"/>
-              </a:ext>
-            </a:extLst>
-          </a:blip>
-          <a:stretch>
-            <a:fillRect/>
-          </a:stretch>
-        </p:blipFill>
-        <p:spPr>
-          <a:xfrm>
-            <a:off x="19859625" y="43535822"/>
-            <a:ext cx="2884975" cy="2884975"/>
-          </a:xfrm>
-          <a:prstGeom prst="rect">
-            <a:avLst/>
-          </a:prstGeom>
-        </p:spPr>
-      </p:pic>
-      <p:sp>
-        <p:nvSpPr>
-          <p:cNvPr id="35" name="TextBox 34">
-            <a:extLst>
-              <a:ext uri="{FF2B5EF4-FFF2-40B4-BE49-F238E27FC236}">
-                <a16:creationId xmlns:a16="http://schemas.microsoft.com/office/drawing/2014/main" id="{7E81FB83-7547-28A2-7CD6-3C02D9F62266}"/>
-              </a:ext>
-            </a:extLst>
-          </p:cNvPr>
-          <p:cNvSpPr txBox="1"/>
-          <p:nvPr/>
-        </p:nvSpPr>
-        <p:spPr>
-          <a:xfrm>
-            <a:off x="22744600" y="44372723"/>
-            <a:ext cx="14116050" cy="1200329"/>
-          </a:xfrm>
-          <a:prstGeom prst="rect">
-            <a:avLst/>
-          </a:prstGeom>
-          <a:noFill/>
-        </p:spPr>
-        <p:txBody>
-          <a:bodyPr wrap="square" rtlCol="0">
-            <a:spAutoFit/>
-          </a:bodyPr>
-          <a:lstStyle/>
-          <a:p>
-            <a:r>
-              <a:rPr lang="en-US" sz="7200" dirty="0" err="1"/>
-              <a:t>ChemicHAL</a:t>
-            </a:r>
-            <a:r>
-              <a:rPr lang="en-US" sz="7200" dirty="0"/>
-              <a:t> Response</a:t>
-            </a:r>
-          </a:p>
-        </p:txBody>
-      </p:sp>
-      <p:sp>
-        <p:nvSpPr>
-          <p:cNvPr id="47" name="Rectangle: Rounded Corners 46">
-            <a:extLst>
-              <a:ext uri="{FF2B5EF4-FFF2-40B4-BE49-F238E27FC236}">
-                <a16:creationId xmlns:a16="http://schemas.microsoft.com/office/drawing/2014/main" id="{F15D1001-4EDE-353E-1E12-A7E7F98D98C9}"/>
+                <a16:creationId xmlns:a16="http://schemas.microsoft.com/office/drawing/2014/main" id="{465AE2D3-52C5-2D04-D846-EC865A9F4DC7}"/>
               </a:ext>
             </a:extLst>
           </p:cNvPr>
@@ -3845,8 +3948,698 @@
         </p:nvSpPr>
         <p:spPr>
           <a:xfrm>
-            <a:off x="24726167" y="18248251"/>
-            <a:ext cx="22543477" cy="17146213"/>
+            <a:off x="12044361" y="6917439"/>
+            <a:ext cx="6499225" cy="1338439"/>
+          </a:xfrm>
+          <a:prstGeom prst="roundRect">
+            <a:avLst/>
+          </a:prstGeom>
+          <a:solidFill>
+            <a:schemeClr val="bg1">
+              <a:lumMod val="65000"/>
+            </a:schemeClr>
+          </a:solidFill>
+        </p:spPr>
+        <p:style>
+          <a:lnRef idx="2">
+            <a:schemeClr val="accent1">
+              <a:shade val="15000"/>
+            </a:schemeClr>
+          </a:lnRef>
+          <a:fillRef idx="1">
+            <a:schemeClr val="accent1"/>
+          </a:fillRef>
+          <a:effectRef idx="0">
+            <a:schemeClr val="accent1"/>
+          </a:effectRef>
+          <a:fontRef idx="minor">
+            <a:schemeClr val="lt1"/>
+          </a:fontRef>
+        </p:style>
+        <p:txBody>
+          <a:bodyPr rtlCol="0" anchor="ctr"/>
+          <a:lstStyle/>
+          <a:p>
+            <a:pPr algn="ctr"/>
+            <a:r>
+              <a:rPr lang="en-US" sz="6000" dirty="0">
+                <a:solidFill>
+                  <a:schemeClr val="tx1"/>
+                </a:solidFill>
+              </a:rPr>
+              <a:t>Find dataset</a:t>
+            </a:r>
+          </a:p>
+        </p:txBody>
+      </p:sp>
+      <p:sp>
+        <p:nvSpPr>
+          <p:cNvPr id="4" name="Rectangle: Rounded Corners 3">
+            <a:extLst>
+              <a:ext uri="{FF2B5EF4-FFF2-40B4-BE49-F238E27FC236}">
+                <a16:creationId xmlns:a16="http://schemas.microsoft.com/office/drawing/2014/main" id="{6DB85F9D-5273-DCFF-C989-7562C2561479}"/>
+              </a:ext>
+            </a:extLst>
+          </p:cNvPr>
+          <p:cNvSpPr/>
+          <p:nvPr/>
+        </p:nvSpPr>
+        <p:spPr>
+          <a:xfrm>
+            <a:off x="12044361" y="9238208"/>
+            <a:ext cx="6499225" cy="1338439"/>
+          </a:xfrm>
+          <a:prstGeom prst="roundRect">
+            <a:avLst/>
+          </a:prstGeom>
+          <a:solidFill>
+            <a:schemeClr val="bg1">
+              <a:lumMod val="65000"/>
+            </a:schemeClr>
+          </a:solidFill>
+        </p:spPr>
+        <p:style>
+          <a:lnRef idx="2">
+            <a:schemeClr val="accent1">
+              <a:shade val="15000"/>
+            </a:schemeClr>
+          </a:lnRef>
+          <a:fillRef idx="1">
+            <a:schemeClr val="accent1"/>
+          </a:fillRef>
+          <a:effectRef idx="0">
+            <a:schemeClr val="accent1"/>
+          </a:effectRef>
+          <a:fontRef idx="minor">
+            <a:schemeClr val="lt1"/>
+          </a:fontRef>
+        </p:style>
+        <p:txBody>
+          <a:bodyPr rtlCol="0" anchor="ctr"/>
+          <a:lstStyle/>
+          <a:p>
+            <a:pPr algn="ctr"/>
+            <a:r>
+              <a:rPr lang="en-US" sz="6000" dirty="0">
+                <a:solidFill>
+                  <a:schemeClr val="tx1"/>
+                </a:solidFill>
+              </a:rPr>
+              <a:t>Load dataset</a:t>
+            </a:r>
+          </a:p>
+        </p:txBody>
+      </p:sp>
+      <p:sp>
+        <p:nvSpPr>
+          <p:cNvPr id="8" name="Rectangle: Rounded Corners 7">
+            <a:extLst>
+              <a:ext uri="{FF2B5EF4-FFF2-40B4-BE49-F238E27FC236}">
+                <a16:creationId xmlns:a16="http://schemas.microsoft.com/office/drawing/2014/main" id="{872B3574-1A6E-95E9-EEA3-C496E1B2F4CE}"/>
+              </a:ext>
+            </a:extLst>
+          </p:cNvPr>
+          <p:cNvSpPr/>
+          <p:nvPr/>
+        </p:nvSpPr>
+        <p:spPr>
+          <a:xfrm>
+            <a:off x="19516990" y="9238208"/>
+            <a:ext cx="6499225" cy="1338439"/>
+          </a:xfrm>
+          <a:prstGeom prst="roundRect">
+            <a:avLst/>
+          </a:prstGeom>
+          <a:solidFill>
+            <a:schemeClr val="bg1">
+              <a:lumMod val="65000"/>
+            </a:schemeClr>
+          </a:solidFill>
+        </p:spPr>
+        <p:style>
+          <a:lnRef idx="2">
+            <a:schemeClr val="accent1">
+              <a:shade val="15000"/>
+            </a:schemeClr>
+          </a:lnRef>
+          <a:fillRef idx="1">
+            <a:schemeClr val="accent1"/>
+          </a:fillRef>
+          <a:effectRef idx="0">
+            <a:schemeClr val="accent1"/>
+          </a:effectRef>
+          <a:fontRef idx="minor">
+            <a:schemeClr val="lt1"/>
+          </a:fontRef>
+        </p:style>
+        <p:txBody>
+          <a:bodyPr rtlCol="0" anchor="ctr"/>
+          <a:lstStyle/>
+          <a:p>
+            <a:pPr algn="ctr"/>
+            <a:r>
+              <a:rPr lang="en-US" sz="6000" dirty="0">
+                <a:solidFill>
+                  <a:schemeClr val="tx1"/>
+                </a:solidFill>
+              </a:rPr>
+              <a:t>Compute features</a:t>
+            </a:r>
+          </a:p>
+        </p:txBody>
+      </p:sp>
+      <p:sp>
+        <p:nvSpPr>
+          <p:cNvPr id="9" name="Rectangle: Rounded Corners 8">
+            <a:extLst>
+              <a:ext uri="{FF2B5EF4-FFF2-40B4-BE49-F238E27FC236}">
+                <a16:creationId xmlns:a16="http://schemas.microsoft.com/office/drawing/2014/main" id="{AB67E2D9-9E9D-F863-4BAE-D1ACB7A59896}"/>
+              </a:ext>
+            </a:extLst>
+          </p:cNvPr>
+          <p:cNvSpPr/>
+          <p:nvPr/>
+        </p:nvSpPr>
+        <p:spPr>
+          <a:xfrm>
+            <a:off x="19516990" y="6917439"/>
+            <a:ext cx="6499225" cy="1338439"/>
+          </a:xfrm>
+          <a:prstGeom prst="roundRect">
+            <a:avLst/>
+          </a:prstGeom>
+          <a:solidFill>
+            <a:schemeClr val="bg1">
+              <a:lumMod val="65000"/>
+            </a:schemeClr>
+          </a:solidFill>
+        </p:spPr>
+        <p:style>
+          <a:lnRef idx="2">
+            <a:schemeClr val="accent1">
+              <a:shade val="15000"/>
+            </a:schemeClr>
+          </a:lnRef>
+          <a:fillRef idx="1">
+            <a:schemeClr val="accent1"/>
+          </a:fillRef>
+          <a:effectRef idx="0">
+            <a:schemeClr val="accent1"/>
+          </a:effectRef>
+          <a:fontRef idx="minor">
+            <a:schemeClr val="lt1"/>
+          </a:fontRef>
+        </p:style>
+        <p:txBody>
+          <a:bodyPr rtlCol="0" anchor="ctr"/>
+          <a:lstStyle/>
+          <a:p>
+            <a:pPr algn="ctr"/>
+            <a:r>
+              <a:rPr lang="en-US" sz="6000" dirty="0">
+                <a:solidFill>
+                  <a:schemeClr val="tx1"/>
+                </a:solidFill>
+              </a:rPr>
+              <a:t>Split dataset</a:t>
+            </a:r>
+          </a:p>
+        </p:txBody>
+      </p:sp>
+      <p:sp>
+        <p:nvSpPr>
+          <p:cNvPr id="10" name="Rectangle: Rounded Corners 9">
+            <a:extLst>
+              <a:ext uri="{FF2B5EF4-FFF2-40B4-BE49-F238E27FC236}">
+                <a16:creationId xmlns:a16="http://schemas.microsoft.com/office/drawing/2014/main" id="{1344948B-9127-5D85-04AF-9E27623C51DB}"/>
+              </a:ext>
+            </a:extLst>
+          </p:cNvPr>
+          <p:cNvSpPr/>
+          <p:nvPr/>
+        </p:nvSpPr>
+        <p:spPr>
+          <a:xfrm>
+            <a:off x="27051018" y="6917439"/>
+            <a:ext cx="6499225" cy="1338439"/>
+          </a:xfrm>
+          <a:prstGeom prst="roundRect">
+            <a:avLst/>
+          </a:prstGeom>
+          <a:solidFill>
+            <a:schemeClr val="bg1">
+              <a:lumMod val="65000"/>
+            </a:schemeClr>
+          </a:solidFill>
+        </p:spPr>
+        <p:style>
+          <a:lnRef idx="2">
+            <a:schemeClr val="accent1">
+              <a:shade val="15000"/>
+            </a:schemeClr>
+          </a:lnRef>
+          <a:fillRef idx="1">
+            <a:schemeClr val="accent1"/>
+          </a:fillRef>
+          <a:effectRef idx="0">
+            <a:schemeClr val="accent1"/>
+          </a:effectRef>
+          <a:fontRef idx="minor">
+            <a:schemeClr val="lt1"/>
+          </a:fontRef>
+        </p:style>
+        <p:txBody>
+          <a:bodyPr rtlCol="0" anchor="ctr"/>
+          <a:lstStyle/>
+          <a:p>
+            <a:pPr algn="ctr"/>
+            <a:r>
+              <a:rPr lang="en-US" sz="6000" dirty="0">
+                <a:solidFill>
+                  <a:schemeClr val="tx1"/>
+                </a:solidFill>
+              </a:rPr>
+              <a:t>Train model</a:t>
+            </a:r>
+          </a:p>
+        </p:txBody>
+      </p:sp>
+      <p:sp>
+        <p:nvSpPr>
+          <p:cNvPr id="12" name="Rectangle: Rounded Corners 11">
+            <a:extLst>
+              <a:ext uri="{FF2B5EF4-FFF2-40B4-BE49-F238E27FC236}">
+                <a16:creationId xmlns:a16="http://schemas.microsoft.com/office/drawing/2014/main" id="{9B31298B-CDEF-CDC2-2977-DCA4EAA13569}"/>
+              </a:ext>
+            </a:extLst>
+          </p:cNvPr>
+          <p:cNvSpPr/>
+          <p:nvPr/>
+        </p:nvSpPr>
+        <p:spPr>
+          <a:xfrm>
+            <a:off x="27051018" y="8990043"/>
+            <a:ext cx="6499225" cy="1834769"/>
+          </a:xfrm>
+          <a:prstGeom prst="roundRect">
+            <a:avLst/>
+          </a:prstGeom>
+          <a:solidFill>
+            <a:schemeClr val="bg1">
+              <a:lumMod val="65000"/>
+            </a:schemeClr>
+          </a:solidFill>
+        </p:spPr>
+        <p:style>
+          <a:lnRef idx="2">
+            <a:schemeClr val="accent1">
+              <a:shade val="15000"/>
+            </a:schemeClr>
+          </a:lnRef>
+          <a:fillRef idx="1">
+            <a:schemeClr val="accent1"/>
+          </a:fillRef>
+          <a:effectRef idx="0">
+            <a:schemeClr val="accent1"/>
+          </a:effectRef>
+          <a:fontRef idx="minor">
+            <a:schemeClr val="lt1"/>
+          </a:fontRef>
+        </p:style>
+        <p:txBody>
+          <a:bodyPr rtlCol="0" anchor="ctr"/>
+          <a:lstStyle/>
+          <a:p>
+            <a:pPr algn="ctr"/>
+            <a:r>
+              <a:rPr lang="en-US" sz="6000" dirty="0">
+                <a:solidFill>
+                  <a:schemeClr val="tx1"/>
+                </a:solidFill>
+              </a:rPr>
+              <a:t>Plot classification</a:t>
+            </a:r>
+          </a:p>
+          <a:p>
+            <a:pPr algn="ctr"/>
+            <a:r>
+              <a:rPr lang="en-US" sz="6000" dirty="0">
+                <a:solidFill>
+                  <a:schemeClr val="tx1"/>
+                </a:solidFill>
+              </a:rPr>
+              <a:t>results</a:t>
+            </a:r>
+          </a:p>
+        </p:txBody>
+      </p:sp>
+      <p:sp>
+        <p:nvSpPr>
+          <p:cNvPr id="13" name="Rectangle: Rounded Corners 12">
+            <a:extLst>
+              <a:ext uri="{FF2B5EF4-FFF2-40B4-BE49-F238E27FC236}">
+                <a16:creationId xmlns:a16="http://schemas.microsoft.com/office/drawing/2014/main" id="{A2D69792-6240-2A88-CEB7-39F07C646BE7}"/>
+              </a:ext>
+            </a:extLst>
+          </p:cNvPr>
+          <p:cNvSpPr/>
+          <p:nvPr/>
+        </p:nvSpPr>
+        <p:spPr>
+          <a:xfrm>
+            <a:off x="34528255" y="8990043"/>
+            <a:ext cx="6499225" cy="1834769"/>
+          </a:xfrm>
+          <a:prstGeom prst="roundRect">
+            <a:avLst/>
+          </a:prstGeom>
+          <a:solidFill>
+            <a:schemeClr val="bg1">
+              <a:lumMod val="65000"/>
+            </a:schemeClr>
+          </a:solidFill>
+        </p:spPr>
+        <p:style>
+          <a:lnRef idx="2">
+            <a:schemeClr val="accent1">
+              <a:shade val="15000"/>
+            </a:schemeClr>
+          </a:lnRef>
+          <a:fillRef idx="1">
+            <a:schemeClr val="accent1"/>
+          </a:fillRef>
+          <a:effectRef idx="0">
+            <a:schemeClr val="accent1"/>
+          </a:effectRef>
+          <a:fontRef idx="minor">
+            <a:schemeClr val="lt1"/>
+          </a:fontRef>
+        </p:style>
+        <p:txBody>
+          <a:bodyPr rtlCol="0" anchor="ctr"/>
+          <a:lstStyle/>
+          <a:p>
+            <a:pPr algn="ctr"/>
+            <a:r>
+              <a:rPr lang="en-US" sz="6000" dirty="0">
+                <a:solidFill>
+                  <a:schemeClr val="tx1"/>
+                </a:solidFill>
+              </a:rPr>
+              <a:t>Identify recurrent anchor rules</a:t>
+            </a:r>
+          </a:p>
+        </p:txBody>
+      </p:sp>
+      <p:cxnSp>
+        <p:nvCxnSpPr>
+          <p:cNvPr id="16" name="Straight Arrow Connector 15">
+            <a:extLst>
+              <a:ext uri="{FF2B5EF4-FFF2-40B4-BE49-F238E27FC236}">
+                <a16:creationId xmlns:a16="http://schemas.microsoft.com/office/drawing/2014/main" id="{0EB09105-A603-3792-FA56-C202D530844E}"/>
+              </a:ext>
+            </a:extLst>
+          </p:cNvPr>
+          <p:cNvCxnSpPr>
+            <a:cxnSpLocks/>
+            <a:stCxn id="3" idx="2"/>
+            <a:endCxn id="4" idx="0"/>
+          </p:cNvCxnSpPr>
+          <p:nvPr/>
+        </p:nvCxnSpPr>
+        <p:spPr>
+          <a:xfrm>
+            <a:off x="15293974" y="8255878"/>
+            <a:ext cx="0" cy="982330"/>
+          </a:xfrm>
+          <a:prstGeom prst="straightConnector1">
+            <a:avLst/>
+          </a:prstGeom>
+          <a:ln w="76200">
+            <a:solidFill>
+              <a:schemeClr val="tx1"/>
+            </a:solidFill>
+            <a:tailEnd type="triangle"/>
+          </a:ln>
+        </p:spPr>
+        <p:style>
+          <a:lnRef idx="2">
+            <a:schemeClr val="dk1"/>
+          </a:lnRef>
+          <a:fillRef idx="0">
+            <a:schemeClr val="dk1"/>
+          </a:fillRef>
+          <a:effectRef idx="1">
+            <a:schemeClr val="dk1"/>
+          </a:effectRef>
+          <a:fontRef idx="minor">
+            <a:schemeClr val="tx1"/>
+          </a:fontRef>
+        </p:style>
+      </p:cxnSp>
+      <p:cxnSp>
+        <p:nvCxnSpPr>
+          <p:cNvPr id="18" name="Straight Arrow Connector 17">
+            <a:extLst>
+              <a:ext uri="{FF2B5EF4-FFF2-40B4-BE49-F238E27FC236}">
+                <a16:creationId xmlns:a16="http://schemas.microsoft.com/office/drawing/2014/main" id="{826109EB-84B7-25A1-4C4D-5E40E7C05280}"/>
+              </a:ext>
+            </a:extLst>
+          </p:cNvPr>
+          <p:cNvCxnSpPr>
+            <a:cxnSpLocks/>
+            <a:endCxn id="8" idx="1"/>
+          </p:cNvCxnSpPr>
+          <p:nvPr/>
+        </p:nvCxnSpPr>
+        <p:spPr>
+          <a:xfrm>
+            <a:off x="18543586" y="9907427"/>
+            <a:ext cx="973404" cy="1"/>
+          </a:xfrm>
+          <a:prstGeom prst="straightConnector1">
+            <a:avLst/>
+          </a:prstGeom>
+          <a:ln w="76200">
+            <a:solidFill>
+              <a:schemeClr val="tx1"/>
+            </a:solidFill>
+            <a:tailEnd type="triangle"/>
+          </a:ln>
+        </p:spPr>
+        <p:style>
+          <a:lnRef idx="2">
+            <a:schemeClr val="dk1"/>
+          </a:lnRef>
+          <a:fillRef idx="0">
+            <a:schemeClr val="dk1"/>
+          </a:fillRef>
+          <a:effectRef idx="1">
+            <a:schemeClr val="dk1"/>
+          </a:effectRef>
+          <a:fontRef idx="minor">
+            <a:schemeClr val="tx1"/>
+          </a:fontRef>
+        </p:style>
+      </p:cxnSp>
+      <p:cxnSp>
+        <p:nvCxnSpPr>
+          <p:cNvPr id="26" name="Straight Arrow Connector 25">
+            <a:extLst>
+              <a:ext uri="{FF2B5EF4-FFF2-40B4-BE49-F238E27FC236}">
+                <a16:creationId xmlns:a16="http://schemas.microsoft.com/office/drawing/2014/main" id="{FE9E200C-F61C-E3BC-C813-973305E697A5}"/>
+              </a:ext>
+            </a:extLst>
+          </p:cNvPr>
+          <p:cNvCxnSpPr>
+            <a:cxnSpLocks/>
+            <a:stCxn id="8" idx="0"/>
+            <a:endCxn id="9" idx="2"/>
+          </p:cNvCxnSpPr>
+          <p:nvPr/>
+        </p:nvCxnSpPr>
+        <p:spPr>
+          <a:xfrm flipV="1">
+            <a:off x="22766603" y="8255878"/>
+            <a:ext cx="0" cy="982330"/>
+          </a:xfrm>
+          <a:prstGeom prst="straightConnector1">
+            <a:avLst/>
+          </a:prstGeom>
+          <a:ln w="76200">
+            <a:solidFill>
+              <a:schemeClr val="tx1"/>
+            </a:solidFill>
+            <a:tailEnd type="triangle"/>
+          </a:ln>
+        </p:spPr>
+        <p:style>
+          <a:lnRef idx="2">
+            <a:schemeClr val="dk1"/>
+          </a:lnRef>
+          <a:fillRef idx="0">
+            <a:schemeClr val="dk1"/>
+          </a:fillRef>
+          <a:effectRef idx="1">
+            <a:schemeClr val="dk1"/>
+          </a:effectRef>
+          <a:fontRef idx="minor">
+            <a:schemeClr val="tx1"/>
+          </a:fontRef>
+        </p:style>
+      </p:cxnSp>
+      <p:cxnSp>
+        <p:nvCxnSpPr>
+          <p:cNvPr id="32" name="Straight Arrow Connector 31">
+            <a:extLst>
+              <a:ext uri="{FF2B5EF4-FFF2-40B4-BE49-F238E27FC236}">
+                <a16:creationId xmlns:a16="http://schemas.microsoft.com/office/drawing/2014/main" id="{6B958271-883F-8940-76BB-8AF8F00A9DC4}"/>
+              </a:ext>
+            </a:extLst>
+          </p:cNvPr>
+          <p:cNvCxnSpPr>
+            <a:cxnSpLocks/>
+          </p:cNvCxnSpPr>
+          <p:nvPr/>
+        </p:nvCxnSpPr>
+        <p:spPr>
+          <a:xfrm>
+            <a:off x="26016215" y="7586658"/>
+            <a:ext cx="1034803" cy="0"/>
+          </a:xfrm>
+          <a:prstGeom prst="straightConnector1">
+            <a:avLst/>
+          </a:prstGeom>
+          <a:ln w="76200">
+            <a:solidFill>
+              <a:schemeClr val="tx1"/>
+            </a:solidFill>
+            <a:tailEnd type="triangle"/>
+          </a:ln>
+        </p:spPr>
+        <p:style>
+          <a:lnRef idx="2">
+            <a:schemeClr val="dk1"/>
+          </a:lnRef>
+          <a:fillRef idx="0">
+            <a:schemeClr val="dk1"/>
+          </a:fillRef>
+          <a:effectRef idx="1">
+            <a:schemeClr val="dk1"/>
+          </a:effectRef>
+          <a:fontRef idx="minor">
+            <a:schemeClr val="tx1"/>
+          </a:fontRef>
+        </p:style>
+      </p:cxnSp>
+      <p:cxnSp>
+        <p:nvCxnSpPr>
+          <p:cNvPr id="38" name="Straight Arrow Connector 37">
+            <a:extLst>
+              <a:ext uri="{FF2B5EF4-FFF2-40B4-BE49-F238E27FC236}">
+                <a16:creationId xmlns:a16="http://schemas.microsoft.com/office/drawing/2014/main" id="{14B6177B-6EC6-A0F4-463E-CAAB2559ADE4}"/>
+              </a:ext>
+            </a:extLst>
+          </p:cNvPr>
+          <p:cNvCxnSpPr>
+            <a:cxnSpLocks/>
+            <a:stCxn id="10" idx="2"/>
+            <a:endCxn id="12" idx="0"/>
+          </p:cNvCxnSpPr>
+          <p:nvPr/>
+        </p:nvCxnSpPr>
+        <p:spPr>
+          <a:xfrm>
+            <a:off x="30300631" y="8255878"/>
+            <a:ext cx="0" cy="734165"/>
+          </a:xfrm>
+          <a:prstGeom prst="straightConnector1">
+            <a:avLst/>
+          </a:prstGeom>
+          <a:ln w="76200">
+            <a:solidFill>
+              <a:schemeClr val="tx1"/>
+            </a:solidFill>
+            <a:tailEnd type="triangle"/>
+          </a:ln>
+        </p:spPr>
+        <p:style>
+          <a:lnRef idx="2">
+            <a:schemeClr val="dk1"/>
+          </a:lnRef>
+          <a:fillRef idx="0">
+            <a:schemeClr val="dk1"/>
+          </a:fillRef>
+          <a:effectRef idx="1">
+            <a:schemeClr val="dk1"/>
+          </a:effectRef>
+          <a:fontRef idx="minor">
+            <a:schemeClr val="tx1"/>
+          </a:fontRef>
+        </p:style>
+      </p:cxnSp>
+      <p:cxnSp>
+        <p:nvCxnSpPr>
+          <p:cNvPr id="44" name="Straight Arrow Connector 43">
+            <a:extLst>
+              <a:ext uri="{FF2B5EF4-FFF2-40B4-BE49-F238E27FC236}">
+                <a16:creationId xmlns:a16="http://schemas.microsoft.com/office/drawing/2014/main" id="{617806EB-FC1C-9A83-BF43-2E984DA88F27}"/>
+              </a:ext>
+            </a:extLst>
+          </p:cNvPr>
+          <p:cNvCxnSpPr>
+            <a:cxnSpLocks/>
+            <a:stCxn id="12" idx="3"/>
+            <a:endCxn id="13" idx="1"/>
+          </p:cNvCxnSpPr>
+          <p:nvPr/>
+        </p:nvCxnSpPr>
+        <p:spPr>
+          <a:xfrm>
+            <a:off x="33550243" y="9907428"/>
+            <a:ext cx="978012" cy="0"/>
+          </a:xfrm>
+          <a:prstGeom prst="straightConnector1">
+            <a:avLst/>
+          </a:prstGeom>
+          <a:ln w="76200">
+            <a:solidFill>
+              <a:schemeClr val="tx1"/>
+            </a:solidFill>
+            <a:tailEnd type="triangle"/>
+          </a:ln>
+        </p:spPr>
+        <p:style>
+          <a:lnRef idx="2">
+            <a:schemeClr val="dk1"/>
+          </a:lnRef>
+          <a:fillRef idx="0">
+            <a:schemeClr val="dk1"/>
+          </a:fillRef>
+          <a:effectRef idx="1">
+            <a:schemeClr val="dk1"/>
+          </a:effectRef>
+          <a:fontRef idx="minor">
+            <a:schemeClr val="tx1"/>
+          </a:fontRef>
+        </p:style>
+      </p:cxnSp>
+      <p:sp>
+        <p:nvSpPr>
+          <p:cNvPr id="49" name="Rectangle: Rounded Corners 48">
+            <a:extLst>
+              <a:ext uri="{FF2B5EF4-FFF2-40B4-BE49-F238E27FC236}">
+                <a16:creationId xmlns:a16="http://schemas.microsoft.com/office/drawing/2014/main" id="{1C29497D-2B90-2BE5-88BB-D67B8144BA05}"/>
+              </a:ext>
+            </a:extLst>
+          </p:cNvPr>
+          <p:cNvSpPr/>
+          <p:nvPr/>
+        </p:nvSpPr>
+        <p:spPr>
+          <a:xfrm>
+            <a:off x="11390334" y="12536218"/>
+            <a:ext cx="29946600" cy="12430872"/>
           </a:xfrm>
           <a:prstGeom prst="roundRect">
             <a:avLst/>
@@ -3878,48 +4671,68 @@
           </a:p>
         </p:txBody>
       </p:sp>
-      <p:pic>
-        <p:nvPicPr>
-          <p:cNvPr id="50" name="Graphic 49" descr="Subtitles with solid fill">
+      <p:sp>
+        <p:nvSpPr>
+          <p:cNvPr id="75" name="Rectangle: Top Corners Rounded 74">
             <a:extLst>
               <a:ext uri="{FF2B5EF4-FFF2-40B4-BE49-F238E27FC236}">
-                <a16:creationId xmlns:a16="http://schemas.microsoft.com/office/drawing/2014/main" id="{5F915C69-C22F-2AA5-1B17-D827237339E2}"/>
+                <a16:creationId xmlns:a16="http://schemas.microsoft.com/office/drawing/2014/main" id="{ADA389BC-6277-D00F-8843-FDFC3BF7E611}"/>
               </a:ext>
             </a:extLst>
           </p:cNvPr>
-          <p:cNvPicPr>
-            <a:picLocks noChangeAspect="1"/>
-          </p:cNvPicPr>
+          <p:cNvSpPr/>
           <p:nvPr/>
-        </p:nvPicPr>
-        <p:blipFill>
-          <a:blip r:embed="rId8">
-            <a:extLst>
-              <a:ext uri="{96DAC541-7B7A-43D3-8B79-37D633B846F1}">
-                <asvg:svgBlip xmlns:asvg="http://schemas.microsoft.com/office/drawing/2016/SVG/main" r:embed="rId9"/>
-              </a:ext>
-            </a:extLst>
-          </a:blip>
-          <a:stretch>
-            <a:fillRect/>
-          </a:stretch>
-        </p:blipFill>
+        </p:nvSpPr>
         <p:spPr>
-          <a:xfrm>
-            <a:off x="34555417" y="15628249"/>
-            <a:ext cx="2884975" cy="2884975"/>
+          <a:xfrm rot="10800000">
+            <a:off x="11391509" y="25999205"/>
+            <a:ext cx="29944252" cy="6757550"/>
           </a:xfrm>
-          <a:prstGeom prst="rect">
+          <a:prstGeom prst="round2SameRect">
             <a:avLst/>
           </a:prstGeom>
+          <a:solidFill>
+            <a:schemeClr val="accent6">
+              <a:lumMod val="40000"/>
+              <a:lumOff val="60000"/>
+            </a:schemeClr>
+          </a:solidFill>
         </p:spPr>
-      </p:pic>
+        <p:style>
+          <a:lnRef idx="2">
+            <a:schemeClr val="accent1">
+              <a:shade val="15000"/>
+            </a:schemeClr>
+          </a:lnRef>
+          <a:fillRef idx="1">
+            <a:schemeClr val="accent1"/>
+          </a:fillRef>
+          <a:effectRef idx="0">
+            <a:schemeClr val="accent1"/>
+          </a:effectRef>
+          <a:fontRef idx="minor">
+            <a:schemeClr val="lt1"/>
+          </a:fontRef>
+        </p:style>
+        <p:txBody>
+          <a:bodyPr rtlCol="0" anchor="ctr"/>
+          <a:lstStyle/>
+          <a:p>
+            <a:pPr algn="just"/>
+            <a:endParaRPr lang="en-US" sz="4400" dirty="0">
+              <a:solidFill>
+                <a:schemeClr val="tx1"/>
+              </a:solidFill>
+            </a:endParaRPr>
+          </a:p>
+        </p:txBody>
+      </p:sp>
       <p:sp>
         <p:nvSpPr>
-          <p:cNvPr id="52" name="TextBox 51">
+          <p:cNvPr id="77" name="TextBox 76">
             <a:extLst>
               <a:ext uri="{FF2B5EF4-FFF2-40B4-BE49-F238E27FC236}">
-                <a16:creationId xmlns:a16="http://schemas.microsoft.com/office/drawing/2014/main" id="{1CA22E51-CE03-F50F-0289-6302FC2665E4}"/>
+                <a16:creationId xmlns:a16="http://schemas.microsoft.com/office/drawing/2014/main" id="{C9821E32-A8A6-C518-B031-E9D5E16F9A8D}"/>
               </a:ext>
             </a:extLst>
           </p:cNvPr>
@@ -3928,8 +4741,8 @@
         </p:nvSpPr>
         <p:spPr>
           <a:xfrm>
-            <a:off x="7072861" y="18773143"/>
-            <a:ext cx="9943000" cy="923330"/>
+            <a:off x="12044361" y="26496566"/>
+            <a:ext cx="28852813" cy="5970865"/>
           </a:xfrm>
           <a:prstGeom prst="rect">
             <a:avLst/>
@@ -3942,17 +4755,796 @@
           </a:bodyPr>
           <a:lstStyle/>
           <a:p>
-            <a:pPr algn="l"/>
-            <a:r>
-              <a:rPr lang="en-US" sz="5400" b="1" i="0" dirty="0">
+            <a:pPr marL="228600" indent="-228600">
+              <a:spcAft>
+                <a:spcPts val="1800"/>
+              </a:spcAft>
+              <a:buFont typeface="+mj-lt"/>
+              <a:buAutoNum type="arabicPeriod"/>
+            </a:pPr>
+            <a:r>
+              <a:rPr lang="en-US" sz="4400" b="1" i="0" dirty="0">
                 <a:solidFill>
                   <a:srgbClr val="0F0F0F"/>
                 </a:solidFill>
                 <a:effectLst/>
                 <a:latin typeface="ui-sans-serif"/>
               </a:rPr>
-              <a:t>Model Performance Evaluation</a:t>
-            </a:r>
+              <a:t>Distinct </a:t>
+            </a:r>
+            <a:r>
+              <a:rPr lang="en-US" sz="4400" i="0" dirty="0">
+                <a:solidFill>
+                  <a:srgbClr val="0F0F0F"/>
+                </a:solidFill>
+                <a:effectLst/>
+                <a:latin typeface="ui-sans-serif"/>
+              </a:rPr>
+              <a:t>Chemotypes for Selectivity: The recurrent anchors clearly separate the two selective classes. Class 1 (delta) is driven by cyano-pyrimidine </a:t>
+            </a:r>
+            <a:r>
+              <a:rPr lang="en-US" sz="4400" b="1" i="0" dirty="0">
+                <a:solidFill>
+                  <a:srgbClr val="0F0F0F"/>
+                </a:solidFill>
+                <a:effectLst/>
+                <a:latin typeface="ui-sans-serif"/>
+              </a:rPr>
+              <a:t>hinge binders</a:t>
+            </a:r>
+            <a:r>
+              <a:rPr lang="en-US" sz="4400" i="0" dirty="0">
+                <a:solidFill>
+                  <a:srgbClr val="0F0F0F"/>
+                </a:solidFill>
+                <a:effectLst/>
+                <a:latin typeface="ui-sans-serif"/>
+              </a:rPr>
+              <a:t>, while Class 2 (gamma) is driven by </a:t>
+            </a:r>
+            <a:r>
+              <a:rPr lang="en-US" sz="4400" i="0" dirty="0" err="1">
+                <a:solidFill>
+                  <a:srgbClr val="0F0F0F"/>
+                </a:solidFill>
+                <a:effectLst/>
+                <a:latin typeface="ui-sans-serif"/>
+              </a:rPr>
+              <a:t>isoquinoline</a:t>
+            </a:r>
+            <a:r>
+              <a:rPr lang="en-US" sz="4400" i="0" dirty="0">
+                <a:solidFill>
+                  <a:srgbClr val="0F0F0F"/>
+                </a:solidFill>
+                <a:effectLst/>
+                <a:latin typeface="ui-sans-serif"/>
+              </a:rPr>
+              <a:t>/</a:t>
+            </a:r>
+            <a:r>
+              <a:rPr lang="en-US" sz="4400" i="0" dirty="0" err="1">
+                <a:solidFill>
+                  <a:srgbClr val="0F0F0F"/>
+                </a:solidFill>
+                <a:effectLst/>
+                <a:latin typeface="ui-sans-serif"/>
+              </a:rPr>
+              <a:t>dihydroisoquinolinone</a:t>
+            </a:r>
+            <a:r>
+              <a:rPr lang="en-US" sz="4400" i="0" dirty="0">
+                <a:solidFill>
+                  <a:srgbClr val="0F0F0F"/>
+                </a:solidFill>
+                <a:effectLst/>
+                <a:latin typeface="ui-sans-serif"/>
+              </a:rPr>
+              <a:t> scaffolds. This </a:t>
+            </a:r>
+            <a:r>
+              <a:rPr lang="en-US" sz="4400" b="1" i="0" dirty="0">
+                <a:solidFill>
+                  <a:srgbClr val="0F0F0F"/>
+                </a:solidFill>
+                <a:effectLst/>
+                <a:latin typeface="ui-sans-serif"/>
+              </a:rPr>
+              <a:t>aligns with known structure-activity relationships (SAR) in PI3K inhibitor design.</a:t>
+            </a:r>
+            <a:endParaRPr lang="en-US" sz="4400" i="0" dirty="0">
+              <a:solidFill>
+                <a:srgbClr val="0F0F0F"/>
+              </a:solidFill>
+              <a:effectLst/>
+              <a:latin typeface="ui-sans-serif"/>
+            </a:endParaRPr>
+          </a:p>
+          <a:p>
+            <a:pPr marL="228600" indent="-228600">
+              <a:spcAft>
+                <a:spcPts val="1800"/>
+              </a:spcAft>
+              <a:buFont typeface="+mj-lt"/>
+              <a:buAutoNum type="arabicPeriod" startAt="2"/>
+            </a:pPr>
+            <a:r>
+              <a:rPr lang="en-US" sz="4400" b="1" i="0" dirty="0">
+                <a:solidFill>
+                  <a:srgbClr val="0F0F0F"/>
+                </a:solidFill>
+                <a:effectLst/>
+                <a:latin typeface="ui-sans-serif"/>
+              </a:rPr>
+              <a:t>Hinge Region Mimicry</a:t>
+            </a:r>
+            <a:r>
+              <a:rPr lang="en-US" sz="4400" i="0" dirty="0">
+                <a:solidFill>
+                  <a:srgbClr val="0F0F0F"/>
+                </a:solidFill>
+                <a:effectLst/>
+                <a:latin typeface="ui-sans-serif"/>
+              </a:rPr>
+              <a:t>: The high anchor occurrence of cyano-pyrimidines in Class 1 confirms the model has learned the </a:t>
+            </a:r>
+            <a:r>
+              <a:rPr lang="en-US" sz="4400" b="1" i="0" dirty="0">
+                <a:solidFill>
+                  <a:srgbClr val="0F0F0F"/>
+                </a:solidFill>
+                <a:effectLst/>
+                <a:latin typeface="ui-sans-serif"/>
+              </a:rPr>
+              <a:t>canonical hydrogen-bonding motif</a:t>
+            </a:r>
+            <a:r>
+              <a:rPr lang="en-US" sz="4400" i="0" dirty="0">
+                <a:solidFill>
+                  <a:srgbClr val="0F0F0F"/>
+                </a:solidFill>
+                <a:effectLst/>
+                <a:latin typeface="ui-sans-serif"/>
+              </a:rPr>
+              <a:t> required for PI3K catalytic domain binding.</a:t>
+            </a:r>
+          </a:p>
+          <a:p>
+            <a:pPr marL="228600" indent="-228600">
+              <a:spcAft>
+                <a:spcPts val="1800"/>
+              </a:spcAft>
+              <a:buFont typeface="+mj-lt"/>
+              <a:buAutoNum type="arabicPeriod" startAt="3"/>
+            </a:pPr>
+            <a:r>
+              <a:rPr lang="en-US" sz="4400" b="1" i="0" dirty="0">
+                <a:solidFill>
+                  <a:srgbClr val="0F0F0F"/>
+                </a:solidFill>
+                <a:effectLst/>
+                <a:latin typeface="ui-sans-serif"/>
+              </a:rPr>
+              <a:t>Scaffold-Driven Selectivity: </a:t>
+            </a:r>
+            <a:r>
+              <a:rPr lang="en-US" sz="4400" i="0" dirty="0">
+                <a:solidFill>
+                  <a:srgbClr val="0F0F0F"/>
+                </a:solidFill>
+                <a:effectLst/>
+                <a:latin typeface="ui-sans-serif"/>
+              </a:rPr>
+              <a:t>The dominance of bicyclic nitrogenous cores (</a:t>
+            </a:r>
+            <a:r>
+              <a:rPr lang="en-US" sz="4400" i="0" dirty="0" err="1">
+                <a:solidFill>
+                  <a:srgbClr val="0F0F0F"/>
+                </a:solidFill>
+                <a:effectLst/>
+                <a:latin typeface="ui-sans-serif"/>
+              </a:rPr>
+              <a:t>isoquinolines</a:t>
+            </a:r>
+            <a:r>
+              <a:rPr lang="en-US" sz="4400" i="0" dirty="0">
+                <a:solidFill>
+                  <a:srgbClr val="0F0F0F"/>
+                </a:solidFill>
+                <a:effectLst/>
+                <a:latin typeface="ui-sans-serif"/>
+              </a:rPr>
+              <a:t>) in Class 2 suggests that PI3K-gamma selectivity is </a:t>
+            </a:r>
+            <a:r>
+              <a:rPr lang="en-US" sz="4400" b="1" i="0" dirty="0">
+                <a:solidFill>
+                  <a:srgbClr val="0F0F0F"/>
+                </a:solidFill>
+                <a:effectLst/>
+                <a:latin typeface="ui-sans-serif"/>
+              </a:rPr>
+              <a:t>heavily scaffold-dependent</a:t>
+            </a:r>
+            <a:r>
+              <a:rPr lang="en-US" sz="4400" i="0" dirty="0">
+                <a:solidFill>
+                  <a:srgbClr val="0F0F0F"/>
+                </a:solidFill>
+                <a:effectLst/>
+                <a:latin typeface="ui-sans-serif"/>
+              </a:rPr>
+              <a:t>, likely due to subtle differences in the </a:t>
+            </a:r>
+            <a:r>
+              <a:rPr lang="en-US" sz="4400" b="1" i="0" dirty="0">
+                <a:solidFill>
+                  <a:srgbClr val="0F0F0F"/>
+                </a:solidFill>
+                <a:effectLst/>
+                <a:latin typeface="ui-sans-serif"/>
+              </a:rPr>
+              <a:t>gatekeeper residue </a:t>
+            </a:r>
+            <a:r>
+              <a:rPr lang="en-US" sz="4400" i="0" dirty="0">
+                <a:solidFill>
+                  <a:srgbClr val="0F0F0F"/>
+                </a:solidFill>
+                <a:effectLst/>
+                <a:latin typeface="ui-sans-serif"/>
+              </a:rPr>
+              <a:t>or </a:t>
+            </a:r>
+            <a:r>
+              <a:rPr lang="en-US" sz="4400" b="1" i="0" dirty="0">
+                <a:solidFill>
+                  <a:srgbClr val="0F0F0F"/>
+                </a:solidFill>
+                <a:effectLst/>
+                <a:latin typeface="ui-sans-serif"/>
+              </a:rPr>
+              <a:t>allosteric pocket topology </a:t>
+            </a:r>
+            <a:r>
+              <a:rPr lang="en-US" sz="4400" i="0" dirty="0">
+                <a:solidFill>
+                  <a:srgbClr val="0F0F0F"/>
+                </a:solidFill>
+                <a:effectLst/>
+                <a:latin typeface="ui-sans-serif"/>
+              </a:rPr>
+              <a:t>compared to PI3K-delta.</a:t>
+            </a:r>
+            <a:endParaRPr lang="en-US" sz="4400" dirty="0"/>
+          </a:p>
+        </p:txBody>
+      </p:sp>
+      <p:sp>
+        <p:nvSpPr>
+          <p:cNvPr id="80" name="TextBox 79">
+            <a:extLst>
+              <a:ext uri="{FF2B5EF4-FFF2-40B4-BE49-F238E27FC236}">
+                <a16:creationId xmlns:a16="http://schemas.microsoft.com/office/drawing/2014/main" id="{4F75911C-6BD0-922D-B821-7CE96BED0CA3}"/>
+              </a:ext>
+            </a:extLst>
+          </p:cNvPr>
+          <p:cNvSpPr txBox="1"/>
+          <p:nvPr/>
+        </p:nvSpPr>
+        <p:spPr>
+          <a:xfrm>
+            <a:off x="17784949" y="25123614"/>
+            <a:ext cx="17157371" cy="923330"/>
+          </a:xfrm>
+          <a:prstGeom prst="rect">
+            <a:avLst/>
+          </a:prstGeom>
+          <a:noFill/>
+        </p:spPr>
+        <p:txBody>
+          <a:bodyPr wrap="square">
+            <a:spAutoFit/>
+          </a:bodyPr>
+          <a:lstStyle/>
+          <a:p>
+            <a:pPr algn="ctr"/>
+            <a:r>
+              <a:rPr lang="en-US" sz="5400" b="1" dirty="0">
+                <a:solidFill>
+                  <a:srgbClr val="0F0F0F"/>
+                </a:solidFill>
+                <a:latin typeface="ui-sans-serif"/>
+              </a:rPr>
+              <a:t>Chemical insights &amp; discussion</a:t>
+            </a:r>
+            <a:endParaRPr lang="en-US" sz="5400" b="1" i="0" dirty="0">
+              <a:solidFill>
+                <a:srgbClr val="0F0F0F"/>
+              </a:solidFill>
+              <a:effectLst/>
+              <a:latin typeface="ui-sans-serif"/>
+            </a:endParaRPr>
+          </a:p>
+        </p:txBody>
+      </p:sp>
+      <p:grpSp>
+        <p:nvGrpSpPr>
+          <p:cNvPr id="7" name="Group 6">
+            <a:extLst>
+              <a:ext uri="{FF2B5EF4-FFF2-40B4-BE49-F238E27FC236}">
+                <a16:creationId xmlns:a16="http://schemas.microsoft.com/office/drawing/2014/main" id="{AE02D07E-FA83-46F7-FBED-29C7C8CFC31A}"/>
+              </a:ext>
+            </a:extLst>
+          </p:cNvPr>
+          <p:cNvGrpSpPr/>
+          <p:nvPr/>
+        </p:nvGrpSpPr>
+        <p:grpSpPr>
+          <a:xfrm>
+            <a:off x="12860226" y="33206377"/>
+            <a:ext cx="27221082" cy="923330"/>
+            <a:chOff x="13161742" y="35331084"/>
+            <a:chExt cx="27221082" cy="923330"/>
+          </a:xfrm>
+        </p:grpSpPr>
+        <p:sp>
+          <p:nvSpPr>
+            <p:cNvPr id="81" name="Rectangle 80">
+              <a:extLst>
+                <a:ext uri="{FF2B5EF4-FFF2-40B4-BE49-F238E27FC236}">
+                  <a16:creationId xmlns:a16="http://schemas.microsoft.com/office/drawing/2014/main" id="{72807964-5BD9-B45A-64B0-2645DF88EB3B}"/>
+                </a:ext>
+              </a:extLst>
+            </p:cNvPr>
+            <p:cNvSpPr/>
+            <p:nvPr/>
+          </p:nvSpPr>
+          <p:spPr>
+            <a:xfrm>
+              <a:off x="13161742" y="35440946"/>
+              <a:ext cx="1646814" cy="703607"/>
+            </a:xfrm>
+            <a:prstGeom prst="rect">
+              <a:avLst/>
+            </a:prstGeom>
+            <a:solidFill>
+              <a:srgbClr val="A6CAEC"/>
+            </a:solidFill>
+          </p:spPr>
+          <p:style>
+            <a:lnRef idx="2">
+              <a:schemeClr val="accent1">
+                <a:shade val="15000"/>
+              </a:schemeClr>
+            </a:lnRef>
+            <a:fillRef idx="1">
+              <a:schemeClr val="accent1"/>
+            </a:fillRef>
+            <a:effectRef idx="0">
+              <a:schemeClr val="accent1"/>
+            </a:effectRef>
+            <a:fontRef idx="minor">
+              <a:schemeClr val="lt1"/>
+            </a:fontRef>
+          </p:style>
+          <p:txBody>
+            <a:bodyPr rtlCol="0" anchor="ctr"/>
+            <a:lstStyle/>
+            <a:p>
+              <a:pPr algn="ctr"/>
+              <a:endParaRPr lang="en-US"/>
+            </a:p>
+          </p:txBody>
+        </p:sp>
+        <p:sp>
+          <p:nvSpPr>
+            <p:cNvPr id="82" name="TextBox 81">
+              <a:extLst>
+                <a:ext uri="{FF2B5EF4-FFF2-40B4-BE49-F238E27FC236}">
+                  <a16:creationId xmlns:a16="http://schemas.microsoft.com/office/drawing/2014/main" id="{EACA069E-8CED-5E8A-69B1-E9F4FC24041A}"/>
+                </a:ext>
+              </a:extLst>
+            </p:cNvPr>
+            <p:cNvSpPr txBox="1"/>
+            <p:nvPr/>
+          </p:nvSpPr>
+          <p:spPr>
+            <a:xfrm>
+              <a:off x="13960804" y="35331084"/>
+              <a:ext cx="6199523" cy="923330"/>
+            </a:xfrm>
+            <a:prstGeom prst="rect">
+              <a:avLst/>
+            </a:prstGeom>
+            <a:noFill/>
+          </p:spPr>
+          <p:txBody>
+            <a:bodyPr wrap="square" rtlCol="0">
+              <a:spAutoFit/>
+            </a:bodyPr>
+            <a:lstStyle/>
+            <a:p>
+              <a:pPr algn="ctr"/>
+              <a:r>
+                <a:rPr lang="en-US" sz="5400" dirty="0"/>
+                <a:t>User prompt</a:t>
+              </a:r>
+            </a:p>
+          </p:txBody>
+        </p:sp>
+        <p:sp>
+          <p:nvSpPr>
+            <p:cNvPr id="83" name="Rectangle 82">
+              <a:extLst>
+                <a:ext uri="{FF2B5EF4-FFF2-40B4-BE49-F238E27FC236}">
+                  <a16:creationId xmlns:a16="http://schemas.microsoft.com/office/drawing/2014/main" id="{083E7B6A-0D88-EE7A-862D-CD52DE210854}"/>
+                </a:ext>
+              </a:extLst>
+            </p:cNvPr>
+            <p:cNvSpPr/>
+            <p:nvPr/>
+          </p:nvSpPr>
+          <p:spPr>
+            <a:xfrm>
+              <a:off x="25749158" y="35440946"/>
+              <a:ext cx="1646814" cy="703607"/>
+            </a:xfrm>
+            <a:prstGeom prst="rect">
+              <a:avLst/>
+            </a:prstGeom>
+            <a:noFill/>
+          </p:spPr>
+          <p:style>
+            <a:lnRef idx="2">
+              <a:schemeClr val="accent1">
+                <a:shade val="15000"/>
+              </a:schemeClr>
+            </a:lnRef>
+            <a:fillRef idx="1">
+              <a:schemeClr val="accent1"/>
+            </a:fillRef>
+            <a:effectRef idx="0">
+              <a:schemeClr val="accent1"/>
+            </a:effectRef>
+            <a:fontRef idx="minor">
+              <a:schemeClr val="lt1"/>
+            </a:fontRef>
+          </p:style>
+          <p:txBody>
+            <a:bodyPr rtlCol="0" anchor="ctr"/>
+            <a:lstStyle/>
+            <a:p>
+              <a:pPr algn="ctr"/>
+              <a:endParaRPr lang="en-US"/>
+            </a:p>
+          </p:txBody>
+        </p:sp>
+        <p:sp>
+          <p:nvSpPr>
+            <p:cNvPr id="84" name="TextBox 83">
+              <a:extLst>
+                <a:ext uri="{FF2B5EF4-FFF2-40B4-BE49-F238E27FC236}">
+                  <a16:creationId xmlns:a16="http://schemas.microsoft.com/office/drawing/2014/main" id="{358AE044-1305-34FC-BBC0-450EF8C6264C}"/>
+                </a:ext>
+              </a:extLst>
+            </p:cNvPr>
+            <p:cNvSpPr txBox="1"/>
+            <p:nvPr/>
+          </p:nvSpPr>
+          <p:spPr>
+            <a:xfrm>
+              <a:off x="26376770" y="35331084"/>
+              <a:ext cx="8218539" cy="923330"/>
+            </a:xfrm>
+            <a:prstGeom prst="rect">
+              <a:avLst/>
+            </a:prstGeom>
+            <a:noFill/>
+          </p:spPr>
+          <p:txBody>
+            <a:bodyPr wrap="square" rtlCol="0">
+              <a:spAutoFit/>
+            </a:bodyPr>
+            <a:lstStyle/>
+            <a:p>
+              <a:pPr algn="ctr"/>
+              <a:r>
+                <a:rPr lang="en-US" sz="5400" dirty="0"/>
+                <a:t>Response &amp; output</a:t>
+              </a:r>
+            </a:p>
+          </p:txBody>
+        </p:sp>
+        <p:sp>
+          <p:nvSpPr>
+            <p:cNvPr id="86" name="Rectangle 85">
+              <a:extLst>
+                <a:ext uri="{FF2B5EF4-FFF2-40B4-BE49-F238E27FC236}">
+                  <a16:creationId xmlns:a16="http://schemas.microsoft.com/office/drawing/2014/main" id="{350C722C-59C7-EC1B-EC99-E1777E1494CE}"/>
+                </a:ext>
+              </a:extLst>
+            </p:cNvPr>
+            <p:cNvSpPr/>
+            <p:nvPr/>
+          </p:nvSpPr>
+          <p:spPr>
+            <a:xfrm>
+              <a:off x="34204757" y="35440946"/>
+              <a:ext cx="1646814" cy="703607"/>
+            </a:xfrm>
+            <a:prstGeom prst="rect">
+              <a:avLst/>
+            </a:prstGeom>
+            <a:solidFill>
+              <a:srgbClr val="B4E5A2"/>
+            </a:solidFill>
+          </p:spPr>
+          <p:style>
+            <a:lnRef idx="2">
+              <a:schemeClr val="accent1">
+                <a:shade val="15000"/>
+              </a:schemeClr>
+            </a:lnRef>
+            <a:fillRef idx="1">
+              <a:schemeClr val="accent1"/>
+            </a:fillRef>
+            <a:effectRef idx="0">
+              <a:schemeClr val="accent1"/>
+            </a:effectRef>
+            <a:fontRef idx="minor">
+              <a:schemeClr val="lt1"/>
+            </a:fontRef>
+          </p:style>
+          <p:txBody>
+            <a:bodyPr rtlCol="0" anchor="ctr"/>
+            <a:lstStyle/>
+            <a:p>
+              <a:pPr algn="ctr"/>
+              <a:endParaRPr lang="en-US"/>
+            </a:p>
+          </p:txBody>
+        </p:sp>
+        <p:sp>
+          <p:nvSpPr>
+            <p:cNvPr id="87" name="TextBox 86">
+              <a:extLst>
+                <a:ext uri="{FF2B5EF4-FFF2-40B4-BE49-F238E27FC236}">
+                  <a16:creationId xmlns:a16="http://schemas.microsoft.com/office/drawing/2014/main" id="{24FCF701-8B21-25B2-2AE4-BF962FF75654}"/>
+                </a:ext>
+              </a:extLst>
+            </p:cNvPr>
+            <p:cNvSpPr txBox="1"/>
+            <p:nvPr/>
+          </p:nvSpPr>
+          <p:spPr>
+            <a:xfrm>
+              <a:off x="35326982" y="35331084"/>
+              <a:ext cx="5055842" cy="923330"/>
+            </a:xfrm>
+            <a:prstGeom prst="rect">
+              <a:avLst/>
+            </a:prstGeom>
+            <a:noFill/>
+          </p:spPr>
+          <p:txBody>
+            <a:bodyPr wrap="square" rtlCol="0">
+              <a:spAutoFit/>
+            </a:bodyPr>
+            <a:lstStyle/>
+            <a:p>
+              <a:pPr algn="ctr"/>
+              <a:r>
+                <a:rPr lang="en-US" sz="5400" dirty="0"/>
+                <a:t>Discussion</a:t>
+              </a:r>
+            </a:p>
+          </p:txBody>
+        </p:sp>
+        <p:sp>
+          <p:nvSpPr>
+            <p:cNvPr id="5" name="Rectangle 4">
+              <a:extLst>
+                <a:ext uri="{FF2B5EF4-FFF2-40B4-BE49-F238E27FC236}">
+                  <a16:creationId xmlns:a16="http://schemas.microsoft.com/office/drawing/2014/main" id="{A2B5BA64-5C49-72B3-4807-202BB7511121}"/>
+                </a:ext>
+              </a:extLst>
+            </p:cNvPr>
+            <p:cNvSpPr/>
+            <p:nvPr/>
+          </p:nvSpPr>
+          <p:spPr>
+            <a:xfrm>
+              <a:off x="19941225" y="35440946"/>
+              <a:ext cx="1646814" cy="703607"/>
+            </a:xfrm>
+            <a:prstGeom prst="rect">
+              <a:avLst/>
+            </a:prstGeom>
+            <a:solidFill>
+              <a:srgbClr val="D9D9D9"/>
+            </a:solidFill>
+          </p:spPr>
+          <p:style>
+            <a:lnRef idx="2">
+              <a:schemeClr val="accent1">
+                <a:shade val="15000"/>
+              </a:schemeClr>
+            </a:lnRef>
+            <a:fillRef idx="1">
+              <a:schemeClr val="accent1"/>
+            </a:fillRef>
+            <a:effectRef idx="0">
+              <a:schemeClr val="accent1"/>
+            </a:effectRef>
+            <a:fontRef idx="minor">
+              <a:schemeClr val="lt1"/>
+            </a:fontRef>
+          </p:style>
+          <p:txBody>
+            <a:bodyPr rtlCol="0" anchor="ctr"/>
+            <a:lstStyle/>
+            <a:p>
+              <a:pPr algn="ctr"/>
+              <a:endParaRPr lang="en-US">
+                <a:solidFill>
+                  <a:srgbClr val="FFFFFF"/>
+                </a:solidFill>
+              </a:endParaRPr>
+            </a:p>
+          </p:txBody>
+        </p:sp>
+        <p:sp>
+          <p:nvSpPr>
+            <p:cNvPr id="6" name="TextBox 5">
+              <a:extLst>
+                <a:ext uri="{FF2B5EF4-FFF2-40B4-BE49-F238E27FC236}">
+                  <a16:creationId xmlns:a16="http://schemas.microsoft.com/office/drawing/2014/main" id="{0B838B24-BA64-D5F2-D98D-5C4BC2C2CAD6}"/>
+                </a:ext>
+              </a:extLst>
+            </p:cNvPr>
+            <p:cNvSpPr txBox="1"/>
+            <p:nvPr/>
+          </p:nvSpPr>
+          <p:spPr>
+            <a:xfrm>
+              <a:off x="20283087" y="35331084"/>
+              <a:ext cx="6199523" cy="923330"/>
+            </a:xfrm>
+            <a:prstGeom prst="rect">
+              <a:avLst/>
+            </a:prstGeom>
+            <a:noFill/>
+          </p:spPr>
+          <p:txBody>
+            <a:bodyPr wrap="square" rtlCol="0">
+              <a:spAutoFit/>
+            </a:bodyPr>
+            <a:lstStyle/>
+            <a:p>
+              <a:pPr algn="ctr"/>
+              <a:r>
+                <a:rPr lang="en-US" sz="5400" dirty="0"/>
+                <a:t>Tool calls</a:t>
+              </a:r>
+            </a:p>
+          </p:txBody>
+        </p:sp>
+      </p:grpSp>
+    </p:spTree>
+    <p:extLst>
+      <p:ext uri="{BB962C8B-B14F-4D97-AF65-F5344CB8AC3E}">
+        <p14:creationId xmlns:p14="http://schemas.microsoft.com/office/powerpoint/2010/main" val="2444434251"/>
+      </p:ext>
+    </p:extLst>
+  </p:cSld>
+  <p:clrMapOvr>
+    <a:masterClrMapping/>
+  </p:clrMapOvr>
+</p:sld>
+</file>
+
+<file path=ppt/slides/slide2.xml><?xml version="1.0" encoding="utf-8"?>
+<p:sld xmlns:a="http://schemas.openxmlformats.org/drawingml/2006/main" xmlns:r="http://schemas.openxmlformats.org/officeDocument/2006/relationships" xmlns:p="http://schemas.openxmlformats.org/presentationml/2006/main">
+  <p:cSld>
+    <p:spTree>
+      <p:nvGrpSpPr>
+        <p:cNvPr id="1" name=""/>
+        <p:cNvGrpSpPr/>
+        <p:nvPr/>
+      </p:nvGrpSpPr>
+      <p:grpSpPr>
+        <a:xfrm>
+          <a:off x="0" y="0"/>
+          <a:ext cx="0" cy="0"/>
+          <a:chOff x="0" y="0"/>
+          <a:chExt cx="0" cy="0"/>
+        </a:xfrm>
+      </p:grpSpPr>
+      <p:pic>
+        <p:nvPicPr>
+          <p:cNvPr id="98" name="Picture 97">
+            <a:extLst>
+              <a:ext uri="{FF2B5EF4-FFF2-40B4-BE49-F238E27FC236}">
+                <a16:creationId xmlns:a16="http://schemas.microsoft.com/office/drawing/2014/main" id="{A7F1FF81-F85B-AEE0-1DE8-5EB96DE47216}"/>
+              </a:ext>
+            </a:extLst>
+          </p:cNvPr>
+          <p:cNvPicPr>
+            <a:picLocks noChangeAspect="1"/>
+          </p:cNvPicPr>
+          <p:nvPr/>
+        </p:nvPicPr>
+        <p:blipFill>
+          <a:blip r:embed="rId2">
+            <a:extLst>
+              <a:ext uri="{28A0092B-C50C-407E-A947-70E740481C1C}">
+                <a14:useLocalDpi xmlns:a14="http://schemas.microsoft.com/office/drawing/2010/main" val="0"/>
+              </a:ext>
+            </a:extLst>
+          </a:blip>
+          <a:srcRect l="25671" t="16772" r="25601" b="34684"/>
+          <a:stretch/>
+        </p:blipFill>
+        <p:spPr>
+          <a:xfrm>
+            <a:off x="6677917" y="30348496"/>
+            <a:ext cx="16999639" cy="4019155"/>
+          </a:xfrm>
+          <a:prstGeom prst="rect">
+            <a:avLst/>
+          </a:prstGeom>
+        </p:spPr>
+      </p:pic>
+      <p:sp>
+        <p:nvSpPr>
+          <p:cNvPr id="14" name="Rectangle: Rounded Corners 13">
+            <a:extLst>
+              <a:ext uri="{FF2B5EF4-FFF2-40B4-BE49-F238E27FC236}">
+                <a16:creationId xmlns:a16="http://schemas.microsoft.com/office/drawing/2014/main" id="{DBF4675B-24DA-ECE6-C51C-65069789A359}"/>
+              </a:ext>
+            </a:extLst>
+          </p:cNvPr>
+          <p:cNvSpPr/>
+          <p:nvPr/>
+        </p:nvSpPr>
+        <p:spPr>
+          <a:xfrm>
+            <a:off x="6564917" y="7050566"/>
+            <a:ext cx="37071692" cy="5165792"/>
+          </a:xfrm>
+          <a:prstGeom prst="roundRect">
+            <a:avLst/>
+          </a:prstGeom>
+          <a:solidFill>
+            <a:schemeClr val="bg1">
+              <a:lumMod val="85000"/>
+            </a:schemeClr>
+          </a:solidFill>
+        </p:spPr>
+        <p:style>
+          <a:lnRef idx="2">
+            <a:schemeClr val="accent1">
+              <a:shade val="15000"/>
+            </a:schemeClr>
+          </a:lnRef>
+          <a:fillRef idx="1">
+            <a:schemeClr val="accent1"/>
+          </a:fillRef>
+          <a:effectRef idx="0">
+            <a:schemeClr val="accent1"/>
+          </a:effectRef>
+          <a:fontRef idx="minor">
+            <a:schemeClr val="lt1"/>
+          </a:fontRef>
+        </p:style>
+        <p:txBody>
+          <a:bodyPr rtlCol="0" anchor="ctr"/>
+          <a:lstStyle/>
+          <a:p>
+            <a:pPr algn="ctr"/>
+            <a:endParaRPr lang="en-US" dirty="0"/>
           </a:p>
         </p:txBody>
       </p:sp>
@@ -3970,8 +5562,8 @@
         </p:nvSpPr>
         <p:spPr>
           <a:xfrm>
-            <a:off x="31026405" y="18410119"/>
-            <a:ext cx="9943000" cy="1754326"/>
+            <a:off x="16522078" y="12574083"/>
+            <a:ext cx="17157371" cy="923330"/>
           </a:xfrm>
           <a:prstGeom prst="rect">
             <a:avLst/>
@@ -3992,97 +5584,617 @@
                 </a:solidFill>
                 <a:latin typeface="ui-sans-serif"/>
               </a:rPr>
-              <a:t>R</a:t>
-            </a:r>
-            <a:r>
-              <a:rPr lang="en-US" sz="5400" b="1" i="0" dirty="0">
+              <a:t>Pair 1: </a:t>
+            </a:r>
+            <a:r>
+              <a:rPr lang="en-US" sz="5400" b="1" dirty="0" err="1">
                 <a:solidFill>
                   <a:srgbClr val="0F0F0F"/>
                 </a:solidFill>
-                <a:effectLst/>
                 <a:latin typeface="ui-sans-serif"/>
               </a:rPr>
-              <a:t>ecurrent Molecular Anchor Fragments (Class 1 &amp; 2)</a:t>
-            </a:r>
+              <a:t>MolAnchor</a:t>
+            </a:r>
+            <a:r>
+              <a:rPr lang="en-US" sz="5400" b="1" dirty="0">
+                <a:solidFill>
+                  <a:srgbClr val="0F0F0F"/>
+                </a:solidFill>
+                <a:latin typeface="ui-sans-serif"/>
+              </a:rPr>
+              <a:t> vs SHAP</a:t>
+            </a:r>
+            <a:endParaRPr lang="en-US" sz="5400" b="1" i="0" dirty="0">
+              <a:solidFill>
+                <a:srgbClr val="0F0F0F"/>
+              </a:solidFill>
+              <a:effectLst/>
+              <a:latin typeface="ui-sans-serif"/>
+            </a:endParaRPr>
           </a:p>
         </p:txBody>
       </p:sp>
-      <p:pic>
-        <p:nvPicPr>
-          <p:cNvPr id="57" name="Picture 56" descr="A black and red hexagons&#10;&#10;AI-generated content may be incorrect.">
+      <p:sp>
+        <p:nvSpPr>
+          <p:cNvPr id="2" name="Rectangle: Top Corners Rounded 1">
             <a:extLst>
               <a:ext uri="{FF2B5EF4-FFF2-40B4-BE49-F238E27FC236}">
-                <a16:creationId xmlns:a16="http://schemas.microsoft.com/office/drawing/2014/main" id="{D31C6E93-8769-C043-E3E6-35F8E48F9A7F}"/>
+                <a16:creationId xmlns:a16="http://schemas.microsoft.com/office/drawing/2014/main" id="{6C13FBF4-81B4-461D-A19D-5804EED023DD}"/>
               </a:ext>
             </a:extLst>
           </p:cNvPr>
-          <p:cNvPicPr>
-            <a:picLocks noChangeAspect="1"/>
-          </p:cNvPicPr>
+          <p:cNvSpPr/>
           <p:nvPr/>
-        </p:nvPicPr>
-        <p:blipFill>
-          <a:blip r:embed="rId10">
+        </p:nvSpPr>
+        <p:spPr>
+          <a:xfrm>
+            <a:off x="6564918" y="492287"/>
+            <a:ext cx="37071691" cy="6053787"/>
+          </a:xfrm>
+          <a:prstGeom prst="round2SameRect">
+            <a:avLst/>
+          </a:prstGeom>
+          <a:solidFill>
+            <a:schemeClr val="tx2">
+              <a:lumMod val="25000"/>
+              <a:lumOff val="75000"/>
+            </a:schemeClr>
+          </a:solidFill>
+        </p:spPr>
+        <p:style>
+          <a:lnRef idx="2">
+            <a:schemeClr val="accent1">
+              <a:shade val="15000"/>
+            </a:schemeClr>
+          </a:lnRef>
+          <a:fillRef idx="1">
+            <a:schemeClr val="accent1"/>
+          </a:fillRef>
+          <a:effectRef idx="0">
+            <a:schemeClr val="accent1"/>
+          </a:effectRef>
+          <a:fontRef idx="minor">
+            <a:schemeClr val="lt1"/>
+          </a:fontRef>
+        </p:style>
+        <p:txBody>
+          <a:bodyPr rtlCol="0" anchor="ctr"/>
+          <a:lstStyle/>
+          <a:p>
+            <a:pPr algn="just"/>
+            <a:r>
+              <a:rPr lang="en-US" sz="6000" dirty="0">
+                <a:solidFill>
+                  <a:schemeClr val="tx1"/>
+                </a:solidFill>
+              </a:rPr>
+              <a:t>You are running an explainability benchmarking study for compound bioactivity prediction. The goal is to train a Deep Neural Network to distinguish compounds active against the D(2) dopamine receptor (</a:t>
+            </a:r>
+            <a:r>
+              <a:rPr lang="en-US" sz="6000" dirty="0" err="1">
+                <a:solidFill>
+                  <a:schemeClr val="tx1"/>
+                </a:solidFill>
+              </a:rPr>
+              <a:t>UniProt</a:t>
+            </a:r>
+            <a:r>
+              <a:rPr lang="en-US" sz="6000" dirty="0">
+                <a:solidFill>
+                  <a:schemeClr val="tx1"/>
+                </a:solidFill>
+              </a:rPr>
+              <a:t> P14416) from inactive compounds, evaluate its performance, and then directly compare two pairs of explainability methods on the same on the same correctly predicted active compound:  </a:t>
+            </a:r>
+            <a:r>
+              <a:rPr lang="en-US" sz="6000" dirty="0" err="1">
+                <a:solidFill>
+                  <a:schemeClr val="tx1"/>
+                </a:solidFill>
+              </a:rPr>
+              <a:t>Molanchor</a:t>
+            </a:r>
+            <a:r>
+              <a:rPr lang="en-US" sz="6000" dirty="0">
+                <a:solidFill>
+                  <a:schemeClr val="tx1"/>
+                </a:solidFill>
+              </a:rPr>
+              <a:t> vs SHAP and </a:t>
+            </a:r>
+            <a:r>
+              <a:rPr lang="en-US" sz="6000" dirty="0" err="1">
+                <a:solidFill>
+                  <a:schemeClr val="tx1"/>
+                </a:solidFill>
+              </a:rPr>
+              <a:t>MolCE</a:t>
+            </a:r>
+            <a:r>
+              <a:rPr lang="en-US" sz="6000" dirty="0">
+                <a:solidFill>
+                  <a:schemeClr val="tx1"/>
+                </a:solidFill>
+              </a:rPr>
+              <a:t> vs Counterfactuals. Summarize where the methods agree on the structural determinants of the predictions and where they disagree</a:t>
+            </a:r>
+            <a:r>
+              <a:rPr lang="en-US" sz="1800" dirty="0">
+                <a:solidFill>
+                  <a:schemeClr val="tx1"/>
+                </a:solidFill>
+              </a:rPr>
+              <a:t>.</a:t>
+            </a:r>
+            <a:endParaRPr lang="en-US" sz="6000" dirty="0">
+              <a:solidFill>
+                <a:schemeClr val="tx1"/>
+              </a:solidFill>
+            </a:endParaRPr>
+          </a:p>
+        </p:txBody>
+      </p:sp>
+      <p:sp>
+        <p:nvSpPr>
+          <p:cNvPr id="49" name="Rectangle: Rounded Corners 48">
             <a:extLst>
-              <a:ext uri="{28A0092B-C50C-407E-A947-70E740481C1C}">
-                <a14:useLocalDpi xmlns:a14="http://schemas.microsoft.com/office/drawing/2010/main" val="0"/>
+              <a:ext uri="{FF2B5EF4-FFF2-40B4-BE49-F238E27FC236}">
+                <a16:creationId xmlns:a16="http://schemas.microsoft.com/office/drawing/2014/main" id="{1C29497D-2B90-2BE5-88BB-D67B8144BA05}"/>
               </a:ext>
             </a:extLst>
-          </a:blip>
-          <a:srcRect r="60622" b="25829"/>
-          <a:stretch/>
-        </p:blipFill>
+          </p:cNvPr>
+          <p:cNvSpPr/>
+          <p:nvPr/>
+        </p:nvSpPr>
         <p:spPr>
           <a:xfrm>
-            <a:off x="25217677" y="21809773"/>
-            <a:ext cx="10517536" cy="3631955"/>
+            <a:off x="6564918" y="13607274"/>
+            <a:ext cx="37071691" cy="14309967"/>
+          </a:xfrm>
+          <a:prstGeom prst="roundRect">
+            <a:avLst/>
+          </a:prstGeom>
+          <a:noFill/>
+        </p:spPr>
+        <p:style>
+          <a:lnRef idx="2">
+            <a:schemeClr val="accent1">
+              <a:shade val="15000"/>
+            </a:schemeClr>
+          </a:lnRef>
+          <a:fillRef idx="1">
+            <a:schemeClr val="accent1"/>
+          </a:fillRef>
+          <a:effectRef idx="0">
+            <a:schemeClr val="accent1"/>
+          </a:effectRef>
+          <a:fontRef idx="minor">
+            <a:schemeClr val="lt1"/>
+          </a:fontRef>
+        </p:style>
+        <p:txBody>
+          <a:bodyPr rtlCol="0" anchor="ctr"/>
+          <a:lstStyle/>
+          <a:p>
+            <a:pPr algn="ctr"/>
+            <a:endParaRPr lang="en-US" dirty="0"/>
+          </a:p>
+        </p:txBody>
+      </p:sp>
+      <p:sp>
+        <p:nvSpPr>
+          <p:cNvPr id="75" name="Rectangle: Top Corners Rounded 74">
+            <a:extLst>
+              <a:ext uri="{FF2B5EF4-FFF2-40B4-BE49-F238E27FC236}">
+                <a16:creationId xmlns:a16="http://schemas.microsoft.com/office/drawing/2014/main" id="{ADA389BC-6277-D00F-8843-FDFC3BF7E611}"/>
+              </a:ext>
+            </a:extLst>
+          </p:cNvPr>
+          <p:cNvSpPr/>
+          <p:nvPr/>
+        </p:nvSpPr>
+        <p:spPr>
+          <a:xfrm rot="10800000">
+            <a:off x="6594255" y="43149687"/>
+            <a:ext cx="37013016" cy="7781566"/>
+          </a:xfrm>
+          <a:prstGeom prst="round2SameRect">
+            <a:avLst/>
+          </a:prstGeom>
+          <a:solidFill>
+            <a:schemeClr val="accent6">
+              <a:lumMod val="40000"/>
+              <a:lumOff val="60000"/>
+            </a:schemeClr>
+          </a:solidFill>
+        </p:spPr>
+        <p:style>
+          <a:lnRef idx="2">
+            <a:schemeClr val="accent1">
+              <a:shade val="15000"/>
+            </a:schemeClr>
+          </a:lnRef>
+          <a:fillRef idx="1">
+            <a:schemeClr val="accent1"/>
+          </a:fillRef>
+          <a:effectRef idx="0">
+            <a:schemeClr val="accent1"/>
+          </a:effectRef>
+          <a:fontRef idx="minor">
+            <a:schemeClr val="lt1"/>
+          </a:fontRef>
+        </p:style>
+        <p:txBody>
+          <a:bodyPr rtlCol="0" anchor="ctr"/>
+          <a:lstStyle/>
+          <a:p>
+            <a:pPr algn="just"/>
+            <a:endParaRPr lang="en-US" sz="4400" dirty="0">
+              <a:solidFill>
+                <a:schemeClr val="tx1"/>
+              </a:solidFill>
+            </a:endParaRPr>
+          </a:p>
+        </p:txBody>
+      </p:sp>
+      <p:sp>
+        <p:nvSpPr>
+          <p:cNvPr id="77" name="TextBox 76">
+            <a:extLst>
+              <a:ext uri="{FF2B5EF4-FFF2-40B4-BE49-F238E27FC236}">
+                <a16:creationId xmlns:a16="http://schemas.microsoft.com/office/drawing/2014/main" id="{C9821E32-A8A6-C518-B031-E9D5E16F9A8D}"/>
+              </a:ext>
+            </a:extLst>
+          </p:cNvPr>
+          <p:cNvSpPr txBox="1"/>
+          <p:nvPr/>
+        </p:nvSpPr>
+        <p:spPr>
+          <a:xfrm>
+            <a:off x="6891932" y="43647051"/>
+            <a:ext cx="36417663" cy="8094524"/>
           </a:xfrm>
           <a:prstGeom prst="rect">
             <a:avLst/>
           </a:prstGeom>
+          <a:noFill/>
         </p:spPr>
-      </p:pic>
-      <p:pic>
-        <p:nvPicPr>
-          <p:cNvPr id="59" name="Picture 58" descr="A red and black molecule&#10;&#10;AI-generated content may be incorrect.">
+        <p:txBody>
+          <a:bodyPr wrap="square">
+            <a:spAutoFit/>
+          </a:bodyPr>
+          <a:lstStyle/>
+          <a:p>
+            <a:pPr marL="228600" indent="-228600">
+              <a:spcAft>
+                <a:spcPts val="1200"/>
+              </a:spcAft>
+              <a:buFont typeface="+mj-lt"/>
+              <a:buAutoNum type="arabicPeriod"/>
+            </a:pPr>
+            <a:r>
+              <a:rPr lang="en-US" sz="4400" b="1" i="0" dirty="0">
+                <a:solidFill>
+                  <a:srgbClr val="0F0F0F"/>
+                </a:solidFill>
+                <a:effectLst/>
+                <a:latin typeface="ui-sans-serif"/>
+              </a:rPr>
+              <a:t> Convergent Pharmacophore: </a:t>
+            </a:r>
+            <a:r>
+              <a:rPr lang="en-US" sz="4400" i="0" dirty="0">
+                <a:solidFill>
+                  <a:srgbClr val="0F0F0F"/>
+                </a:solidFill>
+                <a:effectLst/>
+                <a:latin typeface="ui-sans-serif"/>
+              </a:rPr>
+              <a:t>All four methods agree that the piperazine-benzyl-morpholinone core is the essential pharmacophore for D2 receptor binding.</a:t>
+            </a:r>
+          </a:p>
+          <a:p>
+            <a:pPr marL="228600" indent="-228600">
+              <a:spcAft>
+                <a:spcPts val="1200"/>
+              </a:spcAft>
+              <a:buFont typeface="+mj-lt"/>
+              <a:buAutoNum type="arabicPeriod"/>
+            </a:pPr>
+            <a:r>
+              <a:rPr lang="en-US" sz="4400" b="1" i="0" dirty="0">
+                <a:solidFill>
+                  <a:srgbClr val="0F0F0F"/>
+                </a:solidFill>
+                <a:effectLst/>
+                <a:latin typeface="ui-sans-serif"/>
+              </a:rPr>
+              <a:t> Critical Switch: </a:t>
+            </a:r>
+            <a:r>
+              <a:rPr lang="en-US" sz="4400" i="0" dirty="0">
+                <a:solidFill>
+                  <a:srgbClr val="0F0F0F"/>
+                </a:solidFill>
+                <a:effectLst/>
+                <a:latin typeface="ui-sans-serif"/>
+              </a:rPr>
+              <a:t>The piperazine nitrogen substituent acts as an "on/off switch"—modifying it can eliminate activity even with the intact core scaffold intact.</a:t>
+            </a:r>
+          </a:p>
+          <a:p>
+            <a:pPr marL="228600" indent="-228600">
+              <a:spcAft>
+                <a:spcPts val="1200"/>
+              </a:spcAft>
+              <a:buFont typeface="+mj-lt"/>
+              <a:buAutoNum type="arabicPeriod"/>
+            </a:pPr>
+            <a:r>
+              <a:rPr lang="en-US" sz="4400" b="1" i="0" dirty="0">
+                <a:solidFill>
+                  <a:srgbClr val="0F0F0F"/>
+                </a:solidFill>
+                <a:effectLst/>
+                <a:latin typeface="ui-sans-serif"/>
+              </a:rPr>
+              <a:t> Method Complementarity:</a:t>
+            </a:r>
+          </a:p>
+          <a:p>
+            <a:pPr marL="571500" indent="-571500">
+              <a:spcAft>
+                <a:spcPts val="1200"/>
+              </a:spcAft>
+              <a:buFont typeface="Arial" panose="020B0604020202020204" pitchFamily="34" charset="0"/>
+              <a:buChar char="•"/>
+            </a:pPr>
+            <a:r>
+              <a:rPr lang="en-US" sz="4400" b="1" i="0" dirty="0" err="1">
+                <a:solidFill>
+                  <a:srgbClr val="0F0F0F"/>
+                </a:solidFill>
+                <a:effectLst/>
+                <a:latin typeface="ui-sans-serif"/>
+              </a:rPr>
+              <a:t>MolAnchor</a:t>
+            </a:r>
+            <a:r>
+              <a:rPr lang="en-US" sz="4400" b="1" i="0" dirty="0">
+                <a:solidFill>
+                  <a:srgbClr val="0F0F0F"/>
+                </a:solidFill>
+                <a:effectLst/>
+                <a:latin typeface="ui-sans-serif"/>
+              </a:rPr>
+              <a:t>: </a:t>
+            </a:r>
+            <a:r>
+              <a:rPr lang="en-US" sz="4400" i="0" dirty="0">
+                <a:solidFill>
+                  <a:srgbClr val="0F0F0F"/>
+                </a:solidFill>
+                <a:effectLst/>
+                <a:latin typeface="ui-sans-serif"/>
+              </a:rPr>
+              <a:t>Best for identifying dominant fragments with high precision</a:t>
+            </a:r>
+          </a:p>
+          <a:p>
+            <a:pPr marL="571500" indent="-571500">
+              <a:spcAft>
+                <a:spcPts val="1200"/>
+              </a:spcAft>
+              <a:buFont typeface="Arial" panose="020B0604020202020204" pitchFamily="34" charset="0"/>
+              <a:buChar char="•"/>
+            </a:pPr>
+            <a:r>
+              <a:rPr lang="en-US" sz="4400" b="1" i="0" dirty="0">
+                <a:solidFill>
+                  <a:srgbClr val="0F0F0F"/>
+                </a:solidFill>
+                <a:effectLst/>
+                <a:latin typeface="ui-sans-serif"/>
+              </a:rPr>
+              <a:t>SHAP: </a:t>
+            </a:r>
+            <a:r>
+              <a:rPr lang="en-US" sz="4400" i="0" dirty="0">
+                <a:solidFill>
+                  <a:srgbClr val="0F0F0F"/>
+                </a:solidFill>
+                <a:effectLst/>
+                <a:latin typeface="ui-sans-serif"/>
+              </a:rPr>
+              <a:t>Best for revealing distributed importance and negative contributions</a:t>
+            </a:r>
+          </a:p>
+          <a:p>
+            <a:pPr marL="571500" indent="-571500">
+              <a:spcAft>
+                <a:spcPts val="1200"/>
+              </a:spcAft>
+              <a:buFont typeface="Arial" panose="020B0604020202020204" pitchFamily="34" charset="0"/>
+              <a:buChar char="•"/>
+            </a:pPr>
+            <a:r>
+              <a:rPr lang="en-US" sz="4400" b="1" i="0" dirty="0" err="1">
+                <a:solidFill>
+                  <a:srgbClr val="0F0F0F"/>
+                </a:solidFill>
+                <a:effectLst/>
+                <a:latin typeface="ui-sans-serif"/>
+              </a:rPr>
+              <a:t>MolCE</a:t>
+            </a:r>
+            <a:r>
+              <a:rPr lang="en-US" sz="4400" i="0" dirty="0">
+                <a:solidFill>
+                  <a:srgbClr val="0F0F0F"/>
+                </a:solidFill>
+                <a:effectLst/>
+                <a:latin typeface="ui-sans-serif"/>
+              </a:rPr>
+              <a:t>: Best for identifying contrastive features (what distinguishes active from inactive)</a:t>
+            </a:r>
+          </a:p>
+          <a:p>
+            <a:pPr marL="571500" indent="-571500">
+              <a:spcAft>
+                <a:spcPts val="1200"/>
+              </a:spcAft>
+              <a:buFont typeface="Arial" panose="020B0604020202020204" pitchFamily="34" charset="0"/>
+              <a:buChar char="•"/>
+            </a:pPr>
+            <a:r>
+              <a:rPr lang="en-US" sz="4400" b="1" i="0" dirty="0">
+                <a:solidFill>
+                  <a:srgbClr val="0F0F0F"/>
+                </a:solidFill>
+                <a:effectLst/>
+                <a:latin typeface="ui-sans-serif"/>
+              </a:rPr>
+              <a:t>Counterfactuals: </a:t>
+            </a:r>
+            <a:r>
+              <a:rPr lang="en-US" sz="4400" i="0" dirty="0">
+                <a:solidFill>
+                  <a:srgbClr val="0F0F0F"/>
+                </a:solidFill>
+                <a:effectLst/>
+                <a:latin typeface="ui-sans-serif"/>
+              </a:rPr>
+              <a:t>Best for generating actionable structural modifications</a:t>
+            </a:r>
+          </a:p>
+          <a:p>
+            <a:pPr marL="742950" indent="-742950">
+              <a:spcAft>
+                <a:spcPts val="1200"/>
+              </a:spcAft>
+              <a:buFont typeface="+mj-lt"/>
+              <a:buAutoNum type="arabicPeriod" startAt="4"/>
+            </a:pPr>
+            <a:r>
+              <a:rPr lang="en-US" sz="4400" b="1" i="0" dirty="0">
+                <a:solidFill>
+                  <a:srgbClr val="0F0F0F"/>
+                </a:solidFill>
+                <a:effectLst/>
+                <a:latin typeface="ui-sans-serif"/>
+              </a:rPr>
+              <a:t>Limitation Insight: </a:t>
+            </a:r>
+            <a:r>
+              <a:rPr lang="en-US" sz="4400" i="0" dirty="0" err="1">
+                <a:solidFill>
+                  <a:srgbClr val="0F0F0F"/>
+                </a:solidFill>
+                <a:effectLst/>
+                <a:latin typeface="ui-sans-serif"/>
+              </a:rPr>
+              <a:t>MolAnchor's</a:t>
+            </a:r>
+            <a:r>
+              <a:rPr lang="en-US" sz="4400" i="0" dirty="0">
+                <a:solidFill>
+                  <a:srgbClr val="0F0F0F"/>
+                </a:solidFill>
+                <a:effectLst/>
+                <a:latin typeface="ui-sans-serif"/>
+              </a:rPr>
+              <a:t> single-anchor view may oversimplify; SHAP reveals the benzothiazole's positive contribution that </a:t>
+            </a:r>
+            <a:r>
+              <a:rPr lang="en-US" sz="4400" i="0" dirty="0" err="1">
+                <a:solidFill>
+                  <a:srgbClr val="0F0F0F"/>
+                </a:solidFill>
+                <a:effectLst/>
+                <a:latin typeface="ui-sans-serif"/>
+              </a:rPr>
+              <a:t>MolAnchor</a:t>
+            </a:r>
+            <a:r>
+              <a:rPr lang="en-US" sz="4400" i="0" dirty="0">
+                <a:solidFill>
+                  <a:srgbClr val="0F0F0F"/>
+                </a:solidFill>
+                <a:effectLst/>
+                <a:latin typeface="ui-sans-serif"/>
+              </a:rPr>
+              <a:t> misses. Counterfactuals show that the core scaffold alone is necessary but not sufficient—the N-substituent is the decisive factor.</a:t>
+            </a:r>
+          </a:p>
+          <a:p>
+            <a:pPr marL="228600" indent="-228600">
+              <a:buFont typeface="+mj-lt"/>
+              <a:buAutoNum type="arabicPeriod" startAt="4"/>
+            </a:pPr>
+            <a:endParaRPr lang="en-US" sz="4400" b="1" i="0" dirty="0">
+              <a:solidFill>
+                <a:srgbClr val="0F0F0F"/>
+              </a:solidFill>
+              <a:effectLst/>
+              <a:latin typeface="ui-sans-serif"/>
+            </a:endParaRPr>
+          </a:p>
+        </p:txBody>
+      </p:sp>
+      <p:sp>
+        <p:nvSpPr>
+          <p:cNvPr id="80" name="TextBox 79">
             <a:extLst>
               <a:ext uri="{FF2B5EF4-FFF2-40B4-BE49-F238E27FC236}">
-                <a16:creationId xmlns:a16="http://schemas.microsoft.com/office/drawing/2014/main" id="{FF828C6A-DA1B-1C2D-DF20-B453CD4FBA2B}"/>
+                <a16:creationId xmlns:a16="http://schemas.microsoft.com/office/drawing/2014/main" id="{4F75911C-6BD0-922D-B821-7CE96BED0CA3}"/>
               </a:ext>
             </a:extLst>
           </p:cNvPr>
-          <p:cNvPicPr>
-            <a:picLocks noChangeAspect="1"/>
-          </p:cNvPicPr>
+          <p:cNvSpPr txBox="1"/>
           <p:nvPr/>
-        </p:nvPicPr>
-        <p:blipFill>
-          <a:blip r:embed="rId11">
-            <a:extLst>
-              <a:ext uri="{28A0092B-C50C-407E-A947-70E740481C1C}">
-                <a14:useLocalDpi xmlns:a14="http://schemas.microsoft.com/office/drawing/2010/main" val="0"/>
-              </a:ext>
-            </a:extLst>
-          </a:blip>
-          <a:srcRect t="9899" r="60477" b="34643"/>
-          <a:stretch/>
-        </p:blipFill>
+        </p:nvSpPr>
         <p:spPr>
           <a:xfrm>
-            <a:off x="35692258" y="22170466"/>
-            <a:ext cx="11314115" cy="2910568"/>
+            <a:off x="16522078" y="42190355"/>
+            <a:ext cx="17157371" cy="923330"/>
           </a:xfrm>
           <a:prstGeom prst="rect">
             <a:avLst/>
           </a:prstGeom>
+          <a:noFill/>
         </p:spPr>
-      </p:pic>
+        <p:txBody>
+          <a:bodyPr wrap="square">
+            <a:spAutoFit/>
+          </a:bodyPr>
+          <a:lstStyle/>
+          <a:p>
+            <a:pPr algn="ctr"/>
+            <a:r>
+              <a:rPr lang="en-US" sz="5400" b="1" dirty="0">
+                <a:solidFill>
+                  <a:srgbClr val="0F0F0F"/>
+                </a:solidFill>
+                <a:latin typeface="ui-sans-serif"/>
+              </a:rPr>
+              <a:t>Key takeaways</a:t>
+            </a:r>
+            <a:endParaRPr lang="en-US" sz="5400" b="1" i="0" dirty="0">
+              <a:solidFill>
+                <a:srgbClr val="0F0F0F"/>
+              </a:solidFill>
+              <a:effectLst/>
+              <a:latin typeface="ui-sans-serif"/>
+            </a:endParaRPr>
+          </a:p>
+        </p:txBody>
+      </p:sp>
       <p:grpSp>
         <p:nvGrpSpPr>
-          <p:cNvPr id="67" name="Group 66">
+          <p:cNvPr id="7" name="Group 6">
             <a:extLst>
               <a:ext uri="{FF2B5EF4-FFF2-40B4-BE49-F238E27FC236}">
-                <a16:creationId xmlns:a16="http://schemas.microsoft.com/office/drawing/2014/main" id="{9CE13C4E-79CE-DA5C-2A96-845AEE2FBFDF}"/>
+                <a16:creationId xmlns:a16="http://schemas.microsoft.com/office/drawing/2014/main" id="{AE02D07E-FA83-46F7-FBED-29C7C8CFC31A}"/>
               </a:ext>
             </a:extLst>
           </p:cNvPr>
@@ -4091,18 +6203,67 @@
         </p:nvGrpSpPr>
         <p:grpSpPr>
           <a:xfrm>
-            <a:off x="25192736" y="25365208"/>
-            <a:ext cx="10567418" cy="1477328"/>
-            <a:chOff x="23529200" y="26300403"/>
-            <a:chExt cx="10567418" cy="1477328"/>
+            <a:off x="11490222" y="51440427"/>
+            <a:ext cx="27221082" cy="923330"/>
+            <a:chOff x="13161742" y="35331084"/>
+            <a:chExt cx="27221082" cy="923330"/>
           </a:xfrm>
         </p:grpSpPr>
         <p:sp>
           <p:nvSpPr>
-            <p:cNvPr id="58" name="TextBox 57">
+            <p:cNvPr id="81" name="Rectangle 80">
               <a:extLst>
                 <a:ext uri="{FF2B5EF4-FFF2-40B4-BE49-F238E27FC236}">
-                  <a16:creationId xmlns:a16="http://schemas.microsoft.com/office/drawing/2014/main" id="{8572CEAB-6935-A767-5441-EE39B0CFE9A6}"/>
+                  <a16:creationId xmlns:a16="http://schemas.microsoft.com/office/drawing/2014/main" id="{72807964-5BD9-B45A-64B0-2645DF88EB3B}"/>
+                </a:ext>
+              </a:extLst>
+            </p:cNvPr>
+            <p:cNvSpPr/>
+            <p:nvPr/>
+          </p:nvSpPr>
+          <p:spPr>
+            <a:xfrm>
+              <a:off x="13161742" y="35440946"/>
+              <a:ext cx="1646814" cy="703607"/>
+            </a:xfrm>
+            <a:prstGeom prst="rect">
+              <a:avLst/>
+            </a:prstGeom>
+            <a:solidFill>
+              <a:srgbClr val="A6CAEC"/>
+            </a:solidFill>
+          </p:spPr>
+          <p:style>
+            <a:lnRef idx="2">
+              <a:schemeClr val="accent1">
+                <a:shade val="15000"/>
+              </a:schemeClr>
+            </a:lnRef>
+            <a:fillRef idx="1">
+              <a:schemeClr val="accent1"/>
+            </a:fillRef>
+            <a:effectRef idx="0">
+              <a:schemeClr val="accent1"/>
+            </a:effectRef>
+            <a:fontRef idx="minor">
+              <a:schemeClr val="lt1"/>
+            </a:fontRef>
+          </p:style>
+          <p:txBody>
+            <a:bodyPr rtlCol="0" anchor="ctr"/>
+            <a:lstStyle/>
+            <a:p>
+              <a:pPr algn="ctr"/>
+              <a:endParaRPr lang="en-US"/>
+            </a:p>
+          </p:txBody>
+        </p:sp>
+        <p:sp>
+          <p:nvSpPr>
+            <p:cNvPr id="82" name="TextBox 81">
+              <a:extLst>
+                <a:ext uri="{FF2B5EF4-FFF2-40B4-BE49-F238E27FC236}">
+                  <a16:creationId xmlns:a16="http://schemas.microsoft.com/office/drawing/2014/main" id="{EACA069E-8CED-5E8A-69B1-E9F4FC24041A}"/>
                 </a:ext>
               </a:extLst>
             </p:cNvPr>
@@ -4111,8 +6272,8 @@
           </p:nvSpPr>
           <p:spPr>
             <a:xfrm>
-              <a:off x="23529200" y="26300403"/>
-              <a:ext cx="5414457" cy="1477328"/>
+              <a:off x="13960804" y="35331084"/>
+              <a:ext cx="6199523" cy="923330"/>
             </a:xfrm>
             <a:prstGeom prst="rect">
               <a:avLst/>
@@ -4127,49 +6288,65 @@
             <a:p>
               <a:pPr algn="ctr"/>
               <a:r>
-                <a:rPr lang="en-US" sz="3000" b="1" i="0" dirty="0">
-                  <a:solidFill>
-                    <a:srgbClr val="0F0F0F"/>
-                  </a:solidFill>
-                  <a:effectLst/>
-                  <a:latin typeface="ui-sans-serif"/>
-                </a:rPr>
-                <a:t>Rank 1</a:t>
+                <a:rPr lang="en-US" sz="5400" dirty="0"/>
+                <a:t>User prompt</a:t>
               </a:r>
-            </a:p>
-            <a:p>
-              <a:pPr algn="ctr"/>
-              <a:r>
-                <a:rPr lang="en-US" sz="3000" b="1" dirty="0">
-                  <a:solidFill>
-                    <a:srgbClr val="0F0F0F"/>
-                  </a:solidFill>
-                  <a:latin typeface="ui-sans-serif"/>
-                </a:rPr>
-                <a:t>Anchor occurrence: 0.26</a:t>
-              </a:r>
-            </a:p>
-            <a:p>
-              <a:pPr algn="ctr"/>
-              <a:r>
-                <a:rPr lang="en-US" sz="3000" b="1" dirty="0">
-                  <a:solidFill>
-                    <a:srgbClr val="0F0F0F"/>
-                  </a:solidFill>
-                  <a:latin typeface="ui-sans-serif"/>
-                </a:rPr>
-                <a:t>Substructure occurrence: 0.26</a:t>
-              </a:r>
-              <a:endParaRPr lang="en-US" sz="3000" dirty="0"/>
             </a:p>
           </p:txBody>
         </p:sp>
         <p:sp>
           <p:nvSpPr>
-            <p:cNvPr id="60" name="TextBox 59">
+            <p:cNvPr id="83" name="Rectangle 82">
               <a:extLst>
                 <a:ext uri="{FF2B5EF4-FFF2-40B4-BE49-F238E27FC236}">
-                  <a16:creationId xmlns:a16="http://schemas.microsoft.com/office/drawing/2014/main" id="{CB3D1D01-6B66-4EBF-BA63-15E4A614E261}"/>
+                  <a16:creationId xmlns:a16="http://schemas.microsoft.com/office/drawing/2014/main" id="{083E7B6A-0D88-EE7A-862D-CD52DE210854}"/>
+                </a:ext>
+              </a:extLst>
+            </p:cNvPr>
+            <p:cNvSpPr/>
+            <p:nvPr/>
+          </p:nvSpPr>
+          <p:spPr>
+            <a:xfrm>
+              <a:off x="25749158" y="35440946"/>
+              <a:ext cx="1646814" cy="703607"/>
+            </a:xfrm>
+            <a:prstGeom prst="rect">
+              <a:avLst/>
+            </a:prstGeom>
+            <a:noFill/>
+          </p:spPr>
+          <p:style>
+            <a:lnRef idx="2">
+              <a:schemeClr val="accent1">
+                <a:shade val="15000"/>
+              </a:schemeClr>
+            </a:lnRef>
+            <a:fillRef idx="1">
+              <a:schemeClr val="accent1"/>
+            </a:fillRef>
+            <a:effectRef idx="0">
+              <a:schemeClr val="accent1"/>
+            </a:effectRef>
+            <a:fontRef idx="minor">
+              <a:schemeClr val="lt1"/>
+            </a:fontRef>
+          </p:style>
+          <p:txBody>
+            <a:bodyPr rtlCol="0" anchor="ctr"/>
+            <a:lstStyle/>
+            <a:p>
+              <a:pPr algn="ctr"/>
+              <a:endParaRPr lang="en-US"/>
+            </a:p>
+          </p:txBody>
+        </p:sp>
+        <p:sp>
+          <p:nvSpPr>
+            <p:cNvPr id="84" name="TextBox 83">
+              <a:extLst>
+                <a:ext uri="{FF2B5EF4-FFF2-40B4-BE49-F238E27FC236}">
+                  <a16:creationId xmlns:a16="http://schemas.microsoft.com/office/drawing/2014/main" id="{358AE044-1305-34FC-BBC0-450EF8C6264C}"/>
                 </a:ext>
               </a:extLst>
             </p:cNvPr>
@@ -4178,8 +6355,8 @@
           </p:nvSpPr>
           <p:spPr>
             <a:xfrm>
-              <a:off x="28643452" y="26300403"/>
-              <a:ext cx="5453166" cy="1477328"/>
+              <a:off x="26376770" y="35331084"/>
+              <a:ext cx="8218539" cy="923330"/>
             </a:xfrm>
             <a:prstGeom prst="rect">
               <a:avLst/>
@@ -4194,70 +6371,67 @@
             <a:p>
               <a:pPr algn="ctr"/>
               <a:r>
-                <a:rPr lang="en-US" sz="3000" b="1" i="0" dirty="0">
-                  <a:solidFill>
-                    <a:srgbClr val="0F0F0F"/>
-                  </a:solidFill>
-                  <a:effectLst/>
-                  <a:latin typeface="ui-sans-serif"/>
-                </a:rPr>
-                <a:t>Rank 2</a:t>
+                <a:rPr lang="en-US" sz="5400" dirty="0"/>
+                <a:t>Response &amp; output</a:t>
               </a:r>
-            </a:p>
-            <a:p>
-              <a:pPr algn="ctr"/>
-              <a:r>
-                <a:rPr lang="en-US" sz="3000" b="1" dirty="0">
-                  <a:solidFill>
-                    <a:srgbClr val="0F0F0F"/>
-                  </a:solidFill>
-                  <a:latin typeface="ui-sans-serif"/>
-                </a:rPr>
-                <a:t>Anchor occurrence: 0.25</a:t>
-              </a:r>
-            </a:p>
-            <a:p>
-              <a:pPr algn="ctr"/>
-              <a:r>
-                <a:rPr lang="en-US" sz="3000" b="1" dirty="0">
-                  <a:solidFill>
-                    <a:srgbClr val="0F0F0F"/>
-                  </a:solidFill>
-                  <a:latin typeface="ui-sans-serif"/>
-                </a:rPr>
-                <a:t>Substructure occurrence: 0.25</a:t>
-              </a:r>
-              <a:endParaRPr lang="en-US" sz="3000" dirty="0"/>
             </a:p>
           </p:txBody>
         </p:sp>
-      </p:grpSp>
-      <p:grpSp>
-        <p:nvGrpSpPr>
-          <p:cNvPr id="70" name="Group 69">
-            <a:extLst>
-              <a:ext uri="{FF2B5EF4-FFF2-40B4-BE49-F238E27FC236}">
-                <a16:creationId xmlns:a16="http://schemas.microsoft.com/office/drawing/2014/main" id="{821A5C7F-5F5F-A4FE-1C50-2D26291CDC2B}"/>
-              </a:ext>
-            </a:extLst>
-          </p:cNvPr>
-          <p:cNvGrpSpPr/>
-          <p:nvPr/>
-        </p:nvGrpSpPr>
-        <p:grpSpPr>
-          <a:xfrm>
-            <a:off x="35937642" y="25365208"/>
-            <a:ext cx="10823347" cy="1477328"/>
-            <a:chOff x="34281406" y="25702526"/>
-            <a:chExt cx="10823347" cy="1477328"/>
-          </a:xfrm>
-        </p:grpSpPr>
         <p:sp>
           <p:nvSpPr>
-            <p:cNvPr id="61" name="TextBox 60">
+            <p:cNvPr id="86" name="Rectangle 85">
               <a:extLst>
                 <a:ext uri="{FF2B5EF4-FFF2-40B4-BE49-F238E27FC236}">
-                  <a16:creationId xmlns:a16="http://schemas.microsoft.com/office/drawing/2014/main" id="{A7D21A72-9214-4047-1740-F895FF59E1E6}"/>
+                  <a16:creationId xmlns:a16="http://schemas.microsoft.com/office/drawing/2014/main" id="{350C722C-59C7-EC1B-EC99-E1777E1494CE}"/>
+                </a:ext>
+              </a:extLst>
+            </p:cNvPr>
+            <p:cNvSpPr/>
+            <p:nvPr/>
+          </p:nvSpPr>
+          <p:spPr>
+            <a:xfrm>
+              <a:off x="34204757" y="35440946"/>
+              <a:ext cx="1646814" cy="703607"/>
+            </a:xfrm>
+            <a:prstGeom prst="rect">
+              <a:avLst/>
+            </a:prstGeom>
+            <a:solidFill>
+              <a:srgbClr val="B4E5A2"/>
+            </a:solidFill>
+          </p:spPr>
+          <p:style>
+            <a:lnRef idx="2">
+              <a:schemeClr val="accent1">
+                <a:shade val="15000"/>
+              </a:schemeClr>
+            </a:lnRef>
+            <a:fillRef idx="1">
+              <a:schemeClr val="accent1"/>
+            </a:fillRef>
+            <a:effectRef idx="0">
+              <a:schemeClr val="accent1"/>
+            </a:effectRef>
+            <a:fontRef idx="minor">
+              <a:schemeClr val="lt1"/>
+            </a:fontRef>
+          </p:style>
+          <p:txBody>
+            <a:bodyPr rtlCol="0" anchor="ctr"/>
+            <a:lstStyle/>
+            <a:p>
+              <a:pPr algn="ctr"/>
+              <a:endParaRPr lang="en-US"/>
+            </a:p>
+          </p:txBody>
+        </p:sp>
+        <p:sp>
+          <p:nvSpPr>
+            <p:cNvPr id="87" name="TextBox 86">
+              <a:extLst>
+                <a:ext uri="{FF2B5EF4-FFF2-40B4-BE49-F238E27FC236}">
+                  <a16:creationId xmlns:a16="http://schemas.microsoft.com/office/drawing/2014/main" id="{24FCF701-8B21-25B2-2AE4-BF962FF75654}"/>
                 </a:ext>
               </a:extLst>
             </p:cNvPr>
@@ -4266,8 +6440,8 @@
           </p:nvSpPr>
           <p:spPr>
             <a:xfrm>
-              <a:off x="34281406" y="25702526"/>
-              <a:ext cx="5323362" cy="1477328"/>
+              <a:off x="35326982" y="35331084"/>
+              <a:ext cx="5055842" cy="923330"/>
             </a:xfrm>
             <a:prstGeom prst="rect">
               <a:avLst/>
@@ -4282,49 +6456,71 @@
             <a:p>
               <a:pPr algn="ctr"/>
               <a:r>
-                <a:rPr lang="en-US" sz="3000" b="1" i="0" dirty="0">
-                  <a:solidFill>
-                    <a:srgbClr val="0F0F0F"/>
-                  </a:solidFill>
-                  <a:effectLst/>
-                  <a:latin typeface="ui-sans-serif"/>
-                </a:rPr>
-                <a:t>Rank 1</a:t>
+                <a:rPr lang="en-US" sz="5400" dirty="0"/>
+                <a:t>Discussion</a:t>
               </a:r>
-            </a:p>
-            <a:p>
-              <a:pPr algn="ctr"/>
-              <a:r>
-                <a:rPr lang="en-US" sz="3000" b="1" dirty="0">
-                  <a:solidFill>
-                    <a:srgbClr val="0F0F0F"/>
-                  </a:solidFill>
-                  <a:latin typeface="ui-sans-serif"/>
-                </a:rPr>
-                <a:t>Anchor occurrence: 0.36</a:t>
-              </a:r>
-            </a:p>
-            <a:p>
-              <a:pPr algn="ctr"/>
-              <a:r>
-                <a:rPr lang="en-US" sz="3000" b="1" dirty="0">
-                  <a:solidFill>
-                    <a:srgbClr val="0F0F0F"/>
-                  </a:solidFill>
-                  <a:latin typeface="ui-sans-serif"/>
-                </a:rPr>
-                <a:t>Substructure occurrence: 0.82</a:t>
-              </a:r>
-              <a:endParaRPr lang="en-US" sz="3000" dirty="0"/>
             </a:p>
           </p:txBody>
         </p:sp>
         <p:sp>
           <p:nvSpPr>
-            <p:cNvPr id="62" name="TextBox 61">
+            <p:cNvPr id="5" name="Rectangle 4">
               <a:extLst>
                 <a:ext uri="{FF2B5EF4-FFF2-40B4-BE49-F238E27FC236}">
-                  <a16:creationId xmlns:a16="http://schemas.microsoft.com/office/drawing/2014/main" id="{9062DABE-6143-0CF6-47EE-82DED9712869}"/>
+                  <a16:creationId xmlns:a16="http://schemas.microsoft.com/office/drawing/2014/main" id="{A2B5BA64-5C49-72B3-4807-202BB7511121}"/>
+                </a:ext>
+              </a:extLst>
+            </p:cNvPr>
+            <p:cNvSpPr/>
+            <p:nvPr/>
+          </p:nvSpPr>
+          <p:spPr>
+            <a:xfrm>
+              <a:off x="19941225" y="35440946"/>
+              <a:ext cx="1646814" cy="703607"/>
+            </a:xfrm>
+            <a:prstGeom prst="rect">
+              <a:avLst/>
+            </a:prstGeom>
+            <a:solidFill>
+              <a:srgbClr val="D9D9D9"/>
+            </a:solidFill>
+          </p:spPr>
+          <p:style>
+            <a:lnRef idx="2">
+              <a:schemeClr val="accent1">
+                <a:shade val="15000"/>
+              </a:schemeClr>
+            </a:lnRef>
+            <a:fillRef idx="1">
+              <a:schemeClr val="accent1"/>
+            </a:fillRef>
+            <a:effectRef idx="0">
+              <a:schemeClr val="accent1"/>
+            </a:effectRef>
+            <a:fontRef idx="minor">
+              <a:schemeClr val="lt1"/>
+            </a:fontRef>
+          </p:style>
+          <p:txBody>
+            <a:bodyPr rtlCol="0" anchor="ctr"/>
+            <a:lstStyle/>
+            <a:p>
+              <a:pPr algn="ctr"/>
+              <a:endParaRPr lang="en-US">
+                <a:solidFill>
+                  <a:srgbClr val="FFFFFF"/>
+                </a:solidFill>
+              </a:endParaRPr>
+            </a:p>
+          </p:txBody>
+        </p:sp>
+        <p:sp>
+          <p:nvSpPr>
+            <p:cNvPr id="6" name="TextBox 5">
+              <a:extLst>
+                <a:ext uri="{FF2B5EF4-FFF2-40B4-BE49-F238E27FC236}">
+                  <a16:creationId xmlns:a16="http://schemas.microsoft.com/office/drawing/2014/main" id="{0B838B24-BA64-D5F2-D98D-5C4BC2C2CAD6}"/>
                 </a:ext>
               </a:extLst>
             </p:cNvPr>
@@ -4333,8 +6529,8 @@
           </p:nvSpPr>
           <p:spPr>
             <a:xfrm>
-              <a:off x="39787986" y="25702526"/>
-              <a:ext cx="5316767" cy="1477328"/>
+              <a:off x="20283087" y="35331084"/>
+              <a:ext cx="6199523" cy="923330"/>
             </a:xfrm>
             <a:prstGeom prst="rect">
               <a:avLst/>
@@ -4349,44 +6545,1090 @@
             <a:p>
               <a:pPr algn="ctr"/>
               <a:r>
-                <a:rPr lang="en-US" sz="3000" b="1" i="0" dirty="0">
-                  <a:solidFill>
-                    <a:srgbClr val="0F0F0F"/>
-                  </a:solidFill>
-                  <a:effectLst/>
-                  <a:latin typeface="ui-sans-serif"/>
-                </a:rPr>
-                <a:t>Rank 2</a:t>
+                <a:rPr lang="en-US" sz="5400" dirty="0"/>
+                <a:t>Tool calls</a:t>
               </a:r>
-            </a:p>
-            <a:p>
-              <a:pPr algn="ctr"/>
-              <a:r>
-                <a:rPr lang="en-US" sz="3000" b="1" dirty="0">
-                  <a:solidFill>
-                    <a:srgbClr val="0F0F0F"/>
-                  </a:solidFill>
-                  <a:latin typeface="ui-sans-serif"/>
-                </a:rPr>
-                <a:t>Anchor occurrence: 0.18</a:t>
-              </a:r>
-            </a:p>
-            <a:p>
-              <a:pPr algn="ctr"/>
-              <a:r>
-                <a:rPr lang="en-US" sz="3000" b="1" dirty="0">
-                  <a:solidFill>
-                    <a:srgbClr val="0F0F0F"/>
-                  </a:solidFill>
-                  <a:latin typeface="ui-sans-serif"/>
-                </a:rPr>
-                <a:t>Substructure occurrence: 0.36</a:t>
-              </a:r>
-              <a:endParaRPr lang="en-US" sz="3000" dirty="0"/>
             </a:p>
           </p:txBody>
         </p:sp>
       </p:grpSp>
+      <p:grpSp>
+        <p:nvGrpSpPr>
+          <p:cNvPr id="103" name="Group 102">
+            <a:extLst>
+              <a:ext uri="{FF2B5EF4-FFF2-40B4-BE49-F238E27FC236}">
+                <a16:creationId xmlns:a16="http://schemas.microsoft.com/office/drawing/2014/main" id="{686AEDAD-7926-E065-5CEF-0258F653ADAC}"/>
+              </a:ext>
+            </a:extLst>
+          </p:cNvPr>
+          <p:cNvGrpSpPr/>
+          <p:nvPr/>
+        </p:nvGrpSpPr>
+        <p:grpSpPr>
+          <a:xfrm>
+            <a:off x="7138763" y="7498381"/>
+            <a:ext cx="35924001" cy="4270163"/>
+            <a:chOff x="6759986" y="11876103"/>
+            <a:chExt cx="35924001" cy="4270163"/>
+          </a:xfrm>
+        </p:grpSpPr>
+        <p:sp>
+          <p:nvSpPr>
+            <p:cNvPr id="3" name="Rectangle: Rounded Corners 2">
+              <a:extLst>
+                <a:ext uri="{FF2B5EF4-FFF2-40B4-BE49-F238E27FC236}">
+                  <a16:creationId xmlns:a16="http://schemas.microsoft.com/office/drawing/2014/main" id="{465AE2D3-52C5-2D04-D846-EC865A9F4DC7}"/>
+                </a:ext>
+              </a:extLst>
+            </p:cNvPr>
+            <p:cNvSpPr/>
+            <p:nvPr/>
+          </p:nvSpPr>
+          <p:spPr>
+            <a:xfrm>
+              <a:off x="6759986" y="12124268"/>
+              <a:ext cx="6499225" cy="1338439"/>
+            </a:xfrm>
+            <a:prstGeom prst="roundRect">
+              <a:avLst/>
+            </a:prstGeom>
+            <a:solidFill>
+              <a:schemeClr val="bg1">
+                <a:lumMod val="65000"/>
+              </a:schemeClr>
+            </a:solidFill>
+          </p:spPr>
+          <p:style>
+            <a:lnRef idx="2">
+              <a:schemeClr val="accent1">
+                <a:shade val="15000"/>
+              </a:schemeClr>
+            </a:lnRef>
+            <a:fillRef idx="1">
+              <a:schemeClr val="accent1"/>
+            </a:fillRef>
+            <a:effectRef idx="0">
+              <a:schemeClr val="accent1"/>
+            </a:effectRef>
+            <a:fontRef idx="minor">
+              <a:schemeClr val="lt1"/>
+            </a:fontRef>
+          </p:style>
+          <p:txBody>
+            <a:bodyPr rtlCol="0" anchor="ctr"/>
+            <a:lstStyle/>
+            <a:p>
+              <a:pPr algn="ctr"/>
+              <a:r>
+                <a:rPr lang="en-US" sz="6000" dirty="0">
+                  <a:solidFill>
+                    <a:schemeClr val="tx1"/>
+                  </a:solidFill>
+                </a:rPr>
+                <a:t>Find dataset</a:t>
+              </a:r>
+            </a:p>
+          </p:txBody>
+        </p:sp>
+        <p:sp>
+          <p:nvSpPr>
+            <p:cNvPr id="4" name="Rectangle: Rounded Corners 3">
+              <a:extLst>
+                <a:ext uri="{FF2B5EF4-FFF2-40B4-BE49-F238E27FC236}">
+                  <a16:creationId xmlns:a16="http://schemas.microsoft.com/office/drawing/2014/main" id="{6DB85F9D-5273-DCFF-C989-7562C2561479}"/>
+                </a:ext>
+              </a:extLst>
+            </p:cNvPr>
+            <p:cNvSpPr/>
+            <p:nvPr/>
+          </p:nvSpPr>
+          <p:spPr>
+            <a:xfrm>
+              <a:off x="6759986" y="14558075"/>
+              <a:ext cx="6499225" cy="1338439"/>
+            </a:xfrm>
+            <a:prstGeom prst="roundRect">
+              <a:avLst/>
+            </a:prstGeom>
+            <a:solidFill>
+              <a:schemeClr val="bg1">
+                <a:lumMod val="65000"/>
+              </a:schemeClr>
+            </a:solidFill>
+          </p:spPr>
+          <p:style>
+            <a:lnRef idx="2">
+              <a:schemeClr val="accent1">
+                <a:shade val="15000"/>
+              </a:schemeClr>
+            </a:lnRef>
+            <a:fillRef idx="1">
+              <a:schemeClr val="accent1"/>
+            </a:fillRef>
+            <a:effectRef idx="0">
+              <a:schemeClr val="accent1"/>
+            </a:effectRef>
+            <a:fontRef idx="minor">
+              <a:schemeClr val="lt1"/>
+            </a:fontRef>
+          </p:style>
+          <p:txBody>
+            <a:bodyPr rtlCol="0" anchor="ctr"/>
+            <a:lstStyle/>
+            <a:p>
+              <a:pPr algn="ctr"/>
+              <a:r>
+                <a:rPr lang="en-US" sz="6000" dirty="0">
+                  <a:solidFill>
+                    <a:schemeClr val="tx1"/>
+                  </a:solidFill>
+                </a:rPr>
+                <a:t>Load dataset</a:t>
+              </a:r>
+            </a:p>
+          </p:txBody>
+        </p:sp>
+        <p:sp>
+          <p:nvSpPr>
+            <p:cNvPr id="8" name="Rectangle: Rounded Corners 7">
+              <a:extLst>
+                <a:ext uri="{FF2B5EF4-FFF2-40B4-BE49-F238E27FC236}">
+                  <a16:creationId xmlns:a16="http://schemas.microsoft.com/office/drawing/2014/main" id="{872B3574-1A6E-95E9-EEA3-C496E1B2F4CE}"/>
+                </a:ext>
+              </a:extLst>
+            </p:cNvPr>
+            <p:cNvSpPr/>
+            <p:nvPr/>
+          </p:nvSpPr>
+          <p:spPr>
+            <a:xfrm>
+              <a:off x="14116180" y="14558075"/>
+              <a:ext cx="6499225" cy="1338439"/>
+            </a:xfrm>
+            <a:prstGeom prst="roundRect">
+              <a:avLst/>
+            </a:prstGeom>
+            <a:solidFill>
+              <a:schemeClr val="bg1">
+                <a:lumMod val="65000"/>
+              </a:schemeClr>
+            </a:solidFill>
+          </p:spPr>
+          <p:style>
+            <a:lnRef idx="2">
+              <a:schemeClr val="accent1">
+                <a:shade val="15000"/>
+              </a:schemeClr>
+            </a:lnRef>
+            <a:fillRef idx="1">
+              <a:schemeClr val="accent1"/>
+            </a:fillRef>
+            <a:effectRef idx="0">
+              <a:schemeClr val="accent1"/>
+            </a:effectRef>
+            <a:fontRef idx="minor">
+              <a:schemeClr val="lt1"/>
+            </a:fontRef>
+          </p:style>
+          <p:txBody>
+            <a:bodyPr rtlCol="0" anchor="ctr"/>
+            <a:lstStyle/>
+            <a:p>
+              <a:pPr algn="ctr"/>
+              <a:r>
+                <a:rPr lang="en-US" sz="6000" dirty="0">
+                  <a:solidFill>
+                    <a:schemeClr val="tx1"/>
+                  </a:solidFill>
+                </a:rPr>
+                <a:t>Compute features</a:t>
+              </a:r>
+            </a:p>
+          </p:txBody>
+        </p:sp>
+        <p:sp>
+          <p:nvSpPr>
+            <p:cNvPr id="9" name="Rectangle: Rounded Corners 8">
+              <a:extLst>
+                <a:ext uri="{FF2B5EF4-FFF2-40B4-BE49-F238E27FC236}">
+                  <a16:creationId xmlns:a16="http://schemas.microsoft.com/office/drawing/2014/main" id="{AB67E2D9-9E9D-F863-4BAE-D1ACB7A59896}"/>
+                </a:ext>
+              </a:extLst>
+            </p:cNvPr>
+            <p:cNvSpPr/>
+            <p:nvPr/>
+          </p:nvSpPr>
+          <p:spPr>
+            <a:xfrm>
+              <a:off x="14116180" y="12124268"/>
+              <a:ext cx="6499225" cy="1338439"/>
+            </a:xfrm>
+            <a:prstGeom prst="roundRect">
+              <a:avLst/>
+            </a:prstGeom>
+            <a:solidFill>
+              <a:schemeClr val="bg1">
+                <a:lumMod val="65000"/>
+              </a:schemeClr>
+            </a:solidFill>
+          </p:spPr>
+          <p:style>
+            <a:lnRef idx="2">
+              <a:schemeClr val="accent1">
+                <a:shade val="15000"/>
+              </a:schemeClr>
+            </a:lnRef>
+            <a:fillRef idx="1">
+              <a:schemeClr val="accent1"/>
+            </a:fillRef>
+            <a:effectRef idx="0">
+              <a:schemeClr val="accent1"/>
+            </a:effectRef>
+            <a:fontRef idx="minor">
+              <a:schemeClr val="lt1"/>
+            </a:fontRef>
+          </p:style>
+          <p:txBody>
+            <a:bodyPr rtlCol="0" anchor="ctr"/>
+            <a:lstStyle/>
+            <a:p>
+              <a:pPr algn="ctr"/>
+              <a:r>
+                <a:rPr lang="en-US" sz="6000" dirty="0">
+                  <a:solidFill>
+                    <a:schemeClr val="tx1"/>
+                  </a:solidFill>
+                </a:rPr>
+                <a:t>Split dataset</a:t>
+              </a:r>
+            </a:p>
+          </p:txBody>
+        </p:sp>
+        <p:sp>
+          <p:nvSpPr>
+            <p:cNvPr id="10" name="Rectangle: Rounded Corners 9">
+              <a:extLst>
+                <a:ext uri="{FF2B5EF4-FFF2-40B4-BE49-F238E27FC236}">
+                  <a16:creationId xmlns:a16="http://schemas.microsoft.com/office/drawing/2014/main" id="{1344948B-9127-5D85-04AF-9E27623C51DB}"/>
+                </a:ext>
+              </a:extLst>
+            </p:cNvPr>
+            <p:cNvSpPr/>
+            <p:nvPr/>
+          </p:nvSpPr>
+          <p:spPr>
+            <a:xfrm>
+              <a:off x="21472374" y="12124268"/>
+              <a:ext cx="6499225" cy="1338439"/>
+            </a:xfrm>
+            <a:prstGeom prst="roundRect">
+              <a:avLst/>
+            </a:prstGeom>
+            <a:solidFill>
+              <a:schemeClr val="bg1">
+                <a:lumMod val="65000"/>
+              </a:schemeClr>
+            </a:solidFill>
+          </p:spPr>
+          <p:style>
+            <a:lnRef idx="2">
+              <a:schemeClr val="accent1">
+                <a:shade val="15000"/>
+              </a:schemeClr>
+            </a:lnRef>
+            <a:fillRef idx="1">
+              <a:schemeClr val="accent1"/>
+            </a:fillRef>
+            <a:effectRef idx="0">
+              <a:schemeClr val="accent1"/>
+            </a:effectRef>
+            <a:fontRef idx="minor">
+              <a:schemeClr val="lt1"/>
+            </a:fontRef>
+          </p:style>
+          <p:txBody>
+            <a:bodyPr rtlCol="0" anchor="ctr"/>
+            <a:lstStyle/>
+            <a:p>
+              <a:pPr algn="ctr"/>
+              <a:r>
+                <a:rPr lang="en-US" sz="6000" dirty="0">
+                  <a:solidFill>
+                    <a:schemeClr val="tx1"/>
+                  </a:solidFill>
+                </a:rPr>
+                <a:t>Train model</a:t>
+              </a:r>
+            </a:p>
+          </p:txBody>
+        </p:sp>
+        <p:sp>
+          <p:nvSpPr>
+            <p:cNvPr id="12" name="Rectangle: Rounded Corners 11">
+              <a:extLst>
+                <a:ext uri="{FF2B5EF4-FFF2-40B4-BE49-F238E27FC236}">
+                  <a16:creationId xmlns:a16="http://schemas.microsoft.com/office/drawing/2014/main" id="{9B31298B-CDEF-CDC2-2977-DCA4EAA13569}"/>
+                </a:ext>
+              </a:extLst>
+            </p:cNvPr>
+            <p:cNvSpPr/>
+            <p:nvPr/>
+          </p:nvSpPr>
+          <p:spPr>
+            <a:xfrm>
+              <a:off x="21472374" y="14309910"/>
+              <a:ext cx="6499225" cy="1834769"/>
+            </a:xfrm>
+            <a:prstGeom prst="roundRect">
+              <a:avLst/>
+            </a:prstGeom>
+            <a:solidFill>
+              <a:schemeClr val="bg1">
+                <a:lumMod val="65000"/>
+              </a:schemeClr>
+            </a:solidFill>
+          </p:spPr>
+          <p:style>
+            <a:lnRef idx="2">
+              <a:schemeClr val="accent1">
+                <a:shade val="15000"/>
+              </a:schemeClr>
+            </a:lnRef>
+            <a:fillRef idx="1">
+              <a:schemeClr val="accent1"/>
+            </a:fillRef>
+            <a:effectRef idx="0">
+              <a:schemeClr val="accent1"/>
+            </a:effectRef>
+            <a:fontRef idx="minor">
+              <a:schemeClr val="lt1"/>
+            </a:fontRef>
+          </p:style>
+          <p:txBody>
+            <a:bodyPr rtlCol="0" anchor="ctr"/>
+            <a:lstStyle/>
+            <a:p>
+              <a:pPr algn="ctr"/>
+              <a:r>
+                <a:rPr lang="en-US" sz="6000" dirty="0">
+                  <a:solidFill>
+                    <a:schemeClr val="tx1"/>
+                  </a:solidFill>
+                </a:rPr>
+                <a:t>Explain with </a:t>
+              </a:r>
+              <a:r>
+                <a:rPr lang="en-US" sz="6000" dirty="0" err="1">
+                  <a:solidFill>
+                    <a:schemeClr val="tx1"/>
+                  </a:solidFill>
+                </a:rPr>
+                <a:t>molanchor</a:t>
+              </a:r>
+              <a:endParaRPr lang="en-US" sz="6000" dirty="0">
+                <a:solidFill>
+                  <a:schemeClr val="tx1"/>
+                </a:solidFill>
+              </a:endParaRPr>
+            </a:p>
+          </p:txBody>
+        </p:sp>
+        <p:sp>
+          <p:nvSpPr>
+            <p:cNvPr id="13" name="Rectangle: Rounded Corners 12">
+              <a:extLst>
+                <a:ext uri="{FF2B5EF4-FFF2-40B4-BE49-F238E27FC236}">
+                  <a16:creationId xmlns:a16="http://schemas.microsoft.com/office/drawing/2014/main" id="{A2D69792-6240-2A88-CEB7-39F07C646BE7}"/>
+                </a:ext>
+              </a:extLst>
+            </p:cNvPr>
+            <p:cNvSpPr/>
+            <p:nvPr/>
+          </p:nvSpPr>
+          <p:spPr>
+            <a:xfrm>
+              <a:off x="28828568" y="14308322"/>
+              <a:ext cx="6499225" cy="1837944"/>
+            </a:xfrm>
+            <a:prstGeom prst="roundRect">
+              <a:avLst/>
+            </a:prstGeom>
+            <a:solidFill>
+              <a:schemeClr val="bg1">
+                <a:lumMod val="65000"/>
+              </a:schemeClr>
+            </a:solidFill>
+          </p:spPr>
+          <p:style>
+            <a:lnRef idx="2">
+              <a:schemeClr val="accent1">
+                <a:shade val="15000"/>
+              </a:schemeClr>
+            </a:lnRef>
+            <a:fillRef idx="1">
+              <a:schemeClr val="accent1"/>
+            </a:fillRef>
+            <a:effectRef idx="0">
+              <a:schemeClr val="accent1"/>
+            </a:effectRef>
+            <a:fontRef idx="minor">
+              <a:schemeClr val="lt1"/>
+            </a:fontRef>
+          </p:style>
+          <p:txBody>
+            <a:bodyPr rtlCol="0" anchor="ctr"/>
+            <a:lstStyle/>
+            <a:p>
+              <a:pPr algn="ctr"/>
+              <a:r>
+                <a:rPr lang="en-US" sz="6000" dirty="0">
+                  <a:solidFill>
+                    <a:schemeClr val="tx1"/>
+                  </a:solidFill>
+                </a:rPr>
+                <a:t>Explain smiles with SHAP</a:t>
+              </a:r>
+            </a:p>
+          </p:txBody>
+        </p:sp>
+        <p:cxnSp>
+          <p:nvCxnSpPr>
+            <p:cNvPr id="16" name="Straight Arrow Connector 15">
+              <a:extLst>
+                <a:ext uri="{FF2B5EF4-FFF2-40B4-BE49-F238E27FC236}">
+                  <a16:creationId xmlns:a16="http://schemas.microsoft.com/office/drawing/2014/main" id="{0EB09105-A603-3792-FA56-C202D530844E}"/>
+                </a:ext>
+              </a:extLst>
+            </p:cNvPr>
+            <p:cNvCxnSpPr>
+              <a:cxnSpLocks/>
+              <a:stCxn id="3" idx="2"/>
+              <a:endCxn id="4" idx="0"/>
+            </p:cNvCxnSpPr>
+            <p:nvPr/>
+          </p:nvCxnSpPr>
+          <p:spPr>
+            <a:xfrm>
+              <a:off x="10009599" y="13462707"/>
+              <a:ext cx="0" cy="1095368"/>
+            </a:xfrm>
+            <a:prstGeom prst="straightConnector1">
+              <a:avLst/>
+            </a:prstGeom>
+            <a:ln w="76200">
+              <a:solidFill>
+                <a:schemeClr val="tx1"/>
+              </a:solidFill>
+              <a:tailEnd type="triangle"/>
+            </a:ln>
+          </p:spPr>
+          <p:style>
+            <a:lnRef idx="2">
+              <a:schemeClr val="dk1"/>
+            </a:lnRef>
+            <a:fillRef idx="0">
+              <a:schemeClr val="dk1"/>
+            </a:fillRef>
+            <a:effectRef idx="1">
+              <a:schemeClr val="dk1"/>
+            </a:effectRef>
+            <a:fontRef idx="minor">
+              <a:schemeClr val="tx1"/>
+            </a:fontRef>
+          </p:style>
+        </p:cxnSp>
+        <p:cxnSp>
+          <p:nvCxnSpPr>
+            <p:cNvPr id="18" name="Straight Arrow Connector 17">
+              <a:extLst>
+                <a:ext uri="{FF2B5EF4-FFF2-40B4-BE49-F238E27FC236}">
+                  <a16:creationId xmlns:a16="http://schemas.microsoft.com/office/drawing/2014/main" id="{826109EB-84B7-25A1-4C4D-5E40E7C05280}"/>
+                </a:ext>
+              </a:extLst>
+            </p:cNvPr>
+            <p:cNvCxnSpPr>
+              <a:cxnSpLocks/>
+              <a:stCxn id="4" idx="3"/>
+              <a:endCxn id="8" idx="1"/>
+            </p:cNvCxnSpPr>
+            <p:nvPr/>
+          </p:nvCxnSpPr>
+          <p:spPr>
+            <a:xfrm>
+              <a:off x="13259211" y="15227295"/>
+              <a:ext cx="856969" cy="0"/>
+            </a:xfrm>
+            <a:prstGeom prst="straightConnector1">
+              <a:avLst/>
+            </a:prstGeom>
+            <a:ln w="76200">
+              <a:solidFill>
+                <a:schemeClr val="tx1"/>
+              </a:solidFill>
+              <a:tailEnd type="triangle"/>
+            </a:ln>
+          </p:spPr>
+          <p:style>
+            <a:lnRef idx="2">
+              <a:schemeClr val="dk1"/>
+            </a:lnRef>
+            <a:fillRef idx="0">
+              <a:schemeClr val="dk1"/>
+            </a:fillRef>
+            <a:effectRef idx="1">
+              <a:schemeClr val="dk1"/>
+            </a:effectRef>
+            <a:fontRef idx="minor">
+              <a:schemeClr val="tx1"/>
+            </a:fontRef>
+          </p:style>
+        </p:cxnSp>
+        <p:cxnSp>
+          <p:nvCxnSpPr>
+            <p:cNvPr id="26" name="Straight Arrow Connector 25">
+              <a:extLst>
+                <a:ext uri="{FF2B5EF4-FFF2-40B4-BE49-F238E27FC236}">
+                  <a16:creationId xmlns:a16="http://schemas.microsoft.com/office/drawing/2014/main" id="{FE9E200C-F61C-E3BC-C813-973305E697A5}"/>
+                </a:ext>
+              </a:extLst>
+            </p:cNvPr>
+            <p:cNvCxnSpPr>
+              <a:cxnSpLocks/>
+              <a:stCxn id="8" idx="0"/>
+              <a:endCxn id="9" idx="2"/>
+            </p:cNvCxnSpPr>
+            <p:nvPr/>
+          </p:nvCxnSpPr>
+          <p:spPr>
+            <a:xfrm flipV="1">
+              <a:off x="17365793" y="13462707"/>
+              <a:ext cx="0" cy="1095368"/>
+            </a:xfrm>
+            <a:prstGeom prst="straightConnector1">
+              <a:avLst/>
+            </a:prstGeom>
+            <a:ln w="76200">
+              <a:solidFill>
+                <a:schemeClr val="tx1"/>
+              </a:solidFill>
+              <a:tailEnd type="triangle"/>
+            </a:ln>
+          </p:spPr>
+          <p:style>
+            <a:lnRef idx="2">
+              <a:schemeClr val="dk1"/>
+            </a:lnRef>
+            <a:fillRef idx="0">
+              <a:schemeClr val="dk1"/>
+            </a:fillRef>
+            <a:effectRef idx="1">
+              <a:schemeClr val="dk1"/>
+            </a:effectRef>
+            <a:fontRef idx="minor">
+              <a:schemeClr val="tx1"/>
+            </a:fontRef>
+          </p:style>
+        </p:cxnSp>
+        <p:cxnSp>
+          <p:nvCxnSpPr>
+            <p:cNvPr id="32" name="Straight Arrow Connector 31">
+              <a:extLst>
+                <a:ext uri="{FF2B5EF4-FFF2-40B4-BE49-F238E27FC236}">
+                  <a16:creationId xmlns:a16="http://schemas.microsoft.com/office/drawing/2014/main" id="{6B958271-883F-8940-76BB-8AF8F00A9DC4}"/>
+                </a:ext>
+              </a:extLst>
+            </p:cNvPr>
+            <p:cNvCxnSpPr>
+              <a:cxnSpLocks/>
+              <a:stCxn id="9" idx="3"/>
+            </p:cNvCxnSpPr>
+            <p:nvPr/>
+          </p:nvCxnSpPr>
+          <p:spPr>
+            <a:xfrm flipV="1">
+              <a:off x="20615405" y="12793487"/>
+              <a:ext cx="856969" cy="1"/>
+            </a:xfrm>
+            <a:prstGeom prst="straightConnector1">
+              <a:avLst/>
+            </a:prstGeom>
+            <a:ln w="76200">
+              <a:solidFill>
+                <a:schemeClr val="tx1"/>
+              </a:solidFill>
+              <a:tailEnd type="triangle"/>
+            </a:ln>
+          </p:spPr>
+          <p:style>
+            <a:lnRef idx="2">
+              <a:schemeClr val="dk1"/>
+            </a:lnRef>
+            <a:fillRef idx="0">
+              <a:schemeClr val="dk1"/>
+            </a:fillRef>
+            <a:effectRef idx="1">
+              <a:schemeClr val="dk1"/>
+            </a:effectRef>
+            <a:fontRef idx="minor">
+              <a:schemeClr val="tx1"/>
+            </a:fontRef>
+          </p:style>
+        </p:cxnSp>
+        <p:cxnSp>
+          <p:nvCxnSpPr>
+            <p:cNvPr id="38" name="Straight Arrow Connector 37">
+              <a:extLst>
+                <a:ext uri="{FF2B5EF4-FFF2-40B4-BE49-F238E27FC236}">
+                  <a16:creationId xmlns:a16="http://schemas.microsoft.com/office/drawing/2014/main" id="{14B6177B-6EC6-A0F4-463E-CAAB2559ADE4}"/>
+                </a:ext>
+              </a:extLst>
+            </p:cNvPr>
+            <p:cNvCxnSpPr>
+              <a:cxnSpLocks/>
+              <a:stCxn id="10" idx="2"/>
+              <a:endCxn id="12" idx="0"/>
+            </p:cNvCxnSpPr>
+            <p:nvPr/>
+          </p:nvCxnSpPr>
+          <p:spPr>
+            <a:xfrm>
+              <a:off x="24721987" y="13462707"/>
+              <a:ext cx="0" cy="847203"/>
+            </a:xfrm>
+            <a:prstGeom prst="straightConnector1">
+              <a:avLst/>
+            </a:prstGeom>
+            <a:ln w="76200">
+              <a:solidFill>
+                <a:schemeClr val="tx1"/>
+              </a:solidFill>
+              <a:tailEnd type="triangle"/>
+            </a:ln>
+          </p:spPr>
+          <p:style>
+            <a:lnRef idx="2">
+              <a:schemeClr val="dk1"/>
+            </a:lnRef>
+            <a:fillRef idx="0">
+              <a:schemeClr val="dk1"/>
+            </a:fillRef>
+            <a:effectRef idx="1">
+              <a:schemeClr val="dk1"/>
+            </a:effectRef>
+            <a:fontRef idx="minor">
+              <a:schemeClr val="tx1"/>
+            </a:fontRef>
+          </p:style>
+        </p:cxnSp>
+        <p:cxnSp>
+          <p:nvCxnSpPr>
+            <p:cNvPr id="44" name="Straight Arrow Connector 43">
+              <a:extLst>
+                <a:ext uri="{FF2B5EF4-FFF2-40B4-BE49-F238E27FC236}">
+                  <a16:creationId xmlns:a16="http://schemas.microsoft.com/office/drawing/2014/main" id="{617806EB-FC1C-9A83-BF43-2E984DA88F27}"/>
+                </a:ext>
+              </a:extLst>
+            </p:cNvPr>
+            <p:cNvCxnSpPr>
+              <a:cxnSpLocks/>
+              <a:stCxn id="12" idx="3"/>
+              <a:endCxn id="13" idx="1"/>
+            </p:cNvCxnSpPr>
+            <p:nvPr/>
+          </p:nvCxnSpPr>
+          <p:spPr>
+            <a:xfrm flipV="1">
+              <a:off x="27971599" y="15227294"/>
+              <a:ext cx="856969" cy="1"/>
+            </a:xfrm>
+            <a:prstGeom prst="straightConnector1">
+              <a:avLst/>
+            </a:prstGeom>
+            <a:ln w="76200">
+              <a:solidFill>
+                <a:schemeClr val="tx1"/>
+              </a:solidFill>
+              <a:tailEnd type="triangle"/>
+            </a:ln>
+          </p:spPr>
+          <p:style>
+            <a:lnRef idx="2">
+              <a:schemeClr val="dk1"/>
+            </a:lnRef>
+            <a:fillRef idx="0">
+              <a:schemeClr val="dk1"/>
+            </a:fillRef>
+            <a:effectRef idx="1">
+              <a:schemeClr val="dk1"/>
+            </a:effectRef>
+            <a:fontRef idx="minor">
+              <a:schemeClr val="tx1"/>
+            </a:fontRef>
+          </p:style>
+        </p:cxnSp>
+        <p:sp>
+          <p:nvSpPr>
+            <p:cNvPr id="11" name="Rectangle: Rounded Corners 10">
+              <a:extLst>
+                <a:ext uri="{FF2B5EF4-FFF2-40B4-BE49-F238E27FC236}">
+                  <a16:creationId xmlns:a16="http://schemas.microsoft.com/office/drawing/2014/main" id="{B9E2F0D2-758C-ADDA-FB1D-86150C43DBFB}"/>
+                </a:ext>
+              </a:extLst>
+            </p:cNvPr>
+            <p:cNvSpPr/>
+            <p:nvPr/>
+          </p:nvSpPr>
+          <p:spPr>
+            <a:xfrm>
+              <a:off x="28828568" y="11876103"/>
+              <a:ext cx="6499225" cy="1834769"/>
+            </a:xfrm>
+            <a:prstGeom prst="roundRect">
+              <a:avLst/>
+            </a:prstGeom>
+            <a:solidFill>
+              <a:schemeClr val="bg1">
+                <a:lumMod val="65000"/>
+              </a:schemeClr>
+            </a:solidFill>
+          </p:spPr>
+          <p:style>
+            <a:lnRef idx="2">
+              <a:schemeClr val="accent1">
+                <a:shade val="15000"/>
+              </a:schemeClr>
+            </a:lnRef>
+            <a:fillRef idx="1">
+              <a:schemeClr val="accent1"/>
+            </a:fillRef>
+            <a:effectRef idx="0">
+              <a:schemeClr val="accent1"/>
+            </a:effectRef>
+            <a:fontRef idx="minor">
+              <a:schemeClr val="lt1"/>
+            </a:fontRef>
+          </p:style>
+          <p:txBody>
+            <a:bodyPr rtlCol="0" anchor="ctr"/>
+            <a:lstStyle/>
+            <a:p>
+              <a:pPr algn="ctr"/>
+              <a:r>
+                <a:rPr lang="en-US" sz="6000" dirty="0">
+                  <a:solidFill>
+                    <a:schemeClr val="tx1"/>
+                  </a:solidFill>
+                </a:rPr>
+                <a:t>Explain with </a:t>
+              </a:r>
+              <a:r>
+                <a:rPr lang="en-US" sz="6000" dirty="0" err="1">
+                  <a:solidFill>
+                    <a:schemeClr val="tx1"/>
+                  </a:solidFill>
+                </a:rPr>
+                <a:t>MolCE</a:t>
+              </a:r>
+              <a:endParaRPr lang="en-US" sz="6000" dirty="0">
+                <a:solidFill>
+                  <a:schemeClr val="tx1"/>
+                </a:solidFill>
+              </a:endParaRPr>
+            </a:p>
+          </p:txBody>
+        </p:sp>
+        <p:sp>
+          <p:nvSpPr>
+            <p:cNvPr id="15" name="Rectangle: Rounded Corners 14">
+              <a:extLst>
+                <a:ext uri="{FF2B5EF4-FFF2-40B4-BE49-F238E27FC236}">
+                  <a16:creationId xmlns:a16="http://schemas.microsoft.com/office/drawing/2014/main" id="{B8F65186-81B1-D1B8-C13F-3957238F2887}"/>
+                </a:ext>
+              </a:extLst>
+            </p:cNvPr>
+            <p:cNvSpPr/>
+            <p:nvPr/>
+          </p:nvSpPr>
+          <p:spPr>
+            <a:xfrm>
+              <a:off x="36184762" y="11876103"/>
+              <a:ext cx="6499225" cy="1834769"/>
+            </a:xfrm>
+            <a:prstGeom prst="roundRect">
+              <a:avLst/>
+            </a:prstGeom>
+            <a:solidFill>
+              <a:schemeClr val="bg1">
+                <a:lumMod val="65000"/>
+              </a:schemeClr>
+            </a:solidFill>
+          </p:spPr>
+          <p:style>
+            <a:lnRef idx="2">
+              <a:schemeClr val="accent1">
+                <a:shade val="15000"/>
+              </a:schemeClr>
+            </a:lnRef>
+            <a:fillRef idx="1">
+              <a:schemeClr val="accent1"/>
+            </a:fillRef>
+            <a:effectRef idx="0">
+              <a:schemeClr val="accent1"/>
+            </a:effectRef>
+            <a:fontRef idx="minor">
+              <a:schemeClr val="lt1"/>
+            </a:fontRef>
+          </p:style>
+          <p:txBody>
+            <a:bodyPr rtlCol="0" anchor="ctr"/>
+            <a:lstStyle/>
+            <a:p>
+              <a:pPr algn="ctr"/>
+              <a:r>
+                <a:rPr lang="en-US" sz="6000" dirty="0">
+                  <a:solidFill>
+                    <a:schemeClr val="tx1"/>
+                  </a:solidFill>
+                </a:rPr>
+                <a:t>Generate counterfactuals</a:t>
+              </a:r>
+            </a:p>
+          </p:txBody>
+        </p:sp>
+        <p:cxnSp>
+          <p:nvCxnSpPr>
+            <p:cNvPr id="21" name="Straight Arrow Connector 20">
+              <a:extLst>
+                <a:ext uri="{FF2B5EF4-FFF2-40B4-BE49-F238E27FC236}">
+                  <a16:creationId xmlns:a16="http://schemas.microsoft.com/office/drawing/2014/main" id="{C494FD80-29C3-EE6B-FDB2-9A808DC94B6F}"/>
+                </a:ext>
+              </a:extLst>
+            </p:cNvPr>
+            <p:cNvCxnSpPr>
+              <a:cxnSpLocks/>
+              <a:stCxn id="13" idx="0"/>
+              <a:endCxn id="11" idx="2"/>
+            </p:cNvCxnSpPr>
+            <p:nvPr/>
+          </p:nvCxnSpPr>
+          <p:spPr>
+            <a:xfrm flipV="1">
+              <a:off x="32078181" y="13710872"/>
+              <a:ext cx="0" cy="597450"/>
+            </a:xfrm>
+            <a:prstGeom prst="straightConnector1">
+              <a:avLst/>
+            </a:prstGeom>
+            <a:ln w="76200">
+              <a:solidFill>
+                <a:schemeClr val="tx1"/>
+              </a:solidFill>
+              <a:tailEnd type="triangle"/>
+            </a:ln>
+          </p:spPr>
+          <p:style>
+            <a:lnRef idx="2">
+              <a:schemeClr val="dk1"/>
+            </a:lnRef>
+            <a:fillRef idx="0">
+              <a:schemeClr val="dk1"/>
+            </a:fillRef>
+            <a:effectRef idx="1">
+              <a:schemeClr val="dk1"/>
+            </a:effectRef>
+            <a:fontRef idx="minor">
+              <a:schemeClr val="tx1"/>
+            </a:fontRef>
+          </p:style>
+        </p:cxnSp>
+        <p:sp>
+          <p:nvSpPr>
+            <p:cNvPr id="34" name="Rectangle: Rounded Corners 33">
+              <a:extLst>
+                <a:ext uri="{FF2B5EF4-FFF2-40B4-BE49-F238E27FC236}">
+                  <a16:creationId xmlns:a16="http://schemas.microsoft.com/office/drawing/2014/main" id="{87FD3E7C-BE4B-8079-4E21-3CAB73D84A8F}"/>
+                </a:ext>
+              </a:extLst>
+            </p:cNvPr>
+            <p:cNvSpPr/>
+            <p:nvPr/>
+          </p:nvSpPr>
+          <p:spPr>
+            <a:xfrm>
+              <a:off x="36184762" y="14308322"/>
+              <a:ext cx="6499225" cy="1837944"/>
+            </a:xfrm>
+            <a:prstGeom prst="roundRect">
+              <a:avLst/>
+            </a:prstGeom>
+            <a:solidFill>
+              <a:schemeClr val="bg1">
+                <a:lumMod val="65000"/>
+              </a:schemeClr>
+            </a:solidFill>
+          </p:spPr>
+          <p:style>
+            <a:lnRef idx="2">
+              <a:schemeClr val="accent1">
+                <a:shade val="15000"/>
+              </a:schemeClr>
+            </a:lnRef>
+            <a:fillRef idx="1">
+              <a:schemeClr val="accent1"/>
+            </a:fillRef>
+            <a:effectRef idx="0">
+              <a:schemeClr val="accent1"/>
+            </a:effectRef>
+            <a:fontRef idx="minor">
+              <a:schemeClr val="lt1"/>
+            </a:fontRef>
+          </p:style>
+          <p:txBody>
+            <a:bodyPr rtlCol="0" anchor="ctr"/>
+            <a:lstStyle/>
+            <a:p>
+              <a:pPr algn="ctr"/>
+              <a:r>
+                <a:rPr lang="en-US" sz="6000" dirty="0">
+                  <a:solidFill>
+                    <a:schemeClr val="tx1"/>
+                  </a:solidFill>
+                </a:rPr>
+                <a:t>Get top k bit environments</a:t>
+              </a:r>
+            </a:p>
+          </p:txBody>
+        </p:sp>
+        <p:cxnSp>
+          <p:nvCxnSpPr>
+            <p:cNvPr id="43" name="Straight Arrow Connector 42">
+              <a:extLst>
+                <a:ext uri="{FF2B5EF4-FFF2-40B4-BE49-F238E27FC236}">
+                  <a16:creationId xmlns:a16="http://schemas.microsoft.com/office/drawing/2014/main" id="{6B52E9F8-65B2-1599-AE34-E1A6FD0F09B4}"/>
+                </a:ext>
+              </a:extLst>
+            </p:cNvPr>
+            <p:cNvCxnSpPr>
+              <a:cxnSpLocks/>
+              <a:stCxn id="11" idx="3"/>
+              <a:endCxn id="15" idx="1"/>
+            </p:cNvCxnSpPr>
+            <p:nvPr/>
+          </p:nvCxnSpPr>
+          <p:spPr>
+            <a:xfrm>
+              <a:off x="35327793" y="12793488"/>
+              <a:ext cx="856969" cy="0"/>
+            </a:xfrm>
+            <a:prstGeom prst="straightConnector1">
+              <a:avLst/>
+            </a:prstGeom>
+            <a:ln w="76200">
+              <a:solidFill>
+                <a:schemeClr val="tx1"/>
+              </a:solidFill>
+              <a:tailEnd type="triangle"/>
+            </a:ln>
+          </p:spPr>
+          <p:style>
+            <a:lnRef idx="2">
+              <a:schemeClr val="dk1"/>
+            </a:lnRef>
+            <a:fillRef idx="0">
+              <a:schemeClr val="dk1"/>
+            </a:fillRef>
+            <a:effectRef idx="1">
+              <a:schemeClr val="dk1"/>
+            </a:effectRef>
+            <a:fontRef idx="minor">
+              <a:schemeClr val="tx1"/>
+            </a:fontRef>
+          </p:style>
+        </p:cxnSp>
+        <p:cxnSp>
+          <p:nvCxnSpPr>
+            <p:cNvPr id="47" name="Straight Arrow Connector 46">
+              <a:extLst>
+                <a:ext uri="{FF2B5EF4-FFF2-40B4-BE49-F238E27FC236}">
+                  <a16:creationId xmlns:a16="http://schemas.microsoft.com/office/drawing/2014/main" id="{1E37A21C-5BCA-35D4-54D6-C61119FAA409}"/>
+                </a:ext>
+              </a:extLst>
+            </p:cNvPr>
+            <p:cNvCxnSpPr>
+              <a:cxnSpLocks/>
+              <a:stCxn id="15" idx="2"/>
+              <a:endCxn id="34" idx="0"/>
+            </p:cNvCxnSpPr>
+            <p:nvPr/>
+          </p:nvCxnSpPr>
+          <p:spPr>
+            <a:xfrm>
+              <a:off x="39434375" y="13710872"/>
+              <a:ext cx="0" cy="597450"/>
+            </a:xfrm>
+            <a:prstGeom prst="straightConnector1">
+              <a:avLst/>
+            </a:prstGeom>
+            <a:ln w="76200">
+              <a:solidFill>
+                <a:schemeClr val="tx1"/>
+              </a:solidFill>
+              <a:tailEnd type="triangle"/>
+            </a:ln>
+          </p:spPr>
+          <p:style>
+            <a:lnRef idx="2">
+              <a:schemeClr val="dk1"/>
+            </a:lnRef>
+            <a:fillRef idx="0">
+              <a:schemeClr val="dk1"/>
+            </a:fillRef>
+            <a:effectRef idx="1">
+              <a:schemeClr val="dk1"/>
+            </a:effectRef>
+            <a:fontRef idx="minor">
+              <a:schemeClr val="tx1"/>
+            </a:fontRef>
+          </p:style>
+        </p:cxnSp>
+      </p:grpSp>
+      <p:sp>
+        <p:nvSpPr>
+          <p:cNvPr id="64" name="TextBox 63">
+            <a:extLst>
+              <a:ext uri="{FF2B5EF4-FFF2-40B4-BE49-F238E27FC236}">
+                <a16:creationId xmlns:a16="http://schemas.microsoft.com/office/drawing/2014/main" id="{375CDCAE-E997-6AB6-EE31-7EEA0E2E635E}"/>
+              </a:ext>
+            </a:extLst>
+          </p:cNvPr>
+          <p:cNvSpPr txBox="1"/>
+          <p:nvPr/>
+        </p:nvSpPr>
+        <p:spPr>
+          <a:xfrm>
+            <a:off x="31448517" y="13705366"/>
+            <a:ext cx="6310257" cy="923330"/>
+          </a:xfrm>
+          <a:prstGeom prst="rect">
+            <a:avLst/>
+          </a:prstGeom>
+          <a:noFill/>
+        </p:spPr>
+        <p:txBody>
+          <a:bodyPr wrap="square" rtlCol="0">
+            <a:spAutoFit/>
+          </a:bodyPr>
+          <a:lstStyle/>
+          <a:p>
+            <a:pPr algn="ctr"/>
+            <a:r>
+              <a:rPr lang="en-US" sz="5400" b="1" dirty="0"/>
+              <a:t>SHAP</a:t>
+            </a:r>
+            <a:endParaRPr lang="de-DE" sz="5400" b="1" dirty="0"/>
+          </a:p>
+        </p:txBody>
+      </p:sp>
       <p:sp>
         <p:nvSpPr>
           <p:cNvPr id="63" name="TextBox 62">
@@ -4401,7 +7643,7 @@
         </p:nvSpPr>
         <p:spPr>
           <a:xfrm>
-            <a:off x="27174716" y="20760188"/>
+            <a:off x="12146227" y="13705366"/>
             <a:ext cx="6603459" cy="923330"/>
           </a:xfrm>
           <a:prstGeom prst="rect">
@@ -4417,29 +7659,89 @@
           <a:p>
             <a:pPr algn="ctr"/>
             <a:r>
-              <a:rPr lang="en-US" sz="5400" b="1" dirty="0"/>
-              <a:t>Class </a:t>
-            </a:r>
-            <a:r>
-              <a:rPr lang="en-US" sz="5400" b="1" i="0" dirty="0">
-                <a:solidFill>
-                  <a:srgbClr val="0F0F0F"/>
-                </a:solidFill>
-                <a:effectLst/>
-                <a:latin typeface="ui-sans-serif"/>
-              </a:rPr>
-              <a:t>PI3K-delta</a:t>
+              <a:rPr lang="en-US" sz="5400" b="1" dirty="0" err="1"/>
+              <a:t>MolAnchor</a:t>
             </a:r>
             <a:endParaRPr lang="de-DE" sz="5400" b="1" dirty="0"/>
           </a:p>
         </p:txBody>
       </p:sp>
+      <p:pic>
+        <p:nvPicPr>
+          <p:cNvPr id="52" name="Picture 51">
+            <a:extLst>
+              <a:ext uri="{FF2B5EF4-FFF2-40B4-BE49-F238E27FC236}">
+                <a16:creationId xmlns:a16="http://schemas.microsoft.com/office/drawing/2014/main" id="{205590DA-02DC-2BC3-5EB1-2191FD671C52}"/>
+              </a:ext>
+            </a:extLst>
+          </p:cNvPr>
+          <p:cNvPicPr>
+            <a:picLocks noChangeAspect="1"/>
+          </p:cNvPicPr>
+          <p:nvPr/>
+        </p:nvPicPr>
+        <p:blipFill>
+          <a:blip r:embed="rId3">
+            <a:extLst>
+              <a:ext uri="{28A0092B-C50C-407E-A947-70E740481C1C}">
+                <a14:useLocalDpi xmlns:a14="http://schemas.microsoft.com/office/drawing/2010/main" val="0"/>
+              </a:ext>
+            </a:extLst>
+          </a:blip>
+          <a:srcRect l="4656" t="21016" r="3144" b="22505"/>
+          <a:stretch/>
+        </p:blipFill>
+        <p:spPr>
+          <a:xfrm>
+            <a:off x="10113408" y="14740867"/>
+            <a:ext cx="10669097" cy="6535613"/>
+          </a:xfrm>
+          <a:prstGeom prst="rect">
+            <a:avLst/>
+          </a:prstGeom>
+        </p:spPr>
+      </p:pic>
+      <p:pic>
+        <p:nvPicPr>
+          <p:cNvPr id="55" name="Picture 54">
+            <a:extLst>
+              <a:ext uri="{FF2B5EF4-FFF2-40B4-BE49-F238E27FC236}">
+                <a16:creationId xmlns:a16="http://schemas.microsoft.com/office/drawing/2014/main" id="{377B645A-806B-0951-E881-FFC87314EA36}"/>
+              </a:ext>
+            </a:extLst>
+          </p:cNvPr>
+          <p:cNvPicPr>
+            <a:picLocks noChangeAspect="1"/>
+          </p:cNvPicPr>
+          <p:nvPr/>
+        </p:nvPicPr>
+        <p:blipFill>
+          <a:blip r:embed="rId4">
+            <a:extLst>
+              <a:ext uri="{28A0092B-C50C-407E-A947-70E740481C1C}">
+                <a14:useLocalDpi xmlns:a14="http://schemas.microsoft.com/office/drawing/2010/main" val="0"/>
+              </a:ext>
+            </a:extLst>
+          </a:blip>
+          <a:srcRect l="11525" t="17564" r="10242" b="16495"/>
+          <a:stretch/>
+        </p:blipFill>
+        <p:spPr>
+          <a:xfrm>
+            <a:off x="29190808" y="14586918"/>
+            <a:ext cx="10825674" cy="6843510"/>
+          </a:xfrm>
+          <a:prstGeom prst="rect">
+            <a:avLst/>
+          </a:prstGeom>
+        </p:spPr>
+      </p:pic>
       <p:sp>
         <p:nvSpPr>
-          <p:cNvPr id="64" name="TextBox 63">
+          <p:cNvPr id="70" name="TextBox 69">
             <a:extLst>
               <a:ext uri="{FF2B5EF4-FFF2-40B4-BE49-F238E27FC236}">
-                <a16:creationId xmlns:a16="http://schemas.microsoft.com/office/drawing/2014/main" id="{375CDCAE-E997-6AB6-EE31-7EEA0E2E635E}"/>
+                <a16:creationId xmlns:a16="http://schemas.microsoft.com/office/drawing/2014/main" id="{F75F65F4-FB7F-51FF-4984-C82E951ABDA0}"/>
               </a:ext>
             </a:extLst>
           </p:cNvPr>
@@ -4448,7 +7750,570 @@
         </p:nvSpPr>
         <p:spPr>
           <a:xfrm>
-            <a:off x="38194187" y="20760188"/>
+            <a:off x="7218356" y="21656089"/>
+            <a:ext cx="16459200" cy="5970865"/>
+          </a:xfrm>
+          <a:prstGeom prst="rect">
+            <a:avLst/>
+          </a:prstGeom>
+          <a:noFill/>
+        </p:spPr>
+        <p:txBody>
+          <a:bodyPr wrap="square">
+            <a:spAutoFit/>
+          </a:bodyPr>
+          <a:lstStyle/>
+          <a:p>
+            <a:pPr>
+              <a:spcAft>
+                <a:spcPts val="1200"/>
+              </a:spcAft>
+            </a:pPr>
+            <a:r>
+              <a:rPr lang="en-US" sz="4400" b="1" dirty="0"/>
+              <a:t>✅ AGREEMENTS (</a:t>
+            </a:r>
+            <a:r>
+              <a:rPr lang="en-US" sz="4400" b="1" dirty="0" err="1"/>
+              <a:t>MolAnchor</a:t>
+            </a:r>
+            <a:r>
+              <a:rPr lang="en-US" sz="4400" b="1" dirty="0"/>
+              <a:t> ↔ SHAP)</a:t>
+            </a:r>
+          </a:p>
+          <a:p>
+            <a:pPr marL="742950" indent="-742950" algn="just">
+              <a:spcAft>
+                <a:spcPts val="1200"/>
+              </a:spcAft>
+              <a:buFont typeface="+mj-lt"/>
+              <a:buAutoNum type="arabicPeriod"/>
+            </a:pPr>
+            <a:r>
+              <a:rPr lang="en-US" sz="4400" b="1" dirty="0"/>
+              <a:t>Core scaffold importance: </a:t>
+            </a:r>
+            <a:r>
+              <a:rPr lang="en-US" sz="4400" dirty="0"/>
+              <a:t>Both methods identify the piperazine/benzyl core as critical</a:t>
+            </a:r>
+          </a:p>
+          <a:p>
+            <a:pPr marL="742950" indent="-742950" algn="just">
+              <a:spcAft>
+                <a:spcPts val="1200"/>
+              </a:spcAft>
+              <a:buFont typeface="+mj-lt"/>
+              <a:buAutoNum type="arabicPeriod"/>
+            </a:pPr>
+            <a:r>
+              <a:rPr lang="en-US" sz="4400" b="1" dirty="0"/>
+              <a:t>N-methyl motif: </a:t>
+            </a:r>
+            <a:r>
+              <a:rPr lang="en-US" sz="4400" dirty="0"/>
+              <a:t>SHAP's top features (Bits 1280, 1791, 1792) all involve the N-methyl/benzyl-dimethylamine region captured by </a:t>
+            </a:r>
+            <a:r>
+              <a:rPr lang="en-US" sz="4400" dirty="0" err="1"/>
+              <a:t>MolAnchor's</a:t>
+            </a:r>
+            <a:r>
+              <a:rPr lang="en-US" sz="4400" dirty="0"/>
+              <a:t> anchor</a:t>
+            </a:r>
+          </a:p>
+          <a:p>
+            <a:pPr marL="742950" indent="-742950" algn="just">
+              <a:spcAft>
+                <a:spcPts val="1200"/>
+              </a:spcAft>
+              <a:buFont typeface="+mj-lt"/>
+              <a:buAutoNum type="arabicPeriod"/>
+            </a:pPr>
+            <a:r>
+              <a:rPr lang="en-US" sz="4400" b="1" dirty="0"/>
+              <a:t>Pharmacophore consensus</a:t>
+            </a:r>
+            <a:r>
+              <a:rPr lang="en-US" sz="4400" dirty="0"/>
+              <a:t>: Both confirm the morpholinone-piperazine-benzyl framework is essential for D2 binding</a:t>
+            </a:r>
+          </a:p>
+        </p:txBody>
+      </p:sp>
+      <p:sp>
+        <p:nvSpPr>
+          <p:cNvPr id="76" name="TextBox 75">
+            <a:extLst>
+              <a:ext uri="{FF2B5EF4-FFF2-40B4-BE49-F238E27FC236}">
+                <a16:creationId xmlns:a16="http://schemas.microsoft.com/office/drawing/2014/main" id="{7E7006D0-478E-9B07-8E29-CFFE8A3BC008}"/>
+              </a:ext>
+            </a:extLst>
+          </p:cNvPr>
+          <p:cNvSpPr txBox="1"/>
+          <p:nvPr/>
+        </p:nvSpPr>
+        <p:spPr>
+          <a:xfrm>
+            <a:off x="26374045" y="21656089"/>
+            <a:ext cx="16459200" cy="5970865"/>
+          </a:xfrm>
+          <a:prstGeom prst="rect">
+            <a:avLst/>
+          </a:prstGeom>
+          <a:noFill/>
+        </p:spPr>
+        <p:txBody>
+          <a:bodyPr wrap="square">
+            <a:spAutoFit/>
+          </a:bodyPr>
+          <a:lstStyle/>
+          <a:p>
+            <a:pPr marL="0" marR="0" lvl="0" indent="0" algn="l" defTabSz="457200" rtl="0" eaLnBrk="1" fontAlgn="auto" latinLnBrk="0" hangingPunct="1">
+              <a:lnSpc>
+                <a:spcPct val="100000"/>
+              </a:lnSpc>
+              <a:spcBef>
+                <a:spcPts val="0"/>
+              </a:spcBef>
+              <a:spcAft>
+                <a:spcPts val="1200"/>
+              </a:spcAft>
+              <a:buClrTx/>
+              <a:buSzTx/>
+              <a:buFontTx/>
+              <a:buNone/>
+              <a:tabLst/>
+              <a:defRPr/>
+            </a:pPr>
+            <a:r>
+              <a:rPr kumimoji="0" lang="en-US" sz="4400" b="1" i="0" u="none" strike="noStrike" kern="1200" cap="none" spc="0" normalizeH="0" baseline="0" noProof="0" dirty="0">
+                <a:ln>
+                  <a:noFill/>
+                </a:ln>
+                <a:solidFill>
+                  <a:prstClr val="black"/>
+                </a:solidFill>
+                <a:effectLst/>
+                <a:uLnTx/>
+                <a:uFillTx/>
+                <a:latin typeface="Aptos" panose="02110004020202020204"/>
+                <a:ea typeface="+mn-ea"/>
+                <a:cs typeface="+mn-cs"/>
+              </a:rPr>
+              <a:t>❌ DISAGREEMENTS (</a:t>
+            </a:r>
+            <a:r>
+              <a:rPr kumimoji="0" lang="en-US" sz="4400" b="1" i="0" u="none" strike="noStrike" kern="1200" cap="none" spc="0" normalizeH="0" baseline="0" noProof="0" dirty="0" err="1">
+                <a:ln>
+                  <a:noFill/>
+                </a:ln>
+                <a:solidFill>
+                  <a:prstClr val="black"/>
+                </a:solidFill>
+                <a:effectLst/>
+                <a:uLnTx/>
+                <a:uFillTx/>
+                <a:latin typeface="Aptos" panose="02110004020202020204"/>
+                <a:ea typeface="+mn-ea"/>
+                <a:cs typeface="+mn-cs"/>
+              </a:rPr>
+              <a:t>MolAnchor</a:t>
+            </a:r>
+            <a:r>
+              <a:rPr kumimoji="0" lang="en-US" sz="4400" b="1" i="0" u="none" strike="noStrike" kern="1200" cap="none" spc="0" normalizeH="0" baseline="0" noProof="0" dirty="0">
+                <a:ln>
+                  <a:noFill/>
+                </a:ln>
+                <a:solidFill>
+                  <a:prstClr val="black"/>
+                </a:solidFill>
+                <a:effectLst/>
+                <a:uLnTx/>
+                <a:uFillTx/>
+                <a:latin typeface="Aptos" panose="02110004020202020204"/>
+                <a:ea typeface="+mn-ea"/>
+                <a:cs typeface="+mn-cs"/>
+              </a:rPr>
+              <a:t> ↔ SHAP)</a:t>
+            </a:r>
+          </a:p>
+          <a:p>
+            <a:pPr marL="742950" marR="0" lvl="0" indent="-742950" algn="just" defTabSz="457200" rtl="0" eaLnBrk="1" fontAlgn="auto" latinLnBrk="0" hangingPunct="1">
+              <a:lnSpc>
+                <a:spcPct val="100000"/>
+              </a:lnSpc>
+              <a:spcBef>
+                <a:spcPts val="0"/>
+              </a:spcBef>
+              <a:spcAft>
+                <a:spcPts val="1200"/>
+              </a:spcAft>
+              <a:buClrTx/>
+              <a:buSzTx/>
+              <a:buFont typeface="+mj-lt"/>
+              <a:buAutoNum type="arabicPeriod"/>
+              <a:tabLst/>
+              <a:defRPr/>
+            </a:pPr>
+            <a:r>
+              <a:rPr kumimoji="0" lang="en-US" sz="4400" b="1" i="0" u="none" strike="noStrike" kern="1200" cap="none" spc="0" normalizeH="0" baseline="0" noProof="0" dirty="0">
+                <a:ln>
+                  <a:noFill/>
+                </a:ln>
+                <a:solidFill>
+                  <a:prstClr val="black"/>
+                </a:solidFill>
+                <a:effectLst/>
+                <a:uLnTx/>
+                <a:uFillTx/>
+                <a:latin typeface="Aptos" panose="02110004020202020204"/>
+                <a:ea typeface="+mn-ea"/>
+                <a:cs typeface="+mn-cs"/>
+              </a:rPr>
+              <a:t>Granularity: </a:t>
+            </a:r>
+            <a:r>
+              <a:rPr kumimoji="0" lang="en-US" sz="4400" b="0" i="0" u="none" strike="noStrike" kern="1200" cap="none" spc="0" normalizeH="0" baseline="0" noProof="0" dirty="0" err="1">
+                <a:ln>
+                  <a:noFill/>
+                </a:ln>
+                <a:solidFill>
+                  <a:prstClr val="black"/>
+                </a:solidFill>
+                <a:effectLst/>
+                <a:uLnTx/>
+                <a:uFillTx/>
+                <a:latin typeface="Aptos" panose="02110004020202020204"/>
+                <a:ea typeface="+mn-ea"/>
+                <a:cs typeface="+mn-cs"/>
+              </a:rPr>
+              <a:t>MolAnchor</a:t>
+            </a:r>
+            <a:r>
+              <a:rPr kumimoji="0" lang="en-US" sz="4400" b="0" i="0" u="none" strike="noStrike" kern="1200" cap="none" spc="0" normalizeH="0" baseline="0" noProof="0" dirty="0">
+                <a:ln>
+                  <a:noFill/>
+                </a:ln>
+                <a:solidFill>
+                  <a:prstClr val="black"/>
+                </a:solidFill>
+                <a:effectLst/>
+                <a:uLnTx/>
+                <a:uFillTx/>
+                <a:latin typeface="Aptos" panose="02110004020202020204"/>
+                <a:ea typeface="+mn-ea"/>
+                <a:cs typeface="+mn-cs"/>
+              </a:rPr>
+              <a:t> identifies ONE dominant anchor; SHAP reveals multiple contributing fragments</a:t>
+            </a:r>
+          </a:p>
+          <a:p>
+            <a:pPr marL="742950" marR="0" lvl="0" indent="-742950" algn="just" defTabSz="457200" rtl="0" eaLnBrk="1" fontAlgn="auto" latinLnBrk="0" hangingPunct="1">
+              <a:lnSpc>
+                <a:spcPct val="100000"/>
+              </a:lnSpc>
+              <a:spcBef>
+                <a:spcPts val="0"/>
+              </a:spcBef>
+              <a:spcAft>
+                <a:spcPts val="1200"/>
+              </a:spcAft>
+              <a:buClrTx/>
+              <a:buSzTx/>
+              <a:buFont typeface="+mj-lt"/>
+              <a:buAutoNum type="arabicPeriod"/>
+              <a:tabLst/>
+              <a:defRPr/>
+            </a:pPr>
+            <a:r>
+              <a:rPr kumimoji="0" lang="en-US" sz="4400" b="1" i="0" u="none" strike="noStrike" kern="1200" cap="none" spc="0" normalizeH="0" baseline="0" noProof="0" dirty="0">
+                <a:ln>
+                  <a:noFill/>
+                </a:ln>
+                <a:solidFill>
+                  <a:prstClr val="black"/>
+                </a:solidFill>
+                <a:effectLst/>
+                <a:uLnTx/>
+                <a:uFillTx/>
+                <a:latin typeface="Aptos" panose="02110004020202020204"/>
+                <a:ea typeface="+mn-ea"/>
+                <a:cs typeface="+mn-cs"/>
+              </a:rPr>
+              <a:t>Peripheral groups: </a:t>
+            </a:r>
+            <a:r>
+              <a:rPr kumimoji="0" lang="en-US" sz="4400" b="0" i="0" u="none" strike="noStrike" kern="1200" cap="none" spc="0" normalizeH="0" baseline="0" noProof="0" dirty="0">
+                <a:ln>
+                  <a:noFill/>
+                </a:ln>
+                <a:solidFill>
+                  <a:prstClr val="black"/>
+                </a:solidFill>
+                <a:effectLst/>
+                <a:uLnTx/>
+                <a:uFillTx/>
+                <a:latin typeface="Aptos" panose="02110004020202020204"/>
+                <a:ea typeface="+mn-ea"/>
+                <a:cs typeface="+mn-cs"/>
+              </a:rPr>
+              <a:t>SHAP highlights the benzothiazole (Bit 885, +5.39) as important, while </a:t>
+            </a:r>
+            <a:r>
+              <a:rPr kumimoji="0" lang="en-US" sz="4400" b="0" i="0" u="none" strike="noStrike" kern="1200" cap="none" spc="0" normalizeH="0" baseline="0" noProof="0" dirty="0" err="1">
+                <a:ln>
+                  <a:noFill/>
+                </a:ln>
+                <a:solidFill>
+                  <a:prstClr val="black"/>
+                </a:solidFill>
+                <a:effectLst/>
+                <a:uLnTx/>
+                <a:uFillTx/>
+                <a:latin typeface="Aptos" panose="02110004020202020204"/>
+                <a:ea typeface="+mn-ea"/>
+                <a:cs typeface="+mn-cs"/>
+              </a:rPr>
+              <a:t>MolAnchor</a:t>
+            </a:r>
+            <a:r>
+              <a:rPr kumimoji="0" lang="en-US" sz="4400" b="0" i="0" u="none" strike="noStrike" kern="1200" cap="none" spc="0" normalizeH="0" baseline="0" noProof="0" dirty="0">
+                <a:ln>
+                  <a:noFill/>
+                </a:ln>
+                <a:solidFill>
+                  <a:prstClr val="black"/>
+                </a:solidFill>
+                <a:effectLst/>
+                <a:uLnTx/>
+                <a:uFillTx/>
+                <a:latin typeface="Aptos" panose="02110004020202020204"/>
+                <a:ea typeface="+mn-ea"/>
+                <a:cs typeface="+mn-cs"/>
+              </a:rPr>
+              <a:t> doesn't single it out</a:t>
+            </a:r>
+          </a:p>
+          <a:p>
+            <a:pPr marL="742950" marR="0" lvl="0" indent="-742950" algn="just" defTabSz="457200" rtl="0" eaLnBrk="1" fontAlgn="auto" latinLnBrk="0" hangingPunct="1">
+              <a:lnSpc>
+                <a:spcPct val="100000"/>
+              </a:lnSpc>
+              <a:spcBef>
+                <a:spcPts val="0"/>
+              </a:spcBef>
+              <a:spcAft>
+                <a:spcPts val="1200"/>
+              </a:spcAft>
+              <a:buClrTx/>
+              <a:buSzTx/>
+              <a:buFont typeface="+mj-lt"/>
+              <a:buAutoNum type="arabicPeriod"/>
+              <a:tabLst/>
+              <a:defRPr/>
+            </a:pPr>
+            <a:r>
+              <a:rPr kumimoji="0" lang="en-US" sz="4400" b="1" i="0" u="none" strike="noStrike" kern="1200" cap="none" spc="0" normalizeH="0" baseline="0" noProof="0" dirty="0">
+                <a:ln>
+                  <a:noFill/>
+                </a:ln>
+                <a:solidFill>
+                  <a:prstClr val="black"/>
+                </a:solidFill>
+                <a:effectLst/>
+                <a:uLnTx/>
+                <a:uFillTx/>
+                <a:latin typeface="Aptos" panose="02110004020202020204"/>
+                <a:ea typeface="+mn-ea"/>
+                <a:cs typeface="+mn-cs"/>
+              </a:rPr>
+              <a:t>Negative contribution:</a:t>
+            </a:r>
+            <a:r>
+              <a:rPr kumimoji="0" lang="en-US" sz="4400" b="0" i="0" u="none" strike="noStrike" kern="1200" cap="none" spc="0" normalizeH="0" baseline="0" noProof="0" dirty="0">
+                <a:ln>
+                  <a:noFill/>
+                </a:ln>
+                <a:solidFill>
+                  <a:prstClr val="black"/>
+                </a:solidFill>
+                <a:effectLst/>
+                <a:uLnTx/>
+                <a:uFillTx/>
+                <a:latin typeface="Aptos" panose="02110004020202020204"/>
+                <a:ea typeface="+mn-ea"/>
+                <a:cs typeface="+mn-cs"/>
+              </a:rPr>
+              <a:t> SHAP identifies thiophene substructure (Bit 552, -5.37) as reducing activity—a nuance </a:t>
+            </a:r>
+            <a:r>
+              <a:rPr kumimoji="0" lang="en-US" sz="4400" b="0" i="0" u="none" strike="noStrike" kern="1200" cap="none" spc="0" normalizeH="0" baseline="0" noProof="0" dirty="0" err="1">
+                <a:ln>
+                  <a:noFill/>
+                </a:ln>
+                <a:solidFill>
+                  <a:prstClr val="black"/>
+                </a:solidFill>
+                <a:effectLst/>
+                <a:uLnTx/>
+                <a:uFillTx/>
+                <a:latin typeface="Aptos" panose="02110004020202020204"/>
+                <a:ea typeface="+mn-ea"/>
+                <a:cs typeface="+mn-cs"/>
+              </a:rPr>
+              <a:t>MolAnchor</a:t>
+            </a:r>
+            <a:r>
+              <a:rPr kumimoji="0" lang="en-US" sz="4400" b="0" i="0" u="none" strike="noStrike" kern="1200" cap="none" spc="0" normalizeH="0" baseline="0" noProof="0" dirty="0">
+                <a:ln>
+                  <a:noFill/>
+                </a:ln>
+                <a:solidFill>
+                  <a:prstClr val="black"/>
+                </a:solidFill>
+                <a:effectLst/>
+                <a:uLnTx/>
+                <a:uFillTx/>
+                <a:latin typeface="Aptos" panose="02110004020202020204"/>
+                <a:ea typeface="+mn-ea"/>
+                <a:cs typeface="+mn-cs"/>
+              </a:rPr>
+              <a:t> misses</a:t>
+            </a:r>
+          </a:p>
+        </p:txBody>
+      </p:sp>
+      <p:sp>
+        <p:nvSpPr>
+          <p:cNvPr id="85" name="TextBox 84">
+            <a:extLst>
+              <a:ext uri="{FF2B5EF4-FFF2-40B4-BE49-F238E27FC236}">
+                <a16:creationId xmlns:a16="http://schemas.microsoft.com/office/drawing/2014/main" id="{253B310A-4175-466E-82F8-A8F9C6BF4614}"/>
+              </a:ext>
+            </a:extLst>
+          </p:cNvPr>
+          <p:cNvSpPr txBox="1"/>
+          <p:nvPr/>
+        </p:nvSpPr>
+        <p:spPr>
+          <a:xfrm>
+            <a:off x="16522078" y="28068830"/>
+            <a:ext cx="17157371" cy="923330"/>
+          </a:xfrm>
+          <a:prstGeom prst="rect">
+            <a:avLst/>
+          </a:prstGeom>
+          <a:noFill/>
+        </p:spPr>
+        <p:txBody>
+          <a:bodyPr wrap="square">
+            <a:spAutoFit/>
+          </a:bodyPr>
+          <a:lstStyle/>
+          <a:p>
+            <a:pPr algn="ctr"/>
+            <a:r>
+              <a:rPr lang="en-US" sz="5400" b="1" dirty="0">
+                <a:solidFill>
+                  <a:srgbClr val="0F0F0F"/>
+                </a:solidFill>
+                <a:latin typeface="ui-sans-serif"/>
+              </a:rPr>
+              <a:t>Pair 2: </a:t>
+            </a:r>
+            <a:r>
+              <a:rPr lang="en-US" sz="5400" b="1" dirty="0" err="1">
+                <a:solidFill>
+                  <a:srgbClr val="0F0F0F"/>
+                </a:solidFill>
+                <a:latin typeface="ui-sans-serif"/>
+              </a:rPr>
+              <a:t>MolCE</a:t>
+            </a:r>
+            <a:r>
+              <a:rPr lang="en-US" sz="5400" b="1" dirty="0">
+                <a:solidFill>
+                  <a:srgbClr val="0F0F0F"/>
+                </a:solidFill>
+                <a:latin typeface="ui-sans-serif"/>
+              </a:rPr>
+              <a:t> vs Counterfactuals</a:t>
+            </a:r>
+            <a:endParaRPr lang="en-US" sz="5400" b="1" i="0" dirty="0">
+              <a:solidFill>
+                <a:srgbClr val="0F0F0F"/>
+              </a:solidFill>
+              <a:effectLst/>
+              <a:latin typeface="ui-sans-serif"/>
+            </a:endParaRPr>
+          </a:p>
+        </p:txBody>
+      </p:sp>
+      <p:sp>
+        <p:nvSpPr>
+          <p:cNvPr id="88" name="Rectangle: Rounded Corners 87">
+            <a:extLst>
+              <a:ext uri="{FF2B5EF4-FFF2-40B4-BE49-F238E27FC236}">
+                <a16:creationId xmlns:a16="http://schemas.microsoft.com/office/drawing/2014/main" id="{682C432F-C7DF-608D-CD06-390CC306E433}"/>
+              </a:ext>
+            </a:extLst>
+          </p:cNvPr>
+          <p:cNvSpPr/>
+          <p:nvPr/>
+        </p:nvSpPr>
+        <p:spPr>
+          <a:xfrm>
+            <a:off x="6564918" y="29051222"/>
+            <a:ext cx="37071691" cy="13099376"/>
+          </a:xfrm>
+          <a:prstGeom prst="roundRect">
+            <a:avLst/>
+          </a:prstGeom>
+          <a:noFill/>
+        </p:spPr>
+        <p:style>
+          <a:lnRef idx="2">
+            <a:schemeClr val="accent1">
+              <a:shade val="15000"/>
+            </a:schemeClr>
+          </a:lnRef>
+          <a:fillRef idx="1">
+            <a:schemeClr val="accent1"/>
+          </a:fillRef>
+          <a:effectRef idx="0">
+            <a:schemeClr val="accent1"/>
+          </a:effectRef>
+          <a:fontRef idx="minor">
+            <a:schemeClr val="lt1"/>
+          </a:fontRef>
+        </p:style>
+        <p:txBody>
+          <a:bodyPr rtlCol="0" anchor="ctr"/>
+          <a:lstStyle/>
+          <a:p>
+            <a:pPr algn="ctr"/>
+            <a:endParaRPr lang="en-US" dirty="0"/>
+          </a:p>
+        </p:txBody>
+      </p:sp>
+      <p:sp>
+        <p:nvSpPr>
+          <p:cNvPr id="89" name="TextBox 88">
+            <a:extLst>
+              <a:ext uri="{FF2B5EF4-FFF2-40B4-BE49-F238E27FC236}">
+                <a16:creationId xmlns:a16="http://schemas.microsoft.com/office/drawing/2014/main" id="{57BCAA73-24FE-3A3B-D1CF-4920116A858E}"/>
+              </a:ext>
+            </a:extLst>
+          </p:cNvPr>
+          <p:cNvSpPr txBox="1"/>
+          <p:nvPr/>
+        </p:nvSpPr>
+        <p:spPr>
+          <a:xfrm>
+            <a:off x="31448517" y="29149313"/>
             <a:ext cx="6310257" cy="923330"/>
           </a:xfrm>
           <a:prstGeom prst="rect">
@@ -4465,17 +8330,7 @@
             <a:pPr algn="ctr"/>
             <a:r>
               <a:rPr lang="en-US" sz="5400" b="1" dirty="0"/>
-              <a:t>Class </a:t>
-            </a:r>
-            <a:r>
-              <a:rPr lang="en-US" sz="5400" b="1" i="0" dirty="0">
-                <a:solidFill>
-                  <a:srgbClr val="0F0F0F"/>
-                </a:solidFill>
-                <a:effectLst/>
-                <a:latin typeface="ui-sans-serif"/>
-              </a:rPr>
-              <a:t>PI3K-gamma</a:t>
+              <a:t>Counterfactuals</a:t>
             </a:r>
             <a:endParaRPr lang="de-DE" sz="5400" b="1" dirty="0"/>
           </a:p>
@@ -4483,10 +8338,10 @@
       </p:sp>
       <p:sp>
         <p:nvSpPr>
-          <p:cNvPr id="65" name="TextBox 64">
+          <p:cNvPr id="90" name="TextBox 89">
             <a:extLst>
               <a:ext uri="{FF2B5EF4-FFF2-40B4-BE49-F238E27FC236}">
-                <a16:creationId xmlns:a16="http://schemas.microsoft.com/office/drawing/2014/main" id="{F275191B-4583-8146-851D-EA0FC0A427D2}"/>
+                <a16:creationId xmlns:a16="http://schemas.microsoft.com/office/drawing/2014/main" id="{D161A347-D54E-4609-7680-93A714375D50}"/>
               </a:ext>
             </a:extLst>
           </p:cNvPr>
@@ -4495,8 +8350,8 @@
         </p:nvSpPr>
         <p:spPr>
           <a:xfrm>
-            <a:off x="36073227" y="27126710"/>
-            <a:ext cx="10552176" cy="6863417"/>
+            <a:off x="12146227" y="29149313"/>
+            <a:ext cx="6603459" cy="923330"/>
           </a:xfrm>
           <a:prstGeom prst="rect">
             <a:avLst/>
@@ -4509,72 +8364,21 @@
           </a:bodyPr>
           <a:lstStyle/>
           <a:p>
-            <a:pPr marL="228600" indent="-228600" algn="just">
-              <a:buFont typeface="+mj-lt"/>
-              <a:buAutoNum type="arabicPeriod"/>
-            </a:pPr>
-            <a:r>
-              <a:rPr lang="en-US" sz="4400" dirty="0"/>
-              <a:t>[*]c1ccn2nc(N)c([*])c2n1: Occurs in 36.4% of anchors. A </a:t>
-            </a:r>
-            <a:r>
-              <a:rPr lang="en-US" sz="4400" b="1" dirty="0"/>
-              <a:t>substituted </a:t>
-            </a:r>
-            <a:r>
-              <a:rPr lang="en-US" sz="4400" b="1" dirty="0" err="1"/>
-              <a:t>isoquinoline</a:t>
-            </a:r>
-            <a:r>
-              <a:rPr lang="en-US" sz="4400" b="1" dirty="0"/>
-              <a:t>/pyrazolo-pyridine core</a:t>
-            </a:r>
-            <a:r>
-              <a:rPr lang="en-US" sz="4400" dirty="0"/>
-              <a:t>, highly characteristic of PI3K-gamma selective inhibitors.</a:t>
-            </a:r>
-          </a:p>
-          <a:p>
-            <a:pPr marL="228600" indent="-228600" algn="just">
-              <a:buFont typeface="+mj-lt"/>
-              <a:buAutoNum type="arabicPeriod"/>
-            </a:pPr>
-            <a:endParaRPr lang="en-US" sz="4400" dirty="0"/>
-          </a:p>
-          <a:p>
-            <a:pPr marL="228600" indent="-228600" algn="just">
-              <a:buFont typeface="+mj-lt"/>
-              <a:buAutoNum type="arabicPeriod"/>
-            </a:pPr>
-            <a:r>
-              <a:rPr lang="en-US" sz="4400" dirty="0"/>
-              <a:t>[*]N1Cc2cc([*])cc([*])c2C1=O</a:t>
-            </a:r>
-            <a:r>
-              <a:rPr lang="en-US" sz="4400" b="1" dirty="0"/>
-              <a:t>: </a:t>
-            </a:r>
-            <a:r>
-              <a:rPr lang="en-US" sz="4400" b="1" dirty="0" err="1"/>
-              <a:t>Dihydroisoquinolinone</a:t>
-            </a:r>
-            <a:r>
-              <a:rPr lang="en-US" sz="4400" b="1" dirty="0"/>
-              <a:t> derivatives</a:t>
-            </a:r>
-            <a:r>
-              <a:rPr lang="en-US" sz="4400" dirty="0"/>
-              <a:t>, frequently appearing in gamma-selective chemotypes.</a:t>
-            </a:r>
+            <a:pPr algn="ctr"/>
+            <a:r>
+              <a:rPr lang="en-US" sz="5400" b="1" dirty="0" err="1"/>
+              <a:t>MolCE</a:t>
+            </a:r>
+            <a:endParaRPr lang="de-DE" sz="5400" b="1" dirty="0"/>
           </a:p>
         </p:txBody>
       </p:sp>
       <p:sp>
         <p:nvSpPr>
-          <p:cNvPr id="66" name="TextBox 65">
+          <p:cNvPr id="93" name="TextBox 92">
             <a:extLst>
               <a:ext uri="{FF2B5EF4-FFF2-40B4-BE49-F238E27FC236}">
-                <a16:creationId xmlns:a16="http://schemas.microsoft.com/office/drawing/2014/main" id="{07CA5145-B7E2-1C7C-76AD-CFE78D36AE62}"/>
+                <a16:creationId xmlns:a16="http://schemas.microsoft.com/office/drawing/2014/main" id="{FEECBCF4-1A29-9FAE-BC44-BE319FB16DC2}"/>
               </a:ext>
             </a:extLst>
           </p:cNvPr>
@@ -4583,8 +8387,463 @@
         </p:nvSpPr>
         <p:spPr>
           <a:xfrm>
-            <a:off x="25376906" y="27084437"/>
-            <a:ext cx="10550661" cy="6863417"/>
+            <a:off x="7218356" y="35652534"/>
+            <a:ext cx="16999638" cy="5970865"/>
+          </a:xfrm>
+          <a:prstGeom prst="rect">
+            <a:avLst/>
+          </a:prstGeom>
+          <a:noFill/>
+        </p:spPr>
+        <p:txBody>
+          <a:bodyPr wrap="square">
+            <a:spAutoFit/>
+          </a:bodyPr>
+          <a:lstStyle/>
+          <a:p>
+            <a:pPr>
+              <a:spcAft>
+                <a:spcPts val="1200"/>
+              </a:spcAft>
+            </a:pPr>
+            <a:r>
+              <a:rPr lang="en-US" sz="4400" b="1" dirty="0">
+                <a:latin typeface="Aptos" panose="020B0004020202020204" pitchFamily="34" charset="0"/>
+              </a:rPr>
+              <a:t>✅ AGREEMENTS (</a:t>
+            </a:r>
+            <a:r>
+              <a:rPr lang="en-US" sz="4400" b="1" i="0" dirty="0" err="1">
+                <a:solidFill>
+                  <a:srgbClr val="0F0F0F"/>
+                </a:solidFill>
+                <a:effectLst/>
+                <a:latin typeface="Aptos" panose="020B0004020202020204" pitchFamily="34" charset="0"/>
+              </a:rPr>
+              <a:t>MolCE</a:t>
+            </a:r>
+            <a:r>
+              <a:rPr lang="en-US" sz="4400" b="1" i="0" dirty="0">
+                <a:solidFill>
+                  <a:srgbClr val="0F0F0F"/>
+                </a:solidFill>
+                <a:effectLst/>
+                <a:latin typeface="Aptos" panose="020B0004020202020204" pitchFamily="34" charset="0"/>
+              </a:rPr>
+              <a:t> ↔ Counterfactuals</a:t>
+            </a:r>
+            <a:r>
+              <a:rPr lang="en-US" sz="4400" b="1" dirty="0">
+                <a:latin typeface="Aptos" panose="020B0004020202020204" pitchFamily="34" charset="0"/>
+              </a:rPr>
+              <a:t>)</a:t>
+            </a:r>
+          </a:p>
+          <a:p>
+            <a:pPr marL="742950" indent="-742950" algn="just">
+              <a:spcAft>
+                <a:spcPts val="1200"/>
+              </a:spcAft>
+              <a:buFont typeface="+mj-lt"/>
+              <a:buAutoNum type="arabicPeriod"/>
+            </a:pPr>
+            <a:r>
+              <a:rPr lang="en-US" sz="4400" b="1" i="0" dirty="0">
+                <a:solidFill>
+                  <a:srgbClr val="0F0F0F"/>
+                </a:solidFill>
+                <a:effectLst/>
+                <a:latin typeface="Aptos" panose="020B0004020202020204" pitchFamily="34" charset="0"/>
+              </a:rPr>
+              <a:t> </a:t>
+            </a:r>
+            <a:r>
+              <a:rPr lang="en-US" sz="4400" b="1" dirty="0"/>
+              <a:t>Piperazine N as critical site: </a:t>
+            </a:r>
+            <a:r>
+              <a:rPr lang="en-US" sz="4400" dirty="0"/>
+              <a:t>Both methods identify the piperazine nitrogen substituent as the most impactful site</a:t>
+            </a:r>
+          </a:p>
+          <a:p>
+            <a:pPr marL="742950" indent="-742950" algn="just">
+              <a:spcAft>
+                <a:spcPts val="1200"/>
+              </a:spcAft>
+              <a:buFont typeface="+mj-lt"/>
+              <a:buAutoNum type="arabicPeriod"/>
+            </a:pPr>
+            <a:r>
+              <a:rPr lang="en-US" sz="4400" b="1" dirty="0"/>
+              <a:t> Substituent sensitivity: </a:t>
+            </a:r>
+            <a:r>
+              <a:rPr lang="en-US" sz="4400" dirty="0"/>
+              <a:t>Both confirm that modifying the piperazine N-substituent can flip the prediction</a:t>
+            </a:r>
+          </a:p>
+          <a:p>
+            <a:pPr marL="742950" indent="-742950" algn="just">
+              <a:spcAft>
+                <a:spcPts val="1200"/>
+              </a:spcAft>
+              <a:buFont typeface="+mj-lt"/>
+              <a:buAutoNum type="arabicPeriod"/>
+            </a:pPr>
+            <a:r>
+              <a:rPr lang="en-US" sz="4400" b="1" dirty="0"/>
+              <a:t> Polarity effect: </a:t>
+            </a:r>
+            <a:r>
+              <a:rPr lang="en-US" sz="4400" dirty="0" err="1"/>
+              <a:t>MolCE's</a:t>
+            </a:r>
+            <a:r>
+              <a:rPr lang="en-US" sz="4400" dirty="0"/>
+              <a:t> contrastive R-groups (polar/charged) align with Counterfactuals showing polar additions eliminate activity</a:t>
+            </a:r>
+          </a:p>
+        </p:txBody>
+      </p:sp>
+      <p:sp>
+        <p:nvSpPr>
+          <p:cNvPr id="94" name="TextBox 93">
+            <a:extLst>
+              <a:ext uri="{FF2B5EF4-FFF2-40B4-BE49-F238E27FC236}">
+                <a16:creationId xmlns:a16="http://schemas.microsoft.com/office/drawing/2014/main" id="{CDE8FE82-D510-052C-FDC5-58E137B2D9BC}"/>
+              </a:ext>
+            </a:extLst>
+          </p:cNvPr>
+          <p:cNvSpPr txBox="1"/>
+          <p:nvPr/>
+        </p:nvSpPr>
+        <p:spPr>
+          <a:xfrm>
+            <a:off x="26374045" y="35652534"/>
+            <a:ext cx="16767142" cy="5139869"/>
+          </a:xfrm>
+          <a:prstGeom prst="rect">
+            <a:avLst/>
+          </a:prstGeom>
+          <a:noFill/>
+        </p:spPr>
+        <p:txBody>
+          <a:bodyPr wrap="square">
+            <a:spAutoFit/>
+          </a:bodyPr>
+          <a:lstStyle/>
+          <a:p>
+            <a:pPr>
+              <a:spcAft>
+                <a:spcPts val="1200"/>
+              </a:spcAft>
+              <a:defRPr/>
+            </a:pPr>
+            <a:r>
+              <a:rPr kumimoji="0" lang="en-US" sz="4400" b="1" i="0" u="none" strike="noStrike" kern="1200" cap="none" spc="0" normalizeH="0" baseline="0" noProof="0" dirty="0">
+                <a:ln>
+                  <a:noFill/>
+                </a:ln>
+                <a:solidFill>
+                  <a:prstClr val="black"/>
+                </a:solidFill>
+                <a:effectLst/>
+                <a:uLnTx/>
+                <a:uFillTx/>
+                <a:latin typeface="Aptos" panose="02110004020202020204"/>
+                <a:ea typeface="+mn-ea"/>
+                <a:cs typeface="+mn-cs"/>
+              </a:rPr>
+              <a:t>❌ DISAGREEMENTS (</a:t>
+            </a:r>
+            <a:r>
+              <a:rPr lang="en-US" sz="4400" b="1" i="0" dirty="0" err="1">
+                <a:solidFill>
+                  <a:srgbClr val="0F0F0F"/>
+                </a:solidFill>
+                <a:effectLst/>
+                <a:latin typeface="ui-sans-serif"/>
+              </a:rPr>
+              <a:t>MolCE</a:t>
+            </a:r>
+            <a:r>
+              <a:rPr lang="en-US" sz="4400" b="1" i="0" dirty="0">
+                <a:solidFill>
+                  <a:srgbClr val="0F0F0F"/>
+                </a:solidFill>
+                <a:effectLst/>
+                <a:latin typeface="ui-sans-serif"/>
+              </a:rPr>
+              <a:t> ↔ Counterfactuals</a:t>
+            </a:r>
+            <a:r>
+              <a:rPr kumimoji="0" lang="en-US" sz="4400" b="1" i="0" u="none" strike="noStrike" kern="1200" cap="none" spc="0" normalizeH="0" baseline="0" noProof="0" dirty="0">
+                <a:ln>
+                  <a:noFill/>
+                </a:ln>
+                <a:solidFill>
+                  <a:prstClr val="black"/>
+                </a:solidFill>
+                <a:effectLst/>
+                <a:uLnTx/>
+                <a:uFillTx/>
+                <a:latin typeface="Aptos" panose="02110004020202020204"/>
+                <a:ea typeface="+mn-ea"/>
+                <a:cs typeface="+mn-cs"/>
+              </a:rPr>
+              <a:t>)</a:t>
+            </a:r>
+          </a:p>
+          <a:p>
+            <a:pPr marL="742950" marR="0" lvl="0" indent="-742950" algn="just" defTabSz="457200" rtl="0" eaLnBrk="1" fontAlgn="auto" latinLnBrk="0" hangingPunct="1">
+              <a:lnSpc>
+                <a:spcPct val="100000"/>
+              </a:lnSpc>
+              <a:spcBef>
+                <a:spcPts val="0"/>
+              </a:spcBef>
+              <a:spcAft>
+                <a:spcPts val="1200"/>
+              </a:spcAft>
+              <a:buClrTx/>
+              <a:buSzTx/>
+              <a:buFont typeface="+mj-lt"/>
+              <a:buAutoNum type="arabicPeriod"/>
+              <a:tabLst/>
+              <a:defRPr/>
+            </a:pPr>
+            <a:r>
+              <a:rPr kumimoji="0" lang="en-US" sz="4400" b="1" i="0" u="none" strike="noStrike" kern="1200" cap="none" spc="0" normalizeH="0" baseline="0" noProof="0" dirty="0">
+                <a:ln>
+                  <a:noFill/>
+                </a:ln>
+                <a:solidFill>
+                  <a:prstClr val="black"/>
+                </a:solidFill>
+                <a:effectLst/>
+                <a:uLnTx/>
+                <a:uFillTx/>
+                <a:latin typeface="Aptos" panose="02110004020202020204"/>
+                <a:ea typeface="+mn-ea"/>
+                <a:cs typeface="+mn-cs"/>
+              </a:rPr>
+              <a:t>Scaffold importance: </a:t>
+            </a:r>
+            <a:r>
+              <a:rPr kumimoji="0" lang="en-US" sz="4400" i="0" u="none" strike="noStrike" kern="1200" cap="none" spc="0" normalizeH="0" baseline="0" noProof="0" dirty="0" err="1">
+                <a:ln>
+                  <a:noFill/>
+                </a:ln>
+                <a:solidFill>
+                  <a:prstClr val="black"/>
+                </a:solidFill>
+                <a:effectLst/>
+                <a:uLnTx/>
+                <a:uFillTx/>
+                <a:latin typeface="Aptos" panose="02110004020202020204"/>
+                <a:ea typeface="+mn-ea"/>
+                <a:cs typeface="+mn-cs"/>
+              </a:rPr>
+              <a:t>MolCE</a:t>
+            </a:r>
+            <a:r>
+              <a:rPr kumimoji="0" lang="en-US" sz="4400" i="0" u="none" strike="noStrike" kern="1200" cap="none" spc="0" normalizeH="0" baseline="0" noProof="0" dirty="0">
+                <a:ln>
+                  <a:noFill/>
+                </a:ln>
+                <a:solidFill>
+                  <a:prstClr val="black"/>
+                </a:solidFill>
+                <a:effectLst/>
+                <a:uLnTx/>
+                <a:uFillTx/>
+                <a:latin typeface="Aptos" panose="02110004020202020204"/>
+                <a:ea typeface="+mn-ea"/>
+                <a:cs typeface="+mn-cs"/>
+              </a:rPr>
+              <a:t> shows scaffold contrast score = 0.0 (scaffold changes don't matter), while Counterfactuals show substituent changes do matter</a:t>
+            </a:r>
+          </a:p>
+          <a:p>
+            <a:pPr marL="742950" marR="0" lvl="0" indent="-742950" algn="just" defTabSz="457200" rtl="0" eaLnBrk="1" fontAlgn="auto" latinLnBrk="0" hangingPunct="1">
+              <a:lnSpc>
+                <a:spcPct val="100000"/>
+              </a:lnSpc>
+              <a:spcBef>
+                <a:spcPts val="0"/>
+              </a:spcBef>
+              <a:spcAft>
+                <a:spcPts val="1200"/>
+              </a:spcAft>
+              <a:buClrTx/>
+              <a:buSzTx/>
+              <a:buFont typeface="+mj-lt"/>
+              <a:buAutoNum type="arabicPeriod"/>
+              <a:tabLst/>
+              <a:defRPr/>
+            </a:pPr>
+            <a:r>
+              <a:rPr kumimoji="0" lang="en-US" sz="4400" b="1" i="0" u="none" strike="noStrike" kern="1200" cap="none" spc="0" normalizeH="0" baseline="0" noProof="0" dirty="0">
+                <a:ln>
+                  <a:noFill/>
+                </a:ln>
+                <a:solidFill>
+                  <a:prstClr val="black"/>
+                </a:solidFill>
+                <a:effectLst/>
+                <a:uLnTx/>
+                <a:uFillTx/>
+                <a:latin typeface="Aptos" panose="02110004020202020204"/>
+                <a:ea typeface="+mn-ea"/>
+                <a:cs typeface="+mn-cs"/>
+              </a:rPr>
+              <a:t>Mechanism: </a:t>
+            </a:r>
+            <a:r>
+              <a:rPr kumimoji="0" lang="en-US" sz="4400" i="0" u="none" strike="noStrike" kern="1200" cap="none" spc="0" normalizeH="0" baseline="0" noProof="0" dirty="0" err="1">
+                <a:ln>
+                  <a:noFill/>
+                </a:ln>
+                <a:solidFill>
+                  <a:prstClr val="black"/>
+                </a:solidFill>
+                <a:effectLst/>
+                <a:uLnTx/>
+                <a:uFillTx/>
+                <a:latin typeface="Aptos" panose="02110004020202020204"/>
+                <a:ea typeface="+mn-ea"/>
+                <a:cs typeface="+mn-cs"/>
+              </a:rPr>
+              <a:t>MolCE</a:t>
+            </a:r>
+            <a:r>
+              <a:rPr kumimoji="0" lang="en-US" sz="4400" i="0" u="none" strike="noStrike" kern="1200" cap="none" spc="0" normalizeH="0" baseline="0" noProof="0" dirty="0">
+                <a:ln>
+                  <a:noFill/>
+                </a:ln>
+                <a:solidFill>
+                  <a:prstClr val="black"/>
+                </a:solidFill>
+                <a:effectLst/>
+                <a:uLnTx/>
+                <a:uFillTx/>
+                <a:latin typeface="Aptos" panose="02110004020202020204"/>
+                <a:ea typeface="+mn-ea"/>
+                <a:cs typeface="+mn-cs"/>
+              </a:rPr>
+              <a:t> focuses on contrast (why not inactive?), while Counterfactuals show transformation (how to become inactive?)</a:t>
+            </a:r>
+          </a:p>
+        </p:txBody>
+      </p:sp>
+      <p:grpSp>
+        <p:nvGrpSpPr>
+          <p:cNvPr id="102" name="Group 101">
+            <a:extLst>
+              <a:ext uri="{FF2B5EF4-FFF2-40B4-BE49-F238E27FC236}">
+                <a16:creationId xmlns:a16="http://schemas.microsoft.com/office/drawing/2014/main" id="{D6439D96-81F8-F222-FD0A-6CB3EEA18EBC}"/>
+              </a:ext>
+            </a:extLst>
+          </p:cNvPr>
+          <p:cNvGrpSpPr/>
+          <p:nvPr/>
+        </p:nvGrpSpPr>
+        <p:grpSpPr>
+          <a:xfrm>
+            <a:off x="26135503" y="30203702"/>
+            <a:ext cx="16963406" cy="4094569"/>
+            <a:chOff x="25678303" y="34723809"/>
+            <a:chExt cx="16963406" cy="4094569"/>
+          </a:xfrm>
+        </p:grpSpPr>
+        <p:pic>
+          <p:nvPicPr>
+            <p:cNvPr id="100" name="Picture 99">
+              <a:extLst>
+                <a:ext uri="{FF2B5EF4-FFF2-40B4-BE49-F238E27FC236}">
+                  <a16:creationId xmlns:a16="http://schemas.microsoft.com/office/drawing/2014/main" id="{B1F6B432-D2DB-A370-2458-530FF31A48DE}"/>
+                </a:ext>
+              </a:extLst>
+            </p:cNvPr>
+            <p:cNvPicPr>
+              <a:picLocks noChangeAspect="1"/>
+            </p:cNvPicPr>
+            <p:nvPr/>
+          </p:nvPicPr>
+          <p:blipFill>
+            <a:blip r:embed="rId5">
+              <a:extLst>
+                <a:ext uri="{28A0092B-C50C-407E-A947-70E740481C1C}">
+                  <a14:useLocalDpi xmlns:a14="http://schemas.microsoft.com/office/drawing/2010/main" val="0"/>
+                </a:ext>
+              </a:extLst>
+            </a:blip>
+            <a:srcRect l="28881" t="31485" r="52081" b="52476"/>
+            <a:stretch/>
+          </p:blipFill>
+          <p:spPr>
+            <a:xfrm>
+              <a:off x="25678303" y="34723809"/>
+              <a:ext cx="9202228" cy="4094569"/>
+            </a:xfrm>
+            <a:prstGeom prst="rect">
+              <a:avLst/>
+            </a:prstGeom>
+          </p:spPr>
+        </p:pic>
+        <p:pic>
+          <p:nvPicPr>
+            <p:cNvPr id="101" name="Picture 100">
+              <a:extLst>
+                <a:ext uri="{FF2B5EF4-FFF2-40B4-BE49-F238E27FC236}">
+                  <a16:creationId xmlns:a16="http://schemas.microsoft.com/office/drawing/2014/main" id="{02144A18-8CA9-B867-F30C-81AC5EE2D851}"/>
+                </a:ext>
+              </a:extLst>
+            </p:cNvPr>
+            <p:cNvPicPr>
+              <a:picLocks noChangeAspect="1"/>
+            </p:cNvPicPr>
+            <p:nvPr/>
+          </p:nvPicPr>
+          <p:blipFill>
+            <a:blip r:embed="rId5">
+              <a:extLst>
+                <a:ext uri="{28A0092B-C50C-407E-A947-70E740481C1C}">
+                  <a14:useLocalDpi xmlns:a14="http://schemas.microsoft.com/office/drawing/2010/main" val="0"/>
+                </a:ext>
+              </a:extLst>
+            </a:blip>
+            <a:srcRect l="54567" t="30675" r="27299" b="52476"/>
+            <a:stretch/>
+          </p:blipFill>
+          <p:spPr>
+            <a:xfrm>
+              <a:off x="35089246" y="35101923"/>
+              <a:ext cx="7552463" cy="3706321"/>
+            </a:xfrm>
+            <a:prstGeom prst="rect">
+              <a:avLst/>
+            </a:prstGeom>
+          </p:spPr>
+        </p:pic>
+      </p:grpSp>
+      <p:sp>
+        <p:nvSpPr>
+          <p:cNvPr id="104" name="TextBox 103">
+            <a:extLst>
+              <a:ext uri="{FF2B5EF4-FFF2-40B4-BE49-F238E27FC236}">
+                <a16:creationId xmlns:a16="http://schemas.microsoft.com/office/drawing/2014/main" id="{447066D7-B3FD-7386-0F15-CA073EB9CD5F}"/>
+              </a:ext>
+            </a:extLst>
+          </p:cNvPr>
+          <p:cNvSpPr txBox="1"/>
+          <p:nvPr/>
+        </p:nvSpPr>
+        <p:spPr>
+          <a:xfrm>
+            <a:off x="27209875" y="34408132"/>
+            <a:ext cx="5713914" cy="1015663"/>
           </a:xfrm>
           <a:prstGeom prst="rect">
             <a:avLst/>
@@ -4597,94 +8856,202 @@
           </a:bodyPr>
           <a:lstStyle/>
           <a:p>
-            <a:pPr marL="228600" indent="-228600" algn="just">
-              <a:buFont typeface="+mj-lt"/>
-              <a:buAutoNum type="arabicPeriod"/>
-            </a:pPr>
-            <a:r>
-              <a:rPr lang="en-US" sz="4400" dirty="0"/>
-              <a:t>[*]c1ncnc(N)c1C#N: Occurs in 26.4% of correctly predicted Class 1 compounds. This </a:t>
-            </a:r>
-            <a:r>
-              <a:rPr lang="en-US" sz="4400" b="1" dirty="0"/>
-              <a:t>cyano-substituted pyrimidine</a:t>
-            </a:r>
-            <a:r>
-              <a:rPr lang="en-US" sz="4400" dirty="0"/>
-              <a:t> motif is a classic </a:t>
-            </a:r>
-            <a:r>
-              <a:rPr lang="en-US" sz="4400" b="1" dirty="0"/>
-              <a:t>kinase hinge-binder</a:t>
-            </a:r>
-            <a:r>
-              <a:rPr lang="en-US" sz="4400" dirty="0"/>
-              <a:t>.</a:t>
-            </a:r>
-          </a:p>
-          <a:p>
-            <a:pPr marL="228600" indent="-228600" algn="just">
-              <a:buFont typeface="+mj-lt"/>
-              <a:buAutoNum type="arabicPeriod"/>
-            </a:pPr>
-            <a:endParaRPr lang="en-US" sz="4400" dirty="0"/>
-          </a:p>
-          <a:p>
-            <a:pPr marL="228600" indent="-228600" algn="just">
-              <a:buFont typeface="+mj-lt"/>
-              <a:buAutoNum type="arabicPeriod"/>
-            </a:pPr>
-            <a:r>
-              <a:rPr lang="en-US" sz="4400" dirty="0"/>
-              <a:t>[*]c1nc(N)</a:t>
-            </a:r>
-            <a:r>
-              <a:rPr lang="en-US" sz="4400" dirty="0" err="1"/>
-              <a:t>nc</a:t>
-            </a:r>
-            <a:r>
-              <a:rPr lang="en-US" sz="4400" dirty="0"/>
-              <a:t>(N)c1C#N: Occurs in 25.0% of cases. A </a:t>
-            </a:r>
-            <a:r>
-              <a:rPr lang="en-US" sz="4400" b="1" dirty="0"/>
-              <a:t>diamino-</a:t>
-            </a:r>
-            <a:r>
-              <a:rPr lang="en-US" sz="4400" b="1" dirty="0" err="1"/>
-              <a:t>cyano</a:t>
-            </a:r>
-            <a:r>
-              <a:rPr lang="en-US" sz="4400" b="1" dirty="0"/>
-              <a:t> pyrimidine derivative</a:t>
-            </a:r>
-            <a:r>
-              <a:rPr lang="en-US" sz="4400" dirty="0"/>
-              <a:t>, strongly indicating </a:t>
-            </a:r>
-            <a:r>
-              <a:rPr lang="en-US" sz="4400" b="1" dirty="0"/>
-              <a:t>hydrogen-bonding interactions </a:t>
-            </a:r>
-            <a:r>
-              <a:rPr lang="en-US" sz="4400" dirty="0"/>
-              <a:t>with the </a:t>
-            </a:r>
-            <a:r>
-              <a:rPr lang="en-US" sz="4400" b="1" dirty="0"/>
-              <a:t>hinge region</a:t>
-            </a:r>
-            <a:r>
-              <a:rPr lang="en-US" sz="4400" dirty="0"/>
-              <a:t>.</a:t>
-            </a:r>
+            <a:pPr algn="ctr"/>
+            <a:r>
+              <a:rPr lang="en-US" sz="3000" b="1" i="0" dirty="0">
+                <a:solidFill>
+                  <a:srgbClr val="0F0F0F"/>
+                </a:solidFill>
+                <a:effectLst/>
+                <a:latin typeface="ui-sans-serif"/>
+              </a:rPr>
+              <a:t>CF #1 (substituent)</a:t>
+            </a:r>
+          </a:p>
+          <a:p>
+            <a:pPr algn="ctr"/>
+            <a:r>
+              <a:rPr lang="en-US" sz="3000" b="1" dirty="0">
+                <a:solidFill>
+                  <a:srgbClr val="0F0F0F"/>
+                </a:solidFill>
+                <a:latin typeface="ui-sans-serif"/>
+              </a:rPr>
+              <a:t>Predicted class: 0| Similarity: 0.68</a:t>
+            </a:r>
+            <a:endParaRPr lang="en-US" sz="3000" dirty="0"/>
+          </a:p>
+        </p:txBody>
+      </p:sp>
+      <p:sp>
+        <p:nvSpPr>
+          <p:cNvPr id="105" name="TextBox 104">
+            <a:extLst>
+              <a:ext uri="{FF2B5EF4-FFF2-40B4-BE49-F238E27FC236}">
+                <a16:creationId xmlns:a16="http://schemas.microsoft.com/office/drawing/2014/main" id="{3340F736-7968-FDB4-A971-D1E03504210F}"/>
+              </a:ext>
+            </a:extLst>
+          </p:cNvPr>
+          <p:cNvSpPr txBox="1"/>
+          <p:nvPr/>
+        </p:nvSpPr>
+        <p:spPr>
+          <a:xfrm>
+            <a:off x="36183383" y="34408132"/>
+            <a:ext cx="5713914" cy="1015663"/>
+          </a:xfrm>
+          <a:prstGeom prst="rect">
+            <a:avLst/>
+          </a:prstGeom>
+          <a:noFill/>
+        </p:spPr>
+        <p:txBody>
+          <a:bodyPr wrap="square" rtlCol="0">
+            <a:spAutoFit/>
+          </a:bodyPr>
+          <a:lstStyle/>
+          <a:p>
+            <a:pPr algn="ctr"/>
+            <a:r>
+              <a:rPr lang="en-US" sz="3000" b="1" i="0" dirty="0">
+                <a:solidFill>
+                  <a:srgbClr val="0F0F0F"/>
+                </a:solidFill>
+                <a:effectLst/>
+                <a:latin typeface="ui-sans-serif"/>
+              </a:rPr>
+              <a:t>CF #2 (substituent)</a:t>
+            </a:r>
+          </a:p>
+          <a:p>
+            <a:pPr algn="ctr"/>
+            <a:r>
+              <a:rPr lang="en-US" sz="3000" b="1" dirty="0">
+                <a:solidFill>
+                  <a:srgbClr val="0F0F0F"/>
+                </a:solidFill>
+                <a:latin typeface="ui-sans-serif"/>
+              </a:rPr>
+              <a:t>Predicted class: 0| Similarity: 0.68</a:t>
+            </a:r>
+            <a:endParaRPr lang="en-US" sz="3000" dirty="0"/>
+          </a:p>
+        </p:txBody>
+      </p:sp>
+      <p:sp>
+        <p:nvSpPr>
+          <p:cNvPr id="106" name="TextBox 105">
+            <a:extLst>
+              <a:ext uri="{FF2B5EF4-FFF2-40B4-BE49-F238E27FC236}">
+                <a16:creationId xmlns:a16="http://schemas.microsoft.com/office/drawing/2014/main" id="{B8051128-A1DB-8545-0F40-55389E4B301D}"/>
+              </a:ext>
+            </a:extLst>
+          </p:cNvPr>
+          <p:cNvSpPr txBox="1"/>
+          <p:nvPr/>
+        </p:nvSpPr>
+        <p:spPr>
+          <a:xfrm>
+            <a:off x="8223531" y="34408132"/>
+            <a:ext cx="5414457" cy="1015663"/>
+          </a:xfrm>
+          <a:prstGeom prst="rect">
+            <a:avLst/>
+          </a:prstGeom>
+          <a:noFill/>
+        </p:spPr>
+        <p:txBody>
+          <a:bodyPr wrap="square" rtlCol="0">
+            <a:spAutoFit/>
+          </a:bodyPr>
+          <a:lstStyle/>
+          <a:p>
+            <a:pPr algn="ctr"/>
+            <a:r>
+              <a:rPr lang="en-US" sz="3000" b="1" i="0" dirty="0">
+                <a:solidFill>
+                  <a:srgbClr val="0F0F0F"/>
+                </a:solidFill>
+                <a:effectLst/>
+                <a:latin typeface="ui-sans-serif"/>
+              </a:rPr>
+              <a:t>Rank 1 | Site 1</a:t>
+            </a:r>
+          </a:p>
+          <a:p>
+            <a:pPr algn="ctr"/>
+            <a:r>
+              <a:rPr lang="en-US" sz="3000" b="1" dirty="0">
+                <a:solidFill>
+                  <a:srgbClr val="0F0F0F"/>
+                </a:solidFill>
+                <a:latin typeface="ui-sans-serif"/>
+              </a:rPr>
+              <a:t>Contrast: 1.00</a:t>
+            </a:r>
+            <a:endParaRPr lang="en-US" sz="3000" dirty="0"/>
+          </a:p>
+        </p:txBody>
+      </p:sp>
+      <p:sp>
+        <p:nvSpPr>
+          <p:cNvPr id="107" name="TextBox 106">
+            <a:extLst>
+              <a:ext uri="{FF2B5EF4-FFF2-40B4-BE49-F238E27FC236}">
+                <a16:creationId xmlns:a16="http://schemas.microsoft.com/office/drawing/2014/main" id="{F021D298-CD48-A056-2501-CA7203875916}"/>
+              </a:ext>
+            </a:extLst>
+          </p:cNvPr>
+          <p:cNvSpPr txBox="1"/>
+          <p:nvPr/>
+        </p:nvSpPr>
+        <p:spPr>
+          <a:xfrm>
+            <a:off x="16969252" y="34408132"/>
+            <a:ext cx="5453166" cy="1015663"/>
+          </a:xfrm>
+          <a:prstGeom prst="rect">
+            <a:avLst/>
+          </a:prstGeom>
+          <a:noFill/>
+        </p:spPr>
+        <p:txBody>
+          <a:bodyPr wrap="square" rtlCol="0">
+            <a:spAutoFit/>
+          </a:bodyPr>
+          <a:lstStyle/>
+          <a:p>
+            <a:pPr algn="ctr"/>
+            <a:r>
+              <a:rPr lang="en-US" sz="3000" b="1" i="0" dirty="0">
+                <a:solidFill>
+                  <a:srgbClr val="0F0F0F"/>
+                </a:solidFill>
+                <a:effectLst/>
+                <a:latin typeface="ui-sans-serif"/>
+              </a:rPr>
+              <a:t>Rank 2 | Site 1</a:t>
+            </a:r>
+          </a:p>
+          <a:p>
+            <a:pPr algn="ctr"/>
+            <a:r>
+              <a:rPr lang="en-US" sz="3000" b="1" dirty="0">
+                <a:solidFill>
+                  <a:srgbClr val="0F0F0F"/>
+                </a:solidFill>
+                <a:latin typeface="ui-sans-serif"/>
+              </a:rPr>
+              <a:t>Contrast: 1.00</a:t>
+            </a:r>
+            <a:endParaRPr lang="en-US" sz="3000" dirty="0"/>
           </a:p>
         </p:txBody>
       </p:sp>
     </p:spTree>
     <p:extLst>
       <p:ext uri="{BB962C8B-B14F-4D97-AF65-F5344CB8AC3E}">
-        <p14:creationId xmlns:p14="http://schemas.microsoft.com/office/powerpoint/2010/main" val="1485803423"/>
+        <p14:creationId xmlns:p14="http://schemas.microsoft.com/office/powerpoint/2010/main" val="3074598117"/>
       </p:ext>
     </p:extLst>
   </p:cSld>
@@ -4694,8 +9061,8 @@
 </p:sld>
 </file>
 
-<file path=ppt/slides/slide2.xml><?xml version="1.0" encoding="utf-8"?>
-<p:sld xmlns:a="http://schemas.openxmlformats.org/drawingml/2006/main" xmlns:r="http://schemas.openxmlformats.org/officeDocument/2006/relationships" xmlns:p="http://schemas.openxmlformats.org/presentationml/2006/main">
+<file path=ppt/slides/slide3.xml><?xml version="1.0" encoding="utf-8"?>
+<p:sld xmlns:a="http://schemas.openxmlformats.org/drawingml/2006/main" xmlns:r="http://schemas.openxmlformats.org/officeDocument/2006/relationships" xmlns:p="http://schemas.openxmlformats.org/presentationml/2006/main" show="0">
   <p:cSld>
     <p:spTree>
       <p:nvGrpSpPr>
@@ -4725,8 +9092,8 @@
         </p:nvSpPr>
         <p:spPr>
           <a:xfrm>
-            <a:off x="11390334" y="12224390"/>
-            <a:ext cx="29946600" cy="13758873"/>
+            <a:off x="13691175" y="12224390"/>
+            <a:ext cx="23735578" cy="13758873"/>
           </a:xfrm>
           <a:prstGeom prst="roundRect">
             <a:avLst/>
@@ -7346,7 +11713,7 @@
     </p:spTree>
     <p:extLst>
       <p:ext uri="{BB962C8B-B14F-4D97-AF65-F5344CB8AC3E}">
-        <p14:creationId xmlns:p14="http://schemas.microsoft.com/office/powerpoint/2010/main" val="2350157358"/>
+        <p14:creationId xmlns:p14="http://schemas.microsoft.com/office/powerpoint/2010/main" val="3647094520"/>
       </p:ext>
     </p:extLst>
   </p:cSld>
@@ -7356,8 +11723,1748 @@
 </p:sld>
 </file>
 
-<file path=ppt/slides/slide3.xml><?xml version="1.0" encoding="utf-8"?>
-<p:sld xmlns:a="http://schemas.openxmlformats.org/drawingml/2006/main" xmlns:r="http://schemas.openxmlformats.org/officeDocument/2006/relationships" xmlns:p="http://schemas.openxmlformats.org/presentationml/2006/main">
+<file path=ppt/slides/slide4.xml><?xml version="1.0" encoding="utf-8"?>
+<p:sld xmlns:a="http://schemas.openxmlformats.org/drawingml/2006/main" xmlns:r="http://schemas.openxmlformats.org/officeDocument/2006/relationships" xmlns:p="http://schemas.openxmlformats.org/presentationml/2006/main" show="0">
+  <p:cSld>
+    <p:spTree>
+      <p:nvGrpSpPr>
+        <p:cNvPr id="1" name=""/>
+        <p:cNvGrpSpPr/>
+        <p:nvPr/>
+      </p:nvGrpSpPr>
+      <p:grpSpPr>
+        <a:xfrm>
+          <a:off x="0" y="0"/>
+          <a:ext cx="0" cy="0"/>
+          <a:chOff x="0" y="0"/>
+          <a:chExt cx="0" cy="0"/>
+        </a:xfrm>
+      </p:grpSpPr>
+      <p:pic>
+        <p:nvPicPr>
+          <p:cNvPr id="25" name="Picture 24" descr="A diagram of a confusion matrix&#10;&#10;AI-generated content may be incorrect.">
+            <a:extLst>
+              <a:ext uri="{FF2B5EF4-FFF2-40B4-BE49-F238E27FC236}">
+                <a16:creationId xmlns:a16="http://schemas.microsoft.com/office/drawing/2014/main" id="{35B53DDB-EACD-148B-0EA7-FF3D0B7D55BA}"/>
+              </a:ext>
+            </a:extLst>
+          </p:cNvPr>
+          <p:cNvPicPr>
+            <a:picLocks noChangeAspect="1"/>
+          </p:cNvPicPr>
+          <p:nvPr/>
+        </p:nvPicPr>
+        <p:blipFill>
+          <a:blip r:embed="rId2">
+            <a:extLst>
+              <a:ext uri="{28A0092B-C50C-407E-A947-70E740481C1C}">
+                <a14:useLocalDpi xmlns:a14="http://schemas.microsoft.com/office/drawing/2010/main" val="0"/>
+              </a:ext>
+            </a:extLst>
+          </a:blip>
+          <a:srcRect r="14943"/>
+          <a:stretch/>
+        </p:blipFill>
+        <p:spPr>
+          <a:xfrm>
+            <a:off x="693492" y="19461184"/>
+            <a:ext cx="7978651" cy="8273962"/>
+          </a:xfrm>
+          <a:prstGeom prst="rect">
+            <a:avLst/>
+          </a:prstGeom>
+        </p:spPr>
+      </p:pic>
+      <p:sp>
+        <p:nvSpPr>
+          <p:cNvPr id="28" name="Rectangle: Rounded Corners 27">
+            <a:extLst>
+              <a:ext uri="{FF2B5EF4-FFF2-40B4-BE49-F238E27FC236}">
+                <a16:creationId xmlns:a16="http://schemas.microsoft.com/office/drawing/2014/main" id="{A8D94A47-E16E-5FA6-0A1F-80756C21A4F7}"/>
+              </a:ext>
+            </a:extLst>
+          </p:cNvPr>
+          <p:cNvSpPr/>
+          <p:nvPr/>
+        </p:nvSpPr>
+        <p:spPr>
+          <a:xfrm>
+            <a:off x="693491" y="18597830"/>
+            <a:ext cx="22127025" cy="15953137"/>
+          </a:xfrm>
+          <a:prstGeom prst="roundRect">
+            <a:avLst/>
+          </a:prstGeom>
+          <a:noFill/>
+        </p:spPr>
+        <p:style>
+          <a:lnRef idx="2">
+            <a:schemeClr val="accent1">
+              <a:shade val="15000"/>
+            </a:schemeClr>
+          </a:lnRef>
+          <a:fillRef idx="1">
+            <a:schemeClr val="accent1"/>
+          </a:fillRef>
+          <a:effectRef idx="0">
+            <a:schemeClr val="accent1"/>
+          </a:effectRef>
+          <a:fontRef idx="minor">
+            <a:schemeClr val="lt1"/>
+          </a:fontRef>
+        </p:style>
+        <p:txBody>
+          <a:bodyPr rtlCol="0" anchor="ctr"/>
+          <a:lstStyle/>
+          <a:p>
+            <a:pPr algn="ctr"/>
+            <a:endParaRPr lang="en-US" dirty="0"/>
+          </a:p>
+        </p:txBody>
+      </p:sp>
+      <p:sp>
+        <p:nvSpPr>
+          <p:cNvPr id="6" name="Rectangle: Rounded Corners 5">
+            <a:extLst>
+              <a:ext uri="{FF2B5EF4-FFF2-40B4-BE49-F238E27FC236}">
+                <a16:creationId xmlns:a16="http://schemas.microsoft.com/office/drawing/2014/main" id="{9EB25CD5-A017-BD2B-F176-3CA388103295}"/>
+              </a:ext>
+            </a:extLst>
+          </p:cNvPr>
+          <p:cNvSpPr/>
+          <p:nvPr/>
+        </p:nvSpPr>
+        <p:spPr>
+          <a:xfrm>
+            <a:off x="1633447" y="8198389"/>
+            <a:ext cx="17246113" cy="6270664"/>
+          </a:xfrm>
+          <a:prstGeom prst="roundRect">
+            <a:avLst/>
+          </a:prstGeom>
+          <a:solidFill>
+            <a:schemeClr val="bg1">
+              <a:lumMod val="85000"/>
+            </a:schemeClr>
+          </a:solidFill>
+        </p:spPr>
+        <p:style>
+          <a:lnRef idx="2">
+            <a:schemeClr val="accent1">
+              <a:shade val="15000"/>
+            </a:schemeClr>
+          </a:lnRef>
+          <a:fillRef idx="1">
+            <a:schemeClr val="accent1"/>
+          </a:fillRef>
+          <a:effectRef idx="0">
+            <a:schemeClr val="accent1"/>
+          </a:effectRef>
+          <a:fontRef idx="minor">
+            <a:schemeClr val="lt1"/>
+          </a:fontRef>
+        </p:style>
+        <p:txBody>
+          <a:bodyPr rtlCol="0" anchor="ctr"/>
+          <a:lstStyle/>
+          <a:p>
+            <a:pPr algn="just"/>
+            <a:endParaRPr lang="en-US" sz="4400" dirty="0">
+              <a:solidFill>
+                <a:schemeClr val="tx1"/>
+              </a:solidFill>
+            </a:endParaRPr>
+          </a:p>
+          <a:p>
+            <a:pPr algn="just"/>
+            <a:r>
+              <a:rPr lang="en-US" sz="4400" dirty="0">
+                <a:solidFill>
+                  <a:schemeClr val="tx1"/>
+                </a:solidFill>
+              </a:rPr>
+              <a:t>You are running a reproducibility study for compound selectivity prediction. The goal is to train a Balanced Random Forest Classifier to distinguish PI3K-delta (</a:t>
+            </a:r>
+            <a:r>
+              <a:rPr lang="en-US" sz="4400" dirty="0" err="1">
+                <a:solidFill>
+                  <a:schemeClr val="tx1"/>
+                </a:solidFill>
+              </a:rPr>
+              <a:t>UniProt</a:t>
+            </a:r>
+            <a:r>
+              <a:rPr lang="en-US" sz="4400" dirty="0">
+                <a:solidFill>
+                  <a:schemeClr val="tx1"/>
+                </a:solidFill>
+              </a:rPr>
+              <a:t>: O00329) vs PI3K-gamma (</a:t>
+            </a:r>
+            <a:r>
+              <a:rPr lang="en-US" sz="4400" dirty="0" err="1">
+                <a:solidFill>
+                  <a:schemeClr val="tx1"/>
+                </a:solidFill>
+              </a:rPr>
+              <a:t>UniProt</a:t>
+            </a:r>
+            <a:r>
+              <a:rPr lang="en-US" sz="4400" dirty="0">
+                <a:solidFill>
+                  <a:schemeClr val="tx1"/>
+                </a:solidFill>
+              </a:rPr>
+              <a:t>:  P48736) selective compounds, evaluate its performance, and identify recurrent molecular anchor fragments that drive the model's correct predictions for each selective class (class 1 &amp; 2) and discuss the chemical insight gained</a:t>
+            </a:r>
+            <a:r>
+              <a:rPr lang="en-US" sz="5400" dirty="0">
+                <a:solidFill>
+                  <a:schemeClr val="tx1"/>
+                </a:solidFill>
+              </a:rPr>
+              <a:t>.</a:t>
+            </a:r>
+          </a:p>
+          <a:p>
+            <a:pPr algn="ctr"/>
+            <a:endParaRPr lang="en-US" dirty="0"/>
+          </a:p>
+        </p:txBody>
+      </p:sp>
+      <p:pic>
+        <p:nvPicPr>
+          <p:cNvPr id="7" name="Graphic 6" descr="Customer review with solid fill">
+            <a:extLst>
+              <a:ext uri="{FF2B5EF4-FFF2-40B4-BE49-F238E27FC236}">
+                <a16:creationId xmlns:a16="http://schemas.microsoft.com/office/drawing/2014/main" id="{D7B0435D-F7B8-934A-EEAB-9AFE4BFF1EDC}"/>
+              </a:ext>
+            </a:extLst>
+          </p:cNvPr>
+          <p:cNvPicPr>
+            <a:picLocks noChangeAspect="1"/>
+          </p:cNvPicPr>
+          <p:nvPr/>
+        </p:nvPicPr>
+        <p:blipFill>
+          <a:blip r:embed="rId3">
+            <a:extLst>
+              <a:ext uri="{96DAC541-7B7A-43D3-8B79-37D633B846F1}">
+                <asvg:svgBlip xmlns:asvg="http://schemas.microsoft.com/office/drawing/2016/SVG/main" r:embed="rId4"/>
+              </a:ext>
+            </a:extLst>
+          </a:blip>
+          <a:stretch>
+            <a:fillRect/>
+          </a:stretch>
+        </p:blipFill>
+        <p:spPr>
+          <a:xfrm>
+            <a:off x="8856328" y="5398038"/>
+            <a:ext cx="2800350" cy="2800350"/>
+          </a:xfrm>
+          <a:prstGeom prst="rect">
+            <a:avLst/>
+          </a:prstGeom>
+        </p:spPr>
+      </p:pic>
+      <p:pic>
+        <p:nvPicPr>
+          <p:cNvPr id="11" name="Graphic 10" descr="Tools with solid fill">
+            <a:extLst>
+              <a:ext uri="{FF2B5EF4-FFF2-40B4-BE49-F238E27FC236}">
+                <a16:creationId xmlns:a16="http://schemas.microsoft.com/office/drawing/2014/main" id="{92D0C0C2-A6A2-3FAB-626E-69F6C32225E8}"/>
+              </a:ext>
+            </a:extLst>
+          </p:cNvPr>
+          <p:cNvPicPr>
+            <a:picLocks noChangeAspect="1"/>
+          </p:cNvPicPr>
+          <p:nvPr/>
+        </p:nvPicPr>
+        <p:blipFill>
+          <a:blip r:embed="rId5">
+            <a:extLst>
+              <a:ext uri="{96DAC541-7B7A-43D3-8B79-37D633B846F1}">
+                <asvg:svgBlip xmlns:asvg="http://schemas.microsoft.com/office/drawing/2016/SVG/main" r:embed="rId6"/>
+              </a:ext>
+            </a:extLst>
+          </a:blip>
+          <a:stretch>
+            <a:fillRect/>
+          </a:stretch>
+        </p:blipFill>
+        <p:spPr>
+          <a:xfrm>
+            <a:off x="32037765" y="6360459"/>
+            <a:ext cx="2378678" cy="2378678"/>
+          </a:xfrm>
+          <a:prstGeom prst="rect">
+            <a:avLst/>
+          </a:prstGeom>
+        </p:spPr>
+      </p:pic>
+      <p:sp>
+        <p:nvSpPr>
+          <p:cNvPr id="14" name="Rectangle: Rounded Corners 13">
+            <a:extLst>
+              <a:ext uri="{FF2B5EF4-FFF2-40B4-BE49-F238E27FC236}">
+                <a16:creationId xmlns:a16="http://schemas.microsoft.com/office/drawing/2014/main" id="{DBF4675B-24DA-ECE6-C51C-65069789A359}"/>
+              </a:ext>
+            </a:extLst>
+          </p:cNvPr>
+          <p:cNvSpPr/>
+          <p:nvPr/>
+        </p:nvSpPr>
+        <p:spPr>
+          <a:xfrm>
+            <a:off x="28854274" y="8802264"/>
+            <a:ext cx="9273325" cy="5165792"/>
+          </a:xfrm>
+          <a:prstGeom prst="roundRect">
+            <a:avLst/>
+          </a:prstGeom>
+          <a:solidFill>
+            <a:schemeClr val="accent1">
+              <a:lumMod val="20000"/>
+              <a:lumOff val="80000"/>
+            </a:schemeClr>
+          </a:solidFill>
+        </p:spPr>
+        <p:style>
+          <a:lnRef idx="2">
+            <a:schemeClr val="accent1">
+              <a:shade val="15000"/>
+            </a:schemeClr>
+          </a:lnRef>
+          <a:fillRef idx="1">
+            <a:schemeClr val="accent1"/>
+          </a:fillRef>
+          <a:effectRef idx="0">
+            <a:schemeClr val="accent1"/>
+          </a:effectRef>
+          <a:fontRef idx="minor">
+            <a:schemeClr val="lt1"/>
+          </a:fontRef>
+        </p:style>
+        <p:txBody>
+          <a:bodyPr rtlCol="0" anchor="ctr"/>
+          <a:lstStyle/>
+          <a:p>
+            <a:pPr marL="857250" indent="-857250">
+              <a:buFont typeface="Arial" panose="020B0604020202020204" pitchFamily="34" charset="0"/>
+              <a:buChar char="•"/>
+            </a:pPr>
+            <a:r>
+              <a:rPr lang="en-US" sz="4400" dirty="0">
+                <a:solidFill>
+                  <a:schemeClr val="tx1"/>
+                </a:solidFill>
+              </a:rPr>
+              <a:t>Find dataset</a:t>
+            </a:r>
+          </a:p>
+          <a:p>
+            <a:pPr marL="857250" indent="-857250">
+              <a:buFont typeface="Arial" panose="020B0604020202020204" pitchFamily="34" charset="0"/>
+              <a:buChar char="•"/>
+            </a:pPr>
+            <a:r>
+              <a:rPr lang="en-US" sz="4400" dirty="0">
+                <a:solidFill>
+                  <a:schemeClr val="tx1"/>
+                </a:solidFill>
+              </a:rPr>
+              <a:t>Load dataset</a:t>
+            </a:r>
+          </a:p>
+          <a:p>
+            <a:pPr marL="857250" indent="-857250">
+              <a:buFont typeface="Arial" panose="020B0604020202020204" pitchFamily="34" charset="0"/>
+              <a:buChar char="•"/>
+            </a:pPr>
+            <a:r>
+              <a:rPr lang="en-US" sz="4400" dirty="0">
+                <a:solidFill>
+                  <a:schemeClr val="tx1"/>
+                </a:solidFill>
+              </a:rPr>
+              <a:t>Compute features</a:t>
+            </a:r>
+          </a:p>
+          <a:p>
+            <a:pPr marL="857250" indent="-857250">
+              <a:buFont typeface="Arial" panose="020B0604020202020204" pitchFamily="34" charset="0"/>
+              <a:buChar char="•"/>
+            </a:pPr>
+            <a:r>
+              <a:rPr lang="en-US" sz="4400" dirty="0">
+                <a:solidFill>
+                  <a:schemeClr val="tx1"/>
+                </a:solidFill>
+              </a:rPr>
+              <a:t>Split dataset</a:t>
+            </a:r>
+          </a:p>
+          <a:p>
+            <a:pPr marL="857250" indent="-857250">
+              <a:buFont typeface="Arial" panose="020B0604020202020204" pitchFamily="34" charset="0"/>
+              <a:buChar char="•"/>
+            </a:pPr>
+            <a:r>
+              <a:rPr lang="en-US" sz="4400" dirty="0">
+                <a:solidFill>
+                  <a:schemeClr val="tx1"/>
+                </a:solidFill>
+              </a:rPr>
+              <a:t>Train model</a:t>
+            </a:r>
+          </a:p>
+          <a:p>
+            <a:pPr marL="857250" indent="-857250">
+              <a:buFont typeface="Arial" panose="020B0604020202020204" pitchFamily="34" charset="0"/>
+              <a:buChar char="•"/>
+            </a:pPr>
+            <a:r>
+              <a:rPr lang="en-US" sz="4400" dirty="0">
+                <a:solidFill>
+                  <a:schemeClr val="tx1"/>
+                </a:solidFill>
+              </a:rPr>
+              <a:t>Plot classification results</a:t>
+            </a:r>
+          </a:p>
+          <a:p>
+            <a:pPr marL="857250" indent="-857250">
+              <a:buFont typeface="Arial" panose="020B0604020202020204" pitchFamily="34" charset="0"/>
+              <a:buChar char="•"/>
+            </a:pPr>
+            <a:r>
+              <a:rPr lang="en-US" sz="4400" dirty="0">
+                <a:solidFill>
+                  <a:schemeClr val="tx1"/>
+                </a:solidFill>
+              </a:rPr>
+              <a:t>Identify recurrent anchor rules</a:t>
+            </a:r>
+          </a:p>
+          <a:p>
+            <a:pPr algn="ctr"/>
+            <a:endParaRPr lang="en-US" dirty="0"/>
+          </a:p>
+        </p:txBody>
+      </p:sp>
+      <p:pic>
+        <p:nvPicPr>
+          <p:cNvPr id="20" name="Graphic 19" descr="Customer review with solid fill">
+            <a:extLst>
+              <a:ext uri="{FF2B5EF4-FFF2-40B4-BE49-F238E27FC236}">
+                <a16:creationId xmlns:a16="http://schemas.microsoft.com/office/drawing/2014/main" id="{CB6AEA3E-2CED-76CE-CC55-238DCE87A382}"/>
+              </a:ext>
+            </a:extLst>
+          </p:cNvPr>
+          <p:cNvPicPr>
+            <a:picLocks noChangeAspect="1"/>
+          </p:cNvPicPr>
+          <p:nvPr/>
+        </p:nvPicPr>
+        <p:blipFill>
+          <a:blip r:embed="rId3">
+            <a:extLst>
+              <a:ext uri="{96DAC541-7B7A-43D3-8B79-37D633B846F1}">
+                <asvg:svgBlip xmlns:asvg="http://schemas.microsoft.com/office/drawing/2016/SVG/main" r:embed="rId4"/>
+              </a:ext>
+            </a:extLst>
+          </a:blip>
+          <a:stretch>
+            <a:fillRect/>
+          </a:stretch>
+        </p:blipFill>
+        <p:spPr>
+          <a:xfrm>
+            <a:off x="1165147" y="43423310"/>
+            <a:ext cx="3110003" cy="3110003"/>
+          </a:xfrm>
+          <a:prstGeom prst="rect">
+            <a:avLst/>
+          </a:prstGeom>
+        </p:spPr>
+      </p:pic>
+      <p:pic>
+        <p:nvPicPr>
+          <p:cNvPr id="21" name="Graphic 20" descr="Tools with solid fill">
+            <a:extLst>
+              <a:ext uri="{FF2B5EF4-FFF2-40B4-BE49-F238E27FC236}">
+                <a16:creationId xmlns:a16="http://schemas.microsoft.com/office/drawing/2014/main" id="{30357586-D891-7B9B-5CE7-CEE2D87E838B}"/>
+              </a:ext>
+            </a:extLst>
+          </p:cNvPr>
+          <p:cNvPicPr>
+            <a:picLocks noChangeAspect="1"/>
+          </p:cNvPicPr>
+          <p:nvPr/>
+        </p:nvPicPr>
+        <p:blipFill>
+          <a:blip r:embed="rId5">
+            <a:extLst>
+              <a:ext uri="{96DAC541-7B7A-43D3-8B79-37D633B846F1}">
+                <asvg:svgBlip xmlns:asvg="http://schemas.microsoft.com/office/drawing/2016/SVG/main" r:embed="rId6"/>
+              </a:ext>
+            </a:extLst>
+          </a:blip>
+          <a:stretch>
+            <a:fillRect/>
+          </a:stretch>
+        </p:blipFill>
+        <p:spPr>
+          <a:xfrm>
+            <a:off x="1633447" y="47095411"/>
+            <a:ext cx="2641703" cy="2641703"/>
+          </a:xfrm>
+          <a:prstGeom prst="rect">
+            <a:avLst/>
+          </a:prstGeom>
+        </p:spPr>
+      </p:pic>
+      <p:sp>
+        <p:nvSpPr>
+          <p:cNvPr id="22" name="TextBox 21">
+            <a:extLst>
+              <a:ext uri="{FF2B5EF4-FFF2-40B4-BE49-F238E27FC236}">
+                <a16:creationId xmlns:a16="http://schemas.microsoft.com/office/drawing/2014/main" id="{9AD7EEF7-AC29-6E82-9961-99B7A43B828C}"/>
+              </a:ext>
+            </a:extLst>
+          </p:cNvPr>
+          <p:cNvSpPr txBox="1"/>
+          <p:nvPr/>
+        </p:nvSpPr>
+        <p:spPr>
+          <a:xfrm>
+            <a:off x="5743575" y="44378146"/>
+            <a:ext cx="14116050" cy="1200329"/>
+          </a:xfrm>
+          <a:prstGeom prst="rect">
+            <a:avLst/>
+          </a:prstGeom>
+          <a:noFill/>
+        </p:spPr>
+        <p:txBody>
+          <a:bodyPr wrap="square" rtlCol="0">
+            <a:spAutoFit/>
+          </a:bodyPr>
+          <a:lstStyle/>
+          <a:p>
+            <a:r>
+              <a:rPr lang="en-US" sz="7200" dirty="0"/>
+              <a:t>User prompt to </a:t>
+            </a:r>
+            <a:r>
+              <a:rPr lang="en-US" sz="7200" dirty="0" err="1"/>
+              <a:t>ChemicHAL</a:t>
+            </a:r>
+            <a:endParaRPr lang="en-US" sz="7200" dirty="0"/>
+          </a:p>
+        </p:txBody>
+      </p:sp>
+      <p:sp>
+        <p:nvSpPr>
+          <p:cNvPr id="23" name="TextBox 22">
+            <a:extLst>
+              <a:ext uri="{FF2B5EF4-FFF2-40B4-BE49-F238E27FC236}">
+                <a16:creationId xmlns:a16="http://schemas.microsoft.com/office/drawing/2014/main" id="{79C960E6-BF83-97BE-9634-10CAB5F967F9}"/>
+              </a:ext>
+            </a:extLst>
+          </p:cNvPr>
+          <p:cNvSpPr txBox="1"/>
+          <p:nvPr/>
+        </p:nvSpPr>
+        <p:spPr>
+          <a:xfrm>
+            <a:off x="5743575" y="47334044"/>
+            <a:ext cx="14116050" cy="1200329"/>
+          </a:xfrm>
+          <a:prstGeom prst="rect">
+            <a:avLst/>
+          </a:prstGeom>
+          <a:noFill/>
+        </p:spPr>
+        <p:txBody>
+          <a:bodyPr wrap="square" rtlCol="0">
+            <a:spAutoFit/>
+          </a:bodyPr>
+          <a:lstStyle/>
+          <a:p>
+            <a:r>
+              <a:rPr lang="en-US" sz="7200" dirty="0" err="1"/>
+              <a:t>ChemicHAL</a:t>
+            </a:r>
+            <a:r>
+              <a:rPr lang="en-US" sz="7200" dirty="0"/>
+              <a:t> tools called</a:t>
+            </a:r>
+          </a:p>
+        </p:txBody>
+      </p:sp>
+      <p:pic>
+        <p:nvPicPr>
+          <p:cNvPr id="27" name="Picture 26" descr="A bar graph with numbers and text&#10;&#10;AI-generated content may be incorrect.">
+            <a:extLst>
+              <a:ext uri="{FF2B5EF4-FFF2-40B4-BE49-F238E27FC236}">
+                <a16:creationId xmlns:a16="http://schemas.microsoft.com/office/drawing/2014/main" id="{DDA67D64-D306-A0CD-5ECD-8492A850A7F5}"/>
+              </a:ext>
+            </a:extLst>
+          </p:cNvPr>
+          <p:cNvPicPr>
+            <a:picLocks noChangeAspect="1"/>
+          </p:cNvPicPr>
+          <p:nvPr/>
+        </p:nvPicPr>
+        <p:blipFill>
+          <a:blip r:embed="rId7">
+            <a:extLst>
+              <a:ext uri="{28A0092B-C50C-407E-A947-70E740481C1C}">
+                <a14:useLocalDpi xmlns:a14="http://schemas.microsoft.com/office/drawing/2010/main" val="0"/>
+              </a:ext>
+            </a:extLst>
+          </a:blip>
+          <a:srcRect r="10508" b="17689"/>
+          <a:stretch/>
+        </p:blipFill>
+        <p:spPr>
+          <a:xfrm>
+            <a:off x="8463999" y="20397699"/>
+            <a:ext cx="13225524" cy="6400931"/>
+          </a:xfrm>
+          <a:prstGeom prst="rect">
+            <a:avLst/>
+          </a:prstGeom>
+        </p:spPr>
+      </p:pic>
+      <p:sp>
+        <p:nvSpPr>
+          <p:cNvPr id="30" name="TextBox 29">
+            <a:extLst>
+              <a:ext uri="{FF2B5EF4-FFF2-40B4-BE49-F238E27FC236}">
+                <a16:creationId xmlns:a16="http://schemas.microsoft.com/office/drawing/2014/main" id="{5BAA39A6-DC6F-57E4-6567-4545559A0C33}"/>
+              </a:ext>
+            </a:extLst>
+          </p:cNvPr>
+          <p:cNvSpPr txBox="1"/>
+          <p:nvPr/>
+        </p:nvSpPr>
+        <p:spPr>
+          <a:xfrm>
+            <a:off x="1666244" y="28261810"/>
+            <a:ext cx="20023280" cy="5509200"/>
+          </a:xfrm>
+          <a:prstGeom prst="rect">
+            <a:avLst/>
+          </a:prstGeom>
+          <a:noFill/>
+        </p:spPr>
+        <p:txBody>
+          <a:bodyPr wrap="square">
+            <a:spAutoFit/>
+          </a:bodyPr>
+          <a:lstStyle/>
+          <a:p>
+            <a:pPr algn="l"/>
+            <a:r>
+              <a:rPr lang="en-US" sz="4400" b="0" i="0" dirty="0">
+                <a:solidFill>
+                  <a:srgbClr val="0F0F0F"/>
+                </a:solidFill>
+                <a:effectLst/>
+              </a:rPr>
+              <a:t>The Balanced Random Forest model achieved strong performance on the test set:</a:t>
+            </a:r>
+          </a:p>
+          <a:p>
+            <a:pPr algn="l">
+              <a:buFont typeface="Arial" panose="020B0604020202020204" pitchFamily="34" charset="0"/>
+              <a:buChar char="•"/>
+            </a:pPr>
+            <a:r>
+              <a:rPr lang="en-US" sz="4400" b="1" i="0" dirty="0">
+                <a:solidFill>
+                  <a:srgbClr val="0F0F0F"/>
+                </a:solidFill>
+                <a:effectLst/>
+              </a:rPr>
+              <a:t>Accuracy</a:t>
+            </a:r>
+            <a:r>
+              <a:rPr lang="en-US" sz="4400" b="0" i="0" dirty="0">
+                <a:solidFill>
+                  <a:srgbClr val="0F0F0F"/>
+                </a:solidFill>
+                <a:effectLst/>
+              </a:rPr>
+              <a:t>: 89.3%</a:t>
+            </a:r>
+          </a:p>
+          <a:p>
+            <a:pPr algn="l">
+              <a:buFont typeface="Arial" panose="020B0604020202020204" pitchFamily="34" charset="0"/>
+              <a:buChar char="•"/>
+            </a:pPr>
+            <a:r>
+              <a:rPr lang="en-US" sz="4400" b="1" i="0" dirty="0">
+                <a:solidFill>
+                  <a:srgbClr val="0F0F0F"/>
+                </a:solidFill>
+                <a:effectLst/>
+              </a:rPr>
+              <a:t>Balanced Accuracy</a:t>
+            </a:r>
+            <a:r>
+              <a:rPr lang="en-US" sz="4400" b="0" i="0" dirty="0">
+                <a:solidFill>
+                  <a:srgbClr val="0F0F0F"/>
+                </a:solidFill>
+                <a:effectLst/>
+              </a:rPr>
+              <a:t>: 84.7%</a:t>
+            </a:r>
+          </a:p>
+          <a:p>
+            <a:pPr algn="l">
+              <a:buFont typeface="Arial" panose="020B0604020202020204" pitchFamily="34" charset="0"/>
+              <a:buChar char="•"/>
+            </a:pPr>
+            <a:r>
+              <a:rPr lang="en-US" sz="4400" b="1" i="0" dirty="0">
+                <a:solidFill>
+                  <a:srgbClr val="0F0F0F"/>
+                </a:solidFill>
+                <a:effectLst/>
+              </a:rPr>
+              <a:t>MCC</a:t>
+            </a:r>
+            <a:r>
+              <a:rPr lang="en-US" sz="4400" b="0" i="0" dirty="0">
+                <a:solidFill>
+                  <a:srgbClr val="0F0F0F"/>
+                </a:solidFill>
+                <a:effectLst/>
+              </a:rPr>
+              <a:t>: 0.749</a:t>
+            </a:r>
+          </a:p>
+          <a:p>
+            <a:pPr algn="l">
+              <a:buFont typeface="Arial" panose="020B0604020202020204" pitchFamily="34" charset="0"/>
+              <a:buChar char="•"/>
+            </a:pPr>
+            <a:r>
+              <a:rPr lang="en-US" sz="4400" b="1" i="0" dirty="0">
+                <a:solidFill>
+                  <a:srgbClr val="0F0F0F"/>
+                </a:solidFill>
+                <a:effectLst/>
+              </a:rPr>
+              <a:t>F1 Macro</a:t>
+            </a:r>
+            <a:r>
+              <a:rPr lang="en-US" sz="4400" b="0" i="0" dirty="0">
+                <a:solidFill>
+                  <a:srgbClr val="0F0F0F"/>
+                </a:solidFill>
+                <a:effectLst/>
+              </a:rPr>
+              <a:t>: 0.780</a:t>
+            </a:r>
+          </a:p>
+          <a:p>
+            <a:pPr algn="l"/>
+            <a:r>
+              <a:rPr lang="en-US" sz="4400" b="0" i="0" dirty="0">
+                <a:solidFill>
+                  <a:srgbClr val="0F0F0F"/>
+                </a:solidFill>
+                <a:effectLst/>
+              </a:rPr>
+              <a:t>Class 1 (PI3K-delta selective) and Class 2 (PI3K-gamma selective) show good separation, though Class 2 has fewer samples (15 in test set), which is typical for highly specific selectivity data.</a:t>
+            </a:r>
+          </a:p>
+        </p:txBody>
+      </p:sp>
+      <p:pic>
+        <p:nvPicPr>
+          <p:cNvPr id="33" name="Graphic 32" descr="Subtitles with solid fill">
+            <a:extLst>
+              <a:ext uri="{FF2B5EF4-FFF2-40B4-BE49-F238E27FC236}">
+                <a16:creationId xmlns:a16="http://schemas.microsoft.com/office/drawing/2014/main" id="{C52E7A92-5E5B-8D10-F20D-87C226214225}"/>
+              </a:ext>
+            </a:extLst>
+          </p:cNvPr>
+          <p:cNvPicPr>
+            <a:picLocks noChangeAspect="1"/>
+          </p:cNvPicPr>
+          <p:nvPr/>
+        </p:nvPicPr>
+        <p:blipFill>
+          <a:blip r:embed="rId8">
+            <a:extLst>
+              <a:ext uri="{96DAC541-7B7A-43D3-8B79-37D633B846F1}">
+                <asvg:svgBlip xmlns:asvg="http://schemas.microsoft.com/office/drawing/2016/SVG/main" r:embed="rId9"/>
+              </a:ext>
+            </a:extLst>
+          </a:blip>
+          <a:stretch>
+            <a:fillRect/>
+          </a:stretch>
+        </p:blipFill>
+        <p:spPr>
+          <a:xfrm>
+            <a:off x="10030373" y="15977828"/>
+            <a:ext cx="2884975" cy="2884975"/>
+          </a:xfrm>
+          <a:prstGeom prst="rect">
+            <a:avLst/>
+          </a:prstGeom>
+        </p:spPr>
+      </p:pic>
+      <p:pic>
+        <p:nvPicPr>
+          <p:cNvPr id="34" name="Graphic 33" descr="Subtitles with solid fill">
+            <a:extLst>
+              <a:ext uri="{FF2B5EF4-FFF2-40B4-BE49-F238E27FC236}">
+                <a16:creationId xmlns:a16="http://schemas.microsoft.com/office/drawing/2014/main" id="{79762F53-3216-6517-D583-06E345BC8164}"/>
+              </a:ext>
+            </a:extLst>
+          </p:cNvPr>
+          <p:cNvPicPr>
+            <a:picLocks noChangeAspect="1"/>
+          </p:cNvPicPr>
+          <p:nvPr/>
+        </p:nvPicPr>
+        <p:blipFill>
+          <a:blip r:embed="rId8">
+            <a:extLst>
+              <a:ext uri="{96DAC541-7B7A-43D3-8B79-37D633B846F1}">
+                <asvg:svgBlip xmlns:asvg="http://schemas.microsoft.com/office/drawing/2016/SVG/main" r:embed="rId9"/>
+              </a:ext>
+            </a:extLst>
+          </a:blip>
+          <a:stretch>
+            <a:fillRect/>
+          </a:stretch>
+        </p:blipFill>
+        <p:spPr>
+          <a:xfrm>
+            <a:off x="19859625" y="43535822"/>
+            <a:ext cx="2884975" cy="2884975"/>
+          </a:xfrm>
+          <a:prstGeom prst="rect">
+            <a:avLst/>
+          </a:prstGeom>
+        </p:spPr>
+      </p:pic>
+      <p:sp>
+        <p:nvSpPr>
+          <p:cNvPr id="35" name="TextBox 34">
+            <a:extLst>
+              <a:ext uri="{FF2B5EF4-FFF2-40B4-BE49-F238E27FC236}">
+                <a16:creationId xmlns:a16="http://schemas.microsoft.com/office/drawing/2014/main" id="{7E81FB83-7547-28A2-7CD6-3C02D9F62266}"/>
+              </a:ext>
+            </a:extLst>
+          </p:cNvPr>
+          <p:cNvSpPr txBox="1"/>
+          <p:nvPr/>
+        </p:nvSpPr>
+        <p:spPr>
+          <a:xfrm>
+            <a:off x="22744600" y="44372723"/>
+            <a:ext cx="14116050" cy="1200329"/>
+          </a:xfrm>
+          <a:prstGeom prst="rect">
+            <a:avLst/>
+          </a:prstGeom>
+          <a:noFill/>
+        </p:spPr>
+        <p:txBody>
+          <a:bodyPr wrap="square" rtlCol="0">
+            <a:spAutoFit/>
+          </a:bodyPr>
+          <a:lstStyle/>
+          <a:p>
+            <a:r>
+              <a:rPr lang="en-US" sz="7200" dirty="0" err="1"/>
+              <a:t>ChemicHAL</a:t>
+            </a:r>
+            <a:r>
+              <a:rPr lang="en-US" sz="7200" dirty="0"/>
+              <a:t> Response</a:t>
+            </a:r>
+          </a:p>
+        </p:txBody>
+      </p:sp>
+      <p:sp>
+        <p:nvSpPr>
+          <p:cNvPr id="47" name="Rectangle: Rounded Corners 46">
+            <a:extLst>
+              <a:ext uri="{FF2B5EF4-FFF2-40B4-BE49-F238E27FC236}">
+                <a16:creationId xmlns:a16="http://schemas.microsoft.com/office/drawing/2014/main" id="{F15D1001-4EDE-353E-1E12-A7E7F98D98C9}"/>
+              </a:ext>
+            </a:extLst>
+          </p:cNvPr>
+          <p:cNvSpPr/>
+          <p:nvPr/>
+        </p:nvSpPr>
+        <p:spPr>
+          <a:xfrm>
+            <a:off x="24726167" y="18248251"/>
+            <a:ext cx="22543477" cy="17146213"/>
+          </a:xfrm>
+          <a:prstGeom prst="roundRect">
+            <a:avLst/>
+          </a:prstGeom>
+          <a:noFill/>
+        </p:spPr>
+        <p:style>
+          <a:lnRef idx="2">
+            <a:schemeClr val="accent1">
+              <a:shade val="15000"/>
+            </a:schemeClr>
+          </a:lnRef>
+          <a:fillRef idx="1">
+            <a:schemeClr val="accent1"/>
+          </a:fillRef>
+          <a:effectRef idx="0">
+            <a:schemeClr val="accent1"/>
+          </a:effectRef>
+          <a:fontRef idx="minor">
+            <a:schemeClr val="lt1"/>
+          </a:fontRef>
+        </p:style>
+        <p:txBody>
+          <a:bodyPr rtlCol="0" anchor="ctr"/>
+          <a:lstStyle/>
+          <a:p>
+            <a:pPr algn="ctr"/>
+            <a:endParaRPr lang="en-US" dirty="0"/>
+          </a:p>
+        </p:txBody>
+      </p:sp>
+      <p:pic>
+        <p:nvPicPr>
+          <p:cNvPr id="50" name="Graphic 49" descr="Subtitles with solid fill">
+            <a:extLst>
+              <a:ext uri="{FF2B5EF4-FFF2-40B4-BE49-F238E27FC236}">
+                <a16:creationId xmlns:a16="http://schemas.microsoft.com/office/drawing/2014/main" id="{5F915C69-C22F-2AA5-1B17-D827237339E2}"/>
+              </a:ext>
+            </a:extLst>
+          </p:cNvPr>
+          <p:cNvPicPr>
+            <a:picLocks noChangeAspect="1"/>
+          </p:cNvPicPr>
+          <p:nvPr/>
+        </p:nvPicPr>
+        <p:blipFill>
+          <a:blip r:embed="rId8">
+            <a:extLst>
+              <a:ext uri="{96DAC541-7B7A-43D3-8B79-37D633B846F1}">
+                <asvg:svgBlip xmlns:asvg="http://schemas.microsoft.com/office/drawing/2016/SVG/main" r:embed="rId9"/>
+              </a:ext>
+            </a:extLst>
+          </a:blip>
+          <a:stretch>
+            <a:fillRect/>
+          </a:stretch>
+        </p:blipFill>
+        <p:spPr>
+          <a:xfrm>
+            <a:off x="34555417" y="15628249"/>
+            <a:ext cx="2884975" cy="2884975"/>
+          </a:xfrm>
+          <a:prstGeom prst="rect">
+            <a:avLst/>
+          </a:prstGeom>
+        </p:spPr>
+      </p:pic>
+      <p:sp>
+        <p:nvSpPr>
+          <p:cNvPr id="52" name="TextBox 51">
+            <a:extLst>
+              <a:ext uri="{FF2B5EF4-FFF2-40B4-BE49-F238E27FC236}">
+                <a16:creationId xmlns:a16="http://schemas.microsoft.com/office/drawing/2014/main" id="{1CA22E51-CE03-F50F-0289-6302FC2665E4}"/>
+              </a:ext>
+            </a:extLst>
+          </p:cNvPr>
+          <p:cNvSpPr txBox="1"/>
+          <p:nvPr/>
+        </p:nvSpPr>
+        <p:spPr>
+          <a:xfrm>
+            <a:off x="7072861" y="18773143"/>
+            <a:ext cx="9943000" cy="923330"/>
+          </a:xfrm>
+          <a:prstGeom prst="rect">
+            <a:avLst/>
+          </a:prstGeom>
+          <a:noFill/>
+        </p:spPr>
+        <p:txBody>
+          <a:bodyPr wrap="square">
+            <a:spAutoFit/>
+          </a:bodyPr>
+          <a:lstStyle/>
+          <a:p>
+            <a:pPr algn="l"/>
+            <a:r>
+              <a:rPr lang="en-US" sz="5400" b="1" i="0" dirty="0">
+                <a:solidFill>
+                  <a:srgbClr val="0F0F0F"/>
+                </a:solidFill>
+                <a:effectLst/>
+                <a:latin typeface="ui-sans-serif"/>
+              </a:rPr>
+              <a:t>Model Performance Evaluation</a:t>
+            </a:r>
+          </a:p>
+        </p:txBody>
+      </p:sp>
+      <p:sp>
+        <p:nvSpPr>
+          <p:cNvPr id="53" name="TextBox 52">
+            <a:extLst>
+              <a:ext uri="{FF2B5EF4-FFF2-40B4-BE49-F238E27FC236}">
+                <a16:creationId xmlns:a16="http://schemas.microsoft.com/office/drawing/2014/main" id="{4D9CB3D1-7BFC-3386-B306-BDBBA5137ABA}"/>
+              </a:ext>
+            </a:extLst>
+          </p:cNvPr>
+          <p:cNvSpPr txBox="1"/>
+          <p:nvPr/>
+        </p:nvSpPr>
+        <p:spPr>
+          <a:xfrm>
+            <a:off x="31026405" y="18410119"/>
+            <a:ext cx="9943000" cy="1754326"/>
+          </a:xfrm>
+          <a:prstGeom prst="rect">
+            <a:avLst/>
+          </a:prstGeom>
+          <a:noFill/>
+        </p:spPr>
+        <p:txBody>
+          <a:bodyPr wrap="square">
+            <a:spAutoFit/>
+          </a:bodyPr>
+          <a:lstStyle/>
+          <a:p>
+            <a:pPr algn="ctr"/>
+            <a:r>
+              <a:rPr lang="en-US" sz="5400" b="1" dirty="0">
+                <a:solidFill>
+                  <a:srgbClr val="0F0F0F"/>
+                </a:solidFill>
+                <a:latin typeface="ui-sans-serif"/>
+              </a:rPr>
+              <a:t>R</a:t>
+            </a:r>
+            <a:r>
+              <a:rPr lang="en-US" sz="5400" b="1" i="0" dirty="0">
+                <a:solidFill>
+                  <a:srgbClr val="0F0F0F"/>
+                </a:solidFill>
+                <a:effectLst/>
+                <a:latin typeface="ui-sans-serif"/>
+              </a:rPr>
+              <a:t>ecurrent Molecular Anchor Fragments (Class 1 &amp; 2)</a:t>
+            </a:r>
+          </a:p>
+        </p:txBody>
+      </p:sp>
+      <p:pic>
+        <p:nvPicPr>
+          <p:cNvPr id="57" name="Picture 56" descr="A black and red hexagons&#10;&#10;AI-generated content may be incorrect.">
+            <a:extLst>
+              <a:ext uri="{FF2B5EF4-FFF2-40B4-BE49-F238E27FC236}">
+                <a16:creationId xmlns:a16="http://schemas.microsoft.com/office/drawing/2014/main" id="{D31C6E93-8769-C043-E3E6-35F8E48F9A7F}"/>
+              </a:ext>
+            </a:extLst>
+          </p:cNvPr>
+          <p:cNvPicPr>
+            <a:picLocks noChangeAspect="1"/>
+          </p:cNvPicPr>
+          <p:nvPr/>
+        </p:nvPicPr>
+        <p:blipFill>
+          <a:blip r:embed="rId10">
+            <a:extLst>
+              <a:ext uri="{28A0092B-C50C-407E-A947-70E740481C1C}">
+                <a14:useLocalDpi xmlns:a14="http://schemas.microsoft.com/office/drawing/2010/main" val="0"/>
+              </a:ext>
+            </a:extLst>
+          </a:blip>
+          <a:srcRect r="60622" b="25829"/>
+          <a:stretch/>
+        </p:blipFill>
+        <p:spPr>
+          <a:xfrm>
+            <a:off x="25217677" y="21809773"/>
+            <a:ext cx="10517536" cy="3631955"/>
+          </a:xfrm>
+          <a:prstGeom prst="rect">
+            <a:avLst/>
+          </a:prstGeom>
+        </p:spPr>
+      </p:pic>
+      <p:pic>
+        <p:nvPicPr>
+          <p:cNvPr id="59" name="Picture 58" descr="A red and black molecule&#10;&#10;AI-generated content may be incorrect.">
+            <a:extLst>
+              <a:ext uri="{FF2B5EF4-FFF2-40B4-BE49-F238E27FC236}">
+                <a16:creationId xmlns:a16="http://schemas.microsoft.com/office/drawing/2014/main" id="{FF828C6A-DA1B-1C2D-DF20-B453CD4FBA2B}"/>
+              </a:ext>
+            </a:extLst>
+          </p:cNvPr>
+          <p:cNvPicPr>
+            <a:picLocks noChangeAspect="1"/>
+          </p:cNvPicPr>
+          <p:nvPr/>
+        </p:nvPicPr>
+        <p:blipFill>
+          <a:blip r:embed="rId11">
+            <a:extLst>
+              <a:ext uri="{28A0092B-C50C-407E-A947-70E740481C1C}">
+                <a14:useLocalDpi xmlns:a14="http://schemas.microsoft.com/office/drawing/2010/main" val="0"/>
+              </a:ext>
+            </a:extLst>
+          </a:blip>
+          <a:srcRect t="9899" r="60477" b="34643"/>
+          <a:stretch/>
+        </p:blipFill>
+        <p:spPr>
+          <a:xfrm>
+            <a:off x="35692258" y="22170466"/>
+            <a:ext cx="11314115" cy="2910568"/>
+          </a:xfrm>
+          <a:prstGeom prst="rect">
+            <a:avLst/>
+          </a:prstGeom>
+        </p:spPr>
+      </p:pic>
+      <p:grpSp>
+        <p:nvGrpSpPr>
+          <p:cNvPr id="67" name="Group 66">
+            <a:extLst>
+              <a:ext uri="{FF2B5EF4-FFF2-40B4-BE49-F238E27FC236}">
+                <a16:creationId xmlns:a16="http://schemas.microsoft.com/office/drawing/2014/main" id="{9CE13C4E-79CE-DA5C-2A96-845AEE2FBFDF}"/>
+              </a:ext>
+            </a:extLst>
+          </p:cNvPr>
+          <p:cNvGrpSpPr/>
+          <p:nvPr/>
+        </p:nvGrpSpPr>
+        <p:grpSpPr>
+          <a:xfrm>
+            <a:off x="25192736" y="25365208"/>
+            <a:ext cx="10567418" cy="1477328"/>
+            <a:chOff x="23529200" y="26300403"/>
+            <a:chExt cx="10567418" cy="1477328"/>
+          </a:xfrm>
+        </p:grpSpPr>
+        <p:sp>
+          <p:nvSpPr>
+            <p:cNvPr id="58" name="TextBox 57">
+              <a:extLst>
+                <a:ext uri="{FF2B5EF4-FFF2-40B4-BE49-F238E27FC236}">
+                  <a16:creationId xmlns:a16="http://schemas.microsoft.com/office/drawing/2014/main" id="{8572CEAB-6935-A767-5441-EE39B0CFE9A6}"/>
+                </a:ext>
+              </a:extLst>
+            </p:cNvPr>
+            <p:cNvSpPr txBox="1"/>
+            <p:nvPr/>
+          </p:nvSpPr>
+          <p:spPr>
+            <a:xfrm>
+              <a:off x="23529200" y="26300403"/>
+              <a:ext cx="5414457" cy="1477328"/>
+            </a:xfrm>
+            <a:prstGeom prst="rect">
+              <a:avLst/>
+            </a:prstGeom>
+            <a:noFill/>
+          </p:spPr>
+          <p:txBody>
+            <a:bodyPr wrap="square" rtlCol="0">
+              <a:spAutoFit/>
+            </a:bodyPr>
+            <a:lstStyle/>
+            <a:p>
+              <a:pPr algn="ctr"/>
+              <a:r>
+                <a:rPr lang="en-US" sz="3000" b="1" i="0" dirty="0">
+                  <a:solidFill>
+                    <a:srgbClr val="0F0F0F"/>
+                  </a:solidFill>
+                  <a:effectLst/>
+                  <a:latin typeface="ui-sans-serif"/>
+                </a:rPr>
+                <a:t>Rank 1</a:t>
+              </a:r>
+            </a:p>
+            <a:p>
+              <a:pPr algn="ctr"/>
+              <a:r>
+                <a:rPr lang="en-US" sz="3000" b="1" dirty="0">
+                  <a:solidFill>
+                    <a:srgbClr val="0F0F0F"/>
+                  </a:solidFill>
+                  <a:latin typeface="ui-sans-serif"/>
+                </a:rPr>
+                <a:t>Anchor occurrence: 0.26</a:t>
+              </a:r>
+            </a:p>
+            <a:p>
+              <a:pPr algn="ctr"/>
+              <a:r>
+                <a:rPr lang="en-US" sz="3000" b="1" dirty="0">
+                  <a:solidFill>
+                    <a:srgbClr val="0F0F0F"/>
+                  </a:solidFill>
+                  <a:latin typeface="ui-sans-serif"/>
+                </a:rPr>
+                <a:t>Substructure occurrence: 0.26</a:t>
+              </a:r>
+              <a:endParaRPr lang="en-US" sz="3000" dirty="0"/>
+            </a:p>
+          </p:txBody>
+        </p:sp>
+        <p:sp>
+          <p:nvSpPr>
+            <p:cNvPr id="60" name="TextBox 59">
+              <a:extLst>
+                <a:ext uri="{FF2B5EF4-FFF2-40B4-BE49-F238E27FC236}">
+                  <a16:creationId xmlns:a16="http://schemas.microsoft.com/office/drawing/2014/main" id="{CB3D1D01-6B66-4EBF-BA63-15E4A614E261}"/>
+                </a:ext>
+              </a:extLst>
+            </p:cNvPr>
+            <p:cNvSpPr txBox="1"/>
+            <p:nvPr/>
+          </p:nvSpPr>
+          <p:spPr>
+            <a:xfrm>
+              <a:off x="28643452" y="26300403"/>
+              <a:ext cx="5453166" cy="1477328"/>
+            </a:xfrm>
+            <a:prstGeom prst="rect">
+              <a:avLst/>
+            </a:prstGeom>
+            <a:noFill/>
+          </p:spPr>
+          <p:txBody>
+            <a:bodyPr wrap="square" rtlCol="0">
+              <a:spAutoFit/>
+            </a:bodyPr>
+            <a:lstStyle/>
+            <a:p>
+              <a:pPr algn="ctr"/>
+              <a:r>
+                <a:rPr lang="en-US" sz="3000" b="1" i="0" dirty="0">
+                  <a:solidFill>
+                    <a:srgbClr val="0F0F0F"/>
+                  </a:solidFill>
+                  <a:effectLst/>
+                  <a:latin typeface="ui-sans-serif"/>
+                </a:rPr>
+                <a:t>Rank 2</a:t>
+              </a:r>
+            </a:p>
+            <a:p>
+              <a:pPr algn="ctr"/>
+              <a:r>
+                <a:rPr lang="en-US" sz="3000" b="1" dirty="0">
+                  <a:solidFill>
+                    <a:srgbClr val="0F0F0F"/>
+                  </a:solidFill>
+                  <a:latin typeface="ui-sans-serif"/>
+                </a:rPr>
+                <a:t>Anchor occurrence: 0.25</a:t>
+              </a:r>
+            </a:p>
+            <a:p>
+              <a:pPr algn="ctr"/>
+              <a:r>
+                <a:rPr lang="en-US" sz="3000" b="1" dirty="0">
+                  <a:solidFill>
+                    <a:srgbClr val="0F0F0F"/>
+                  </a:solidFill>
+                  <a:latin typeface="ui-sans-serif"/>
+                </a:rPr>
+                <a:t>Substructure occurrence: 0.25</a:t>
+              </a:r>
+              <a:endParaRPr lang="en-US" sz="3000" dirty="0"/>
+            </a:p>
+          </p:txBody>
+        </p:sp>
+      </p:grpSp>
+      <p:grpSp>
+        <p:nvGrpSpPr>
+          <p:cNvPr id="70" name="Group 69">
+            <a:extLst>
+              <a:ext uri="{FF2B5EF4-FFF2-40B4-BE49-F238E27FC236}">
+                <a16:creationId xmlns:a16="http://schemas.microsoft.com/office/drawing/2014/main" id="{821A5C7F-5F5F-A4FE-1C50-2D26291CDC2B}"/>
+              </a:ext>
+            </a:extLst>
+          </p:cNvPr>
+          <p:cNvGrpSpPr/>
+          <p:nvPr/>
+        </p:nvGrpSpPr>
+        <p:grpSpPr>
+          <a:xfrm>
+            <a:off x="35937642" y="25365208"/>
+            <a:ext cx="10823347" cy="1477328"/>
+            <a:chOff x="34281406" y="25702526"/>
+            <a:chExt cx="10823347" cy="1477328"/>
+          </a:xfrm>
+        </p:grpSpPr>
+        <p:sp>
+          <p:nvSpPr>
+            <p:cNvPr id="61" name="TextBox 60">
+              <a:extLst>
+                <a:ext uri="{FF2B5EF4-FFF2-40B4-BE49-F238E27FC236}">
+                  <a16:creationId xmlns:a16="http://schemas.microsoft.com/office/drawing/2014/main" id="{A7D21A72-9214-4047-1740-F895FF59E1E6}"/>
+                </a:ext>
+              </a:extLst>
+            </p:cNvPr>
+            <p:cNvSpPr txBox="1"/>
+            <p:nvPr/>
+          </p:nvSpPr>
+          <p:spPr>
+            <a:xfrm>
+              <a:off x="34281406" y="25702526"/>
+              <a:ext cx="5323362" cy="1477328"/>
+            </a:xfrm>
+            <a:prstGeom prst="rect">
+              <a:avLst/>
+            </a:prstGeom>
+            <a:noFill/>
+          </p:spPr>
+          <p:txBody>
+            <a:bodyPr wrap="square" rtlCol="0">
+              <a:spAutoFit/>
+            </a:bodyPr>
+            <a:lstStyle/>
+            <a:p>
+              <a:pPr algn="ctr"/>
+              <a:r>
+                <a:rPr lang="en-US" sz="3000" b="1" i="0" dirty="0">
+                  <a:solidFill>
+                    <a:srgbClr val="0F0F0F"/>
+                  </a:solidFill>
+                  <a:effectLst/>
+                  <a:latin typeface="ui-sans-serif"/>
+                </a:rPr>
+                <a:t>Rank 1</a:t>
+              </a:r>
+            </a:p>
+            <a:p>
+              <a:pPr algn="ctr"/>
+              <a:r>
+                <a:rPr lang="en-US" sz="3000" b="1" dirty="0">
+                  <a:solidFill>
+                    <a:srgbClr val="0F0F0F"/>
+                  </a:solidFill>
+                  <a:latin typeface="ui-sans-serif"/>
+                </a:rPr>
+                <a:t>Anchor occurrence: 0.36</a:t>
+              </a:r>
+            </a:p>
+            <a:p>
+              <a:pPr algn="ctr"/>
+              <a:r>
+                <a:rPr lang="en-US" sz="3000" b="1" dirty="0">
+                  <a:solidFill>
+                    <a:srgbClr val="0F0F0F"/>
+                  </a:solidFill>
+                  <a:latin typeface="ui-sans-serif"/>
+                </a:rPr>
+                <a:t>Substructure occurrence: 0.82</a:t>
+              </a:r>
+              <a:endParaRPr lang="en-US" sz="3000" dirty="0"/>
+            </a:p>
+          </p:txBody>
+        </p:sp>
+        <p:sp>
+          <p:nvSpPr>
+            <p:cNvPr id="62" name="TextBox 61">
+              <a:extLst>
+                <a:ext uri="{FF2B5EF4-FFF2-40B4-BE49-F238E27FC236}">
+                  <a16:creationId xmlns:a16="http://schemas.microsoft.com/office/drawing/2014/main" id="{9062DABE-6143-0CF6-47EE-82DED9712869}"/>
+                </a:ext>
+              </a:extLst>
+            </p:cNvPr>
+            <p:cNvSpPr txBox="1"/>
+            <p:nvPr/>
+          </p:nvSpPr>
+          <p:spPr>
+            <a:xfrm>
+              <a:off x="39787986" y="25702526"/>
+              <a:ext cx="5316767" cy="1477328"/>
+            </a:xfrm>
+            <a:prstGeom prst="rect">
+              <a:avLst/>
+            </a:prstGeom>
+            <a:noFill/>
+          </p:spPr>
+          <p:txBody>
+            <a:bodyPr wrap="square" rtlCol="0">
+              <a:spAutoFit/>
+            </a:bodyPr>
+            <a:lstStyle/>
+            <a:p>
+              <a:pPr algn="ctr"/>
+              <a:r>
+                <a:rPr lang="en-US" sz="3000" b="1" i="0" dirty="0">
+                  <a:solidFill>
+                    <a:srgbClr val="0F0F0F"/>
+                  </a:solidFill>
+                  <a:effectLst/>
+                  <a:latin typeface="ui-sans-serif"/>
+                </a:rPr>
+                <a:t>Rank 2</a:t>
+              </a:r>
+            </a:p>
+            <a:p>
+              <a:pPr algn="ctr"/>
+              <a:r>
+                <a:rPr lang="en-US" sz="3000" b="1" dirty="0">
+                  <a:solidFill>
+                    <a:srgbClr val="0F0F0F"/>
+                  </a:solidFill>
+                  <a:latin typeface="ui-sans-serif"/>
+                </a:rPr>
+                <a:t>Anchor occurrence: 0.18</a:t>
+              </a:r>
+            </a:p>
+            <a:p>
+              <a:pPr algn="ctr"/>
+              <a:r>
+                <a:rPr lang="en-US" sz="3000" b="1" dirty="0">
+                  <a:solidFill>
+                    <a:srgbClr val="0F0F0F"/>
+                  </a:solidFill>
+                  <a:latin typeface="ui-sans-serif"/>
+                </a:rPr>
+                <a:t>Substructure occurrence: 0.36</a:t>
+              </a:r>
+              <a:endParaRPr lang="en-US" sz="3000" dirty="0"/>
+            </a:p>
+          </p:txBody>
+        </p:sp>
+      </p:grpSp>
+      <p:sp>
+        <p:nvSpPr>
+          <p:cNvPr id="63" name="TextBox 62">
+            <a:extLst>
+              <a:ext uri="{FF2B5EF4-FFF2-40B4-BE49-F238E27FC236}">
+                <a16:creationId xmlns:a16="http://schemas.microsoft.com/office/drawing/2014/main" id="{6A5C72D7-D885-252B-9D5B-8FCC3218E83B}"/>
+              </a:ext>
+            </a:extLst>
+          </p:cNvPr>
+          <p:cNvSpPr txBox="1"/>
+          <p:nvPr/>
+        </p:nvSpPr>
+        <p:spPr>
+          <a:xfrm>
+            <a:off x="27174716" y="20760188"/>
+            <a:ext cx="6603459" cy="923330"/>
+          </a:xfrm>
+          <a:prstGeom prst="rect">
+            <a:avLst/>
+          </a:prstGeom>
+          <a:noFill/>
+        </p:spPr>
+        <p:txBody>
+          <a:bodyPr wrap="square" rtlCol="0">
+            <a:spAutoFit/>
+          </a:bodyPr>
+          <a:lstStyle/>
+          <a:p>
+            <a:pPr algn="ctr"/>
+            <a:r>
+              <a:rPr lang="en-US" sz="5400" b="1" dirty="0"/>
+              <a:t>Class </a:t>
+            </a:r>
+            <a:r>
+              <a:rPr lang="en-US" sz="5400" b="1" i="0" dirty="0">
+                <a:solidFill>
+                  <a:srgbClr val="0F0F0F"/>
+                </a:solidFill>
+                <a:effectLst/>
+                <a:latin typeface="ui-sans-serif"/>
+              </a:rPr>
+              <a:t>PI3K-delta</a:t>
+            </a:r>
+            <a:endParaRPr lang="de-DE" sz="5400" b="1" dirty="0"/>
+          </a:p>
+        </p:txBody>
+      </p:sp>
+      <p:sp>
+        <p:nvSpPr>
+          <p:cNvPr id="64" name="TextBox 63">
+            <a:extLst>
+              <a:ext uri="{FF2B5EF4-FFF2-40B4-BE49-F238E27FC236}">
+                <a16:creationId xmlns:a16="http://schemas.microsoft.com/office/drawing/2014/main" id="{375CDCAE-E997-6AB6-EE31-7EEA0E2E635E}"/>
+              </a:ext>
+            </a:extLst>
+          </p:cNvPr>
+          <p:cNvSpPr txBox="1"/>
+          <p:nvPr/>
+        </p:nvSpPr>
+        <p:spPr>
+          <a:xfrm>
+            <a:off x="38194187" y="20760188"/>
+            <a:ext cx="6310257" cy="923330"/>
+          </a:xfrm>
+          <a:prstGeom prst="rect">
+            <a:avLst/>
+          </a:prstGeom>
+          <a:noFill/>
+        </p:spPr>
+        <p:txBody>
+          <a:bodyPr wrap="square" rtlCol="0">
+            <a:spAutoFit/>
+          </a:bodyPr>
+          <a:lstStyle/>
+          <a:p>
+            <a:pPr algn="ctr"/>
+            <a:r>
+              <a:rPr lang="en-US" sz="5400" b="1" dirty="0"/>
+              <a:t>Class </a:t>
+            </a:r>
+            <a:r>
+              <a:rPr lang="en-US" sz="5400" b="1" i="0" dirty="0">
+                <a:solidFill>
+                  <a:srgbClr val="0F0F0F"/>
+                </a:solidFill>
+                <a:effectLst/>
+                <a:latin typeface="ui-sans-serif"/>
+              </a:rPr>
+              <a:t>PI3K-gamma</a:t>
+            </a:r>
+            <a:endParaRPr lang="de-DE" sz="5400" b="1" dirty="0"/>
+          </a:p>
+        </p:txBody>
+      </p:sp>
+      <p:sp>
+        <p:nvSpPr>
+          <p:cNvPr id="65" name="TextBox 64">
+            <a:extLst>
+              <a:ext uri="{FF2B5EF4-FFF2-40B4-BE49-F238E27FC236}">
+                <a16:creationId xmlns:a16="http://schemas.microsoft.com/office/drawing/2014/main" id="{F275191B-4583-8146-851D-EA0FC0A427D2}"/>
+              </a:ext>
+            </a:extLst>
+          </p:cNvPr>
+          <p:cNvSpPr txBox="1"/>
+          <p:nvPr/>
+        </p:nvSpPr>
+        <p:spPr>
+          <a:xfrm>
+            <a:off x="36073227" y="27126710"/>
+            <a:ext cx="10552176" cy="6863417"/>
+          </a:xfrm>
+          <a:prstGeom prst="rect">
+            <a:avLst/>
+          </a:prstGeom>
+          <a:noFill/>
+        </p:spPr>
+        <p:txBody>
+          <a:bodyPr wrap="square" rtlCol="0">
+            <a:spAutoFit/>
+          </a:bodyPr>
+          <a:lstStyle/>
+          <a:p>
+            <a:pPr marL="228600" indent="-228600" algn="just">
+              <a:buFont typeface="+mj-lt"/>
+              <a:buAutoNum type="arabicPeriod"/>
+            </a:pPr>
+            <a:r>
+              <a:rPr lang="en-US" sz="4400" dirty="0"/>
+              <a:t>[*]c1ccn2nc(N)c([*])c2n1: Occurs in 36.4% of anchors. A </a:t>
+            </a:r>
+            <a:r>
+              <a:rPr lang="en-US" sz="4400" b="1" dirty="0"/>
+              <a:t>substituted </a:t>
+            </a:r>
+            <a:r>
+              <a:rPr lang="en-US" sz="4400" b="1" dirty="0" err="1"/>
+              <a:t>isoquinoline</a:t>
+            </a:r>
+            <a:r>
+              <a:rPr lang="en-US" sz="4400" b="1" dirty="0"/>
+              <a:t>/pyrazolo-pyridine core</a:t>
+            </a:r>
+            <a:r>
+              <a:rPr lang="en-US" sz="4400" dirty="0"/>
+              <a:t>, highly characteristic of PI3K-gamma selective inhibitors.</a:t>
+            </a:r>
+          </a:p>
+          <a:p>
+            <a:pPr marL="228600" indent="-228600" algn="just">
+              <a:buFont typeface="+mj-lt"/>
+              <a:buAutoNum type="arabicPeriod"/>
+            </a:pPr>
+            <a:endParaRPr lang="en-US" sz="4400" dirty="0"/>
+          </a:p>
+          <a:p>
+            <a:pPr marL="228600" indent="-228600" algn="just">
+              <a:buFont typeface="+mj-lt"/>
+              <a:buAutoNum type="arabicPeriod"/>
+            </a:pPr>
+            <a:r>
+              <a:rPr lang="en-US" sz="4400" dirty="0"/>
+              <a:t>[*]N1Cc2cc([*])cc([*])c2C1=O</a:t>
+            </a:r>
+            <a:r>
+              <a:rPr lang="en-US" sz="4400" b="1" dirty="0"/>
+              <a:t>: </a:t>
+            </a:r>
+            <a:r>
+              <a:rPr lang="en-US" sz="4400" b="1" dirty="0" err="1"/>
+              <a:t>Dihydroisoquinolinone</a:t>
+            </a:r>
+            <a:r>
+              <a:rPr lang="en-US" sz="4400" b="1" dirty="0"/>
+              <a:t> derivatives</a:t>
+            </a:r>
+            <a:r>
+              <a:rPr lang="en-US" sz="4400" dirty="0"/>
+              <a:t>, frequently appearing in gamma-selective chemotypes.</a:t>
+            </a:r>
+          </a:p>
+        </p:txBody>
+      </p:sp>
+      <p:sp>
+        <p:nvSpPr>
+          <p:cNvPr id="66" name="TextBox 65">
+            <a:extLst>
+              <a:ext uri="{FF2B5EF4-FFF2-40B4-BE49-F238E27FC236}">
+                <a16:creationId xmlns:a16="http://schemas.microsoft.com/office/drawing/2014/main" id="{07CA5145-B7E2-1C7C-76AD-CFE78D36AE62}"/>
+              </a:ext>
+            </a:extLst>
+          </p:cNvPr>
+          <p:cNvSpPr txBox="1"/>
+          <p:nvPr/>
+        </p:nvSpPr>
+        <p:spPr>
+          <a:xfrm>
+            <a:off x="25376906" y="27084437"/>
+            <a:ext cx="10550661" cy="6863417"/>
+          </a:xfrm>
+          <a:prstGeom prst="rect">
+            <a:avLst/>
+          </a:prstGeom>
+          <a:noFill/>
+        </p:spPr>
+        <p:txBody>
+          <a:bodyPr wrap="square" rtlCol="0">
+            <a:spAutoFit/>
+          </a:bodyPr>
+          <a:lstStyle/>
+          <a:p>
+            <a:pPr marL="228600" indent="-228600" algn="just">
+              <a:buFont typeface="+mj-lt"/>
+              <a:buAutoNum type="arabicPeriod"/>
+            </a:pPr>
+            <a:r>
+              <a:rPr lang="en-US" sz="4400" dirty="0"/>
+              <a:t>[*]c1ncnc(N)c1C#N: Occurs in 26.4% of correctly predicted Class 1 compounds. This </a:t>
+            </a:r>
+            <a:r>
+              <a:rPr lang="en-US" sz="4400" b="1" dirty="0"/>
+              <a:t>cyano-substituted pyrimidine</a:t>
+            </a:r>
+            <a:r>
+              <a:rPr lang="en-US" sz="4400" dirty="0"/>
+              <a:t> motif is a classic </a:t>
+            </a:r>
+            <a:r>
+              <a:rPr lang="en-US" sz="4400" b="1" dirty="0"/>
+              <a:t>kinase hinge-binder</a:t>
+            </a:r>
+            <a:r>
+              <a:rPr lang="en-US" sz="4400" dirty="0"/>
+              <a:t>.</a:t>
+            </a:r>
+          </a:p>
+          <a:p>
+            <a:pPr marL="228600" indent="-228600" algn="just">
+              <a:buFont typeface="+mj-lt"/>
+              <a:buAutoNum type="arabicPeriod"/>
+            </a:pPr>
+            <a:endParaRPr lang="en-US" sz="4400" dirty="0"/>
+          </a:p>
+          <a:p>
+            <a:pPr marL="228600" indent="-228600" algn="just">
+              <a:buFont typeface="+mj-lt"/>
+              <a:buAutoNum type="arabicPeriod"/>
+            </a:pPr>
+            <a:r>
+              <a:rPr lang="en-US" sz="4400" dirty="0"/>
+              <a:t>[*]c1nc(N)</a:t>
+            </a:r>
+            <a:r>
+              <a:rPr lang="en-US" sz="4400" dirty="0" err="1"/>
+              <a:t>nc</a:t>
+            </a:r>
+            <a:r>
+              <a:rPr lang="en-US" sz="4400" dirty="0"/>
+              <a:t>(N)c1C#N: Occurs in 25.0% of cases. A </a:t>
+            </a:r>
+            <a:r>
+              <a:rPr lang="en-US" sz="4400" b="1" dirty="0"/>
+              <a:t>diamino-</a:t>
+            </a:r>
+            <a:r>
+              <a:rPr lang="en-US" sz="4400" b="1" dirty="0" err="1"/>
+              <a:t>cyano</a:t>
+            </a:r>
+            <a:r>
+              <a:rPr lang="en-US" sz="4400" b="1" dirty="0"/>
+              <a:t> pyrimidine derivative</a:t>
+            </a:r>
+            <a:r>
+              <a:rPr lang="en-US" sz="4400" dirty="0"/>
+              <a:t>, strongly indicating </a:t>
+            </a:r>
+            <a:r>
+              <a:rPr lang="en-US" sz="4400" b="1" dirty="0"/>
+              <a:t>hydrogen-bonding interactions </a:t>
+            </a:r>
+            <a:r>
+              <a:rPr lang="en-US" sz="4400" dirty="0"/>
+              <a:t>with the </a:t>
+            </a:r>
+            <a:r>
+              <a:rPr lang="en-US" sz="4400" b="1" dirty="0"/>
+              <a:t>hinge region</a:t>
+            </a:r>
+            <a:r>
+              <a:rPr lang="en-US" sz="4400" dirty="0"/>
+              <a:t>.</a:t>
+            </a:r>
+          </a:p>
+        </p:txBody>
+      </p:sp>
+    </p:spTree>
+    <p:extLst>
+      <p:ext uri="{BB962C8B-B14F-4D97-AF65-F5344CB8AC3E}">
+        <p14:creationId xmlns:p14="http://schemas.microsoft.com/office/powerpoint/2010/main" val="1485803423"/>
+      </p:ext>
+    </p:extLst>
+  </p:cSld>
+  <p:clrMapOvr>
+    <a:masterClrMapping/>
+  </p:clrMapOvr>
+</p:sld>
+</file>
+
+<file path=ppt/slides/slide5.xml><?xml version="1.0" encoding="utf-8"?>
+<p:sld xmlns:a="http://schemas.openxmlformats.org/drawingml/2006/main" xmlns:r="http://schemas.openxmlformats.org/officeDocument/2006/relationships" xmlns:p="http://schemas.openxmlformats.org/presentationml/2006/main" show="0">
   <p:cSld>
     <p:spTree>
       <p:nvGrpSpPr>
@@ -7387,8 +13494,8 @@
         </p:nvSpPr>
         <p:spPr>
           <a:xfrm>
-            <a:off x="13691175" y="12224390"/>
-            <a:ext cx="23735578" cy="13758873"/>
+            <a:off x="11390334" y="12224390"/>
+            <a:ext cx="29946600" cy="13758873"/>
           </a:xfrm>
           <a:prstGeom prst="roundRect">
             <a:avLst/>
@@ -10008,7 +16115,7 @@
     </p:spTree>
     <p:extLst>
       <p:ext uri="{BB962C8B-B14F-4D97-AF65-F5344CB8AC3E}">
-        <p14:creationId xmlns:p14="http://schemas.microsoft.com/office/powerpoint/2010/main" val="3647094520"/>
+        <p14:creationId xmlns:p14="http://schemas.microsoft.com/office/powerpoint/2010/main" val="2350157358"/>
       </p:ext>
     </p:extLst>
   </p:cSld>
@@ -10018,8 +16125,8 @@
 </p:sld>
 </file>
 
-<file path=ppt/slides/slide4.xml><?xml version="1.0" encoding="utf-8"?>
-<p:sld xmlns:a="http://schemas.openxmlformats.org/drawingml/2006/main" xmlns:r="http://schemas.openxmlformats.org/officeDocument/2006/relationships" xmlns:p="http://schemas.openxmlformats.org/presentationml/2006/main">
+<file path=ppt/slides/slide6.xml><?xml version="1.0" encoding="utf-8"?>
+<p:sld xmlns:a="http://schemas.openxmlformats.org/drawingml/2006/main" xmlns:r="http://schemas.openxmlformats.org/officeDocument/2006/relationships" xmlns:p="http://schemas.openxmlformats.org/presentationml/2006/main" show="0">
   <p:cSld>
     <p:spTree>
       <p:nvGrpSpPr>

--- a/slides/figures_publication_portrait.pptx
+++ b/slides/figures_publication_portrait.pptx
@@ -7,10 +7,11 @@
   <p:sldIdLst>
     <p:sldId id="260" r:id="rId2"/>
     <p:sldId id="261" r:id="rId3"/>
-    <p:sldId id="259" r:id="rId4"/>
-    <p:sldId id="256" r:id="rId5"/>
-    <p:sldId id="258" r:id="rId6"/>
-    <p:sldId id="257" r:id="rId7"/>
+    <p:sldId id="262" r:id="rId4"/>
+    <p:sldId id="259" r:id="rId5"/>
+    <p:sldId id="256" r:id="rId6"/>
+    <p:sldId id="258" r:id="rId7"/>
+    <p:sldId id="257" r:id="rId8"/>
   </p:sldIdLst>
   <p:sldSz cx="51206400" cy="51206400"/>
   <p:notesSz cx="6799263" cy="9929813"/>
@@ -248,7 +249,7 @@
           <a:p>
             <a:fld id="{DBEC7EBC-4893-4C67-8E48-D69CA1600258}" type="datetimeFigureOut">
               <a:rPr lang="en-US" smtClean="0"/>
-              <a:t>5/18/2026</a:t>
+              <a:t>5/28/2026</a:t>
             </a:fld>
             <a:endParaRPr lang="en-US"/>
           </a:p>
@@ -418,7 +419,7 @@
           <a:p>
             <a:fld id="{DBEC7EBC-4893-4C67-8E48-D69CA1600258}" type="datetimeFigureOut">
               <a:rPr lang="en-US" smtClean="0"/>
-              <a:t>5/18/2026</a:t>
+              <a:t>5/28/2026</a:t>
             </a:fld>
             <a:endParaRPr lang="en-US"/>
           </a:p>
@@ -598,7 +599,7 @@
           <a:p>
             <a:fld id="{DBEC7EBC-4893-4C67-8E48-D69CA1600258}" type="datetimeFigureOut">
               <a:rPr lang="en-US" smtClean="0"/>
-              <a:t>5/18/2026</a:t>
+              <a:t>5/28/2026</a:t>
             </a:fld>
             <a:endParaRPr lang="en-US"/>
           </a:p>
@@ -768,7 +769,7 @@
           <a:p>
             <a:fld id="{DBEC7EBC-4893-4C67-8E48-D69CA1600258}" type="datetimeFigureOut">
               <a:rPr lang="en-US" smtClean="0"/>
-              <a:t>5/18/2026</a:t>
+              <a:t>5/28/2026</a:t>
             </a:fld>
             <a:endParaRPr lang="en-US"/>
           </a:p>
@@ -1014,7 +1015,7 @@
           <a:p>
             <a:fld id="{DBEC7EBC-4893-4C67-8E48-D69CA1600258}" type="datetimeFigureOut">
               <a:rPr lang="en-US" smtClean="0"/>
-              <a:t>5/18/2026</a:t>
+              <a:t>5/28/2026</a:t>
             </a:fld>
             <a:endParaRPr lang="en-US"/>
           </a:p>
@@ -1246,7 +1247,7 @@
           <a:p>
             <a:fld id="{DBEC7EBC-4893-4C67-8E48-D69CA1600258}" type="datetimeFigureOut">
               <a:rPr lang="en-US" smtClean="0"/>
-              <a:t>5/18/2026</a:t>
+              <a:t>5/28/2026</a:t>
             </a:fld>
             <a:endParaRPr lang="en-US"/>
           </a:p>
@@ -1613,7 +1614,7 @@
           <a:p>
             <a:fld id="{DBEC7EBC-4893-4C67-8E48-D69CA1600258}" type="datetimeFigureOut">
               <a:rPr lang="en-US" smtClean="0"/>
-              <a:t>5/18/2026</a:t>
+              <a:t>5/28/2026</a:t>
             </a:fld>
             <a:endParaRPr lang="en-US"/>
           </a:p>
@@ -1731,7 +1732,7 @@
           <a:p>
             <a:fld id="{DBEC7EBC-4893-4C67-8E48-D69CA1600258}" type="datetimeFigureOut">
               <a:rPr lang="en-US" smtClean="0"/>
-              <a:t>5/18/2026</a:t>
+              <a:t>5/28/2026</a:t>
             </a:fld>
             <a:endParaRPr lang="en-US"/>
           </a:p>
@@ -1826,7 +1827,7 @@
           <a:p>
             <a:fld id="{DBEC7EBC-4893-4C67-8E48-D69CA1600258}" type="datetimeFigureOut">
               <a:rPr lang="en-US" smtClean="0"/>
-              <a:t>5/18/2026</a:t>
+              <a:t>5/28/2026</a:t>
             </a:fld>
             <a:endParaRPr lang="en-US"/>
           </a:p>
@@ -2103,7 +2104,7 @@
           <a:p>
             <a:fld id="{DBEC7EBC-4893-4C67-8E48-D69CA1600258}" type="datetimeFigureOut">
               <a:rPr lang="en-US" smtClean="0"/>
-              <a:t>5/18/2026</a:t>
+              <a:t>5/28/2026</a:t>
             </a:fld>
             <a:endParaRPr lang="en-US"/>
           </a:p>
@@ -2360,7 +2361,7 @@
           <a:p>
             <a:fld id="{DBEC7EBC-4893-4C67-8E48-D69CA1600258}" type="datetimeFigureOut">
               <a:rPr lang="en-US" smtClean="0"/>
-              <a:t>5/18/2026</a:t>
+              <a:t>5/28/2026</a:t>
             </a:fld>
             <a:endParaRPr lang="en-US"/>
           </a:p>
@@ -2573,7 +2574,7 @@
           <a:p>
             <a:fld id="{DBEC7EBC-4893-4C67-8E48-D69CA1600258}" type="datetimeFigureOut">
               <a:rPr lang="en-US" smtClean="0"/>
-              <a:t>5/18/2026</a:t>
+              <a:t>5/28/2026</a:t>
             </a:fld>
             <a:endParaRPr lang="en-US"/>
           </a:p>
@@ -9062,6 +9063,3476 @@
 </file>
 
 <file path=ppt/slides/slide3.xml><?xml version="1.0" encoding="utf-8"?>
+<p:sld xmlns:a="http://schemas.openxmlformats.org/drawingml/2006/main" xmlns:r="http://schemas.openxmlformats.org/officeDocument/2006/relationships" xmlns:p="http://schemas.openxmlformats.org/presentationml/2006/main">
+  <p:cSld>
+    <p:spTree>
+      <p:nvGrpSpPr>
+        <p:cNvPr id="1" name=""/>
+        <p:cNvGrpSpPr/>
+        <p:nvPr/>
+      </p:nvGrpSpPr>
+      <p:grpSpPr>
+        <a:xfrm>
+          <a:off x="0" y="0"/>
+          <a:ext cx="0" cy="0"/>
+          <a:chOff x="0" y="0"/>
+          <a:chExt cx="0" cy="0"/>
+        </a:xfrm>
+      </p:grpSpPr>
+      <p:pic>
+        <p:nvPicPr>
+          <p:cNvPr id="98" name="Picture 97">
+            <a:extLst>
+              <a:ext uri="{FF2B5EF4-FFF2-40B4-BE49-F238E27FC236}">
+                <a16:creationId xmlns:a16="http://schemas.microsoft.com/office/drawing/2014/main" id="{A7F1FF81-F85B-AEE0-1DE8-5EB96DE47216}"/>
+              </a:ext>
+            </a:extLst>
+          </p:cNvPr>
+          <p:cNvPicPr>
+            <a:picLocks noChangeAspect="1"/>
+          </p:cNvPicPr>
+          <p:nvPr/>
+        </p:nvPicPr>
+        <p:blipFill>
+          <a:blip r:embed="rId2">
+            <a:extLst>
+              <a:ext uri="{28A0092B-C50C-407E-A947-70E740481C1C}">
+                <a14:useLocalDpi xmlns:a14="http://schemas.microsoft.com/office/drawing/2010/main" val="0"/>
+              </a:ext>
+            </a:extLst>
+          </a:blip>
+          <a:srcRect l="25671" t="16772" r="25601" b="34684"/>
+          <a:stretch/>
+        </p:blipFill>
+        <p:spPr>
+          <a:xfrm>
+            <a:off x="6677917" y="30348496"/>
+            <a:ext cx="16999639" cy="4019155"/>
+          </a:xfrm>
+          <a:prstGeom prst="rect">
+            <a:avLst/>
+          </a:prstGeom>
+        </p:spPr>
+      </p:pic>
+      <p:sp>
+        <p:nvSpPr>
+          <p:cNvPr id="14" name="Rectangle: Rounded Corners 13">
+            <a:extLst>
+              <a:ext uri="{FF2B5EF4-FFF2-40B4-BE49-F238E27FC236}">
+                <a16:creationId xmlns:a16="http://schemas.microsoft.com/office/drawing/2014/main" id="{DBF4675B-24DA-ECE6-C51C-65069789A359}"/>
+              </a:ext>
+            </a:extLst>
+          </p:cNvPr>
+          <p:cNvSpPr/>
+          <p:nvPr/>
+        </p:nvSpPr>
+        <p:spPr>
+          <a:xfrm>
+            <a:off x="6564917" y="4535967"/>
+            <a:ext cx="37071692" cy="5165792"/>
+          </a:xfrm>
+          <a:prstGeom prst="roundRect">
+            <a:avLst/>
+          </a:prstGeom>
+          <a:solidFill>
+            <a:schemeClr val="bg1">
+              <a:lumMod val="85000"/>
+            </a:schemeClr>
+          </a:solidFill>
+        </p:spPr>
+        <p:style>
+          <a:lnRef idx="2">
+            <a:schemeClr val="accent1">
+              <a:shade val="15000"/>
+            </a:schemeClr>
+          </a:lnRef>
+          <a:fillRef idx="1">
+            <a:schemeClr val="accent1"/>
+          </a:fillRef>
+          <a:effectRef idx="0">
+            <a:schemeClr val="accent1"/>
+          </a:effectRef>
+          <a:fontRef idx="minor">
+            <a:schemeClr val="lt1"/>
+          </a:fontRef>
+        </p:style>
+        <p:txBody>
+          <a:bodyPr rtlCol="0" anchor="ctr"/>
+          <a:lstStyle/>
+          <a:p>
+            <a:pPr algn="ctr"/>
+            <a:endParaRPr lang="en-US" dirty="0"/>
+          </a:p>
+        </p:txBody>
+      </p:sp>
+      <p:sp>
+        <p:nvSpPr>
+          <p:cNvPr id="53" name="TextBox 52">
+            <a:extLst>
+              <a:ext uri="{FF2B5EF4-FFF2-40B4-BE49-F238E27FC236}">
+                <a16:creationId xmlns:a16="http://schemas.microsoft.com/office/drawing/2014/main" id="{4D9CB3D1-7BFC-3386-B306-BDBBA5137ABA}"/>
+              </a:ext>
+            </a:extLst>
+          </p:cNvPr>
+          <p:cNvSpPr txBox="1"/>
+          <p:nvPr/>
+        </p:nvSpPr>
+        <p:spPr>
+          <a:xfrm>
+            <a:off x="16522078" y="12574083"/>
+            <a:ext cx="17157371" cy="923330"/>
+          </a:xfrm>
+          <a:prstGeom prst="rect">
+            <a:avLst/>
+          </a:prstGeom>
+          <a:noFill/>
+        </p:spPr>
+        <p:txBody>
+          <a:bodyPr wrap="square">
+            <a:spAutoFit/>
+          </a:bodyPr>
+          <a:lstStyle/>
+          <a:p>
+            <a:pPr algn="ctr"/>
+            <a:r>
+              <a:rPr lang="en-US" sz="5400" b="1" dirty="0">
+                <a:solidFill>
+                  <a:srgbClr val="0F0F0F"/>
+                </a:solidFill>
+                <a:latin typeface="ui-sans-serif"/>
+              </a:rPr>
+              <a:t>Pair 1: </a:t>
+            </a:r>
+            <a:r>
+              <a:rPr lang="en-US" sz="5400" b="1" dirty="0" err="1">
+                <a:solidFill>
+                  <a:srgbClr val="0F0F0F"/>
+                </a:solidFill>
+                <a:latin typeface="ui-sans-serif"/>
+              </a:rPr>
+              <a:t>MolAnchor</a:t>
+            </a:r>
+            <a:r>
+              <a:rPr lang="en-US" sz="5400" b="1" dirty="0">
+                <a:solidFill>
+                  <a:srgbClr val="0F0F0F"/>
+                </a:solidFill>
+                <a:latin typeface="ui-sans-serif"/>
+              </a:rPr>
+              <a:t> vs SHAP</a:t>
+            </a:r>
+            <a:endParaRPr lang="en-US" sz="5400" b="1" i="0" dirty="0">
+              <a:solidFill>
+                <a:srgbClr val="0F0F0F"/>
+              </a:solidFill>
+              <a:effectLst/>
+              <a:latin typeface="ui-sans-serif"/>
+            </a:endParaRPr>
+          </a:p>
+        </p:txBody>
+      </p:sp>
+      <p:sp>
+        <p:nvSpPr>
+          <p:cNvPr id="2" name="Rectangle: Top Corners Rounded 1">
+            <a:extLst>
+              <a:ext uri="{FF2B5EF4-FFF2-40B4-BE49-F238E27FC236}">
+                <a16:creationId xmlns:a16="http://schemas.microsoft.com/office/drawing/2014/main" id="{6C13FBF4-81B4-461D-A19D-5804EED023DD}"/>
+              </a:ext>
+            </a:extLst>
+          </p:cNvPr>
+          <p:cNvSpPr/>
+          <p:nvPr/>
+        </p:nvSpPr>
+        <p:spPr>
+          <a:xfrm>
+            <a:off x="6564918" y="492288"/>
+            <a:ext cx="37042353" cy="3858422"/>
+          </a:xfrm>
+          <a:prstGeom prst="round2SameRect">
+            <a:avLst/>
+          </a:prstGeom>
+          <a:solidFill>
+            <a:schemeClr val="tx2">
+              <a:lumMod val="25000"/>
+              <a:lumOff val="75000"/>
+            </a:schemeClr>
+          </a:solidFill>
+        </p:spPr>
+        <p:style>
+          <a:lnRef idx="2">
+            <a:schemeClr val="accent1">
+              <a:shade val="15000"/>
+            </a:schemeClr>
+          </a:lnRef>
+          <a:fillRef idx="1">
+            <a:schemeClr val="accent1"/>
+          </a:fillRef>
+          <a:effectRef idx="0">
+            <a:schemeClr val="accent1"/>
+          </a:effectRef>
+          <a:fontRef idx="minor">
+            <a:schemeClr val="lt1"/>
+          </a:fontRef>
+        </p:style>
+        <p:txBody>
+          <a:bodyPr rtlCol="0" anchor="ctr"/>
+          <a:lstStyle/>
+          <a:p>
+            <a:pPr algn="just"/>
+            <a:r>
+              <a:rPr lang="en-US" sz="6000" dirty="0">
+                <a:solidFill>
+                  <a:schemeClr val="tx1"/>
+                </a:solidFill>
+              </a:rPr>
+              <a:t>Train a GNN model on a compound activity prediction dataset. Select a correctly predicted active compound and a correctly predicted inactive compound from the test set and explain the predictions using </a:t>
+            </a:r>
+            <a:r>
+              <a:rPr lang="en-US" sz="6000" dirty="0" err="1">
+                <a:solidFill>
+                  <a:schemeClr val="tx1"/>
+                </a:solidFill>
+              </a:rPr>
+              <a:t>EdgeSHAPer</a:t>
+            </a:r>
+            <a:r>
+              <a:rPr lang="en-US" sz="6000" dirty="0">
+                <a:solidFill>
+                  <a:schemeClr val="tx1"/>
+                </a:solidFill>
+              </a:rPr>
+              <a:t>. Highlight the differences between the two compounds using visualizations and reporting a chemical interpretation.</a:t>
+            </a:r>
+          </a:p>
+        </p:txBody>
+      </p:sp>
+      <p:sp>
+        <p:nvSpPr>
+          <p:cNvPr id="49" name="Rectangle: Rounded Corners 48">
+            <a:extLst>
+              <a:ext uri="{FF2B5EF4-FFF2-40B4-BE49-F238E27FC236}">
+                <a16:creationId xmlns:a16="http://schemas.microsoft.com/office/drawing/2014/main" id="{1C29497D-2B90-2BE5-88BB-D67B8144BA05}"/>
+              </a:ext>
+            </a:extLst>
+          </p:cNvPr>
+          <p:cNvSpPr/>
+          <p:nvPr/>
+        </p:nvSpPr>
+        <p:spPr>
+          <a:xfrm>
+            <a:off x="6564918" y="13607274"/>
+            <a:ext cx="37071691" cy="14309967"/>
+          </a:xfrm>
+          <a:prstGeom prst="roundRect">
+            <a:avLst/>
+          </a:prstGeom>
+          <a:noFill/>
+        </p:spPr>
+        <p:style>
+          <a:lnRef idx="2">
+            <a:schemeClr val="accent1">
+              <a:shade val="15000"/>
+            </a:schemeClr>
+          </a:lnRef>
+          <a:fillRef idx="1">
+            <a:schemeClr val="accent1"/>
+          </a:fillRef>
+          <a:effectRef idx="0">
+            <a:schemeClr val="accent1"/>
+          </a:effectRef>
+          <a:fontRef idx="minor">
+            <a:schemeClr val="lt1"/>
+          </a:fontRef>
+        </p:style>
+        <p:txBody>
+          <a:bodyPr rtlCol="0" anchor="ctr"/>
+          <a:lstStyle/>
+          <a:p>
+            <a:pPr algn="ctr"/>
+            <a:endParaRPr lang="en-US" dirty="0"/>
+          </a:p>
+        </p:txBody>
+      </p:sp>
+      <p:sp>
+        <p:nvSpPr>
+          <p:cNvPr id="75" name="Rectangle: Top Corners Rounded 74">
+            <a:extLst>
+              <a:ext uri="{FF2B5EF4-FFF2-40B4-BE49-F238E27FC236}">
+                <a16:creationId xmlns:a16="http://schemas.microsoft.com/office/drawing/2014/main" id="{ADA389BC-6277-D00F-8843-FDFC3BF7E611}"/>
+              </a:ext>
+            </a:extLst>
+          </p:cNvPr>
+          <p:cNvSpPr/>
+          <p:nvPr/>
+        </p:nvSpPr>
+        <p:spPr>
+          <a:xfrm rot="10800000">
+            <a:off x="6594255" y="43149687"/>
+            <a:ext cx="37013016" cy="7781566"/>
+          </a:xfrm>
+          <a:prstGeom prst="round2SameRect">
+            <a:avLst/>
+          </a:prstGeom>
+          <a:solidFill>
+            <a:schemeClr val="accent6">
+              <a:lumMod val="40000"/>
+              <a:lumOff val="60000"/>
+            </a:schemeClr>
+          </a:solidFill>
+        </p:spPr>
+        <p:style>
+          <a:lnRef idx="2">
+            <a:schemeClr val="accent1">
+              <a:shade val="15000"/>
+            </a:schemeClr>
+          </a:lnRef>
+          <a:fillRef idx="1">
+            <a:schemeClr val="accent1"/>
+          </a:fillRef>
+          <a:effectRef idx="0">
+            <a:schemeClr val="accent1"/>
+          </a:effectRef>
+          <a:fontRef idx="minor">
+            <a:schemeClr val="lt1"/>
+          </a:fontRef>
+        </p:style>
+        <p:txBody>
+          <a:bodyPr rtlCol="0" anchor="ctr"/>
+          <a:lstStyle/>
+          <a:p>
+            <a:pPr algn="just"/>
+            <a:endParaRPr lang="en-US" sz="4400" dirty="0">
+              <a:solidFill>
+                <a:schemeClr val="tx1"/>
+              </a:solidFill>
+            </a:endParaRPr>
+          </a:p>
+        </p:txBody>
+      </p:sp>
+      <p:sp>
+        <p:nvSpPr>
+          <p:cNvPr id="77" name="TextBox 76">
+            <a:extLst>
+              <a:ext uri="{FF2B5EF4-FFF2-40B4-BE49-F238E27FC236}">
+                <a16:creationId xmlns:a16="http://schemas.microsoft.com/office/drawing/2014/main" id="{C9821E32-A8A6-C518-B031-E9D5E16F9A8D}"/>
+              </a:ext>
+            </a:extLst>
+          </p:cNvPr>
+          <p:cNvSpPr txBox="1"/>
+          <p:nvPr/>
+        </p:nvSpPr>
+        <p:spPr>
+          <a:xfrm>
+            <a:off x="6891932" y="43647051"/>
+            <a:ext cx="36417663" cy="8094524"/>
+          </a:xfrm>
+          <a:prstGeom prst="rect">
+            <a:avLst/>
+          </a:prstGeom>
+          <a:noFill/>
+        </p:spPr>
+        <p:txBody>
+          <a:bodyPr wrap="square">
+            <a:spAutoFit/>
+          </a:bodyPr>
+          <a:lstStyle/>
+          <a:p>
+            <a:pPr marL="228600" indent="-228600">
+              <a:spcAft>
+                <a:spcPts val="1200"/>
+              </a:spcAft>
+              <a:buFont typeface="+mj-lt"/>
+              <a:buAutoNum type="arabicPeriod"/>
+            </a:pPr>
+            <a:r>
+              <a:rPr lang="en-US" sz="4400" b="1" i="0" dirty="0">
+                <a:solidFill>
+                  <a:srgbClr val="0F0F0F"/>
+                </a:solidFill>
+                <a:effectLst/>
+                <a:latin typeface="ui-sans-serif"/>
+              </a:rPr>
+              <a:t> Convergent Pharmacophore: </a:t>
+            </a:r>
+            <a:r>
+              <a:rPr lang="en-US" sz="4400" i="0" dirty="0">
+                <a:solidFill>
+                  <a:srgbClr val="0F0F0F"/>
+                </a:solidFill>
+                <a:effectLst/>
+                <a:latin typeface="ui-sans-serif"/>
+              </a:rPr>
+              <a:t>All four methods agree that the piperazine-benzyl-morpholinone core is the essential pharmacophore for D2 receptor binding.</a:t>
+            </a:r>
+          </a:p>
+          <a:p>
+            <a:pPr marL="228600" indent="-228600">
+              <a:spcAft>
+                <a:spcPts val="1200"/>
+              </a:spcAft>
+              <a:buFont typeface="+mj-lt"/>
+              <a:buAutoNum type="arabicPeriod"/>
+            </a:pPr>
+            <a:r>
+              <a:rPr lang="en-US" sz="4400" b="1" i="0" dirty="0">
+                <a:solidFill>
+                  <a:srgbClr val="0F0F0F"/>
+                </a:solidFill>
+                <a:effectLst/>
+                <a:latin typeface="ui-sans-serif"/>
+              </a:rPr>
+              <a:t> Critical Switch: </a:t>
+            </a:r>
+            <a:r>
+              <a:rPr lang="en-US" sz="4400" i="0" dirty="0">
+                <a:solidFill>
+                  <a:srgbClr val="0F0F0F"/>
+                </a:solidFill>
+                <a:effectLst/>
+                <a:latin typeface="ui-sans-serif"/>
+              </a:rPr>
+              <a:t>The piperazine nitrogen substituent acts as an "on/off switch"—modifying it can eliminate activity even with the intact core scaffold intact.</a:t>
+            </a:r>
+          </a:p>
+          <a:p>
+            <a:pPr marL="228600" indent="-228600">
+              <a:spcAft>
+                <a:spcPts val="1200"/>
+              </a:spcAft>
+              <a:buFont typeface="+mj-lt"/>
+              <a:buAutoNum type="arabicPeriod"/>
+            </a:pPr>
+            <a:r>
+              <a:rPr lang="en-US" sz="4400" b="1" i="0" dirty="0">
+                <a:solidFill>
+                  <a:srgbClr val="0F0F0F"/>
+                </a:solidFill>
+                <a:effectLst/>
+                <a:latin typeface="ui-sans-serif"/>
+              </a:rPr>
+              <a:t> Method Complementarity:</a:t>
+            </a:r>
+          </a:p>
+          <a:p>
+            <a:pPr marL="571500" indent="-571500">
+              <a:spcAft>
+                <a:spcPts val="1200"/>
+              </a:spcAft>
+              <a:buFont typeface="Arial" panose="020B0604020202020204" pitchFamily="34" charset="0"/>
+              <a:buChar char="•"/>
+            </a:pPr>
+            <a:r>
+              <a:rPr lang="en-US" sz="4400" b="1" i="0" dirty="0" err="1">
+                <a:solidFill>
+                  <a:srgbClr val="0F0F0F"/>
+                </a:solidFill>
+                <a:effectLst/>
+                <a:latin typeface="ui-sans-serif"/>
+              </a:rPr>
+              <a:t>MolAnchor</a:t>
+            </a:r>
+            <a:r>
+              <a:rPr lang="en-US" sz="4400" b="1" i="0" dirty="0">
+                <a:solidFill>
+                  <a:srgbClr val="0F0F0F"/>
+                </a:solidFill>
+                <a:effectLst/>
+                <a:latin typeface="ui-sans-serif"/>
+              </a:rPr>
+              <a:t>: </a:t>
+            </a:r>
+            <a:r>
+              <a:rPr lang="en-US" sz="4400" i="0" dirty="0">
+                <a:solidFill>
+                  <a:srgbClr val="0F0F0F"/>
+                </a:solidFill>
+                <a:effectLst/>
+                <a:latin typeface="ui-sans-serif"/>
+              </a:rPr>
+              <a:t>Best for identifying dominant fragments with high precision</a:t>
+            </a:r>
+          </a:p>
+          <a:p>
+            <a:pPr marL="571500" indent="-571500">
+              <a:spcAft>
+                <a:spcPts val="1200"/>
+              </a:spcAft>
+              <a:buFont typeface="Arial" panose="020B0604020202020204" pitchFamily="34" charset="0"/>
+              <a:buChar char="•"/>
+            </a:pPr>
+            <a:r>
+              <a:rPr lang="en-US" sz="4400" b="1" i="0" dirty="0">
+                <a:solidFill>
+                  <a:srgbClr val="0F0F0F"/>
+                </a:solidFill>
+                <a:effectLst/>
+                <a:latin typeface="ui-sans-serif"/>
+              </a:rPr>
+              <a:t>SHAP: </a:t>
+            </a:r>
+            <a:r>
+              <a:rPr lang="en-US" sz="4400" i="0" dirty="0">
+                <a:solidFill>
+                  <a:srgbClr val="0F0F0F"/>
+                </a:solidFill>
+                <a:effectLst/>
+                <a:latin typeface="ui-sans-serif"/>
+              </a:rPr>
+              <a:t>Best for revealing distributed importance and negative contributions</a:t>
+            </a:r>
+          </a:p>
+          <a:p>
+            <a:pPr marL="571500" indent="-571500">
+              <a:spcAft>
+                <a:spcPts val="1200"/>
+              </a:spcAft>
+              <a:buFont typeface="Arial" panose="020B0604020202020204" pitchFamily="34" charset="0"/>
+              <a:buChar char="•"/>
+            </a:pPr>
+            <a:r>
+              <a:rPr lang="en-US" sz="4400" b="1" i="0" dirty="0" err="1">
+                <a:solidFill>
+                  <a:srgbClr val="0F0F0F"/>
+                </a:solidFill>
+                <a:effectLst/>
+                <a:latin typeface="ui-sans-serif"/>
+              </a:rPr>
+              <a:t>MolCE</a:t>
+            </a:r>
+            <a:r>
+              <a:rPr lang="en-US" sz="4400" i="0" dirty="0">
+                <a:solidFill>
+                  <a:srgbClr val="0F0F0F"/>
+                </a:solidFill>
+                <a:effectLst/>
+                <a:latin typeface="ui-sans-serif"/>
+              </a:rPr>
+              <a:t>: Best for identifying contrastive features (what distinguishes active from inactive)</a:t>
+            </a:r>
+          </a:p>
+          <a:p>
+            <a:pPr marL="571500" indent="-571500">
+              <a:spcAft>
+                <a:spcPts val="1200"/>
+              </a:spcAft>
+              <a:buFont typeface="Arial" panose="020B0604020202020204" pitchFamily="34" charset="0"/>
+              <a:buChar char="•"/>
+            </a:pPr>
+            <a:r>
+              <a:rPr lang="en-US" sz="4400" b="1" i="0" dirty="0">
+                <a:solidFill>
+                  <a:srgbClr val="0F0F0F"/>
+                </a:solidFill>
+                <a:effectLst/>
+                <a:latin typeface="ui-sans-serif"/>
+              </a:rPr>
+              <a:t>Counterfactuals: </a:t>
+            </a:r>
+            <a:r>
+              <a:rPr lang="en-US" sz="4400" i="0" dirty="0">
+                <a:solidFill>
+                  <a:srgbClr val="0F0F0F"/>
+                </a:solidFill>
+                <a:effectLst/>
+                <a:latin typeface="ui-sans-serif"/>
+              </a:rPr>
+              <a:t>Best for generating actionable structural modifications</a:t>
+            </a:r>
+          </a:p>
+          <a:p>
+            <a:pPr marL="742950" indent="-742950">
+              <a:spcAft>
+                <a:spcPts val="1200"/>
+              </a:spcAft>
+              <a:buFont typeface="+mj-lt"/>
+              <a:buAutoNum type="arabicPeriod" startAt="4"/>
+            </a:pPr>
+            <a:r>
+              <a:rPr lang="en-US" sz="4400" b="1" i="0" dirty="0">
+                <a:solidFill>
+                  <a:srgbClr val="0F0F0F"/>
+                </a:solidFill>
+                <a:effectLst/>
+                <a:latin typeface="ui-sans-serif"/>
+              </a:rPr>
+              <a:t>Limitation Insight: </a:t>
+            </a:r>
+            <a:r>
+              <a:rPr lang="en-US" sz="4400" i="0" dirty="0" err="1">
+                <a:solidFill>
+                  <a:srgbClr val="0F0F0F"/>
+                </a:solidFill>
+                <a:effectLst/>
+                <a:latin typeface="ui-sans-serif"/>
+              </a:rPr>
+              <a:t>MolAnchor's</a:t>
+            </a:r>
+            <a:r>
+              <a:rPr lang="en-US" sz="4400" i="0" dirty="0">
+                <a:solidFill>
+                  <a:srgbClr val="0F0F0F"/>
+                </a:solidFill>
+                <a:effectLst/>
+                <a:latin typeface="ui-sans-serif"/>
+              </a:rPr>
+              <a:t> single-anchor view may oversimplify; SHAP reveals the benzothiazole's positive contribution that </a:t>
+            </a:r>
+            <a:r>
+              <a:rPr lang="en-US" sz="4400" i="0" dirty="0" err="1">
+                <a:solidFill>
+                  <a:srgbClr val="0F0F0F"/>
+                </a:solidFill>
+                <a:effectLst/>
+                <a:latin typeface="ui-sans-serif"/>
+              </a:rPr>
+              <a:t>MolAnchor</a:t>
+            </a:r>
+            <a:r>
+              <a:rPr lang="en-US" sz="4400" i="0" dirty="0">
+                <a:solidFill>
+                  <a:srgbClr val="0F0F0F"/>
+                </a:solidFill>
+                <a:effectLst/>
+                <a:latin typeface="ui-sans-serif"/>
+              </a:rPr>
+              <a:t> misses. Counterfactuals show that the core scaffold alone is necessary but not sufficient—the N-substituent is the decisive factor.</a:t>
+            </a:r>
+          </a:p>
+          <a:p>
+            <a:pPr marL="228600" indent="-228600">
+              <a:buFont typeface="+mj-lt"/>
+              <a:buAutoNum type="arabicPeriod" startAt="4"/>
+            </a:pPr>
+            <a:endParaRPr lang="en-US" sz="4400" b="1" i="0" dirty="0">
+              <a:solidFill>
+                <a:srgbClr val="0F0F0F"/>
+              </a:solidFill>
+              <a:effectLst/>
+              <a:latin typeface="ui-sans-serif"/>
+            </a:endParaRPr>
+          </a:p>
+        </p:txBody>
+      </p:sp>
+      <p:sp>
+        <p:nvSpPr>
+          <p:cNvPr id="80" name="TextBox 79">
+            <a:extLst>
+              <a:ext uri="{FF2B5EF4-FFF2-40B4-BE49-F238E27FC236}">
+                <a16:creationId xmlns:a16="http://schemas.microsoft.com/office/drawing/2014/main" id="{4F75911C-6BD0-922D-B821-7CE96BED0CA3}"/>
+              </a:ext>
+            </a:extLst>
+          </p:cNvPr>
+          <p:cNvSpPr txBox="1"/>
+          <p:nvPr/>
+        </p:nvSpPr>
+        <p:spPr>
+          <a:xfrm>
+            <a:off x="16522078" y="42190355"/>
+            <a:ext cx="17157371" cy="923330"/>
+          </a:xfrm>
+          <a:prstGeom prst="rect">
+            <a:avLst/>
+          </a:prstGeom>
+          <a:noFill/>
+        </p:spPr>
+        <p:txBody>
+          <a:bodyPr wrap="square">
+            <a:spAutoFit/>
+          </a:bodyPr>
+          <a:lstStyle/>
+          <a:p>
+            <a:pPr algn="ctr"/>
+            <a:r>
+              <a:rPr lang="en-US" sz="5400" b="1" dirty="0">
+                <a:solidFill>
+                  <a:srgbClr val="0F0F0F"/>
+                </a:solidFill>
+                <a:latin typeface="ui-sans-serif"/>
+              </a:rPr>
+              <a:t>Key takeaways</a:t>
+            </a:r>
+            <a:endParaRPr lang="en-US" sz="5400" b="1" i="0" dirty="0">
+              <a:solidFill>
+                <a:srgbClr val="0F0F0F"/>
+              </a:solidFill>
+              <a:effectLst/>
+              <a:latin typeface="ui-sans-serif"/>
+            </a:endParaRPr>
+          </a:p>
+        </p:txBody>
+      </p:sp>
+      <p:grpSp>
+        <p:nvGrpSpPr>
+          <p:cNvPr id="7" name="Group 6">
+            <a:extLst>
+              <a:ext uri="{FF2B5EF4-FFF2-40B4-BE49-F238E27FC236}">
+                <a16:creationId xmlns:a16="http://schemas.microsoft.com/office/drawing/2014/main" id="{AE02D07E-FA83-46F7-FBED-29C7C8CFC31A}"/>
+              </a:ext>
+            </a:extLst>
+          </p:cNvPr>
+          <p:cNvGrpSpPr/>
+          <p:nvPr/>
+        </p:nvGrpSpPr>
+        <p:grpSpPr>
+          <a:xfrm>
+            <a:off x="11490222" y="51440427"/>
+            <a:ext cx="27221082" cy="923330"/>
+            <a:chOff x="13161742" y="35331084"/>
+            <a:chExt cx="27221082" cy="923330"/>
+          </a:xfrm>
+        </p:grpSpPr>
+        <p:sp>
+          <p:nvSpPr>
+            <p:cNvPr id="81" name="Rectangle 80">
+              <a:extLst>
+                <a:ext uri="{FF2B5EF4-FFF2-40B4-BE49-F238E27FC236}">
+                  <a16:creationId xmlns:a16="http://schemas.microsoft.com/office/drawing/2014/main" id="{72807964-5BD9-B45A-64B0-2645DF88EB3B}"/>
+                </a:ext>
+              </a:extLst>
+            </p:cNvPr>
+            <p:cNvSpPr/>
+            <p:nvPr/>
+          </p:nvSpPr>
+          <p:spPr>
+            <a:xfrm>
+              <a:off x="13161742" y="35440946"/>
+              <a:ext cx="1646814" cy="703607"/>
+            </a:xfrm>
+            <a:prstGeom prst="rect">
+              <a:avLst/>
+            </a:prstGeom>
+            <a:solidFill>
+              <a:srgbClr val="A6CAEC"/>
+            </a:solidFill>
+          </p:spPr>
+          <p:style>
+            <a:lnRef idx="2">
+              <a:schemeClr val="accent1">
+                <a:shade val="15000"/>
+              </a:schemeClr>
+            </a:lnRef>
+            <a:fillRef idx="1">
+              <a:schemeClr val="accent1"/>
+            </a:fillRef>
+            <a:effectRef idx="0">
+              <a:schemeClr val="accent1"/>
+            </a:effectRef>
+            <a:fontRef idx="minor">
+              <a:schemeClr val="lt1"/>
+            </a:fontRef>
+          </p:style>
+          <p:txBody>
+            <a:bodyPr rtlCol="0" anchor="ctr"/>
+            <a:lstStyle/>
+            <a:p>
+              <a:pPr algn="ctr"/>
+              <a:endParaRPr lang="en-US"/>
+            </a:p>
+          </p:txBody>
+        </p:sp>
+        <p:sp>
+          <p:nvSpPr>
+            <p:cNvPr id="82" name="TextBox 81">
+              <a:extLst>
+                <a:ext uri="{FF2B5EF4-FFF2-40B4-BE49-F238E27FC236}">
+                  <a16:creationId xmlns:a16="http://schemas.microsoft.com/office/drawing/2014/main" id="{EACA069E-8CED-5E8A-69B1-E9F4FC24041A}"/>
+                </a:ext>
+              </a:extLst>
+            </p:cNvPr>
+            <p:cNvSpPr txBox="1"/>
+            <p:nvPr/>
+          </p:nvSpPr>
+          <p:spPr>
+            <a:xfrm>
+              <a:off x="13960804" y="35331084"/>
+              <a:ext cx="6199523" cy="923330"/>
+            </a:xfrm>
+            <a:prstGeom prst="rect">
+              <a:avLst/>
+            </a:prstGeom>
+            <a:noFill/>
+          </p:spPr>
+          <p:txBody>
+            <a:bodyPr wrap="square" rtlCol="0">
+              <a:spAutoFit/>
+            </a:bodyPr>
+            <a:lstStyle/>
+            <a:p>
+              <a:pPr algn="ctr"/>
+              <a:r>
+                <a:rPr lang="en-US" sz="5400" dirty="0"/>
+                <a:t>User prompt</a:t>
+              </a:r>
+            </a:p>
+          </p:txBody>
+        </p:sp>
+        <p:sp>
+          <p:nvSpPr>
+            <p:cNvPr id="83" name="Rectangle 82">
+              <a:extLst>
+                <a:ext uri="{FF2B5EF4-FFF2-40B4-BE49-F238E27FC236}">
+                  <a16:creationId xmlns:a16="http://schemas.microsoft.com/office/drawing/2014/main" id="{083E7B6A-0D88-EE7A-862D-CD52DE210854}"/>
+                </a:ext>
+              </a:extLst>
+            </p:cNvPr>
+            <p:cNvSpPr/>
+            <p:nvPr/>
+          </p:nvSpPr>
+          <p:spPr>
+            <a:xfrm>
+              <a:off x="25749158" y="35440946"/>
+              <a:ext cx="1646814" cy="703607"/>
+            </a:xfrm>
+            <a:prstGeom prst="rect">
+              <a:avLst/>
+            </a:prstGeom>
+            <a:noFill/>
+          </p:spPr>
+          <p:style>
+            <a:lnRef idx="2">
+              <a:schemeClr val="accent1">
+                <a:shade val="15000"/>
+              </a:schemeClr>
+            </a:lnRef>
+            <a:fillRef idx="1">
+              <a:schemeClr val="accent1"/>
+            </a:fillRef>
+            <a:effectRef idx="0">
+              <a:schemeClr val="accent1"/>
+            </a:effectRef>
+            <a:fontRef idx="minor">
+              <a:schemeClr val="lt1"/>
+            </a:fontRef>
+          </p:style>
+          <p:txBody>
+            <a:bodyPr rtlCol="0" anchor="ctr"/>
+            <a:lstStyle/>
+            <a:p>
+              <a:pPr algn="ctr"/>
+              <a:endParaRPr lang="en-US"/>
+            </a:p>
+          </p:txBody>
+        </p:sp>
+        <p:sp>
+          <p:nvSpPr>
+            <p:cNvPr id="84" name="TextBox 83">
+              <a:extLst>
+                <a:ext uri="{FF2B5EF4-FFF2-40B4-BE49-F238E27FC236}">
+                  <a16:creationId xmlns:a16="http://schemas.microsoft.com/office/drawing/2014/main" id="{358AE044-1305-34FC-BBC0-450EF8C6264C}"/>
+                </a:ext>
+              </a:extLst>
+            </p:cNvPr>
+            <p:cNvSpPr txBox="1"/>
+            <p:nvPr/>
+          </p:nvSpPr>
+          <p:spPr>
+            <a:xfrm>
+              <a:off x="26376770" y="35331084"/>
+              <a:ext cx="8218539" cy="923330"/>
+            </a:xfrm>
+            <a:prstGeom prst="rect">
+              <a:avLst/>
+            </a:prstGeom>
+            <a:noFill/>
+          </p:spPr>
+          <p:txBody>
+            <a:bodyPr wrap="square" rtlCol="0">
+              <a:spAutoFit/>
+            </a:bodyPr>
+            <a:lstStyle/>
+            <a:p>
+              <a:pPr algn="ctr"/>
+              <a:r>
+                <a:rPr lang="en-US" sz="5400" dirty="0"/>
+                <a:t>Response &amp; output</a:t>
+              </a:r>
+            </a:p>
+          </p:txBody>
+        </p:sp>
+        <p:sp>
+          <p:nvSpPr>
+            <p:cNvPr id="86" name="Rectangle 85">
+              <a:extLst>
+                <a:ext uri="{FF2B5EF4-FFF2-40B4-BE49-F238E27FC236}">
+                  <a16:creationId xmlns:a16="http://schemas.microsoft.com/office/drawing/2014/main" id="{350C722C-59C7-EC1B-EC99-E1777E1494CE}"/>
+                </a:ext>
+              </a:extLst>
+            </p:cNvPr>
+            <p:cNvSpPr/>
+            <p:nvPr/>
+          </p:nvSpPr>
+          <p:spPr>
+            <a:xfrm>
+              <a:off x="34204757" y="35440946"/>
+              <a:ext cx="1646814" cy="703607"/>
+            </a:xfrm>
+            <a:prstGeom prst="rect">
+              <a:avLst/>
+            </a:prstGeom>
+            <a:solidFill>
+              <a:srgbClr val="B4E5A2"/>
+            </a:solidFill>
+          </p:spPr>
+          <p:style>
+            <a:lnRef idx="2">
+              <a:schemeClr val="accent1">
+                <a:shade val="15000"/>
+              </a:schemeClr>
+            </a:lnRef>
+            <a:fillRef idx="1">
+              <a:schemeClr val="accent1"/>
+            </a:fillRef>
+            <a:effectRef idx="0">
+              <a:schemeClr val="accent1"/>
+            </a:effectRef>
+            <a:fontRef idx="minor">
+              <a:schemeClr val="lt1"/>
+            </a:fontRef>
+          </p:style>
+          <p:txBody>
+            <a:bodyPr rtlCol="0" anchor="ctr"/>
+            <a:lstStyle/>
+            <a:p>
+              <a:pPr algn="ctr"/>
+              <a:endParaRPr lang="en-US"/>
+            </a:p>
+          </p:txBody>
+        </p:sp>
+        <p:sp>
+          <p:nvSpPr>
+            <p:cNvPr id="87" name="TextBox 86">
+              <a:extLst>
+                <a:ext uri="{FF2B5EF4-FFF2-40B4-BE49-F238E27FC236}">
+                  <a16:creationId xmlns:a16="http://schemas.microsoft.com/office/drawing/2014/main" id="{24FCF701-8B21-25B2-2AE4-BF962FF75654}"/>
+                </a:ext>
+              </a:extLst>
+            </p:cNvPr>
+            <p:cNvSpPr txBox="1"/>
+            <p:nvPr/>
+          </p:nvSpPr>
+          <p:spPr>
+            <a:xfrm>
+              <a:off x="35326982" y="35331084"/>
+              <a:ext cx="5055842" cy="923330"/>
+            </a:xfrm>
+            <a:prstGeom prst="rect">
+              <a:avLst/>
+            </a:prstGeom>
+            <a:noFill/>
+          </p:spPr>
+          <p:txBody>
+            <a:bodyPr wrap="square" rtlCol="0">
+              <a:spAutoFit/>
+            </a:bodyPr>
+            <a:lstStyle/>
+            <a:p>
+              <a:pPr algn="ctr"/>
+              <a:r>
+                <a:rPr lang="en-US" sz="5400" dirty="0"/>
+                <a:t>Discussion</a:t>
+              </a:r>
+            </a:p>
+          </p:txBody>
+        </p:sp>
+        <p:sp>
+          <p:nvSpPr>
+            <p:cNvPr id="5" name="Rectangle 4">
+              <a:extLst>
+                <a:ext uri="{FF2B5EF4-FFF2-40B4-BE49-F238E27FC236}">
+                  <a16:creationId xmlns:a16="http://schemas.microsoft.com/office/drawing/2014/main" id="{A2B5BA64-5C49-72B3-4807-202BB7511121}"/>
+                </a:ext>
+              </a:extLst>
+            </p:cNvPr>
+            <p:cNvSpPr/>
+            <p:nvPr/>
+          </p:nvSpPr>
+          <p:spPr>
+            <a:xfrm>
+              <a:off x="19941225" y="35440946"/>
+              <a:ext cx="1646814" cy="703607"/>
+            </a:xfrm>
+            <a:prstGeom prst="rect">
+              <a:avLst/>
+            </a:prstGeom>
+            <a:solidFill>
+              <a:srgbClr val="D9D9D9"/>
+            </a:solidFill>
+          </p:spPr>
+          <p:style>
+            <a:lnRef idx="2">
+              <a:schemeClr val="accent1">
+                <a:shade val="15000"/>
+              </a:schemeClr>
+            </a:lnRef>
+            <a:fillRef idx="1">
+              <a:schemeClr val="accent1"/>
+            </a:fillRef>
+            <a:effectRef idx="0">
+              <a:schemeClr val="accent1"/>
+            </a:effectRef>
+            <a:fontRef idx="minor">
+              <a:schemeClr val="lt1"/>
+            </a:fontRef>
+          </p:style>
+          <p:txBody>
+            <a:bodyPr rtlCol="0" anchor="ctr"/>
+            <a:lstStyle/>
+            <a:p>
+              <a:pPr algn="ctr"/>
+              <a:endParaRPr lang="en-US">
+                <a:solidFill>
+                  <a:srgbClr val="FFFFFF"/>
+                </a:solidFill>
+              </a:endParaRPr>
+            </a:p>
+          </p:txBody>
+        </p:sp>
+        <p:sp>
+          <p:nvSpPr>
+            <p:cNvPr id="6" name="TextBox 5">
+              <a:extLst>
+                <a:ext uri="{FF2B5EF4-FFF2-40B4-BE49-F238E27FC236}">
+                  <a16:creationId xmlns:a16="http://schemas.microsoft.com/office/drawing/2014/main" id="{0B838B24-BA64-D5F2-D98D-5C4BC2C2CAD6}"/>
+                </a:ext>
+              </a:extLst>
+            </p:cNvPr>
+            <p:cNvSpPr txBox="1"/>
+            <p:nvPr/>
+          </p:nvSpPr>
+          <p:spPr>
+            <a:xfrm>
+              <a:off x="20283087" y="35331084"/>
+              <a:ext cx="6199523" cy="923330"/>
+            </a:xfrm>
+            <a:prstGeom prst="rect">
+              <a:avLst/>
+            </a:prstGeom>
+            <a:noFill/>
+          </p:spPr>
+          <p:txBody>
+            <a:bodyPr wrap="square" rtlCol="0">
+              <a:spAutoFit/>
+            </a:bodyPr>
+            <a:lstStyle/>
+            <a:p>
+              <a:pPr algn="ctr"/>
+              <a:r>
+                <a:rPr lang="en-US" sz="5400" dirty="0"/>
+                <a:t>Tool calls</a:t>
+              </a:r>
+            </a:p>
+          </p:txBody>
+        </p:sp>
+      </p:grpSp>
+      <p:grpSp>
+        <p:nvGrpSpPr>
+          <p:cNvPr id="103" name="Group 102">
+            <a:extLst>
+              <a:ext uri="{FF2B5EF4-FFF2-40B4-BE49-F238E27FC236}">
+                <a16:creationId xmlns:a16="http://schemas.microsoft.com/office/drawing/2014/main" id="{686AEDAD-7926-E065-5CEF-0258F653ADAC}"/>
+              </a:ext>
+            </a:extLst>
+          </p:cNvPr>
+          <p:cNvGrpSpPr/>
+          <p:nvPr/>
+        </p:nvGrpSpPr>
+        <p:grpSpPr>
+          <a:xfrm>
+            <a:off x="7138763" y="4983782"/>
+            <a:ext cx="35924001" cy="4270163"/>
+            <a:chOff x="6759986" y="11876103"/>
+            <a:chExt cx="35924001" cy="4270163"/>
+          </a:xfrm>
+        </p:grpSpPr>
+        <p:sp>
+          <p:nvSpPr>
+            <p:cNvPr id="3" name="Rectangle: Rounded Corners 2">
+              <a:extLst>
+                <a:ext uri="{FF2B5EF4-FFF2-40B4-BE49-F238E27FC236}">
+                  <a16:creationId xmlns:a16="http://schemas.microsoft.com/office/drawing/2014/main" id="{465AE2D3-52C5-2D04-D846-EC865A9F4DC7}"/>
+                </a:ext>
+              </a:extLst>
+            </p:cNvPr>
+            <p:cNvSpPr/>
+            <p:nvPr/>
+          </p:nvSpPr>
+          <p:spPr>
+            <a:xfrm>
+              <a:off x="6759986" y="12124268"/>
+              <a:ext cx="6499225" cy="1338439"/>
+            </a:xfrm>
+            <a:prstGeom prst="roundRect">
+              <a:avLst/>
+            </a:prstGeom>
+            <a:solidFill>
+              <a:schemeClr val="bg1">
+                <a:lumMod val="65000"/>
+              </a:schemeClr>
+            </a:solidFill>
+          </p:spPr>
+          <p:style>
+            <a:lnRef idx="2">
+              <a:schemeClr val="accent1">
+                <a:shade val="15000"/>
+              </a:schemeClr>
+            </a:lnRef>
+            <a:fillRef idx="1">
+              <a:schemeClr val="accent1"/>
+            </a:fillRef>
+            <a:effectRef idx="0">
+              <a:schemeClr val="accent1"/>
+            </a:effectRef>
+            <a:fontRef idx="minor">
+              <a:schemeClr val="lt1"/>
+            </a:fontRef>
+          </p:style>
+          <p:txBody>
+            <a:bodyPr rtlCol="0" anchor="ctr"/>
+            <a:lstStyle/>
+            <a:p>
+              <a:pPr algn="ctr"/>
+              <a:r>
+                <a:rPr lang="en-US" sz="6000" dirty="0">
+                  <a:solidFill>
+                    <a:schemeClr val="tx1"/>
+                  </a:solidFill>
+                </a:rPr>
+                <a:t>Find dataset</a:t>
+              </a:r>
+            </a:p>
+          </p:txBody>
+        </p:sp>
+        <p:sp>
+          <p:nvSpPr>
+            <p:cNvPr id="4" name="Rectangle: Rounded Corners 3">
+              <a:extLst>
+                <a:ext uri="{FF2B5EF4-FFF2-40B4-BE49-F238E27FC236}">
+                  <a16:creationId xmlns:a16="http://schemas.microsoft.com/office/drawing/2014/main" id="{6DB85F9D-5273-DCFF-C989-7562C2561479}"/>
+                </a:ext>
+              </a:extLst>
+            </p:cNvPr>
+            <p:cNvSpPr/>
+            <p:nvPr/>
+          </p:nvSpPr>
+          <p:spPr>
+            <a:xfrm>
+              <a:off x="6759986" y="14558075"/>
+              <a:ext cx="6499225" cy="1338439"/>
+            </a:xfrm>
+            <a:prstGeom prst="roundRect">
+              <a:avLst/>
+            </a:prstGeom>
+            <a:solidFill>
+              <a:schemeClr val="bg1">
+                <a:lumMod val="65000"/>
+              </a:schemeClr>
+            </a:solidFill>
+          </p:spPr>
+          <p:style>
+            <a:lnRef idx="2">
+              <a:schemeClr val="accent1">
+                <a:shade val="15000"/>
+              </a:schemeClr>
+            </a:lnRef>
+            <a:fillRef idx="1">
+              <a:schemeClr val="accent1"/>
+            </a:fillRef>
+            <a:effectRef idx="0">
+              <a:schemeClr val="accent1"/>
+            </a:effectRef>
+            <a:fontRef idx="minor">
+              <a:schemeClr val="lt1"/>
+            </a:fontRef>
+          </p:style>
+          <p:txBody>
+            <a:bodyPr rtlCol="0" anchor="ctr"/>
+            <a:lstStyle/>
+            <a:p>
+              <a:pPr algn="ctr"/>
+              <a:r>
+                <a:rPr lang="en-US" sz="6000" dirty="0">
+                  <a:solidFill>
+                    <a:schemeClr val="tx1"/>
+                  </a:solidFill>
+                </a:rPr>
+                <a:t>Load dataset</a:t>
+              </a:r>
+            </a:p>
+          </p:txBody>
+        </p:sp>
+        <p:sp>
+          <p:nvSpPr>
+            <p:cNvPr id="8" name="Rectangle: Rounded Corners 7">
+              <a:extLst>
+                <a:ext uri="{FF2B5EF4-FFF2-40B4-BE49-F238E27FC236}">
+                  <a16:creationId xmlns:a16="http://schemas.microsoft.com/office/drawing/2014/main" id="{872B3574-1A6E-95E9-EEA3-C496E1B2F4CE}"/>
+                </a:ext>
+              </a:extLst>
+            </p:cNvPr>
+            <p:cNvSpPr/>
+            <p:nvPr/>
+          </p:nvSpPr>
+          <p:spPr>
+            <a:xfrm>
+              <a:off x="14116180" y="14558075"/>
+              <a:ext cx="6499225" cy="1338439"/>
+            </a:xfrm>
+            <a:prstGeom prst="roundRect">
+              <a:avLst/>
+            </a:prstGeom>
+            <a:solidFill>
+              <a:schemeClr val="bg1">
+                <a:lumMod val="65000"/>
+              </a:schemeClr>
+            </a:solidFill>
+          </p:spPr>
+          <p:style>
+            <a:lnRef idx="2">
+              <a:schemeClr val="accent1">
+                <a:shade val="15000"/>
+              </a:schemeClr>
+            </a:lnRef>
+            <a:fillRef idx="1">
+              <a:schemeClr val="accent1"/>
+            </a:fillRef>
+            <a:effectRef idx="0">
+              <a:schemeClr val="accent1"/>
+            </a:effectRef>
+            <a:fontRef idx="minor">
+              <a:schemeClr val="lt1"/>
+            </a:fontRef>
+          </p:style>
+          <p:txBody>
+            <a:bodyPr rtlCol="0" anchor="ctr"/>
+            <a:lstStyle/>
+            <a:p>
+              <a:pPr algn="ctr"/>
+              <a:r>
+                <a:rPr lang="en-US" sz="6000" dirty="0">
+                  <a:solidFill>
+                    <a:schemeClr val="tx1"/>
+                  </a:solidFill>
+                </a:rPr>
+                <a:t>Split dataset</a:t>
+              </a:r>
+            </a:p>
+          </p:txBody>
+        </p:sp>
+        <p:sp>
+          <p:nvSpPr>
+            <p:cNvPr id="9" name="Rectangle: Rounded Corners 8">
+              <a:extLst>
+                <a:ext uri="{FF2B5EF4-FFF2-40B4-BE49-F238E27FC236}">
+                  <a16:creationId xmlns:a16="http://schemas.microsoft.com/office/drawing/2014/main" id="{AB67E2D9-9E9D-F863-4BAE-D1ACB7A59896}"/>
+                </a:ext>
+              </a:extLst>
+            </p:cNvPr>
+            <p:cNvSpPr/>
+            <p:nvPr/>
+          </p:nvSpPr>
+          <p:spPr>
+            <a:xfrm>
+              <a:off x="14116180" y="11876103"/>
+              <a:ext cx="6499225" cy="1834769"/>
+            </a:xfrm>
+            <a:prstGeom prst="roundRect">
+              <a:avLst/>
+            </a:prstGeom>
+            <a:solidFill>
+              <a:schemeClr val="bg1">
+                <a:lumMod val="65000"/>
+              </a:schemeClr>
+            </a:solidFill>
+          </p:spPr>
+          <p:style>
+            <a:lnRef idx="2">
+              <a:schemeClr val="accent1">
+                <a:shade val="15000"/>
+              </a:schemeClr>
+            </a:lnRef>
+            <a:fillRef idx="1">
+              <a:schemeClr val="accent1"/>
+            </a:fillRef>
+            <a:effectRef idx="0">
+              <a:schemeClr val="accent1"/>
+            </a:effectRef>
+            <a:fontRef idx="minor">
+              <a:schemeClr val="lt1"/>
+            </a:fontRef>
+          </p:style>
+          <p:txBody>
+            <a:bodyPr rtlCol="0" anchor="ctr"/>
+            <a:lstStyle/>
+            <a:p>
+              <a:pPr algn="ctr"/>
+              <a:r>
+                <a:rPr lang="en-US" sz="6000" dirty="0">
+                  <a:solidFill>
+                    <a:schemeClr val="tx1"/>
+                  </a:solidFill>
+                </a:rPr>
+                <a:t>Prepare GNN dataset</a:t>
+              </a:r>
+            </a:p>
+          </p:txBody>
+        </p:sp>
+        <p:sp>
+          <p:nvSpPr>
+            <p:cNvPr id="10" name="Rectangle: Rounded Corners 9">
+              <a:extLst>
+                <a:ext uri="{FF2B5EF4-FFF2-40B4-BE49-F238E27FC236}">
+                  <a16:creationId xmlns:a16="http://schemas.microsoft.com/office/drawing/2014/main" id="{1344948B-9127-5D85-04AF-9E27623C51DB}"/>
+                </a:ext>
+              </a:extLst>
+            </p:cNvPr>
+            <p:cNvSpPr/>
+            <p:nvPr/>
+          </p:nvSpPr>
+          <p:spPr>
+            <a:xfrm>
+              <a:off x="21472374" y="12124268"/>
+              <a:ext cx="6499225" cy="1338439"/>
+            </a:xfrm>
+            <a:prstGeom prst="roundRect">
+              <a:avLst/>
+            </a:prstGeom>
+            <a:solidFill>
+              <a:schemeClr val="bg1">
+                <a:lumMod val="65000"/>
+              </a:schemeClr>
+            </a:solidFill>
+          </p:spPr>
+          <p:style>
+            <a:lnRef idx="2">
+              <a:schemeClr val="accent1">
+                <a:shade val="15000"/>
+              </a:schemeClr>
+            </a:lnRef>
+            <a:fillRef idx="1">
+              <a:schemeClr val="accent1"/>
+            </a:fillRef>
+            <a:effectRef idx="0">
+              <a:schemeClr val="accent1"/>
+            </a:effectRef>
+            <a:fontRef idx="minor">
+              <a:schemeClr val="lt1"/>
+            </a:fontRef>
+          </p:style>
+          <p:txBody>
+            <a:bodyPr rtlCol="0" anchor="ctr"/>
+            <a:lstStyle/>
+            <a:p>
+              <a:pPr algn="ctr"/>
+              <a:r>
+                <a:rPr lang="en-US" sz="6000" dirty="0">
+                  <a:solidFill>
+                    <a:schemeClr val="tx1"/>
+                  </a:solidFill>
+                </a:rPr>
+                <a:t>Train GNN model</a:t>
+              </a:r>
+            </a:p>
+          </p:txBody>
+        </p:sp>
+        <p:sp>
+          <p:nvSpPr>
+            <p:cNvPr id="12" name="Rectangle: Rounded Corners 11">
+              <a:extLst>
+                <a:ext uri="{FF2B5EF4-FFF2-40B4-BE49-F238E27FC236}">
+                  <a16:creationId xmlns:a16="http://schemas.microsoft.com/office/drawing/2014/main" id="{9B31298B-CDEF-CDC2-2977-DCA4EAA13569}"/>
+                </a:ext>
+              </a:extLst>
+            </p:cNvPr>
+            <p:cNvSpPr/>
+            <p:nvPr/>
+          </p:nvSpPr>
+          <p:spPr>
+            <a:xfrm>
+              <a:off x="21472374" y="14309910"/>
+              <a:ext cx="6499225" cy="1834769"/>
+            </a:xfrm>
+            <a:prstGeom prst="roundRect">
+              <a:avLst/>
+            </a:prstGeom>
+            <a:solidFill>
+              <a:schemeClr val="bg1">
+                <a:lumMod val="65000"/>
+              </a:schemeClr>
+            </a:solidFill>
+          </p:spPr>
+          <p:style>
+            <a:lnRef idx="2">
+              <a:schemeClr val="accent1">
+                <a:shade val="15000"/>
+              </a:schemeClr>
+            </a:lnRef>
+            <a:fillRef idx="1">
+              <a:schemeClr val="accent1"/>
+            </a:fillRef>
+            <a:effectRef idx="0">
+              <a:schemeClr val="accent1"/>
+            </a:effectRef>
+            <a:fontRef idx="minor">
+              <a:schemeClr val="lt1"/>
+            </a:fontRef>
+          </p:style>
+          <p:txBody>
+            <a:bodyPr rtlCol="0" anchor="ctr"/>
+            <a:lstStyle/>
+            <a:p>
+              <a:pPr algn="ctr"/>
+              <a:r>
+                <a:rPr lang="en-US" sz="6000" dirty="0">
+                  <a:solidFill>
+                    <a:schemeClr val="tx1"/>
+                  </a:solidFill>
+                </a:rPr>
+                <a:t>Select compounds</a:t>
+              </a:r>
+            </a:p>
+          </p:txBody>
+        </p:sp>
+        <p:sp>
+          <p:nvSpPr>
+            <p:cNvPr id="13" name="Rectangle: Rounded Corners 12">
+              <a:extLst>
+                <a:ext uri="{FF2B5EF4-FFF2-40B4-BE49-F238E27FC236}">
+                  <a16:creationId xmlns:a16="http://schemas.microsoft.com/office/drawing/2014/main" id="{A2D69792-6240-2A88-CEB7-39F07C646BE7}"/>
+                </a:ext>
+              </a:extLst>
+            </p:cNvPr>
+            <p:cNvSpPr/>
+            <p:nvPr/>
+          </p:nvSpPr>
+          <p:spPr>
+            <a:xfrm>
+              <a:off x="28828568" y="14308322"/>
+              <a:ext cx="6499225" cy="1837944"/>
+            </a:xfrm>
+            <a:prstGeom prst="roundRect">
+              <a:avLst/>
+            </a:prstGeom>
+            <a:solidFill>
+              <a:schemeClr val="bg1">
+                <a:lumMod val="65000"/>
+              </a:schemeClr>
+            </a:solidFill>
+          </p:spPr>
+          <p:style>
+            <a:lnRef idx="2">
+              <a:schemeClr val="accent1">
+                <a:shade val="15000"/>
+              </a:schemeClr>
+            </a:lnRef>
+            <a:fillRef idx="1">
+              <a:schemeClr val="accent1"/>
+            </a:fillRef>
+            <a:effectRef idx="0">
+              <a:schemeClr val="accent1"/>
+            </a:effectRef>
+            <a:fontRef idx="minor">
+              <a:schemeClr val="lt1"/>
+            </a:fontRef>
+          </p:style>
+          <p:txBody>
+            <a:bodyPr rtlCol="0" anchor="ctr"/>
+            <a:lstStyle/>
+            <a:p>
+              <a:pPr algn="ctr"/>
+              <a:r>
+                <a:rPr lang="en-US" sz="6000" dirty="0">
+                  <a:solidFill>
+                    <a:schemeClr val="tx1"/>
+                  </a:solidFill>
+                </a:rPr>
+                <a:t>Explain with </a:t>
+              </a:r>
+              <a:r>
+                <a:rPr lang="en-US" sz="6000" dirty="0" err="1">
+                  <a:solidFill>
+                    <a:schemeClr val="tx1"/>
+                  </a:solidFill>
+                </a:rPr>
+                <a:t>EdgeSHAPer</a:t>
+              </a:r>
+              <a:endParaRPr lang="en-US" sz="6000" dirty="0">
+                <a:solidFill>
+                  <a:schemeClr val="tx1"/>
+                </a:solidFill>
+              </a:endParaRPr>
+            </a:p>
+          </p:txBody>
+        </p:sp>
+        <p:cxnSp>
+          <p:nvCxnSpPr>
+            <p:cNvPr id="16" name="Straight Arrow Connector 15">
+              <a:extLst>
+                <a:ext uri="{FF2B5EF4-FFF2-40B4-BE49-F238E27FC236}">
+                  <a16:creationId xmlns:a16="http://schemas.microsoft.com/office/drawing/2014/main" id="{0EB09105-A603-3792-FA56-C202D530844E}"/>
+                </a:ext>
+              </a:extLst>
+            </p:cNvPr>
+            <p:cNvCxnSpPr>
+              <a:cxnSpLocks/>
+              <a:stCxn id="3" idx="2"/>
+              <a:endCxn id="4" idx="0"/>
+            </p:cNvCxnSpPr>
+            <p:nvPr/>
+          </p:nvCxnSpPr>
+          <p:spPr>
+            <a:xfrm>
+              <a:off x="10009599" y="13462707"/>
+              <a:ext cx="0" cy="1095368"/>
+            </a:xfrm>
+            <a:prstGeom prst="straightConnector1">
+              <a:avLst/>
+            </a:prstGeom>
+            <a:ln w="76200">
+              <a:solidFill>
+                <a:schemeClr val="tx1"/>
+              </a:solidFill>
+              <a:tailEnd type="triangle"/>
+            </a:ln>
+          </p:spPr>
+          <p:style>
+            <a:lnRef idx="2">
+              <a:schemeClr val="dk1"/>
+            </a:lnRef>
+            <a:fillRef idx="0">
+              <a:schemeClr val="dk1"/>
+            </a:fillRef>
+            <a:effectRef idx="1">
+              <a:schemeClr val="dk1"/>
+            </a:effectRef>
+            <a:fontRef idx="minor">
+              <a:schemeClr val="tx1"/>
+            </a:fontRef>
+          </p:style>
+        </p:cxnSp>
+        <p:cxnSp>
+          <p:nvCxnSpPr>
+            <p:cNvPr id="18" name="Straight Arrow Connector 17">
+              <a:extLst>
+                <a:ext uri="{FF2B5EF4-FFF2-40B4-BE49-F238E27FC236}">
+                  <a16:creationId xmlns:a16="http://schemas.microsoft.com/office/drawing/2014/main" id="{826109EB-84B7-25A1-4C4D-5E40E7C05280}"/>
+                </a:ext>
+              </a:extLst>
+            </p:cNvPr>
+            <p:cNvCxnSpPr>
+              <a:cxnSpLocks/>
+              <a:stCxn id="4" idx="3"/>
+              <a:endCxn id="8" idx="1"/>
+            </p:cNvCxnSpPr>
+            <p:nvPr/>
+          </p:nvCxnSpPr>
+          <p:spPr>
+            <a:xfrm>
+              <a:off x="13259211" y="15227295"/>
+              <a:ext cx="856969" cy="0"/>
+            </a:xfrm>
+            <a:prstGeom prst="straightConnector1">
+              <a:avLst/>
+            </a:prstGeom>
+            <a:ln w="76200">
+              <a:solidFill>
+                <a:schemeClr val="tx1"/>
+              </a:solidFill>
+              <a:tailEnd type="triangle"/>
+            </a:ln>
+          </p:spPr>
+          <p:style>
+            <a:lnRef idx="2">
+              <a:schemeClr val="dk1"/>
+            </a:lnRef>
+            <a:fillRef idx="0">
+              <a:schemeClr val="dk1"/>
+            </a:fillRef>
+            <a:effectRef idx="1">
+              <a:schemeClr val="dk1"/>
+            </a:effectRef>
+            <a:fontRef idx="minor">
+              <a:schemeClr val="tx1"/>
+            </a:fontRef>
+          </p:style>
+        </p:cxnSp>
+        <p:cxnSp>
+          <p:nvCxnSpPr>
+            <p:cNvPr id="26" name="Straight Arrow Connector 25">
+              <a:extLst>
+                <a:ext uri="{FF2B5EF4-FFF2-40B4-BE49-F238E27FC236}">
+                  <a16:creationId xmlns:a16="http://schemas.microsoft.com/office/drawing/2014/main" id="{FE9E200C-F61C-E3BC-C813-973305E697A5}"/>
+                </a:ext>
+              </a:extLst>
+            </p:cNvPr>
+            <p:cNvCxnSpPr>
+              <a:cxnSpLocks/>
+              <a:stCxn id="8" idx="0"/>
+              <a:endCxn id="9" idx="2"/>
+            </p:cNvCxnSpPr>
+            <p:nvPr/>
+          </p:nvCxnSpPr>
+          <p:spPr>
+            <a:xfrm flipV="1">
+              <a:off x="17365793" y="13710872"/>
+              <a:ext cx="0" cy="847203"/>
+            </a:xfrm>
+            <a:prstGeom prst="straightConnector1">
+              <a:avLst/>
+            </a:prstGeom>
+            <a:ln w="76200">
+              <a:solidFill>
+                <a:schemeClr val="tx1"/>
+              </a:solidFill>
+              <a:tailEnd type="triangle"/>
+            </a:ln>
+          </p:spPr>
+          <p:style>
+            <a:lnRef idx="2">
+              <a:schemeClr val="dk1"/>
+            </a:lnRef>
+            <a:fillRef idx="0">
+              <a:schemeClr val="dk1"/>
+            </a:fillRef>
+            <a:effectRef idx="1">
+              <a:schemeClr val="dk1"/>
+            </a:effectRef>
+            <a:fontRef idx="minor">
+              <a:schemeClr val="tx1"/>
+            </a:fontRef>
+          </p:style>
+        </p:cxnSp>
+        <p:cxnSp>
+          <p:nvCxnSpPr>
+            <p:cNvPr id="32" name="Straight Arrow Connector 31">
+              <a:extLst>
+                <a:ext uri="{FF2B5EF4-FFF2-40B4-BE49-F238E27FC236}">
+                  <a16:creationId xmlns:a16="http://schemas.microsoft.com/office/drawing/2014/main" id="{6B958271-883F-8940-76BB-8AF8F00A9DC4}"/>
+                </a:ext>
+              </a:extLst>
+            </p:cNvPr>
+            <p:cNvCxnSpPr>
+              <a:cxnSpLocks/>
+              <a:stCxn id="9" idx="3"/>
+            </p:cNvCxnSpPr>
+            <p:nvPr/>
+          </p:nvCxnSpPr>
+          <p:spPr>
+            <a:xfrm>
+              <a:off x="20615405" y="12793488"/>
+              <a:ext cx="856969" cy="0"/>
+            </a:xfrm>
+            <a:prstGeom prst="straightConnector1">
+              <a:avLst/>
+            </a:prstGeom>
+            <a:ln w="76200">
+              <a:solidFill>
+                <a:schemeClr val="tx1"/>
+              </a:solidFill>
+              <a:tailEnd type="triangle"/>
+            </a:ln>
+          </p:spPr>
+          <p:style>
+            <a:lnRef idx="2">
+              <a:schemeClr val="dk1"/>
+            </a:lnRef>
+            <a:fillRef idx="0">
+              <a:schemeClr val="dk1"/>
+            </a:fillRef>
+            <a:effectRef idx="1">
+              <a:schemeClr val="dk1"/>
+            </a:effectRef>
+            <a:fontRef idx="minor">
+              <a:schemeClr val="tx1"/>
+            </a:fontRef>
+          </p:style>
+        </p:cxnSp>
+        <p:cxnSp>
+          <p:nvCxnSpPr>
+            <p:cNvPr id="38" name="Straight Arrow Connector 37">
+              <a:extLst>
+                <a:ext uri="{FF2B5EF4-FFF2-40B4-BE49-F238E27FC236}">
+                  <a16:creationId xmlns:a16="http://schemas.microsoft.com/office/drawing/2014/main" id="{14B6177B-6EC6-A0F4-463E-CAAB2559ADE4}"/>
+                </a:ext>
+              </a:extLst>
+            </p:cNvPr>
+            <p:cNvCxnSpPr>
+              <a:cxnSpLocks/>
+              <a:stCxn id="10" idx="2"/>
+              <a:endCxn id="12" idx="0"/>
+            </p:cNvCxnSpPr>
+            <p:nvPr/>
+          </p:nvCxnSpPr>
+          <p:spPr>
+            <a:xfrm>
+              <a:off x="24721987" y="13462707"/>
+              <a:ext cx="0" cy="847203"/>
+            </a:xfrm>
+            <a:prstGeom prst="straightConnector1">
+              <a:avLst/>
+            </a:prstGeom>
+            <a:ln w="76200">
+              <a:solidFill>
+                <a:schemeClr val="tx1"/>
+              </a:solidFill>
+              <a:tailEnd type="triangle"/>
+            </a:ln>
+          </p:spPr>
+          <p:style>
+            <a:lnRef idx="2">
+              <a:schemeClr val="dk1"/>
+            </a:lnRef>
+            <a:fillRef idx="0">
+              <a:schemeClr val="dk1"/>
+            </a:fillRef>
+            <a:effectRef idx="1">
+              <a:schemeClr val="dk1"/>
+            </a:effectRef>
+            <a:fontRef idx="minor">
+              <a:schemeClr val="tx1"/>
+            </a:fontRef>
+          </p:style>
+        </p:cxnSp>
+        <p:cxnSp>
+          <p:nvCxnSpPr>
+            <p:cNvPr id="44" name="Straight Arrow Connector 43">
+              <a:extLst>
+                <a:ext uri="{FF2B5EF4-FFF2-40B4-BE49-F238E27FC236}">
+                  <a16:creationId xmlns:a16="http://schemas.microsoft.com/office/drawing/2014/main" id="{617806EB-FC1C-9A83-BF43-2E984DA88F27}"/>
+                </a:ext>
+              </a:extLst>
+            </p:cNvPr>
+            <p:cNvCxnSpPr>
+              <a:cxnSpLocks/>
+              <a:stCxn id="12" idx="3"/>
+              <a:endCxn id="13" idx="1"/>
+            </p:cNvCxnSpPr>
+            <p:nvPr/>
+          </p:nvCxnSpPr>
+          <p:spPr>
+            <a:xfrm flipV="1">
+              <a:off x="27971599" y="15227294"/>
+              <a:ext cx="856969" cy="1"/>
+            </a:xfrm>
+            <a:prstGeom prst="straightConnector1">
+              <a:avLst/>
+            </a:prstGeom>
+            <a:ln w="76200">
+              <a:solidFill>
+                <a:schemeClr val="tx1"/>
+              </a:solidFill>
+              <a:tailEnd type="triangle"/>
+            </a:ln>
+          </p:spPr>
+          <p:style>
+            <a:lnRef idx="2">
+              <a:schemeClr val="dk1"/>
+            </a:lnRef>
+            <a:fillRef idx="0">
+              <a:schemeClr val="dk1"/>
+            </a:fillRef>
+            <a:effectRef idx="1">
+              <a:schemeClr val="dk1"/>
+            </a:effectRef>
+            <a:fontRef idx="minor">
+              <a:schemeClr val="tx1"/>
+            </a:fontRef>
+          </p:style>
+        </p:cxnSp>
+        <p:sp>
+          <p:nvSpPr>
+            <p:cNvPr id="11" name="Rectangle: Rounded Corners 10">
+              <a:extLst>
+                <a:ext uri="{FF2B5EF4-FFF2-40B4-BE49-F238E27FC236}">
+                  <a16:creationId xmlns:a16="http://schemas.microsoft.com/office/drawing/2014/main" id="{B9E2F0D2-758C-ADDA-FB1D-86150C43DBFB}"/>
+                </a:ext>
+              </a:extLst>
+            </p:cNvPr>
+            <p:cNvSpPr/>
+            <p:nvPr/>
+          </p:nvSpPr>
+          <p:spPr>
+            <a:xfrm>
+              <a:off x="28828568" y="11876103"/>
+              <a:ext cx="6499225" cy="1834769"/>
+            </a:xfrm>
+            <a:prstGeom prst="roundRect">
+              <a:avLst/>
+            </a:prstGeom>
+            <a:solidFill>
+              <a:schemeClr val="bg1">
+                <a:lumMod val="65000"/>
+              </a:schemeClr>
+            </a:solidFill>
+          </p:spPr>
+          <p:style>
+            <a:lnRef idx="2">
+              <a:schemeClr val="accent1">
+                <a:shade val="15000"/>
+              </a:schemeClr>
+            </a:lnRef>
+            <a:fillRef idx="1">
+              <a:schemeClr val="accent1"/>
+            </a:fillRef>
+            <a:effectRef idx="0">
+              <a:schemeClr val="accent1"/>
+            </a:effectRef>
+            <a:fontRef idx="minor">
+              <a:schemeClr val="lt1"/>
+            </a:fontRef>
+          </p:style>
+          <p:txBody>
+            <a:bodyPr rtlCol="0" anchor="ctr"/>
+            <a:lstStyle/>
+            <a:p>
+              <a:pPr algn="ctr"/>
+              <a:r>
+                <a:rPr lang="en-US" sz="6000" dirty="0">
+                  <a:solidFill>
+                    <a:schemeClr val="tx1"/>
+                  </a:solidFill>
+                </a:rPr>
+                <a:t>Visualize </a:t>
+              </a:r>
+              <a:r>
+                <a:rPr lang="en-US" sz="6000" dirty="0" err="1">
+                  <a:solidFill>
+                    <a:schemeClr val="tx1"/>
+                  </a:solidFill>
+                </a:rPr>
+                <a:t>EdgeSHAPer</a:t>
+              </a:r>
+              <a:r>
+                <a:rPr lang="en-US" sz="6000" dirty="0">
+                  <a:solidFill>
+                    <a:schemeClr val="tx1"/>
+                  </a:solidFill>
+                </a:rPr>
+                <a:t> results</a:t>
+              </a:r>
+            </a:p>
+          </p:txBody>
+        </p:sp>
+        <p:sp>
+          <p:nvSpPr>
+            <p:cNvPr id="15" name="Rectangle: Rounded Corners 14">
+              <a:extLst>
+                <a:ext uri="{FF2B5EF4-FFF2-40B4-BE49-F238E27FC236}">
+                  <a16:creationId xmlns:a16="http://schemas.microsoft.com/office/drawing/2014/main" id="{B8F65186-81B1-D1B8-C13F-3957238F2887}"/>
+                </a:ext>
+              </a:extLst>
+            </p:cNvPr>
+            <p:cNvSpPr/>
+            <p:nvPr/>
+          </p:nvSpPr>
+          <p:spPr>
+            <a:xfrm>
+              <a:off x="36184762" y="11876103"/>
+              <a:ext cx="6499225" cy="1834769"/>
+            </a:xfrm>
+            <a:prstGeom prst="roundRect">
+              <a:avLst/>
+            </a:prstGeom>
+            <a:solidFill>
+              <a:schemeClr val="bg1">
+                <a:lumMod val="65000"/>
+              </a:schemeClr>
+            </a:solidFill>
+          </p:spPr>
+          <p:style>
+            <a:lnRef idx="2">
+              <a:schemeClr val="accent1">
+                <a:shade val="15000"/>
+              </a:schemeClr>
+            </a:lnRef>
+            <a:fillRef idx="1">
+              <a:schemeClr val="accent1"/>
+            </a:fillRef>
+            <a:effectRef idx="0">
+              <a:schemeClr val="accent1"/>
+            </a:effectRef>
+            <a:fontRef idx="minor">
+              <a:schemeClr val="lt1"/>
+            </a:fontRef>
+          </p:style>
+          <p:txBody>
+            <a:bodyPr rtlCol="0" anchor="ctr"/>
+            <a:lstStyle/>
+            <a:p>
+              <a:pPr algn="ctr"/>
+              <a:r>
+                <a:rPr lang="en-US" sz="6000" dirty="0">
+                  <a:solidFill>
+                    <a:schemeClr val="tx1"/>
+                  </a:solidFill>
+                </a:rPr>
+                <a:t>Get bond environments</a:t>
+              </a:r>
+            </a:p>
+          </p:txBody>
+        </p:sp>
+        <p:cxnSp>
+          <p:nvCxnSpPr>
+            <p:cNvPr id="21" name="Straight Arrow Connector 20">
+              <a:extLst>
+                <a:ext uri="{FF2B5EF4-FFF2-40B4-BE49-F238E27FC236}">
+                  <a16:creationId xmlns:a16="http://schemas.microsoft.com/office/drawing/2014/main" id="{C494FD80-29C3-EE6B-FDB2-9A808DC94B6F}"/>
+                </a:ext>
+              </a:extLst>
+            </p:cNvPr>
+            <p:cNvCxnSpPr>
+              <a:cxnSpLocks/>
+              <a:stCxn id="13" idx="0"/>
+              <a:endCxn id="11" idx="2"/>
+            </p:cNvCxnSpPr>
+            <p:nvPr/>
+          </p:nvCxnSpPr>
+          <p:spPr>
+            <a:xfrm flipV="1">
+              <a:off x="32078181" y="13710872"/>
+              <a:ext cx="0" cy="597450"/>
+            </a:xfrm>
+            <a:prstGeom prst="straightConnector1">
+              <a:avLst/>
+            </a:prstGeom>
+            <a:ln w="76200">
+              <a:solidFill>
+                <a:schemeClr val="tx1"/>
+              </a:solidFill>
+              <a:tailEnd type="triangle"/>
+            </a:ln>
+          </p:spPr>
+          <p:style>
+            <a:lnRef idx="2">
+              <a:schemeClr val="dk1"/>
+            </a:lnRef>
+            <a:fillRef idx="0">
+              <a:schemeClr val="dk1"/>
+            </a:fillRef>
+            <a:effectRef idx="1">
+              <a:schemeClr val="dk1"/>
+            </a:effectRef>
+            <a:fontRef idx="minor">
+              <a:schemeClr val="tx1"/>
+            </a:fontRef>
+          </p:style>
+        </p:cxnSp>
+        <p:cxnSp>
+          <p:nvCxnSpPr>
+            <p:cNvPr id="43" name="Straight Arrow Connector 42">
+              <a:extLst>
+                <a:ext uri="{FF2B5EF4-FFF2-40B4-BE49-F238E27FC236}">
+                  <a16:creationId xmlns:a16="http://schemas.microsoft.com/office/drawing/2014/main" id="{6B52E9F8-65B2-1599-AE34-E1A6FD0F09B4}"/>
+                </a:ext>
+              </a:extLst>
+            </p:cNvPr>
+            <p:cNvCxnSpPr>
+              <a:cxnSpLocks/>
+              <a:stCxn id="11" idx="3"/>
+              <a:endCxn id="15" idx="1"/>
+            </p:cNvCxnSpPr>
+            <p:nvPr/>
+          </p:nvCxnSpPr>
+          <p:spPr>
+            <a:xfrm>
+              <a:off x="35327793" y="12793488"/>
+              <a:ext cx="856969" cy="0"/>
+            </a:xfrm>
+            <a:prstGeom prst="straightConnector1">
+              <a:avLst/>
+            </a:prstGeom>
+            <a:ln w="76200">
+              <a:solidFill>
+                <a:schemeClr val="tx1"/>
+              </a:solidFill>
+              <a:tailEnd type="triangle"/>
+            </a:ln>
+          </p:spPr>
+          <p:style>
+            <a:lnRef idx="2">
+              <a:schemeClr val="dk1"/>
+            </a:lnRef>
+            <a:fillRef idx="0">
+              <a:schemeClr val="dk1"/>
+            </a:fillRef>
+            <a:effectRef idx="1">
+              <a:schemeClr val="dk1"/>
+            </a:effectRef>
+            <a:fontRef idx="minor">
+              <a:schemeClr val="tx1"/>
+            </a:fontRef>
+          </p:style>
+        </p:cxnSp>
+      </p:grpSp>
+      <p:sp>
+        <p:nvSpPr>
+          <p:cNvPr id="64" name="TextBox 63">
+            <a:extLst>
+              <a:ext uri="{FF2B5EF4-FFF2-40B4-BE49-F238E27FC236}">
+                <a16:creationId xmlns:a16="http://schemas.microsoft.com/office/drawing/2014/main" id="{375CDCAE-E997-6AB6-EE31-7EEA0E2E635E}"/>
+              </a:ext>
+            </a:extLst>
+          </p:cNvPr>
+          <p:cNvSpPr txBox="1"/>
+          <p:nvPr/>
+        </p:nvSpPr>
+        <p:spPr>
+          <a:xfrm>
+            <a:off x="31448517" y="13705366"/>
+            <a:ext cx="6310257" cy="923330"/>
+          </a:xfrm>
+          <a:prstGeom prst="rect">
+            <a:avLst/>
+          </a:prstGeom>
+          <a:noFill/>
+        </p:spPr>
+        <p:txBody>
+          <a:bodyPr wrap="square" rtlCol="0">
+            <a:spAutoFit/>
+          </a:bodyPr>
+          <a:lstStyle/>
+          <a:p>
+            <a:pPr algn="ctr"/>
+            <a:r>
+              <a:rPr lang="en-US" sz="5400" b="1" dirty="0"/>
+              <a:t>SHAP</a:t>
+            </a:r>
+            <a:endParaRPr lang="de-DE" sz="5400" b="1" dirty="0"/>
+          </a:p>
+        </p:txBody>
+      </p:sp>
+      <p:sp>
+        <p:nvSpPr>
+          <p:cNvPr id="63" name="TextBox 62">
+            <a:extLst>
+              <a:ext uri="{FF2B5EF4-FFF2-40B4-BE49-F238E27FC236}">
+                <a16:creationId xmlns:a16="http://schemas.microsoft.com/office/drawing/2014/main" id="{6A5C72D7-D885-252B-9D5B-8FCC3218E83B}"/>
+              </a:ext>
+            </a:extLst>
+          </p:cNvPr>
+          <p:cNvSpPr txBox="1"/>
+          <p:nvPr/>
+        </p:nvSpPr>
+        <p:spPr>
+          <a:xfrm>
+            <a:off x="12146227" y="13705366"/>
+            <a:ext cx="6603459" cy="923330"/>
+          </a:xfrm>
+          <a:prstGeom prst="rect">
+            <a:avLst/>
+          </a:prstGeom>
+          <a:noFill/>
+        </p:spPr>
+        <p:txBody>
+          <a:bodyPr wrap="square" rtlCol="0">
+            <a:spAutoFit/>
+          </a:bodyPr>
+          <a:lstStyle/>
+          <a:p>
+            <a:pPr algn="ctr"/>
+            <a:r>
+              <a:rPr lang="en-US" sz="5400" b="1" dirty="0" err="1"/>
+              <a:t>MolAnchor</a:t>
+            </a:r>
+            <a:endParaRPr lang="de-DE" sz="5400" b="1" dirty="0"/>
+          </a:p>
+        </p:txBody>
+      </p:sp>
+      <p:pic>
+        <p:nvPicPr>
+          <p:cNvPr id="52" name="Picture 51">
+            <a:extLst>
+              <a:ext uri="{FF2B5EF4-FFF2-40B4-BE49-F238E27FC236}">
+                <a16:creationId xmlns:a16="http://schemas.microsoft.com/office/drawing/2014/main" id="{205590DA-02DC-2BC3-5EB1-2191FD671C52}"/>
+              </a:ext>
+            </a:extLst>
+          </p:cNvPr>
+          <p:cNvPicPr>
+            <a:picLocks noChangeAspect="1"/>
+          </p:cNvPicPr>
+          <p:nvPr/>
+        </p:nvPicPr>
+        <p:blipFill>
+          <a:blip r:embed="rId3">
+            <a:extLst>
+              <a:ext uri="{28A0092B-C50C-407E-A947-70E740481C1C}">
+                <a14:useLocalDpi xmlns:a14="http://schemas.microsoft.com/office/drawing/2010/main" val="0"/>
+              </a:ext>
+            </a:extLst>
+          </a:blip>
+          <a:srcRect l="4656" t="21016" r="3144" b="22505"/>
+          <a:stretch/>
+        </p:blipFill>
+        <p:spPr>
+          <a:xfrm>
+            <a:off x="10113408" y="14740867"/>
+            <a:ext cx="10669097" cy="6535613"/>
+          </a:xfrm>
+          <a:prstGeom prst="rect">
+            <a:avLst/>
+          </a:prstGeom>
+        </p:spPr>
+      </p:pic>
+      <p:pic>
+        <p:nvPicPr>
+          <p:cNvPr id="55" name="Picture 54">
+            <a:extLst>
+              <a:ext uri="{FF2B5EF4-FFF2-40B4-BE49-F238E27FC236}">
+                <a16:creationId xmlns:a16="http://schemas.microsoft.com/office/drawing/2014/main" id="{377B645A-806B-0951-E881-FFC87314EA36}"/>
+              </a:ext>
+            </a:extLst>
+          </p:cNvPr>
+          <p:cNvPicPr>
+            <a:picLocks noChangeAspect="1"/>
+          </p:cNvPicPr>
+          <p:nvPr/>
+        </p:nvPicPr>
+        <p:blipFill>
+          <a:blip r:embed="rId4">
+            <a:extLst>
+              <a:ext uri="{28A0092B-C50C-407E-A947-70E740481C1C}">
+                <a14:useLocalDpi xmlns:a14="http://schemas.microsoft.com/office/drawing/2010/main" val="0"/>
+              </a:ext>
+            </a:extLst>
+          </a:blip>
+          <a:srcRect l="11525" t="17564" r="10242" b="16495"/>
+          <a:stretch/>
+        </p:blipFill>
+        <p:spPr>
+          <a:xfrm>
+            <a:off x="29190808" y="14586918"/>
+            <a:ext cx="10825674" cy="6843510"/>
+          </a:xfrm>
+          <a:prstGeom prst="rect">
+            <a:avLst/>
+          </a:prstGeom>
+        </p:spPr>
+      </p:pic>
+      <p:sp>
+        <p:nvSpPr>
+          <p:cNvPr id="70" name="TextBox 69">
+            <a:extLst>
+              <a:ext uri="{FF2B5EF4-FFF2-40B4-BE49-F238E27FC236}">
+                <a16:creationId xmlns:a16="http://schemas.microsoft.com/office/drawing/2014/main" id="{F75F65F4-FB7F-51FF-4984-C82E951ABDA0}"/>
+              </a:ext>
+            </a:extLst>
+          </p:cNvPr>
+          <p:cNvSpPr txBox="1"/>
+          <p:nvPr/>
+        </p:nvSpPr>
+        <p:spPr>
+          <a:xfrm>
+            <a:off x="7218356" y="21656089"/>
+            <a:ext cx="16459200" cy="5970865"/>
+          </a:xfrm>
+          <a:prstGeom prst="rect">
+            <a:avLst/>
+          </a:prstGeom>
+          <a:noFill/>
+        </p:spPr>
+        <p:txBody>
+          <a:bodyPr wrap="square">
+            <a:spAutoFit/>
+          </a:bodyPr>
+          <a:lstStyle/>
+          <a:p>
+            <a:pPr>
+              <a:spcAft>
+                <a:spcPts val="1200"/>
+              </a:spcAft>
+            </a:pPr>
+            <a:r>
+              <a:rPr lang="en-US" sz="4400" b="1" dirty="0"/>
+              <a:t>✅ AGREEMENTS (</a:t>
+            </a:r>
+            <a:r>
+              <a:rPr lang="en-US" sz="4400" b="1" dirty="0" err="1"/>
+              <a:t>MolAnchor</a:t>
+            </a:r>
+            <a:r>
+              <a:rPr lang="en-US" sz="4400" b="1" dirty="0"/>
+              <a:t> ↔ SHAP)</a:t>
+            </a:r>
+          </a:p>
+          <a:p>
+            <a:pPr marL="742950" indent="-742950" algn="just">
+              <a:spcAft>
+                <a:spcPts val="1200"/>
+              </a:spcAft>
+              <a:buFont typeface="+mj-lt"/>
+              <a:buAutoNum type="arabicPeriod"/>
+            </a:pPr>
+            <a:r>
+              <a:rPr lang="en-US" sz="4400" b="1" dirty="0"/>
+              <a:t>Core scaffold importance: </a:t>
+            </a:r>
+            <a:r>
+              <a:rPr lang="en-US" sz="4400" dirty="0"/>
+              <a:t>Both methods identify the piperazine/benzyl core as critical</a:t>
+            </a:r>
+          </a:p>
+          <a:p>
+            <a:pPr marL="742950" indent="-742950" algn="just">
+              <a:spcAft>
+                <a:spcPts val="1200"/>
+              </a:spcAft>
+              <a:buFont typeface="+mj-lt"/>
+              <a:buAutoNum type="arabicPeriod"/>
+            </a:pPr>
+            <a:r>
+              <a:rPr lang="en-US" sz="4400" b="1" dirty="0"/>
+              <a:t>N-methyl motif: </a:t>
+            </a:r>
+            <a:r>
+              <a:rPr lang="en-US" sz="4400" dirty="0"/>
+              <a:t>SHAP's top features (Bits 1280, 1791, 1792) all involve the N-methyl/benzyl-dimethylamine region captured by </a:t>
+            </a:r>
+            <a:r>
+              <a:rPr lang="en-US" sz="4400" dirty="0" err="1"/>
+              <a:t>MolAnchor's</a:t>
+            </a:r>
+            <a:r>
+              <a:rPr lang="en-US" sz="4400" dirty="0"/>
+              <a:t> anchor</a:t>
+            </a:r>
+          </a:p>
+          <a:p>
+            <a:pPr marL="742950" indent="-742950" algn="just">
+              <a:spcAft>
+                <a:spcPts val="1200"/>
+              </a:spcAft>
+              <a:buFont typeface="+mj-lt"/>
+              <a:buAutoNum type="arabicPeriod"/>
+            </a:pPr>
+            <a:r>
+              <a:rPr lang="en-US" sz="4400" b="1" dirty="0"/>
+              <a:t>Pharmacophore consensus</a:t>
+            </a:r>
+            <a:r>
+              <a:rPr lang="en-US" sz="4400" dirty="0"/>
+              <a:t>: Both confirm the morpholinone-piperazine-benzyl framework is essential for D2 binding</a:t>
+            </a:r>
+          </a:p>
+        </p:txBody>
+      </p:sp>
+      <p:sp>
+        <p:nvSpPr>
+          <p:cNvPr id="76" name="TextBox 75">
+            <a:extLst>
+              <a:ext uri="{FF2B5EF4-FFF2-40B4-BE49-F238E27FC236}">
+                <a16:creationId xmlns:a16="http://schemas.microsoft.com/office/drawing/2014/main" id="{7E7006D0-478E-9B07-8E29-CFFE8A3BC008}"/>
+              </a:ext>
+            </a:extLst>
+          </p:cNvPr>
+          <p:cNvSpPr txBox="1"/>
+          <p:nvPr/>
+        </p:nvSpPr>
+        <p:spPr>
+          <a:xfrm>
+            <a:off x="26374045" y="21656089"/>
+            <a:ext cx="16459200" cy="5970865"/>
+          </a:xfrm>
+          <a:prstGeom prst="rect">
+            <a:avLst/>
+          </a:prstGeom>
+          <a:noFill/>
+        </p:spPr>
+        <p:txBody>
+          <a:bodyPr wrap="square">
+            <a:spAutoFit/>
+          </a:bodyPr>
+          <a:lstStyle/>
+          <a:p>
+            <a:pPr marL="0" marR="0" lvl="0" indent="0" algn="l" defTabSz="457200" rtl="0" eaLnBrk="1" fontAlgn="auto" latinLnBrk="0" hangingPunct="1">
+              <a:lnSpc>
+                <a:spcPct val="100000"/>
+              </a:lnSpc>
+              <a:spcBef>
+                <a:spcPts val="0"/>
+              </a:spcBef>
+              <a:spcAft>
+                <a:spcPts val="1200"/>
+              </a:spcAft>
+              <a:buClrTx/>
+              <a:buSzTx/>
+              <a:buFontTx/>
+              <a:buNone/>
+              <a:tabLst/>
+              <a:defRPr/>
+            </a:pPr>
+            <a:r>
+              <a:rPr kumimoji="0" lang="en-US" sz="4400" b="1" i="0" u="none" strike="noStrike" kern="1200" cap="none" spc="0" normalizeH="0" baseline="0" noProof="0" dirty="0">
+                <a:ln>
+                  <a:noFill/>
+                </a:ln>
+                <a:solidFill>
+                  <a:prstClr val="black"/>
+                </a:solidFill>
+                <a:effectLst/>
+                <a:uLnTx/>
+                <a:uFillTx/>
+                <a:latin typeface="Aptos" panose="02110004020202020204"/>
+                <a:ea typeface="+mn-ea"/>
+                <a:cs typeface="+mn-cs"/>
+              </a:rPr>
+              <a:t>❌ DISAGREEMENTS (</a:t>
+            </a:r>
+            <a:r>
+              <a:rPr kumimoji="0" lang="en-US" sz="4400" b="1" i="0" u="none" strike="noStrike" kern="1200" cap="none" spc="0" normalizeH="0" baseline="0" noProof="0" dirty="0" err="1">
+                <a:ln>
+                  <a:noFill/>
+                </a:ln>
+                <a:solidFill>
+                  <a:prstClr val="black"/>
+                </a:solidFill>
+                <a:effectLst/>
+                <a:uLnTx/>
+                <a:uFillTx/>
+                <a:latin typeface="Aptos" panose="02110004020202020204"/>
+                <a:ea typeface="+mn-ea"/>
+                <a:cs typeface="+mn-cs"/>
+              </a:rPr>
+              <a:t>MolAnchor</a:t>
+            </a:r>
+            <a:r>
+              <a:rPr kumimoji="0" lang="en-US" sz="4400" b="1" i="0" u="none" strike="noStrike" kern="1200" cap="none" spc="0" normalizeH="0" baseline="0" noProof="0" dirty="0">
+                <a:ln>
+                  <a:noFill/>
+                </a:ln>
+                <a:solidFill>
+                  <a:prstClr val="black"/>
+                </a:solidFill>
+                <a:effectLst/>
+                <a:uLnTx/>
+                <a:uFillTx/>
+                <a:latin typeface="Aptos" panose="02110004020202020204"/>
+                <a:ea typeface="+mn-ea"/>
+                <a:cs typeface="+mn-cs"/>
+              </a:rPr>
+              <a:t> ↔ SHAP)</a:t>
+            </a:r>
+          </a:p>
+          <a:p>
+            <a:pPr marL="742950" marR="0" lvl="0" indent="-742950" algn="just" defTabSz="457200" rtl="0" eaLnBrk="1" fontAlgn="auto" latinLnBrk="0" hangingPunct="1">
+              <a:lnSpc>
+                <a:spcPct val="100000"/>
+              </a:lnSpc>
+              <a:spcBef>
+                <a:spcPts val="0"/>
+              </a:spcBef>
+              <a:spcAft>
+                <a:spcPts val="1200"/>
+              </a:spcAft>
+              <a:buClrTx/>
+              <a:buSzTx/>
+              <a:buFont typeface="+mj-lt"/>
+              <a:buAutoNum type="arabicPeriod"/>
+              <a:tabLst/>
+              <a:defRPr/>
+            </a:pPr>
+            <a:r>
+              <a:rPr kumimoji="0" lang="en-US" sz="4400" b="1" i="0" u="none" strike="noStrike" kern="1200" cap="none" spc="0" normalizeH="0" baseline="0" noProof="0" dirty="0">
+                <a:ln>
+                  <a:noFill/>
+                </a:ln>
+                <a:solidFill>
+                  <a:prstClr val="black"/>
+                </a:solidFill>
+                <a:effectLst/>
+                <a:uLnTx/>
+                <a:uFillTx/>
+                <a:latin typeface="Aptos" panose="02110004020202020204"/>
+                <a:ea typeface="+mn-ea"/>
+                <a:cs typeface="+mn-cs"/>
+              </a:rPr>
+              <a:t>Granularity: </a:t>
+            </a:r>
+            <a:r>
+              <a:rPr kumimoji="0" lang="en-US" sz="4400" b="0" i="0" u="none" strike="noStrike" kern="1200" cap="none" spc="0" normalizeH="0" baseline="0" noProof="0" dirty="0" err="1">
+                <a:ln>
+                  <a:noFill/>
+                </a:ln>
+                <a:solidFill>
+                  <a:prstClr val="black"/>
+                </a:solidFill>
+                <a:effectLst/>
+                <a:uLnTx/>
+                <a:uFillTx/>
+                <a:latin typeface="Aptos" panose="02110004020202020204"/>
+                <a:ea typeface="+mn-ea"/>
+                <a:cs typeface="+mn-cs"/>
+              </a:rPr>
+              <a:t>MolAnchor</a:t>
+            </a:r>
+            <a:r>
+              <a:rPr kumimoji="0" lang="en-US" sz="4400" b="0" i="0" u="none" strike="noStrike" kern="1200" cap="none" spc="0" normalizeH="0" baseline="0" noProof="0" dirty="0">
+                <a:ln>
+                  <a:noFill/>
+                </a:ln>
+                <a:solidFill>
+                  <a:prstClr val="black"/>
+                </a:solidFill>
+                <a:effectLst/>
+                <a:uLnTx/>
+                <a:uFillTx/>
+                <a:latin typeface="Aptos" panose="02110004020202020204"/>
+                <a:ea typeface="+mn-ea"/>
+                <a:cs typeface="+mn-cs"/>
+              </a:rPr>
+              <a:t> identifies ONE dominant anchor; SHAP reveals multiple contributing fragments</a:t>
+            </a:r>
+          </a:p>
+          <a:p>
+            <a:pPr marL="742950" marR="0" lvl="0" indent="-742950" algn="just" defTabSz="457200" rtl="0" eaLnBrk="1" fontAlgn="auto" latinLnBrk="0" hangingPunct="1">
+              <a:lnSpc>
+                <a:spcPct val="100000"/>
+              </a:lnSpc>
+              <a:spcBef>
+                <a:spcPts val="0"/>
+              </a:spcBef>
+              <a:spcAft>
+                <a:spcPts val="1200"/>
+              </a:spcAft>
+              <a:buClrTx/>
+              <a:buSzTx/>
+              <a:buFont typeface="+mj-lt"/>
+              <a:buAutoNum type="arabicPeriod"/>
+              <a:tabLst/>
+              <a:defRPr/>
+            </a:pPr>
+            <a:r>
+              <a:rPr kumimoji="0" lang="en-US" sz="4400" b="1" i="0" u="none" strike="noStrike" kern="1200" cap="none" spc="0" normalizeH="0" baseline="0" noProof="0" dirty="0">
+                <a:ln>
+                  <a:noFill/>
+                </a:ln>
+                <a:solidFill>
+                  <a:prstClr val="black"/>
+                </a:solidFill>
+                <a:effectLst/>
+                <a:uLnTx/>
+                <a:uFillTx/>
+                <a:latin typeface="Aptos" panose="02110004020202020204"/>
+                <a:ea typeface="+mn-ea"/>
+                <a:cs typeface="+mn-cs"/>
+              </a:rPr>
+              <a:t>Peripheral groups: </a:t>
+            </a:r>
+            <a:r>
+              <a:rPr kumimoji="0" lang="en-US" sz="4400" b="0" i="0" u="none" strike="noStrike" kern="1200" cap="none" spc="0" normalizeH="0" baseline="0" noProof="0" dirty="0">
+                <a:ln>
+                  <a:noFill/>
+                </a:ln>
+                <a:solidFill>
+                  <a:prstClr val="black"/>
+                </a:solidFill>
+                <a:effectLst/>
+                <a:uLnTx/>
+                <a:uFillTx/>
+                <a:latin typeface="Aptos" panose="02110004020202020204"/>
+                <a:ea typeface="+mn-ea"/>
+                <a:cs typeface="+mn-cs"/>
+              </a:rPr>
+              <a:t>SHAP highlights the benzothiazole (Bit 885, +5.39) as important, while </a:t>
+            </a:r>
+            <a:r>
+              <a:rPr kumimoji="0" lang="en-US" sz="4400" b="0" i="0" u="none" strike="noStrike" kern="1200" cap="none" spc="0" normalizeH="0" baseline="0" noProof="0" dirty="0" err="1">
+                <a:ln>
+                  <a:noFill/>
+                </a:ln>
+                <a:solidFill>
+                  <a:prstClr val="black"/>
+                </a:solidFill>
+                <a:effectLst/>
+                <a:uLnTx/>
+                <a:uFillTx/>
+                <a:latin typeface="Aptos" panose="02110004020202020204"/>
+                <a:ea typeface="+mn-ea"/>
+                <a:cs typeface="+mn-cs"/>
+              </a:rPr>
+              <a:t>MolAnchor</a:t>
+            </a:r>
+            <a:r>
+              <a:rPr kumimoji="0" lang="en-US" sz="4400" b="0" i="0" u="none" strike="noStrike" kern="1200" cap="none" spc="0" normalizeH="0" baseline="0" noProof="0" dirty="0">
+                <a:ln>
+                  <a:noFill/>
+                </a:ln>
+                <a:solidFill>
+                  <a:prstClr val="black"/>
+                </a:solidFill>
+                <a:effectLst/>
+                <a:uLnTx/>
+                <a:uFillTx/>
+                <a:latin typeface="Aptos" panose="02110004020202020204"/>
+                <a:ea typeface="+mn-ea"/>
+                <a:cs typeface="+mn-cs"/>
+              </a:rPr>
+              <a:t> doesn't single it out</a:t>
+            </a:r>
+          </a:p>
+          <a:p>
+            <a:pPr marL="742950" marR="0" lvl="0" indent="-742950" algn="just" defTabSz="457200" rtl="0" eaLnBrk="1" fontAlgn="auto" latinLnBrk="0" hangingPunct="1">
+              <a:lnSpc>
+                <a:spcPct val="100000"/>
+              </a:lnSpc>
+              <a:spcBef>
+                <a:spcPts val="0"/>
+              </a:spcBef>
+              <a:spcAft>
+                <a:spcPts val="1200"/>
+              </a:spcAft>
+              <a:buClrTx/>
+              <a:buSzTx/>
+              <a:buFont typeface="+mj-lt"/>
+              <a:buAutoNum type="arabicPeriod"/>
+              <a:tabLst/>
+              <a:defRPr/>
+            </a:pPr>
+            <a:r>
+              <a:rPr kumimoji="0" lang="en-US" sz="4400" b="1" i="0" u="none" strike="noStrike" kern="1200" cap="none" spc="0" normalizeH="0" baseline="0" noProof="0" dirty="0">
+                <a:ln>
+                  <a:noFill/>
+                </a:ln>
+                <a:solidFill>
+                  <a:prstClr val="black"/>
+                </a:solidFill>
+                <a:effectLst/>
+                <a:uLnTx/>
+                <a:uFillTx/>
+                <a:latin typeface="Aptos" panose="02110004020202020204"/>
+                <a:ea typeface="+mn-ea"/>
+                <a:cs typeface="+mn-cs"/>
+              </a:rPr>
+              <a:t>Negative contribution:</a:t>
+            </a:r>
+            <a:r>
+              <a:rPr kumimoji="0" lang="en-US" sz="4400" b="0" i="0" u="none" strike="noStrike" kern="1200" cap="none" spc="0" normalizeH="0" baseline="0" noProof="0" dirty="0">
+                <a:ln>
+                  <a:noFill/>
+                </a:ln>
+                <a:solidFill>
+                  <a:prstClr val="black"/>
+                </a:solidFill>
+                <a:effectLst/>
+                <a:uLnTx/>
+                <a:uFillTx/>
+                <a:latin typeface="Aptos" panose="02110004020202020204"/>
+                <a:ea typeface="+mn-ea"/>
+                <a:cs typeface="+mn-cs"/>
+              </a:rPr>
+              <a:t> SHAP identifies thiophene substructure (Bit 552, -5.37) as reducing activity—a nuance </a:t>
+            </a:r>
+            <a:r>
+              <a:rPr kumimoji="0" lang="en-US" sz="4400" b="0" i="0" u="none" strike="noStrike" kern="1200" cap="none" spc="0" normalizeH="0" baseline="0" noProof="0" dirty="0" err="1">
+                <a:ln>
+                  <a:noFill/>
+                </a:ln>
+                <a:solidFill>
+                  <a:prstClr val="black"/>
+                </a:solidFill>
+                <a:effectLst/>
+                <a:uLnTx/>
+                <a:uFillTx/>
+                <a:latin typeface="Aptos" panose="02110004020202020204"/>
+                <a:ea typeface="+mn-ea"/>
+                <a:cs typeface="+mn-cs"/>
+              </a:rPr>
+              <a:t>MolAnchor</a:t>
+            </a:r>
+            <a:r>
+              <a:rPr kumimoji="0" lang="en-US" sz="4400" b="0" i="0" u="none" strike="noStrike" kern="1200" cap="none" spc="0" normalizeH="0" baseline="0" noProof="0" dirty="0">
+                <a:ln>
+                  <a:noFill/>
+                </a:ln>
+                <a:solidFill>
+                  <a:prstClr val="black"/>
+                </a:solidFill>
+                <a:effectLst/>
+                <a:uLnTx/>
+                <a:uFillTx/>
+                <a:latin typeface="Aptos" panose="02110004020202020204"/>
+                <a:ea typeface="+mn-ea"/>
+                <a:cs typeface="+mn-cs"/>
+              </a:rPr>
+              <a:t> misses</a:t>
+            </a:r>
+          </a:p>
+        </p:txBody>
+      </p:sp>
+      <p:sp>
+        <p:nvSpPr>
+          <p:cNvPr id="85" name="TextBox 84">
+            <a:extLst>
+              <a:ext uri="{FF2B5EF4-FFF2-40B4-BE49-F238E27FC236}">
+                <a16:creationId xmlns:a16="http://schemas.microsoft.com/office/drawing/2014/main" id="{253B310A-4175-466E-82F8-A8F9C6BF4614}"/>
+              </a:ext>
+            </a:extLst>
+          </p:cNvPr>
+          <p:cNvSpPr txBox="1"/>
+          <p:nvPr/>
+        </p:nvSpPr>
+        <p:spPr>
+          <a:xfrm>
+            <a:off x="16522078" y="28068830"/>
+            <a:ext cx="17157371" cy="923330"/>
+          </a:xfrm>
+          <a:prstGeom prst="rect">
+            <a:avLst/>
+          </a:prstGeom>
+          <a:noFill/>
+        </p:spPr>
+        <p:txBody>
+          <a:bodyPr wrap="square">
+            <a:spAutoFit/>
+          </a:bodyPr>
+          <a:lstStyle/>
+          <a:p>
+            <a:pPr algn="ctr"/>
+            <a:r>
+              <a:rPr lang="en-US" sz="5400" b="1" dirty="0">
+                <a:solidFill>
+                  <a:srgbClr val="0F0F0F"/>
+                </a:solidFill>
+                <a:latin typeface="ui-sans-serif"/>
+              </a:rPr>
+              <a:t>Pair 2: </a:t>
+            </a:r>
+            <a:r>
+              <a:rPr lang="en-US" sz="5400" b="1" dirty="0" err="1">
+                <a:solidFill>
+                  <a:srgbClr val="0F0F0F"/>
+                </a:solidFill>
+                <a:latin typeface="ui-sans-serif"/>
+              </a:rPr>
+              <a:t>MolCE</a:t>
+            </a:r>
+            <a:r>
+              <a:rPr lang="en-US" sz="5400" b="1" dirty="0">
+                <a:solidFill>
+                  <a:srgbClr val="0F0F0F"/>
+                </a:solidFill>
+                <a:latin typeface="ui-sans-serif"/>
+              </a:rPr>
+              <a:t> vs Counterfactuals</a:t>
+            </a:r>
+            <a:endParaRPr lang="en-US" sz="5400" b="1" i="0" dirty="0">
+              <a:solidFill>
+                <a:srgbClr val="0F0F0F"/>
+              </a:solidFill>
+              <a:effectLst/>
+              <a:latin typeface="ui-sans-serif"/>
+            </a:endParaRPr>
+          </a:p>
+        </p:txBody>
+      </p:sp>
+      <p:sp>
+        <p:nvSpPr>
+          <p:cNvPr id="88" name="Rectangle: Rounded Corners 87">
+            <a:extLst>
+              <a:ext uri="{FF2B5EF4-FFF2-40B4-BE49-F238E27FC236}">
+                <a16:creationId xmlns:a16="http://schemas.microsoft.com/office/drawing/2014/main" id="{682C432F-C7DF-608D-CD06-390CC306E433}"/>
+              </a:ext>
+            </a:extLst>
+          </p:cNvPr>
+          <p:cNvSpPr/>
+          <p:nvPr/>
+        </p:nvSpPr>
+        <p:spPr>
+          <a:xfrm>
+            <a:off x="6564918" y="29051222"/>
+            <a:ext cx="37071691" cy="13099376"/>
+          </a:xfrm>
+          <a:prstGeom prst="roundRect">
+            <a:avLst/>
+          </a:prstGeom>
+          <a:noFill/>
+        </p:spPr>
+        <p:style>
+          <a:lnRef idx="2">
+            <a:schemeClr val="accent1">
+              <a:shade val="15000"/>
+            </a:schemeClr>
+          </a:lnRef>
+          <a:fillRef idx="1">
+            <a:schemeClr val="accent1"/>
+          </a:fillRef>
+          <a:effectRef idx="0">
+            <a:schemeClr val="accent1"/>
+          </a:effectRef>
+          <a:fontRef idx="minor">
+            <a:schemeClr val="lt1"/>
+          </a:fontRef>
+        </p:style>
+        <p:txBody>
+          <a:bodyPr rtlCol="0" anchor="ctr"/>
+          <a:lstStyle/>
+          <a:p>
+            <a:pPr algn="ctr"/>
+            <a:endParaRPr lang="en-US" dirty="0"/>
+          </a:p>
+        </p:txBody>
+      </p:sp>
+      <p:sp>
+        <p:nvSpPr>
+          <p:cNvPr id="89" name="TextBox 88">
+            <a:extLst>
+              <a:ext uri="{FF2B5EF4-FFF2-40B4-BE49-F238E27FC236}">
+                <a16:creationId xmlns:a16="http://schemas.microsoft.com/office/drawing/2014/main" id="{57BCAA73-24FE-3A3B-D1CF-4920116A858E}"/>
+              </a:ext>
+            </a:extLst>
+          </p:cNvPr>
+          <p:cNvSpPr txBox="1"/>
+          <p:nvPr/>
+        </p:nvSpPr>
+        <p:spPr>
+          <a:xfrm>
+            <a:off x="31448517" y="29149313"/>
+            <a:ext cx="6310257" cy="923330"/>
+          </a:xfrm>
+          <a:prstGeom prst="rect">
+            <a:avLst/>
+          </a:prstGeom>
+          <a:noFill/>
+        </p:spPr>
+        <p:txBody>
+          <a:bodyPr wrap="square" rtlCol="0">
+            <a:spAutoFit/>
+          </a:bodyPr>
+          <a:lstStyle/>
+          <a:p>
+            <a:pPr algn="ctr"/>
+            <a:r>
+              <a:rPr lang="en-US" sz="5400" b="1" dirty="0"/>
+              <a:t>Counterfactuals</a:t>
+            </a:r>
+            <a:endParaRPr lang="de-DE" sz="5400" b="1" dirty="0"/>
+          </a:p>
+        </p:txBody>
+      </p:sp>
+      <p:sp>
+        <p:nvSpPr>
+          <p:cNvPr id="90" name="TextBox 89">
+            <a:extLst>
+              <a:ext uri="{FF2B5EF4-FFF2-40B4-BE49-F238E27FC236}">
+                <a16:creationId xmlns:a16="http://schemas.microsoft.com/office/drawing/2014/main" id="{D161A347-D54E-4609-7680-93A714375D50}"/>
+              </a:ext>
+            </a:extLst>
+          </p:cNvPr>
+          <p:cNvSpPr txBox="1"/>
+          <p:nvPr/>
+        </p:nvSpPr>
+        <p:spPr>
+          <a:xfrm>
+            <a:off x="12146227" y="29149313"/>
+            <a:ext cx="6603459" cy="923330"/>
+          </a:xfrm>
+          <a:prstGeom prst="rect">
+            <a:avLst/>
+          </a:prstGeom>
+          <a:noFill/>
+        </p:spPr>
+        <p:txBody>
+          <a:bodyPr wrap="square" rtlCol="0">
+            <a:spAutoFit/>
+          </a:bodyPr>
+          <a:lstStyle/>
+          <a:p>
+            <a:pPr algn="ctr"/>
+            <a:r>
+              <a:rPr lang="en-US" sz="5400" b="1" dirty="0" err="1"/>
+              <a:t>MolCE</a:t>
+            </a:r>
+            <a:endParaRPr lang="de-DE" sz="5400" b="1" dirty="0"/>
+          </a:p>
+        </p:txBody>
+      </p:sp>
+      <p:sp>
+        <p:nvSpPr>
+          <p:cNvPr id="93" name="TextBox 92">
+            <a:extLst>
+              <a:ext uri="{FF2B5EF4-FFF2-40B4-BE49-F238E27FC236}">
+                <a16:creationId xmlns:a16="http://schemas.microsoft.com/office/drawing/2014/main" id="{FEECBCF4-1A29-9FAE-BC44-BE319FB16DC2}"/>
+              </a:ext>
+            </a:extLst>
+          </p:cNvPr>
+          <p:cNvSpPr txBox="1"/>
+          <p:nvPr/>
+        </p:nvSpPr>
+        <p:spPr>
+          <a:xfrm>
+            <a:off x="7218356" y="35652534"/>
+            <a:ext cx="16999638" cy="5970865"/>
+          </a:xfrm>
+          <a:prstGeom prst="rect">
+            <a:avLst/>
+          </a:prstGeom>
+          <a:noFill/>
+        </p:spPr>
+        <p:txBody>
+          <a:bodyPr wrap="square">
+            <a:spAutoFit/>
+          </a:bodyPr>
+          <a:lstStyle/>
+          <a:p>
+            <a:pPr>
+              <a:spcAft>
+                <a:spcPts val="1200"/>
+              </a:spcAft>
+            </a:pPr>
+            <a:r>
+              <a:rPr lang="en-US" sz="4400" b="1" dirty="0">
+                <a:latin typeface="Aptos" panose="020B0004020202020204" pitchFamily="34" charset="0"/>
+              </a:rPr>
+              <a:t>✅ AGREEMENTS (</a:t>
+            </a:r>
+            <a:r>
+              <a:rPr lang="en-US" sz="4400" b="1" i="0" dirty="0" err="1">
+                <a:solidFill>
+                  <a:srgbClr val="0F0F0F"/>
+                </a:solidFill>
+                <a:effectLst/>
+                <a:latin typeface="Aptos" panose="020B0004020202020204" pitchFamily="34" charset="0"/>
+              </a:rPr>
+              <a:t>MolCE</a:t>
+            </a:r>
+            <a:r>
+              <a:rPr lang="en-US" sz="4400" b="1" i="0" dirty="0">
+                <a:solidFill>
+                  <a:srgbClr val="0F0F0F"/>
+                </a:solidFill>
+                <a:effectLst/>
+                <a:latin typeface="Aptos" panose="020B0004020202020204" pitchFamily="34" charset="0"/>
+              </a:rPr>
+              <a:t> ↔ Counterfactuals</a:t>
+            </a:r>
+            <a:r>
+              <a:rPr lang="en-US" sz="4400" b="1" dirty="0">
+                <a:latin typeface="Aptos" panose="020B0004020202020204" pitchFamily="34" charset="0"/>
+              </a:rPr>
+              <a:t>)</a:t>
+            </a:r>
+          </a:p>
+          <a:p>
+            <a:pPr marL="742950" indent="-742950" algn="just">
+              <a:spcAft>
+                <a:spcPts val="1200"/>
+              </a:spcAft>
+              <a:buFont typeface="+mj-lt"/>
+              <a:buAutoNum type="arabicPeriod"/>
+            </a:pPr>
+            <a:r>
+              <a:rPr lang="en-US" sz="4400" b="1" i="0" dirty="0">
+                <a:solidFill>
+                  <a:srgbClr val="0F0F0F"/>
+                </a:solidFill>
+                <a:effectLst/>
+                <a:latin typeface="Aptos" panose="020B0004020202020204" pitchFamily="34" charset="0"/>
+              </a:rPr>
+              <a:t> </a:t>
+            </a:r>
+            <a:r>
+              <a:rPr lang="en-US" sz="4400" b="1" dirty="0"/>
+              <a:t>Piperazine N as critical site: </a:t>
+            </a:r>
+            <a:r>
+              <a:rPr lang="en-US" sz="4400" dirty="0"/>
+              <a:t>Both methods identify the piperazine nitrogen substituent as the most impactful site</a:t>
+            </a:r>
+          </a:p>
+          <a:p>
+            <a:pPr marL="742950" indent="-742950" algn="just">
+              <a:spcAft>
+                <a:spcPts val="1200"/>
+              </a:spcAft>
+              <a:buFont typeface="+mj-lt"/>
+              <a:buAutoNum type="arabicPeriod"/>
+            </a:pPr>
+            <a:r>
+              <a:rPr lang="en-US" sz="4400" b="1" dirty="0"/>
+              <a:t> Substituent sensitivity: </a:t>
+            </a:r>
+            <a:r>
+              <a:rPr lang="en-US" sz="4400" dirty="0"/>
+              <a:t>Both confirm that modifying the piperazine N-substituent can flip the prediction</a:t>
+            </a:r>
+          </a:p>
+          <a:p>
+            <a:pPr marL="742950" indent="-742950" algn="just">
+              <a:spcAft>
+                <a:spcPts val="1200"/>
+              </a:spcAft>
+              <a:buFont typeface="+mj-lt"/>
+              <a:buAutoNum type="arabicPeriod"/>
+            </a:pPr>
+            <a:r>
+              <a:rPr lang="en-US" sz="4400" b="1" dirty="0"/>
+              <a:t> Polarity effect: </a:t>
+            </a:r>
+            <a:r>
+              <a:rPr lang="en-US" sz="4400" dirty="0" err="1"/>
+              <a:t>MolCE's</a:t>
+            </a:r>
+            <a:r>
+              <a:rPr lang="en-US" sz="4400" dirty="0"/>
+              <a:t> contrastive R-groups (polar/charged) align with Counterfactuals showing polar additions eliminate activity</a:t>
+            </a:r>
+          </a:p>
+        </p:txBody>
+      </p:sp>
+      <p:sp>
+        <p:nvSpPr>
+          <p:cNvPr id="94" name="TextBox 93">
+            <a:extLst>
+              <a:ext uri="{FF2B5EF4-FFF2-40B4-BE49-F238E27FC236}">
+                <a16:creationId xmlns:a16="http://schemas.microsoft.com/office/drawing/2014/main" id="{CDE8FE82-D510-052C-FDC5-58E137B2D9BC}"/>
+              </a:ext>
+            </a:extLst>
+          </p:cNvPr>
+          <p:cNvSpPr txBox="1"/>
+          <p:nvPr/>
+        </p:nvSpPr>
+        <p:spPr>
+          <a:xfrm>
+            <a:off x="26374045" y="35652534"/>
+            <a:ext cx="16767142" cy="5139869"/>
+          </a:xfrm>
+          <a:prstGeom prst="rect">
+            <a:avLst/>
+          </a:prstGeom>
+          <a:noFill/>
+        </p:spPr>
+        <p:txBody>
+          <a:bodyPr wrap="square">
+            <a:spAutoFit/>
+          </a:bodyPr>
+          <a:lstStyle/>
+          <a:p>
+            <a:pPr>
+              <a:spcAft>
+                <a:spcPts val="1200"/>
+              </a:spcAft>
+              <a:defRPr/>
+            </a:pPr>
+            <a:r>
+              <a:rPr kumimoji="0" lang="en-US" sz="4400" b="1" i="0" u="none" strike="noStrike" kern="1200" cap="none" spc="0" normalizeH="0" baseline="0" noProof="0" dirty="0">
+                <a:ln>
+                  <a:noFill/>
+                </a:ln>
+                <a:solidFill>
+                  <a:prstClr val="black"/>
+                </a:solidFill>
+                <a:effectLst/>
+                <a:uLnTx/>
+                <a:uFillTx/>
+                <a:latin typeface="Aptos" panose="02110004020202020204"/>
+                <a:ea typeface="+mn-ea"/>
+                <a:cs typeface="+mn-cs"/>
+              </a:rPr>
+              <a:t>❌ DISAGREEMENTS (</a:t>
+            </a:r>
+            <a:r>
+              <a:rPr lang="en-US" sz="4400" b="1" i="0" dirty="0" err="1">
+                <a:solidFill>
+                  <a:srgbClr val="0F0F0F"/>
+                </a:solidFill>
+                <a:effectLst/>
+                <a:latin typeface="ui-sans-serif"/>
+              </a:rPr>
+              <a:t>MolCE</a:t>
+            </a:r>
+            <a:r>
+              <a:rPr lang="en-US" sz="4400" b="1" i="0" dirty="0">
+                <a:solidFill>
+                  <a:srgbClr val="0F0F0F"/>
+                </a:solidFill>
+                <a:effectLst/>
+                <a:latin typeface="ui-sans-serif"/>
+              </a:rPr>
+              <a:t> ↔ Counterfactuals</a:t>
+            </a:r>
+            <a:r>
+              <a:rPr kumimoji="0" lang="en-US" sz="4400" b="1" i="0" u="none" strike="noStrike" kern="1200" cap="none" spc="0" normalizeH="0" baseline="0" noProof="0" dirty="0">
+                <a:ln>
+                  <a:noFill/>
+                </a:ln>
+                <a:solidFill>
+                  <a:prstClr val="black"/>
+                </a:solidFill>
+                <a:effectLst/>
+                <a:uLnTx/>
+                <a:uFillTx/>
+                <a:latin typeface="Aptos" panose="02110004020202020204"/>
+                <a:ea typeface="+mn-ea"/>
+                <a:cs typeface="+mn-cs"/>
+              </a:rPr>
+              <a:t>)</a:t>
+            </a:r>
+          </a:p>
+          <a:p>
+            <a:pPr marL="742950" marR="0" lvl="0" indent="-742950" algn="just" defTabSz="457200" rtl="0" eaLnBrk="1" fontAlgn="auto" latinLnBrk="0" hangingPunct="1">
+              <a:lnSpc>
+                <a:spcPct val="100000"/>
+              </a:lnSpc>
+              <a:spcBef>
+                <a:spcPts val="0"/>
+              </a:spcBef>
+              <a:spcAft>
+                <a:spcPts val="1200"/>
+              </a:spcAft>
+              <a:buClrTx/>
+              <a:buSzTx/>
+              <a:buFont typeface="+mj-lt"/>
+              <a:buAutoNum type="arabicPeriod"/>
+              <a:tabLst/>
+              <a:defRPr/>
+            </a:pPr>
+            <a:r>
+              <a:rPr kumimoji="0" lang="en-US" sz="4400" b="1" i="0" u="none" strike="noStrike" kern="1200" cap="none" spc="0" normalizeH="0" baseline="0" noProof="0" dirty="0">
+                <a:ln>
+                  <a:noFill/>
+                </a:ln>
+                <a:solidFill>
+                  <a:prstClr val="black"/>
+                </a:solidFill>
+                <a:effectLst/>
+                <a:uLnTx/>
+                <a:uFillTx/>
+                <a:latin typeface="Aptos" panose="02110004020202020204"/>
+                <a:ea typeface="+mn-ea"/>
+                <a:cs typeface="+mn-cs"/>
+              </a:rPr>
+              <a:t>Scaffold importance: </a:t>
+            </a:r>
+            <a:r>
+              <a:rPr kumimoji="0" lang="en-US" sz="4400" i="0" u="none" strike="noStrike" kern="1200" cap="none" spc="0" normalizeH="0" baseline="0" noProof="0" dirty="0" err="1">
+                <a:ln>
+                  <a:noFill/>
+                </a:ln>
+                <a:solidFill>
+                  <a:prstClr val="black"/>
+                </a:solidFill>
+                <a:effectLst/>
+                <a:uLnTx/>
+                <a:uFillTx/>
+                <a:latin typeface="Aptos" panose="02110004020202020204"/>
+                <a:ea typeface="+mn-ea"/>
+                <a:cs typeface="+mn-cs"/>
+              </a:rPr>
+              <a:t>MolCE</a:t>
+            </a:r>
+            <a:r>
+              <a:rPr kumimoji="0" lang="en-US" sz="4400" i="0" u="none" strike="noStrike" kern="1200" cap="none" spc="0" normalizeH="0" baseline="0" noProof="0" dirty="0">
+                <a:ln>
+                  <a:noFill/>
+                </a:ln>
+                <a:solidFill>
+                  <a:prstClr val="black"/>
+                </a:solidFill>
+                <a:effectLst/>
+                <a:uLnTx/>
+                <a:uFillTx/>
+                <a:latin typeface="Aptos" panose="02110004020202020204"/>
+                <a:ea typeface="+mn-ea"/>
+                <a:cs typeface="+mn-cs"/>
+              </a:rPr>
+              <a:t> shows scaffold contrast score = 0.0 (scaffold changes don't matter), while Counterfactuals show substituent changes do matter</a:t>
+            </a:r>
+          </a:p>
+          <a:p>
+            <a:pPr marL="742950" marR="0" lvl="0" indent="-742950" algn="just" defTabSz="457200" rtl="0" eaLnBrk="1" fontAlgn="auto" latinLnBrk="0" hangingPunct="1">
+              <a:lnSpc>
+                <a:spcPct val="100000"/>
+              </a:lnSpc>
+              <a:spcBef>
+                <a:spcPts val="0"/>
+              </a:spcBef>
+              <a:spcAft>
+                <a:spcPts val="1200"/>
+              </a:spcAft>
+              <a:buClrTx/>
+              <a:buSzTx/>
+              <a:buFont typeface="+mj-lt"/>
+              <a:buAutoNum type="arabicPeriod"/>
+              <a:tabLst/>
+              <a:defRPr/>
+            </a:pPr>
+            <a:r>
+              <a:rPr kumimoji="0" lang="en-US" sz="4400" b="1" i="0" u="none" strike="noStrike" kern="1200" cap="none" spc="0" normalizeH="0" baseline="0" noProof="0" dirty="0">
+                <a:ln>
+                  <a:noFill/>
+                </a:ln>
+                <a:solidFill>
+                  <a:prstClr val="black"/>
+                </a:solidFill>
+                <a:effectLst/>
+                <a:uLnTx/>
+                <a:uFillTx/>
+                <a:latin typeface="Aptos" panose="02110004020202020204"/>
+                <a:ea typeface="+mn-ea"/>
+                <a:cs typeface="+mn-cs"/>
+              </a:rPr>
+              <a:t>Mechanism: </a:t>
+            </a:r>
+            <a:r>
+              <a:rPr kumimoji="0" lang="en-US" sz="4400" i="0" u="none" strike="noStrike" kern="1200" cap="none" spc="0" normalizeH="0" baseline="0" noProof="0" dirty="0" err="1">
+                <a:ln>
+                  <a:noFill/>
+                </a:ln>
+                <a:solidFill>
+                  <a:prstClr val="black"/>
+                </a:solidFill>
+                <a:effectLst/>
+                <a:uLnTx/>
+                <a:uFillTx/>
+                <a:latin typeface="Aptos" panose="02110004020202020204"/>
+                <a:ea typeface="+mn-ea"/>
+                <a:cs typeface="+mn-cs"/>
+              </a:rPr>
+              <a:t>MolCE</a:t>
+            </a:r>
+            <a:r>
+              <a:rPr kumimoji="0" lang="en-US" sz="4400" i="0" u="none" strike="noStrike" kern="1200" cap="none" spc="0" normalizeH="0" baseline="0" noProof="0" dirty="0">
+                <a:ln>
+                  <a:noFill/>
+                </a:ln>
+                <a:solidFill>
+                  <a:prstClr val="black"/>
+                </a:solidFill>
+                <a:effectLst/>
+                <a:uLnTx/>
+                <a:uFillTx/>
+                <a:latin typeface="Aptos" panose="02110004020202020204"/>
+                <a:ea typeface="+mn-ea"/>
+                <a:cs typeface="+mn-cs"/>
+              </a:rPr>
+              <a:t> focuses on contrast (why not inactive?), while Counterfactuals show transformation (how to become inactive?)</a:t>
+            </a:r>
+          </a:p>
+        </p:txBody>
+      </p:sp>
+      <p:grpSp>
+        <p:nvGrpSpPr>
+          <p:cNvPr id="102" name="Group 101">
+            <a:extLst>
+              <a:ext uri="{FF2B5EF4-FFF2-40B4-BE49-F238E27FC236}">
+                <a16:creationId xmlns:a16="http://schemas.microsoft.com/office/drawing/2014/main" id="{D6439D96-81F8-F222-FD0A-6CB3EEA18EBC}"/>
+              </a:ext>
+            </a:extLst>
+          </p:cNvPr>
+          <p:cNvGrpSpPr/>
+          <p:nvPr/>
+        </p:nvGrpSpPr>
+        <p:grpSpPr>
+          <a:xfrm>
+            <a:off x="26135503" y="30203702"/>
+            <a:ext cx="16963406" cy="4094569"/>
+            <a:chOff x="25678303" y="34723809"/>
+            <a:chExt cx="16963406" cy="4094569"/>
+          </a:xfrm>
+        </p:grpSpPr>
+        <p:pic>
+          <p:nvPicPr>
+            <p:cNvPr id="100" name="Picture 99">
+              <a:extLst>
+                <a:ext uri="{FF2B5EF4-FFF2-40B4-BE49-F238E27FC236}">
+                  <a16:creationId xmlns:a16="http://schemas.microsoft.com/office/drawing/2014/main" id="{B1F6B432-D2DB-A370-2458-530FF31A48DE}"/>
+                </a:ext>
+              </a:extLst>
+            </p:cNvPr>
+            <p:cNvPicPr>
+              <a:picLocks noChangeAspect="1"/>
+            </p:cNvPicPr>
+            <p:nvPr/>
+          </p:nvPicPr>
+          <p:blipFill>
+            <a:blip r:embed="rId5">
+              <a:extLst>
+                <a:ext uri="{28A0092B-C50C-407E-A947-70E740481C1C}">
+                  <a14:useLocalDpi xmlns:a14="http://schemas.microsoft.com/office/drawing/2010/main" val="0"/>
+                </a:ext>
+              </a:extLst>
+            </a:blip>
+            <a:srcRect l="28881" t="31485" r="52081" b="52476"/>
+            <a:stretch/>
+          </p:blipFill>
+          <p:spPr>
+            <a:xfrm>
+              <a:off x="25678303" y="34723809"/>
+              <a:ext cx="9202228" cy="4094569"/>
+            </a:xfrm>
+            <a:prstGeom prst="rect">
+              <a:avLst/>
+            </a:prstGeom>
+          </p:spPr>
+        </p:pic>
+        <p:pic>
+          <p:nvPicPr>
+            <p:cNvPr id="101" name="Picture 100">
+              <a:extLst>
+                <a:ext uri="{FF2B5EF4-FFF2-40B4-BE49-F238E27FC236}">
+                  <a16:creationId xmlns:a16="http://schemas.microsoft.com/office/drawing/2014/main" id="{02144A18-8CA9-B867-F30C-81AC5EE2D851}"/>
+                </a:ext>
+              </a:extLst>
+            </p:cNvPr>
+            <p:cNvPicPr>
+              <a:picLocks noChangeAspect="1"/>
+            </p:cNvPicPr>
+            <p:nvPr/>
+          </p:nvPicPr>
+          <p:blipFill>
+            <a:blip r:embed="rId5">
+              <a:extLst>
+                <a:ext uri="{28A0092B-C50C-407E-A947-70E740481C1C}">
+                  <a14:useLocalDpi xmlns:a14="http://schemas.microsoft.com/office/drawing/2010/main" val="0"/>
+                </a:ext>
+              </a:extLst>
+            </a:blip>
+            <a:srcRect l="54567" t="30675" r="27299" b="52476"/>
+            <a:stretch/>
+          </p:blipFill>
+          <p:spPr>
+            <a:xfrm>
+              <a:off x="35089246" y="35101923"/>
+              <a:ext cx="7552463" cy="3706321"/>
+            </a:xfrm>
+            <a:prstGeom prst="rect">
+              <a:avLst/>
+            </a:prstGeom>
+          </p:spPr>
+        </p:pic>
+      </p:grpSp>
+      <p:sp>
+        <p:nvSpPr>
+          <p:cNvPr id="104" name="TextBox 103">
+            <a:extLst>
+              <a:ext uri="{FF2B5EF4-FFF2-40B4-BE49-F238E27FC236}">
+                <a16:creationId xmlns:a16="http://schemas.microsoft.com/office/drawing/2014/main" id="{447066D7-B3FD-7386-0F15-CA073EB9CD5F}"/>
+              </a:ext>
+            </a:extLst>
+          </p:cNvPr>
+          <p:cNvSpPr txBox="1"/>
+          <p:nvPr/>
+        </p:nvSpPr>
+        <p:spPr>
+          <a:xfrm>
+            <a:off x="27209875" y="34408132"/>
+            <a:ext cx="5713914" cy="1015663"/>
+          </a:xfrm>
+          <a:prstGeom prst="rect">
+            <a:avLst/>
+          </a:prstGeom>
+          <a:noFill/>
+        </p:spPr>
+        <p:txBody>
+          <a:bodyPr wrap="square" rtlCol="0">
+            <a:spAutoFit/>
+          </a:bodyPr>
+          <a:lstStyle/>
+          <a:p>
+            <a:pPr algn="ctr"/>
+            <a:r>
+              <a:rPr lang="en-US" sz="3000" b="1" i="0" dirty="0">
+                <a:solidFill>
+                  <a:srgbClr val="0F0F0F"/>
+                </a:solidFill>
+                <a:effectLst/>
+                <a:latin typeface="ui-sans-serif"/>
+              </a:rPr>
+              <a:t>CF #1 (substituent)</a:t>
+            </a:r>
+          </a:p>
+          <a:p>
+            <a:pPr algn="ctr"/>
+            <a:r>
+              <a:rPr lang="en-US" sz="3000" b="1" dirty="0">
+                <a:solidFill>
+                  <a:srgbClr val="0F0F0F"/>
+                </a:solidFill>
+                <a:latin typeface="ui-sans-serif"/>
+              </a:rPr>
+              <a:t>Predicted class: 0| Similarity: 0.68</a:t>
+            </a:r>
+            <a:endParaRPr lang="en-US" sz="3000" dirty="0"/>
+          </a:p>
+        </p:txBody>
+      </p:sp>
+      <p:sp>
+        <p:nvSpPr>
+          <p:cNvPr id="105" name="TextBox 104">
+            <a:extLst>
+              <a:ext uri="{FF2B5EF4-FFF2-40B4-BE49-F238E27FC236}">
+                <a16:creationId xmlns:a16="http://schemas.microsoft.com/office/drawing/2014/main" id="{3340F736-7968-FDB4-A971-D1E03504210F}"/>
+              </a:ext>
+            </a:extLst>
+          </p:cNvPr>
+          <p:cNvSpPr txBox="1"/>
+          <p:nvPr/>
+        </p:nvSpPr>
+        <p:spPr>
+          <a:xfrm>
+            <a:off x="36183383" y="34408132"/>
+            <a:ext cx="5713914" cy="1015663"/>
+          </a:xfrm>
+          <a:prstGeom prst="rect">
+            <a:avLst/>
+          </a:prstGeom>
+          <a:noFill/>
+        </p:spPr>
+        <p:txBody>
+          <a:bodyPr wrap="square" rtlCol="0">
+            <a:spAutoFit/>
+          </a:bodyPr>
+          <a:lstStyle/>
+          <a:p>
+            <a:pPr algn="ctr"/>
+            <a:r>
+              <a:rPr lang="en-US" sz="3000" b="1" i="0" dirty="0">
+                <a:solidFill>
+                  <a:srgbClr val="0F0F0F"/>
+                </a:solidFill>
+                <a:effectLst/>
+                <a:latin typeface="ui-sans-serif"/>
+              </a:rPr>
+              <a:t>CF #2 (substituent)</a:t>
+            </a:r>
+          </a:p>
+          <a:p>
+            <a:pPr algn="ctr"/>
+            <a:r>
+              <a:rPr lang="en-US" sz="3000" b="1" dirty="0">
+                <a:solidFill>
+                  <a:srgbClr val="0F0F0F"/>
+                </a:solidFill>
+                <a:latin typeface="ui-sans-serif"/>
+              </a:rPr>
+              <a:t>Predicted class: 0| Similarity: 0.68</a:t>
+            </a:r>
+            <a:endParaRPr lang="en-US" sz="3000" dirty="0"/>
+          </a:p>
+        </p:txBody>
+      </p:sp>
+      <p:sp>
+        <p:nvSpPr>
+          <p:cNvPr id="106" name="TextBox 105">
+            <a:extLst>
+              <a:ext uri="{FF2B5EF4-FFF2-40B4-BE49-F238E27FC236}">
+                <a16:creationId xmlns:a16="http://schemas.microsoft.com/office/drawing/2014/main" id="{B8051128-A1DB-8545-0F40-55389E4B301D}"/>
+              </a:ext>
+            </a:extLst>
+          </p:cNvPr>
+          <p:cNvSpPr txBox="1"/>
+          <p:nvPr/>
+        </p:nvSpPr>
+        <p:spPr>
+          <a:xfrm>
+            <a:off x="8223531" y="34408132"/>
+            <a:ext cx="5414457" cy="1015663"/>
+          </a:xfrm>
+          <a:prstGeom prst="rect">
+            <a:avLst/>
+          </a:prstGeom>
+          <a:noFill/>
+        </p:spPr>
+        <p:txBody>
+          <a:bodyPr wrap="square" rtlCol="0">
+            <a:spAutoFit/>
+          </a:bodyPr>
+          <a:lstStyle/>
+          <a:p>
+            <a:pPr algn="ctr"/>
+            <a:r>
+              <a:rPr lang="en-US" sz="3000" b="1" i="0" dirty="0">
+                <a:solidFill>
+                  <a:srgbClr val="0F0F0F"/>
+                </a:solidFill>
+                <a:effectLst/>
+                <a:latin typeface="ui-sans-serif"/>
+              </a:rPr>
+              <a:t>Rank 1 | Site 1</a:t>
+            </a:r>
+          </a:p>
+          <a:p>
+            <a:pPr algn="ctr"/>
+            <a:r>
+              <a:rPr lang="en-US" sz="3000" b="1" dirty="0">
+                <a:solidFill>
+                  <a:srgbClr val="0F0F0F"/>
+                </a:solidFill>
+                <a:latin typeface="ui-sans-serif"/>
+              </a:rPr>
+              <a:t>Contrast: 1.00</a:t>
+            </a:r>
+            <a:endParaRPr lang="en-US" sz="3000" dirty="0"/>
+          </a:p>
+        </p:txBody>
+      </p:sp>
+      <p:sp>
+        <p:nvSpPr>
+          <p:cNvPr id="107" name="TextBox 106">
+            <a:extLst>
+              <a:ext uri="{FF2B5EF4-FFF2-40B4-BE49-F238E27FC236}">
+                <a16:creationId xmlns:a16="http://schemas.microsoft.com/office/drawing/2014/main" id="{F021D298-CD48-A056-2501-CA7203875916}"/>
+              </a:ext>
+            </a:extLst>
+          </p:cNvPr>
+          <p:cNvSpPr txBox="1"/>
+          <p:nvPr/>
+        </p:nvSpPr>
+        <p:spPr>
+          <a:xfrm>
+            <a:off x="16969252" y="34408132"/>
+            <a:ext cx="5453166" cy="1015663"/>
+          </a:xfrm>
+          <a:prstGeom prst="rect">
+            <a:avLst/>
+          </a:prstGeom>
+          <a:noFill/>
+        </p:spPr>
+        <p:txBody>
+          <a:bodyPr wrap="square" rtlCol="0">
+            <a:spAutoFit/>
+          </a:bodyPr>
+          <a:lstStyle/>
+          <a:p>
+            <a:pPr algn="ctr"/>
+            <a:r>
+              <a:rPr lang="en-US" sz="3000" b="1" i="0" dirty="0">
+                <a:solidFill>
+                  <a:srgbClr val="0F0F0F"/>
+                </a:solidFill>
+                <a:effectLst/>
+                <a:latin typeface="ui-sans-serif"/>
+              </a:rPr>
+              <a:t>Rank 2 | Site 1</a:t>
+            </a:r>
+          </a:p>
+          <a:p>
+            <a:pPr algn="ctr"/>
+            <a:r>
+              <a:rPr lang="en-US" sz="3000" b="1" dirty="0">
+                <a:solidFill>
+                  <a:srgbClr val="0F0F0F"/>
+                </a:solidFill>
+                <a:latin typeface="ui-sans-serif"/>
+              </a:rPr>
+              <a:t>Contrast: 1.00</a:t>
+            </a:r>
+            <a:endParaRPr lang="en-US" sz="3000" dirty="0"/>
+          </a:p>
+        </p:txBody>
+      </p:sp>
+    </p:spTree>
+    <p:extLst>
+      <p:ext uri="{BB962C8B-B14F-4D97-AF65-F5344CB8AC3E}">
+        <p14:creationId xmlns:p14="http://schemas.microsoft.com/office/powerpoint/2010/main" val="2175012759"/>
+      </p:ext>
+    </p:extLst>
+  </p:cSld>
+  <p:clrMapOvr>
+    <a:masterClrMapping/>
+  </p:clrMapOvr>
+</p:sld>
+</file>
+
+<file path=ppt/slides/slide4.xml><?xml version="1.0" encoding="utf-8"?>
 <p:sld xmlns:a="http://schemas.openxmlformats.org/drawingml/2006/main" xmlns:r="http://schemas.openxmlformats.org/officeDocument/2006/relationships" xmlns:p="http://schemas.openxmlformats.org/presentationml/2006/main" show="0">
   <p:cSld>
     <p:spTree>
@@ -11723,7 +15194,7 @@
 </p:sld>
 </file>
 
-<file path=ppt/slides/slide4.xml><?xml version="1.0" encoding="utf-8"?>
+<file path=ppt/slides/slide5.xml><?xml version="1.0" encoding="utf-8"?>
 <p:sld xmlns:a="http://schemas.openxmlformats.org/drawingml/2006/main" xmlns:r="http://schemas.openxmlformats.org/officeDocument/2006/relationships" xmlns:p="http://schemas.openxmlformats.org/presentationml/2006/main" show="0">
   <p:cSld>
     <p:spTree>
@@ -13463,7 +16934,7 @@
 </p:sld>
 </file>
 
-<file path=ppt/slides/slide5.xml><?xml version="1.0" encoding="utf-8"?>
+<file path=ppt/slides/slide6.xml><?xml version="1.0" encoding="utf-8"?>
 <p:sld xmlns:a="http://schemas.openxmlformats.org/drawingml/2006/main" xmlns:r="http://schemas.openxmlformats.org/officeDocument/2006/relationships" xmlns:p="http://schemas.openxmlformats.org/presentationml/2006/main" show="0">
   <p:cSld>
     <p:spTree>
@@ -16125,7 +19596,7 @@
 </p:sld>
 </file>
 
-<file path=ppt/slides/slide6.xml><?xml version="1.0" encoding="utf-8"?>
+<file path=ppt/slides/slide7.xml><?xml version="1.0" encoding="utf-8"?>
 <p:sld xmlns:a="http://schemas.openxmlformats.org/drawingml/2006/main" xmlns:r="http://schemas.openxmlformats.org/officeDocument/2006/relationships" xmlns:p="http://schemas.openxmlformats.org/presentationml/2006/main" show="0">
   <p:cSld>
     <p:spTree>

--- a/slides/figures_publication_portrait.pptx
+++ b/slides/figures_publication_portrait.pptx
@@ -249,7 +249,7 @@
           <a:p>
             <a:fld id="{DBEC7EBC-4893-4C67-8E48-D69CA1600258}" type="datetimeFigureOut">
               <a:rPr lang="en-US" smtClean="0"/>
-              <a:t>5/28/2026</a:t>
+              <a:t>5/29/2026</a:t>
             </a:fld>
             <a:endParaRPr lang="en-US"/>
           </a:p>
@@ -419,7 +419,7 @@
           <a:p>
             <a:fld id="{DBEC7EBC-4893-4C67-8E48-D69CA1600258}" type="datetimeFigureOut">
               <a:rPr lang="en-US" smtClean="0"/>
-              <a:t>5/28/2026</a:t>
+              <a:t>5/29/2026</a:t>
             </a:fld>
             <a:endParaRPr lang="en-US"/>
           </a:p>
@@ -599,7 +599,7 @@
           <a:p>
             <a:fld id="{DBEC7EBC-4893-4C67-8E48-D69CA1600258}" type="datetimeFigureOut">
               <a:rPr lang="en-US" smtClean="0"/>
-              <a:t>5/28/2026</a:t>
+              <a:t>5/29/2026</a:t>
             </a:fld>
             <a:endParaRPr lang="en-US"/>
           </a:p>
@@ -769,7 +769,7 @@
           <a:p>
             <a:fld id="{DBEC7EBC-4893-4C67-8E48-D69CA1600258}" type="datetimeFigureOut">
               <a:rPr lang="en-US" smtClean="0"/>
-              <a:t>5/28/2026</a:t>
+              <a:t>5/29/2026</a:t>
             </a:fld>
             <a:endParaRPr lang="en-US"/>
           </a:p>
@@ -1015,7 +1015,7 @@
           <a:p>
             <a:fld id="{DBEC7EBC-4893-4C67-8E48-D69CA1600258}" type="datetimeFigureOut">
               <a:rPr lang="en-US" smtClean="0"/>
-              <a:t>5/28/2026</a:t>
+              <a:t>5/29/2026</a:t>
             </a:fld>
             <a:endParaRPr lang="en-US"/>
           </a:p>
@@ -1247,7 +1247,7 @@
           <a:p>
             <a:fld id="{DBEC7EBC-4893-4C67-8E48-D69CA1600258}" type="datetimeFigureOut">
               <a:rPr lang="en-US" smtClean="0"/>
-              <a:t>5/28/2026</a:t>
+              <a:t>5/29/2026</a:t>
             </a:fld>
             <a:endParaRPr lang="en-US"/>
           </a:p>
@@ -1614,7 +1614,7 @@
           <a:p>
             <a:fld id="{DBEC7EBC-4893-4C67-8E48-D69CA1600258}" type="datetimeFigureOut">
               <a:rPr lang="en-US" smtClean="0"/>
-              <a:t>5/28/2026</a:t>
+              <a:t>5/29/2026</a:t>
             </a:fld>
             <a:endParaRPr lang="en-US"/>
           </a:p>
@@ -1732,7 +1732,7 @@
           <a:p>
             <a:fld id="{DBEC7EBC-4893-4C67-8E48-D69CA1600258}" type="datetimeFigureOut">
               <a:rPr lang="en-US" smtClean="0"/>
-              <a:t>5/28/2026</a:t>
+              <a:t>5/29/2026</a:t>
             </a:fld>
             <a:endParaRPr lang="en-US"/>
           </a:p>
@@ -1827,7 +1827,7 @@
           <a:p>
             <a:fld id="{DBEC7EBC-4893-4C67-8E48-D69CA1600258}" type="datetimeFigureOut">
               <a:rPr lang="en-US" smtClean="0"/>
-              <a:t>5/28/2026</a:t>
+              <a:t>5/29/2026</a:t>
             </a:fld>
             <a:endParaRPr lang="en-US"/>
           </a:p>
@@ -2104,7 +2104,7 @@
           <a:p>
             <a:fld id="{DBEC7EBC-4893-4C67-8E48-D69CA1600258}" type="datetimeFigureOut">
               <a:rPr lang="en-US" smtClean="0"/>
-              <a:t>5/28/2026</a:t>
+              <a:t>5/29/2026</a:t>
             </a:fld>
             <a:endParaRPr lang="en-US"/>
           </a:p>
@@ -2361,7 +2361,7 @@
           <a:p>
             <a:fld id="{DBEC7EBC-4893-4C67-8E48-D69CA1600258}" type="datetimeFigureOut">
               <a:rPr lang="en-US" smtClean="0"/>
-              <a:t>5/28/2026</a:t>
+              <a:t>5/29/2026</a:t>
             </a:fld>
             <a:endParaRPr lang="en-US"/>
           </a:p>
@@ -2574,7 +2574,7 @@
           <a:p>
             <a:fld id="{DBEC7EBC-4893-4C67-8E48-D69CA1600258}" type="datetimeFigureOut">
               <a:rPr lang="en-US" smtClean="0"/>
-              <a:t>5/28/2026</a:t>
+              <a:t>5/29/2026</a:t>
             </a:fld>
             <a:endParaRPr lang="en-US"/>
           </a:p>
@@ -5685,7 +5685,7 @@
                   <a:schemeClr val="tx1"/>
                 </a:solidFill>
               </a:rPr>
-              <a:t> P14416) from inactive compounds, evaluate its performance, and then directly compare two pairs of explainability methods on the same on the same correctly predicted active compound:  </a:t>
+              <a:t> P14416) from inactive compounds, evaluate its performance, and then directly compare two pairs of explainability methods on the same on the same correctly predicted active compound: </a:t>
             </a:r>
             <a:r>
               <a:rPr lang="en-US" sz="6000" dirty="0" err="1">
@@ -9179,7 +9179,7 @@
         </p:nvSpPr>
         <p:spPr>
           <a:xfrm>
-            <a:off x="16522078" y="12574083"/>
+            <a:off x="16522078" y="9797020"/>
             <a:ext cx="17157371" cy="923330"/>
           </a:xfrm>
           <a:prstGeom prst="rect">
@@ -9195,39 +9195,15 @@
           <a:p>
             <a:pPr algn="ctr"/>
             <a:r>
-              <a:rPr lang="en-US" sz="5400" b="1" dirty="0">
+              <a:rPr lang="en-US" sz="5400" b="1" i="0" dirty="0">
                 <a:solidFill>
                   <a:srgbClr val="0F0F0F"/>
                 </a:solidFill>
+                <a:effectLst/>
                 <a:latin typeface="ui-sans-serif"/>
               </a:rPr>
-              <a:t>Pair 1: </a:t>
-            </a:r>
-            <a:r>
-              <a:rPr lang="en-US" sz="5400" b="1" dirty="0" err="1">
-                <a:solidFill>
-                  <a:srgbClr val="0F0F0F"/>
-                </a:solidFill>
-                <a:latin typeface="ui-sans-serif"/>
-              </a:rPr>
-              <a:t>MolAnchor</a:t>
-            </a:r>
-            <a:r>
-              <a:rPr lang="en-US" sz="5400" b="1" dirty="0">
-                <a:solidFill>
-                  <a:srgbClr val="0F0F0F"/>
-                </a:solidFill>
-                <a:latin typeface="ui-sans-serif"/>
-              </a:rPr>
-              <a:t> vs SHAP</a:t>
-            </a:r>
-            <a:endParaRPr lang="en-US" sz="5400" b="1" i="0" dirty="0">
-              <a:solidFill>
-                <a:srgbClr val="0F0F0F"/>
-              </a:solidFill>
-              <a:effectLst/>
-              <a:latin typeface="ui-sans-serif"/>
-            </a:endParaRPr>
+              <a:t>Explanation of active and inactive compounds</a:t>
+            </a:r>
           </a:p>
         </p:txBody>
       </p:sp>
@@ -9320,7 +9296,7 @@
         </p:nvSpPr>
         <p:spPr>
           <a:xfrm>
-            <a:off x="6564918" y="13607274"/>
+            <a:off x="6564918" y="10830211"/>
             <a:ext cx="37071691" cy="14309967"/>
           </a:xfrm>
           <a:prstGeom prst="roundRect">
@@ -11077,7 +11053,7 @@
         </p:nvSpPr>
         <p:spPr>
           <a:xfrm>
-            <a:off x="31448517" y="13705366"/>
+            <a:off x="31448517" y="10928303"/>
             <a:ext cx="6310257" cy="923330"/>
           </a:xfrm>
           <a:prstGeom prst="rect">
@@ -11094,7 +11070,7 @@
             <a:pPr algn="ctr"/>
             <a:r>
               <a:rPr lang="en-US" sz="5400" b="1" dirty="0"/>
-              <a:t>SHAP</a:t>
+              <a:t>Inactive</a:t>
             </a:r>
             <a:endParaRPr lang="de-DE" sz="5400" b="1" dirty="0"/>
           </a:p>
@@ -11114,7 +11090,7 @@
         </p:nvSpPr>
         <p:spPr>
           <a:xfrm>
-            <a:off x="12146227" y="13705366"/>
+            <a:off x="12146227" y="10928303"/>
             <a:ext cx="6603459" cy="923330"/>
           </a:xfrm>
           <a:prstGeom prst="rect">
@@ -11130,8 +11106,8 @@
           <a:p>
             <a:pPr algn="ctr"/>
             <a:r>
-              <a:rPr lang="en-US" sz="5400" b="1" dirty="0" err="1"/>
-              <a:t>MolAnchor</a:t>
+              <a:rPr lang="en-US" sz="5400" b="1" dirty="0"/>
+              <a:t>Active</a:t>
             </a:r>
             <a:endParaRPr lang="de-DE" sz="5400" b="1" dirty="0"/>
           </a:p>
@@ -11164,7 +11140,7 @@
         </p:blipFill>
         <p:spPr>
           <a:xfrm>
-            <a:off x="10113408" y="14740867"/>
+            <a:off x="10113408" y="11963804"/>
             <a:ext cx="10669097" cy="6535613"/>
           </a:xfrm>
           <a:prstGeom prst="rect">
@@ -11199,7 +11175,7 @@
         </p:blipFill>
         <p:spPr>
           <a:xfrm>
-            <a:off x="29190808" y="14586918"/>
+            <a:off x="29190808" y="11809855"/>
             <a:ext cx="10825674" cy="6843510"/>
           </a:xfrm>
           <a:prstGeom prst="rect">
@@ -11221,8 +11197,8 @@
         </p:nvSpPr>
         <p:spPr>
           <a:xfrm>
-            <a:off x="7218356" y="21656089"/>
-            <a:ext cx="16459200" cy="5970865"/>
+            <a:off x="7218356" y="18879026"/>
+            <a:ext cx="16459200" cy="5663089"/>
           </a:xfrm>
           <a:prstGeom prst="rect">
             <a:avLst/>
@@ -11241,75 +11217,103 @@
               </a:spcAft>
             </a:pPr>
             <a:r>
+              <a:rPr lang="it-IT" sz="4400" b="1" dirty="0"/>
+              <a:t>💡</a:t>
+            </a:r>
+            <a:r>
+              <a:rPr lang="en-US" sz="4400" b="1" dirty="0" err="1"/>
+              <a:t>EdgeSHAPer</a:t>
+            </a:r>
+            <a:r>
               <a:rPr lang="en-US" sz="4400" b="1" dirty="0"/>
-              <a:t>✅ AGREEMENTS (</a:t>
-            </a:r>
-            <a:r>
-              <a:rPr lang="en-US" sz="4400" b="1" dirty="0" err="1"/>
-              <a:t>MolAnchor</a:t>
-            </a:r>
-            <a:r>
-              <a:rPr lang="en-US" sz="4400" b="1" dirty="0"/>
-              <a:t> ↔ SHAP)</a:t>
-            </a:r>
-          </a:p>
-          <a:p>
-            <a:pPr marL="742950" indent="-742950" algn="just">
-              <a:spcAft>
-                <a:spcPts val="1200"/>
-              </a:spcAft>
-              <a:buFont typeface="+mj-lt"/>
-              <a:buAutoNum type="arabicPeriod"/>
+              <a:t> insights </a:t>
+            </a:r>
+          </a:p>
+          <a:p>
+            <a:pPr algn="l"/>
+            <a:r>
+              <a:rPr lang="en-US" sz="4400" b="1" i="0" dirty="0">
+                <a:effectLst/>
+              </a:rPr>
+              <a:t>Piperazine Ring Bonds Dominate</a:t>
+            </a:r>
+            <a:r>
+              <a:rPr lang="en-US" sz="4400" b="0" i="0" dirty="0">
+                <a:effectLst/>
+              </a:rPr>
+              <a:t> (φ = 0.116, 0.101, 0.095)</a:t>
+            </a:r>
+          </a:p>
+          <a:p>
+            <a:pPr algn="l"/>
+            <a:endParaRPr lang="en-US" sz="4400" b="0" i="0" dirty="0">
+              <a:effectLst/>
+            </a:endParaRPr>
+          </a:p>
+          <a:p>
+            <a:pPr marL="1028700" lvl="1" indent="-571500">
+              <a:buFont typeface="Arial" panose="020B0604020202020204" pitchFamily="34" charset="0"/>
+              <a:buChar char="•"/>
             </a:pPr>
             <a:r>
-              <a:rPr lang="en-US" sz="4400" b="1" dirty="0"/>
-              <a:t>Core scaffold importance: </a:t>
-            </a:r>
-            <a:r>
-              <a:rPr lang="en-US" sz="4400" dirty="0"/>
-              <a:t>Both methods identify the piperazine/benzyl core as critical</a:t>
-            </a:r>
-          </a:p>
-          <a:p>
-            <a:pPr marL="742950" indent="-742950" algn="just">
-              <a:spcAft>
-                <a:spcPts val="1200"/>
-              </a:spcAft>
-              <a:buFont typeface="+mj-lt"/>
-              <a:buAutoNum type="arabicPeriod"/>
+              <a:rPr lang="en-US" sz="4400" b="0" i="0" dirty="0">
+                <a:effectLst/>
+              </a:rPr>
+              <a:t>The C-N and C-C bonds within the </a:t>
+            </a:r>
+            <a:r>
+              <a:rPr lang="en-US" sz="4400" b="1" i="0" dirty="0">
+                <a:effectLst/>
+              </a:rPr>
+              <a:t>piperazine ring </a:t>
+            </a:r>
+            <a:r>
+              <a:rPr lang="en-US" sz="4400" b="0" i="0" dirty="0">
+                <a:effectLst/>
+              </a:rPr>
+              <a:t>show the highest positive SHAP values</a:t>
+            </a:r>
+          </a:p>
+          <a:p>
+            <a:pPr marL="1028700" lvl="1" indent="-571500">
+              <a:buFont typeface="Arial" panose="020B0604020202020204" pitchFamily="34" charset="0"/>
+              <a:buChar char="•"/>
             </a:pPr>
             <a:r>
-              <a:rPr lang="en-US" sz="4400" b="1" dirty="0"/>
-              <a:t>N-methyl motif: </a:t>
-            </a:r>
-            <a:r>
-              <a:rPr lang="en-US" sz="4400" dirty="0"/>
-              <a:t>SHAP's top features (Bits 1280, 1791, 1792) all involve the N-methyl/benzyl-dimethylamine region captured by </a:t>
-            </a:r>
-            <a:r>
-              <a:rPr lang="en-US" sz="4400" dirty="0" err="1"/>
-              <a:t>MolAnchor's</a:t>
-            </a:r>
-            <a:r>
-              <a:rPr lang="en-US" sz="4400" dirty="0"/>
-              <a:t> anchor</a:t>
-            </a:r>
-          </a:p>
-          <a:p>
-            <a:pPr marL="742950" indent="-742950" algn="just">
-              <a:spcAft>
-                <a:spcPts val="1200"/>
-              </a:spcAft>
-              <a:buFont typeface="+mj-lt"/>
-              <a:buAutoNum type="arabicPeriod"/>
+              <a:rPr lang="en-US" sz="4400" b="0" i="0" dirty="0">
+                <a:effectLst/>
+              </a:rPr>
+              <a:t>This suggests the model associates the </a:t>
+            </a:r>
+            <a:r>
+              <a:rPr lang="en-US" sz="4400" b="1" i="0" dirty="0">
+                <a:effectLst/>
+              </a:rPr>
+              <a:t>piperazine scaffold with activity</a:t>
+            </a:r>
+          </a:p>
+          <a:p>
+            <a:pPr marL="1028700" lvl="1" indent="-571500">
+              <a:buFont typeface="Arial" panose="020B0604020202020204" pitchFamily="34" charset="0"/>
+              <a:buChar char="•"/>
             </a:pPr>
             <a:r>
-              <a:rPr lang="en-US" sz="4400" b="1" dirty="0"/>
-              <a:t>Pharmacophore consensus</a:t>
-            </a:r>
-            <a:r>
-              <a:rPr lang="en-US" sz="4400" dirty="0"/>
-              <a:t>: Both confirm the morpholinone-piperazine-benzyl framework is essential for D2 binding</a:t>
+              <a:rPr lang="en-US" sz="4400" b="0" i="0" dirty="0">
+                <a:effectLst/>
+              </a:rPr>
+              <a:t>Piperazine is a </a:t>
+            </a:r>
+            <a:r>
+              <a:rPr lang="en-US" sz="4400" b="1" i="0" dirty="0">
+                <a:effectLst/>
+              </a:rPr>
+              <a:t>common pharmacophore </a:t>
+            </a:r>
+            <a:r>
+              <a:rPr lang="en-US" sz="4400" b="0" i="0" dirty="0">
+                <a:effectLst/>
+              </a:rPr>
+              <a:t>in bioactive molecules</a:t>
             </a:r>
           </a:p>
         </p:txBody>
@@ -11328,7 +11332,7 @@
         </p:nvSpPr>
         <p:spPr>
           <a:xfrm>
-            <a:off x="26374045" y="21656089"/>
+            <a:off x="26374045" y="18879026"/>
             <a:ext cx="16459200" cy="5970865"/>
           </a:xfrm>
           <a:prstGeom prst="rect">

--- a/slides/figures_publication_portrait.pptx
+++ b/slides/figures_publication_portrait.pptx
@@ -6,12 +6,13 @@
   </p:sldMasterIdLst>
   <p:sldIdLst>
     <p:sldId id="260" r:id="rId2"/>
-    <p:sldId id="261" r:id="rId3"/>
+    <p:sldId id="263" r:id="rId3"/>
     <p:sldId id="262" r:id="rId4"/>
-    <p:sldId id="259" r:id="rId5"/>
-    <p:sldId id="256" r:id="rId6"/>
-    <p:sldId id="258" r:id="rId7"/>
-    <p:sldId id="257" r:id="rId8"/>
+    <p:sldId id="261" r:id="rId5"/>
+    <p:sldId id="259" r:id="rId6"/>
+    <p:sldId id="256" r:id="rId7"/>
+    <p:sldId id="258" r:id="rId8"/>
+    <p:sldId id="257" r:id="rId9"/>
   </p:sldIdLst>
   <p:sldSz cx="51206400" cy="51206400"/>
   <p:notesSz cx="6799263" cy="9929813"/>
@@ -249,7 +250,7 @@
           <a:p>
             <a:fld id="{DBEC7EBC-4893-4C67-8E48-D69CA1600258}" type="datetimeFigureOut">
               <a:rPr lang="en-US" smtClean="0"/>
-              <a:t>5/29/2026</a:t>
+              <a:t>6/3/2026</a:t>
             </a:fld>
             <a:endParaRPr lang="en-US"/>
           </a:p>
@@ -419,7 +420,7 @@
           <a:p>
             <a:fld id="{DBEC7EBC-4893-4C67-8E48-D69CA1600258}" type="datetimeFigureOut">
               <a:rPr lang="en-US" smtClean="0"/>
-              <a:t>5/29/2026</a:t>
+              <a:t>6/3/2026</a:t>
             </a:fld>
             <a:endParaRPr lang="en-US"/>
           </a:p>
@@ -599,7 +600,7 @@
           <a:p>
             <a:fld id="{DBEC7EBC-4893-4C67-8E48-D69CA1600258}" type="datetimeFigureOut">
               <a:rPr lang="en-US" smtClean="0"/>
-              <a:t>5/29/2026</a:t>
+              <a:t>6/3/2026</a:t>
             </a:fld>
             <a:endParaRPr lang="en-US"/>
           </a:p>
@@ -769,7 +770,7 @@
           <a:p>
             <a:fld id="{DBEC7EBC-4893-4C67-8E48-D69CA1600258}" type="datetimeFigureOut">
               <a:rPr lang="en-US" smtClean="0"/>
-              <a:t>5/29/2026</a:t>
+              <a:t>6/3/2026</a:t>
             </a:fld>
             <a:endParaRPr lang="en-US"/>
           </a:p>
@@ -1015,7 +1016,7 @@
           <a:p>
             <a:fld id="{DBEC7EBC-4893-4C67-8E48-D69CA1600258}" type="datetimeFigureOut">
               <a:rPr lang="en-US" smtClean="0"/>
-              <a:t>5/29/2026</a:t>
+              <a:t>6/3/2026</a:t>
             </a:fld>
             <a:endParaRPr lang="en-US"/>
           </a:p>
@@ -1247,7 +1248,7 @@
           <a:p>
             <a:fld id="{DBEC7EBC-4893-4C67-8E48-D69CA1600258}" type="datetimeFigureOut">
               <a:rPr lang="en-US" smtClean="0"/>
-              <a:t>5/29/2026</a:t>
+              <a:t>6/3/2026</a:t>
             </a:fld>
             <a:endParaRPr lang="en-US"/>
           </a:p>
@@ -1614,7 +1615,7 @@
           <a:p>
             <a:fld id="{DBEC7EBC-4893-4C67-8E48-D69CA1600258}" type="datetimeFigureOut">
               <a:rPr lang="en-US" smtClean="0"/>
-              <a:t>5/29/2026</a:t>
+              <a:t>6/3/2026</a:t>
             </a:fld>
             <a:endParaRPr lang="en-US"/>
           </a:p>
@@ -1732,7 +1733,7 @@
           <a:p>
             <a:fld id="{DBEC7EBC-4893-4C67-8E48-D69CA1600258}" type="datetimeFigureOut">
               <a:rPr lang="en-US" smtClean="0"/>
-              <a:t>5/29/2026</a:t>
+              <a:t>6/3/2026</a:t>
             </a:fld>
             <a:endParaRPr lang="en-US"/>
           </a:p>
@@ -1827,7 +1828,7 @@
           <a:p>
             <a:fld id="{DBEC7EBC-4893-4C67-8E48-D69CA1600258}" type="datetimeFigureOut">
               <a:rPr lang="en-US" smtClean="0"/>
-              <a:t>5/29/2026</a:t>
+              <a:t>6/3/2026</a:t>
             </a:fld>
             <a:endParaRPr lang="en-US"/>
           </a:p>
@@ -2104,7 +2105,7 @@
           <a:p>
             <a:fld id="{DBEC7EBC-4893-4C67-8E48-D69CA1600258}" type="datetimeFigureOut">
               <a:rPr lang="en-US" smtClean="0"/>
-              <a:t>5/29/2026</a:t>
+              <a:t>6/3/2026</a:t>
             </a:fld>
             <a:endParaRPr lang="en-US"/>
           </a:p>
@@ -2361,7 +2362,7 @@
           <a:p>
             <a:fld id="{DBEC7EBC-4893-4C67-8E48-D69CA1600258}" type="datetimeFigureOut">
               <a:rPr lang="en-US" smtClean="0"/>
-              <a:t>5/29/2026</a:t>
+              <a:t>6/3/2026</a:t>
             </a:fld>
             <a:endParaRPr lang="en-US"/>
           </a:p>
@@ -2574,7 +2575,7 @@
           <a:p>
             <a:fld id="{DBEC7EBC-4893-4C67-8E48-D69CA1600258}" type="datetimeFigureOut">
               <a:rPr lang="en-US" smtClean="0"/>
-              <a:t>5/29/2026</a:t>
+              <a:t>6/3/2026</a:t>
             </a:fld>
             <a:endParaRPr lang="en-US"/>
           </a:p>
@@ -5490,8 +5491,8 @@
         </p:blipFill>
         <p:spPr>
           <a:xfrm>
-            <a:off x="6677917" y="30348496"/>
-            <a:ext cx="16999639" cy="4019155"/>
+            <a:off x="4455039" y="28125844"/>
+            <a:ext cx="20876373" cy="4935715"/>
           </a:xfrm>
           <a:prstGeom prst="rect">
             <a:avLst/>
@@ -5512,8 +5513,8 @@
         </p:nvSpPr>
         <p:spPr>
           <a:xfrm>
-            <a:off x="6564917" y="7050566"/>
-            <a:ext cx="37071692" cy="5165792"/>
+            <a:off x="4154224" y="2369470"/>
+            <a:ext cx="43034339" cy="5165792"/>
           </a:xfrm>
           <a:prstGeom prst="roundRect">
             <a:avLst/>
@@ -5563,7 +5564,7 @@
         </p:nvSpPr>
         <p:spPr>
           <a:xfrm>
-            <a:off x="16522078" y="12574083"/>
+            <a:off x="17092708" y="7904417"/>
             <a:ext cx="17157371" cy="923330"/>
           </a:xfrm>
           <a:prstGeom prst="rect">
@@ -5629,8 +5630,8 @@
         </p:nvSpPr>
         <p:spPr>
           <a:xfrm>
-            <a:off x="6564918" y="492287"/>
-            <a:ext cx="37071691" cy="6053787"/>
+            <a:off x="4154225" y="-3102958"/>
+            <a:ext cx="43034337" cy="5118544"/>
           </a:xfrm>
           <a:prstGeom prst="round2SameRect">
             <a:avLst/>
@@ -5685,7 +5686,7 @@
                   <a:schemeClr val="tx1"/>
                 </a:solidFill>
               </a:rPr>
-              <a:t> P14416) from inactive compounds, evaluate its performance, and then directly compare two pairs of explainability methods on the same on the same correctly predicted active compound: </a:t>
+              <a:t>: P14416) from inactive compounds, evaluate its performance, and then directly compare two pairs of explainability methods on the same on the same correctly predicted active compound:  </a:t>
             </a:r>
             <a:r>
               <a:rPr lang="en-US" sz="6000" dirty="0" err="1">
@@ -5749,8 +5750,8 @@
         </p:nvSpPr>
         <p:spPr>
           <a:xfrm>
-            <a:off x="6564918" y="13607274"/>
-            <a:ext cx="37071691" cy="14309967"/>
+            <a:off x="4154225" y="8937608"/>
+            <a:ext cx="43034337" cy="16187596"/>
           </a:xfrm>
           <a:prstGeom prst="roundRect">
             <a:avLst/>
@@ -5796,8 +5797,8 @@
         </p:nvSpPr>
         <p:spPr>
           <a:xfrm rot="10800000">
-            <a:off x="6594255" y="43149687"/>
-            <a:ext cx="37013016" cy="7781566"/>
+            <a:off x="4183558" y="43987533"/>
+            <a:ext cx="42966225" cy="8711116"/>
           </a:xfrm>
           <a:prstGeom prst="round2SameRect">
             <a:avLst/>
@@ -5852,8 +5853,8 @@
         </p:nvSpPr>
         <p:spPr>
           <a:xfrm>
-            <a:off x="6891932" y="43647051"/>
-            <a:ext cx="36417663" cy="8094524"/>
+            <a:off x="4337120" y="43987535"/>
+            <a:ext cx="42668547" cy="9633406"/>
           </a:xfrm>
           <a:prstGeom prst="rect">
             <a:avLst/>
@@ -5874,7 +5875,7 @@
               <a:buAutoNum type="arabicPeriod"/>
             </a:pPr>
             <a:r>
-              <a:rPr lang="en-US" sz="4400" b="1" i="0" dirty="0">
+              <a:rPr lang="en-US" sz="5200" b="1" i="0" dirty="0">
                 <a:solidFill>
                   <a:srgbClr val="0F0F0F"/>
                 </a:solidFill>
@@ -5884,7 +5885,7 @@
               <a:t> Convergent Pharmacophore: </a:t>
             </a:r>
             <a:r>
-              <a:rPr lang="en-US" sz="4400" i="0" dirty="0">
+              <a:rPr lang="en-US" sz="5200" i="0" dirty="0">
                 <a:solidFill>
                   <a:srgbClr val="0F0F0F"/>
                 </a:solidFill>
@@ -5903,7 +5904,7 @@
               <a:buAutoNum type="arabicPeriod"/>
             </a:pPr>
             <a:r>
-              <a:rPr lang="en-US" sz="4400" b="1" i="0" dirty="0">
+              <a:rPr lang="en-US" sz="5200" b="1" i="0" dirty="0">
                 <a:solidFill>
                   <a:srgbClr val="0F0F0F"/>
                 </a:solidFill>
@@ -5913,7 +5914,7 @@
               <a:t> Critical Switch: </a:t>
             </a:r>
             <a:r>
-              <a:rPr lang="en-US" sz="4400" i="0" dirty="0">
+              <a:rPr lang="en-US" sz="5200" i="0" dirty="0">
                 <a:solidFill>
                   <a:srgbClr val="0F0F0F"/>
                 </a:solidFill>
@@ -5932,7 +5933,7 @@
               <a:buAutoNum type="arabicPeriod"/>
             </a:pPr>
             <a:r>
-              <a:rPr lang="en-US" sz="4400" b="1" i="0" dirty="0">
+              <a:rPr lang="en-US" sz="5200" b="1" i="0" dirty="0">
                 <a:solidFill>
                   <a:srgbClr val="0F0F0F"/>
                 </a:solidFill>
@@ -5951,7 +5952,7 @@
               <a:buChar char="•"/>
             </a:pPr>
             <a:r>
-              <a:rPr lang="en-US" sz="4400" b="1" i="0" dirty="0" err="1">
+              <a:rPr lang="en-US" sz="5200" b="1" i="0" dirty="0" err="1">
                 <a:solidFill>
                   <a:srgbClr val="0F0F0F"/>
                 </a:solidFill>
@@ -5961,7 +5962,7 @@
               <a:t>MolAnchor</a:t>
             </a:r>
             <a:r>
-              <a:rPr lang="en-US" sz="4400" b="1" i="0" dirty="0">
+              <a:rPr lang="en-US" sz="5200" b="1" i="0" dirty="0">
                 <a:solidFill>
                   <a:srgbClr val="0F0F0F"/>
                 </a:solidFill>
@@ -5971,7 +5972,7 @@
               <a:t>: </a:t>
             </a:r>
             <a:r>
-              <a:rPr lang="en-US" sz="4400" i="0" dirty="0">
+              <a:rPr lang="en-US" sz="5200" i="0" dirty="0">
                 <a:solidFill>
                   <a:srgbClr val="0F0F0F"/>
                 </a:solidFill>
@@ -5990,7 +5991,7 @@
               <a:buChar char="•"/>
             </a:pPr>
             <a:r>
-              <a:rPr lang="en-US" sz="4400" b="1" i="0" dirty="0">
+              <a:rPr lang="en-US" sz="5200" b="1" i="0" dirty="0">
                 <a:solidFill>
                   <a:srgbClr val="0F0F0F"/>
                 </a:solidFill>
@@ -6000,7 +6001,7 @@
               <a:t>SHAP: </a:t>
             </a:r>
             <a:r>
-              <a:rPr lang="en-US" sz="4400" i="0" dirty="0">
+              <a:rPr lang="en-US" sz="5200" i="0" dirty="0">
                 <a:solidFill>
                   <a:srgbClr val="0F0F0F"/>
                 </a:solidFill>
@@ -6019,7 +6020,7 @@
               <a:buChar char="•"/>
             </a:pPr>
             <a:r>
-              <a:rPr lang="en-US" sz="4400" b="1" i="0" dirty="0" err="1">
+              <a:rPr lang="en-US" sz="5200" b="1" i="0" dirty="0" err="1">
                 <a:solidFill>
                   <a:srgbClr val="0F0F0F"/>
                 </a:solidFill>
@@ -6029,7 +6030,7 @@
               <a:t>MolCE</a:t>
             </a:r>
             <a:r>
-              <a:rPr lang="en-US" sz="4400" i="0" dirty="0">
+              <a:rPr lang="en-US" sz="5200" i="0" dirty="0">
                 <a:solidFill>
                   <a:srgbClr val="0F0F0F"/>
                 </a:solidFill>
@@ -6048,7 +6049,7 @@
               <a:buChar char="•"/>
             </a:pPr>
             <a:r>
-              <a:rPr lang="en-US" sz="4400" b="1" i="0" dirty="0">
+              <a:rPr lang="en-US" sz="5200" b="1" i="0" dirty="0">
                 <a:solidFill>
                   <a:srgbClr val="0F0F0F"/>
                 </a:solidFill>
@@ -6058,7 +6059,7 @@
               <a:t>Counterfactuals: </a:t>
             </a:r>
             <a:r>
-              <a:rPr lang="en-US" sz="4400" i="0" dirty="0">
+              <a:rPr lang="en-US" sz="5200" i="0" dirty="0">
                 <a:solidFill>
                   <a:srgbClr val="0F0F0F"/>
                 </a:solidFill>
@@ -6077,7 +6078,7 @@
               <a:buAutoNum type="arabicPeriod" startAt="4"/>
             </a:pPr>
             <a:r>
-              <a:rPr lang="en-US" sz="4400" b="1" i="0" dirty="0">
+              <a:rPr lang="en-US" sz="5200" b="1" i="0" dirty="0">
                 <a:solidFill>
                   <a:srgbClr val="0F0F0F"/>
                 </a:solidFill>
@@ -6087,7 +6088,7 @@
               <a:t>Limitation Insight: </a:t>
             </a:r>
             <a:r>
-              <a:rPr lang="en-US" sz="4400" i="0" dirty="0" err="1">
+              <a:rPr lang="en-US" sz="5200" i="0" dirty="0" err="1">
                 <a:solidFill>
                   <a:srgbClr val="0F0F0F"/>
                 </a:solidFill>
@@ -6097,7 +6098,7 @@
               <a:t>MolAnchor's</a:t>
             </a:r>
             <a:r>
-              <a:rPr lang="en-US" sz="4400" i="0" dirty="0">
+              <a:rPr lang="en-US" sz="5200" i="0" dirty="0">
                 <a:solidFill>
                   <a:srgbClr val="0F0F0F"/>
                 </a:solidFill>
@@ -6107,7 +6108,7 @@
               <a:t> single-anchor view may oversimplify; SHAP reveals the benzothiazole's positive contribution that </a:t>
             </a:r>
             <a:r>
-              <a:rPr lang="en-US" sz="4400" i="0" dirty="0" err="1">
+              <a:rPr lang="en-US" sz="5200" i="0" dirty="0" err="1">
                 <a:solidFill>
                   <a:srgbClr val="0F0F0F"/>
                 </a:solidFill>
@@ -6117,7 +6118,7 @@
               <a:t>MolAnchor</a:t>
             </a:r>
             <a:r>
-              <a:rPr lang="en-US" sz="4400" i="0" dirty="0">
+              <a:rPr lang="en-US" sz="5200" i="0" dirty="0">
                 <a:solidFill>
                   <a:srgbClr val="0F0F0F"/>
                 </a:solidFill>
@@ -6132,7 +6133,7 @@
               <a:buFont typeface="+mj-lt"/>
               <a:buAutoNum type="arabicPeriod" startAt="4"/>
             </a:pPr>
-            <a:endParaRPr lang="en-US" sz="4400" b="1" i="0" dirty="0">
+            <a:endParaRPr lang="en-US" sz="5400" b="1" i="0" dirty="0">
               <a:solidFill>
                 <a:srgbClr val="0F0F0F"/>
               </a:solidFill>
@@ -6156,7 +6157,7 @@
         </p:nvSpPr>
         <p:spPr>
           <a:xfrm>
-            <a:off x="16522078" y="42190355"/>
+            <a:off x="17092708" y="43009821"/>
             <a:ext cx="17157371" cy="923330"/>
           </a:xfrm>
           <a:prstGeom prst="rect">
@@ -6204,7 +6205,7 @@
         </p:nvGrpSpPr>
         <p:grpSpPr>
           <a:xfrm>
-            <a:off x="11490222" y="51440427"/>
+            <a:off x="12060852" y="53380182"/>
             <a:ext cx="27221082" cy="923330"/>
             <a:chOff x="13161742" y="35331084"/>
             <a:chExt cx="27221082" cy="923330"/>
@@ -6567,10 +6568,10 @@
         </p:nvGrpSpPr>
         <p:grpSpPr>
           <a:xfrm>
-            <a:off x="7138763" y="7498381"/>
-            <a:ext cx="35924001" cy="4270163"/>
-            <a:chOff x="6759986" y="11876103"/>
-            <a:chExt cx="35924001" cy="4270163"/>
+            <a:off x="4728070" y="2817285"/>
+            <a:ext cx="41369126" cy="4270163"/>
+            <a:chOff x="6759985" y="11876103"/>
+            <a:chExt cx="41369126" cy="4270163"/>
           </a:xfrm>
         </p:grpSpPr>
         <p:sp>
@@ -6587,8 +6588,8 @@
           </p:nvSpPr>
           <p:spPr>
             <a:xfrm>
-              <a:off x="6759986" y="12124268"/>
-              <a:ext cx="6499225" cy="1338439"/>
+              <a:off x="6759985" y="12124268"/>
+              <a:ext cx="7772400" cy="1338439"/>
             </a:xfrm>
             <a:prstGeom prst="roundRect">
               <a:avLst/>
@@ -6645,8 +6646,8 @@
           </p:nvSpPr>
           <p:spPr>
             <a:xfrm>
-              <a:off x="6759986" y="14558075"/>
-              <a:ext cx="6499225" cy="1338439"/>
+              <a:off x="6759985" y="14558075"/>
+              <a:ext cx="7772400" cy="1338439"/>
             </a:xfrm>
             <a:prstGeom prst="roundRect">
               <a:avLst/>
@@ -6703,8 +6704,8 @@
           </p:nvSpPr>
           <p:spPr>
             <a:xfrm>
-              <a:off x="14116180" y="14558075"/>
-              <a:ext cx="6499225" cy="1338439"/>
+              <a:off x="15159167" y="14558075"/>
+              <a:ext cx="7772400" cy="1338439"/>
             </a:xfrm>
             <a:prstGeom prst="roundRect">
               <a:avLst/>
@@ -6761,8 +6762,8 @@
           </p:nvSpPr>
           <p:spPr>
             <a:xfrm>
-              <a:off x="14116180" y="12124268"/>
-              <a:ext cx="6499225" cy="1338439"/>
+              <a:off x="15159167" y="12124268"/>
+              <a:ext cx="7772400" cy="1338439"/>
             </a:xfrm>
             <a:prstGeom prst="roundRect">
               <a:avLst/>
@@ -6819,8 +6820,8 @@
           </p:nvSpPr>
           <p:spPr>
             <a:xfrm>
-              <a:off x="21472374" y="12124268"/>
-              <a:ext cx="6499225" cy="1338439"/>
+              <a:off x="23558349" y="12124268"/>
+              <a:ext cx="7772400" cy="1338439"/>
             </a:xfrm>
             <a:prstGeom prst="roundRect">
               <a:avLst/>
@@ -6877,8 +6878,8 @@
           </p:nvSpPr>
           <p:spPr>
             <a:xfrm>
-              <a:off x="21472374" y="14309910"/>
-              <a:ext cx="6499225" cy="1834769"/>
+              <a:off x="23558349" y="14309910"/>
+              <a:ext cx="7772400" cy="1834769"/>
             </a:xfrm>
             <a:prstGeom prst="roundRect">
               <a:avLst/>
@@ -6948,8 +6949,8 @@
           </p:nvSpPr>
           <p:spPr>
             <a:xfrm>
-              <a:off x="28828568" y="14308322"/>
-              <a:ext cx="6499225" cy="1837944"/>
+              <a:off x="31957531" y="14308322"/>
+              <a:ext cx="7772400" cy="1837944"/>
             </a:xfrm>
             <a:prstGeom prst="roundRect">
               <a:avLst/>
@@ -7010,7 +7011,7 @@
           </p:nvCxnSpPr>
           <p:spPr>
             <a:xfrm>
-              <a:off x="10009599" y="13462707"/>
+              <a:off x="10646185" y="13462707"/>
               <a:ext cx="0" cy="1095368"/>
             </a:xfrm>
             <a:prstGeom prst="straightConnector1">
@@ -7056,8 +7057,8 @@
           </p:nvCxnSpPr>
           <p:spPr>
             <a:xfrm>
-              <a:off x="13259211" y="15227295"/>
-              <a:ext cx="856969" cy="0"/>
+              <a:off x="14532385" y="15227295"/>
+              <a:ext cx="626782" cy="0"/>
             </a:xfrm>
             <a:prstGeom prst="straightConnector1">
               <a:avLst/>
@@ -7102,7 +7103,7 @@
           </p:nvCxnSpPr>
           <p:spPr>
             <a:xfrm flipV="1">
-              <a:off x="17365793" y="13462707"/>
+              <a:off x="19045367" y="13462707"/>
               <a:ext cx="0" cy="1095368"/>
             </a:xfrm>
             <a:prstGeom prst="straightConnector1">
@@ -7142,13 +7143,14 @@
             <p:cNvCxnSpPr>
               <a:cxnSpLocks/>
               <a:stCxn id="9" idx="3"/>
+              <a:endCxn id="10" idx="1"/>
             </p:cNvCxnSpPr>
             <p:nvPr/>
           </p:nvCxnSpPr>
           <p:spPr>
-            <a:xfrm flipV="1">
-              <a:off x="20615405" y="12793487"/>
-              <a:ext cx="856969" cy="1"/>
+            <a:xfrm>
+              <a:off x="22931567" y="12793488"/>
+              <a:ext cx="626782" cy="0"/>
             </a:xfrm>
             <a:prstGeom prst="straightConnector1">
               <a:avLst/>
@@ -7193,7 +7195,7 @@
           </p:nvCxnSpPr>
           <p:spPr>
             <a:xfrm>
-              <a:off x="24721987" y="13462707"/>
+              <a:off x="27444549" y="13462707"/>
               <a:ext cx="0" cy="847203"/>
             </a:xfrm>
             <a:prstGeom prst="straightConnector1">
@@ -7239,8 +7241,8 @@
           </p:nvCxnSpPr>
           <p:spPr>
             <a:xfrm flipV="1">
-              <a:off x="27971599" y="15227294"/>
-              <a:ext cx="856969" cy="1"/>
+              <a:off x="31330749" y="15227294"/>
+              <a:ext cx="626782" cy="1"/>
             </a:xfrm>
             <a:prstGeom prst="straightConnector1">
               <a:avLst/>
@@ -7281,8 +7283,8 @@
           </p:nvSpPr>
           <p:spPr>
             <a:xfrm>
-              <a:off x="28828568" y="11876103"/>
-              <a:ext cx="6499225" cy="1834769"/>
+              <a:off x="31957531" y="11876103"/>
+              <a:ext cx="7772400" cy="1834769"/>
             </a:xfrm>
             <a:prstGeom prst="roundRect">
               <a:avLst/>
@@ -7352,8 +7354,8 @@
           </p:nvSpPr>
           <p:spPr>
             <a:xfrm>
-              <a:off x="36184762" y="11876103"/>
-              <a:ext cx="6499225" cy="1834769"/>
+              <a:off x="40356711" y="11876103"/>
+              <a:ext cx="7772400" cy="1834769"/>
             </a:xfrm>
             <a:prstGeom prst="roundRect">
               <a:avLst/>
@@ -7414,7 +7416,7 @@
           </p:nvCxnSpPr>
           <p:spPr>
             <a:xfrm flipV="1">
-              <a:off x="32078181" y="13710872"/>
+              <a:off x="35843731" y="13710872"/>
               <a:ext cx="0" cy="597450"/>
             </a:xfrm>
             <a:prstGeom prst="straightConnector1">
@@ -7456,8 +7458,8 @@
           </p:nvSpPr>
           <p:spPr>
             <a:xfrm>
-              <a:off x="36184762" y="14308322"/>
-              <a:ext cx="6499225" cy="1837944"/>
+              <a:off x="40356711" y="14308322"/>
+              <a:ext cx="7772400" cy="1837944"/>
             </a:xfrm>
             <a:prstGeom prst="roundRect">
               <a:avLst/>
@@ -7518,8 +7520,8 @@
           </p:nvCxnSpPr>
           <p:spPr>
             <a:xfrm>
-              <a:off x="35327793" y="12793488"/>
-              <a:ext cx="856969" cy="0"/>
+              <a:off x="39729931" y="12793488"/>
+              <a:ext cx="626780" cy="0"/>
             </a:xfrm>
             <a:prstGeom prst="straightConnector1">
               <a:avLst/>
@@ -7564,7 +7566,7 @@
           </p:nvCxnSpPr>
           <p:spPr>
             <a:xfrm>
-              <a:off x="39434375" y="13710872"/>
+              <a:off x="44242911" y="13710872"/>
               <a:ext cx="0" cy="597450"/>
             </a:xfrm>
             <a:prstGeom prst="straightConnector1">
@@ -7607,7 +7609,7 @@
         </p:nvSpPr>
         <p:spPr>
           <a:xfrm>
-            <a:off x="31448517" y="13705366"/>
+            <a:off x="33235830" y="9035700"/>
             <a:ext cx="6310257" cy="923330"/>
           </a:xfrm>
           <a:prstGeom prst="rect">
@@ -7644,7 +7646,7 @@
         </p:nvSpPr>
         <p:spPr>
           <a:xfrm>
-            <a:off x="12146227" y="13705366"/>
+            <a:off x="11591496" y="9035700"/>
             <a:ext cx="6603459" cy="923330"/>
           </a:xfrm>
           <a:prstGeom prst="rect">
@@ -7694,8 +7696,8 @@
         </p:blipFill>
         <p:spPr>
           <a:xfrm>
-            <a:off x="10113408" y="14740867"/>
-            <a:ext cx="10669097" cy="6535613"/>
+            <a:off x="9388797" y="9863073"/>
+            <a:ext cx="11008857" cy="6743741"/>
           </a:xfrm>
           <a:prstGeom prst="rect">
             <a:avLst/>
@@ -7729,8 +7731,8 @@
         </p:blipFill>
         <p:spPr>
           <a:xfrm>
-            <a:off x="29190808" y="14586918"/>
-            <a:ext cx="10825674" cy="6843510"/>
+            <a:off x="30886530" y="9917252"/>
+            <a:ext cx="11008857" cy="6959310"/>
           </a:xfrm>
           <a:prstGeom prst="rect">
             <a:avLst/>
@@ -7751,8 +7753,8 @@
         </p:nvSpPr>
         <p:spPr>
           <a:xfrm>
-            <a:off x="7218356" y="21656089"/>
-            <a:ext cx="16459200" cy="5970865"/>
+            <a:off x="4631351" y="16986423"/>
+            <a:ext cx="20523749" cy="7201972"/>
           </a:xfrm>
           <a:prstGeom prst="rect">
             <a:avLst/>
@@ -7771,15 +7773,15 @@
               </a:spcAft>
             </a:pPr>
             <a:r>
-              <a:rPr lang="en-US" sz="4400" b="1" dirty="0"/>
+              <a:rPr lang="en-US" sz="5400" b="1" dirty="0"/>
               <a:t>✅ AGREEMENTS (</a:t>
             </a:r>
             <a:r>
-              <a:rPr lang="en-US" sz="4400" b="1" dirty="0" err="1"/>
+              <a:rPr lang="en-US" sz="5400" b="1" dirty="0" err="1"/>
               <a:t>MolAnchor</a:t>
             </a:r>
             <a:r>
-              <a:rPr lang="en-US" sz="4400" b="1" dirty="0"/>
+              <a:rPr lang="en-US" sz="5400" b="1" dirty="0"/>
               <a:t> ↔ SHAP)</a:t>
             </a:r>
           </a:p>
@@ -7792,11 +7794,11 @@
               <a:buAutoNum type="arabicPeriod"/>
             </a:pPr>
             <a:r>
-              <a:rPr lang="en-US" sz="4400" b="1" dirty="0"/>
+              <a:rPr lang="en-US" sz="5400" b="1" dirty="0"/>
               <a:t>Core scaffold importance: </a:t>
             </a:r>
             <a:r>
-              <a:rPr lang="en-US" sz="4400" dirty="0"/>
+              <a:rPr lang="en-US" sz="5400" dirty="0"/>
               <a:t>Both methods identify the piperazine/benzyl core as critical</a:t>
             </a:r>
           </a:p>
@@ -7809,19 +7811,19 @@
               <a:buAutoNum type="arabicPeriod"/>
             </a:pPr>
             <a:r>
-              <a:rPr lang="en-US" sz="4400" b="1" dirty="0"/>
+              <a:rPr lang="en-US" sz="5400" b="1" dirty="0"/>
               <a:t>N-methyl motif: </a:t>
             </a:r>
             <a:r>
-              <a:rPr lang="en-US" sz="4400" dirty="0"/>
+              <a:rPr lang="en-US" sz="5400" dirty="0"/>
               <a:t>SHAP's top features (Bits 1280, 1791, 1792) all involve the N-methyl/benzyl-dimethylamine region captured by </a:t>
             </a:r>
             <a:r>
-              <a:rPr lang="en-US" sz="4400" dirty="0" err="1"/>
+              <a:rPr lang="en-US" sz="5400" dirty="0" err="1"/>
               <a:t>MolAnchor's</a:t>
             </a:r>
             <a:r>
-              <a:rPr lang="en-US" sz="4400" dirty="0"/>
+              <a:rPr lang="en-US" sz="5400" dirty="0"/>
               <a:t> anchor</a:t>
             </a:r>
           </a:p>
@@ -7834,11 +7836,11 @@
               <a:buAutoNum type="arabicPeriod"/>
             </a:pPr>
             <a:r>
-              <a:rPr lang="en-US" sz="4400" b="1" dirty="0"/>
+              <a:rPr lang="en-US" sz="5400" b="1" dirty="0"/>
               <a:t>Pharmacophore consensus</a:t>
             </a:r>
             <a:r>
-              <a:rPr lang="en-US" sz="4400" dirty="0"/>
+              <a:rPr lang="en-US" sz="5400" dirty="0"/>
               <a:t>: Both confirm the morpholinone-piperazine-benzyl framework is essential for D2 binding</a:t>
             </a:r>
           </a:p>
@@ -7858,8 +7860,8 @@
         </p:nvSpPr>
         <p:spPr>
           <a:xfrm>
-            <a:off x="26374045" y="21656089"/>
-            <a:ext cx="16459200" cy="5970865"/>
+            <a:off x="26789758" y="16986423"/>
+            <a:ext cx="19202400" cy="6370975"/>
           </a:xfrm>
           <a:prstGeom prst="rect">
             <a:avLst/>
@@ -7890,7 +7892,7 @@
               <a:defRPr/>
             </a:pPr>
             <a:r>
-              <a:rPr kumimoji="0" lang="en-US" sz="4400" b="1" i="0" u="none" strike="noStrike" kern="1200" cap="none" spc="0" normalizeH="0" baseline="0" noProof="0" dirty="0">
+              <a:rPr kumimoji="0" lang="en-US" sz="5400" b="1" i="0" u="none" strike="noStrike" kern="1200" cap="none" spc="0" normalizeH="0" baseline="0" noProof="0" dirty="0">
                 <a:ln>
                   <a:noFill/>
                 </a:ln>
@@ -7907,7 +7909,7 @@
               <a:t>❌ DISAGREEMENTS (</a:t>
             </a:r>
             <a:r>
-              <a:rPr kumimoji="0" lang="en-US" sz="4400" b="1" i="0" u="none" strike="noStrike" kern="1200" cap="none" spc="0" normalizeH="0" baseline="0" noProof="0" dirty="0" err="1">
+              <a:rPr kumimoji="0" lang="en-US" sz="5400" b="1" i="0" u="none" strike="noStrike" kern="1200" cap="none" spc="0" normalizeH="0" baseline="0" noProof="0" dirty="0" err="1">
                 <a:ln>
                   <a:noFill/>
                 </a:ln>
@@ -7924,7 +7926,7 @@
               <a:t>MolAnchor</a:t>
             </a:r>
             <a:r>
-              <a:rPr kumimoji="0" lang="en-US" sz="4400" b="1" i="0" u="none" strike="noStrike" kern="1200" cap="none" spc="0" normalizeH="0" baseline="0" noProof="0" dirty="0">
+              <a:rPr kumimoji="0" lang="en-US" sz="5400" b="1" i="0" u="none" strike="noStrike" kern="1200" cap="none" spc="0" normalizeH="0" baseline="0" noProof="0" dirty="0">
                 <a:ln>
                   <a:noFill/>
                 </a:ln>
@@ -7960,7 +7962,7 @@
               <a:defRPr/>
             </a:pPr>
             <a:r>
-              <a:rPr kumimoji="0" lang="en-US" sz="4400" b="1" i="0" u="none" strike="noStrike" kern="1200" cap="none" spc="0" normalizeH="0" baseline="0" noProof="0" dirty="0">
+              <a:rPr kumimoji="0" lang="en-US" sz="5400" b="1" i="0" u="none" strike="noStrike" kern="1200" cap="none" spc="0" normalizeH="0" baseline="0" noProof="0" dirty="0">
                 <a:ln>
                   <a:noFill/>
                 </a:ln>
@@ -7977,7 +7979,7 @@
               <a:t>Granularity: </a:t>
             </a:r>
             <a:r>
-              <a:rPr kumimoji="0" lang="en-US" sz="4400" b="0" i="0" u="none" strike="noStrike" kern="1200" cap="none" spc="0" normalizeH="0" baseline="0" noProof="0" dirty="0" err="1">
+              <a:rPr kumimoji="0" lang="en-US" sz="5400" b="0" i="0" u="none" strike="noStrike" kern="1200" cap="none" spc="0" normalizeH="0" baseline="0" noProof="0" dirty="0" err="1">
                 <a:ln>
                   <a:noFill/>
                 </a:ln>
@@ -7994,7 +7996,7 @@
               <a:t>MolAnchor</a:t>
             </a:r>
             <a:r>
-              <a:rPr kumimoji="0" lang="en-US" sz="4400" b="0" i="0" u="none" strike="noStrike" kern="1200" cap="none" spc="0" normalizeH="0" baseline="0" noProof="0" dirty="0">
+              <a:rPr kumimoji="0" lang="en-US" sz="5400" b="0" i="0" u="none" strike="noStrike" kern="1200" cap="none" spc="0" normalizeH="0" baseline="0" noProof="0" dirty="0">
                 <a:ln>
                   <a:noFill/>
                 </a:ln>
@@ -8030,7 +8032,7 @@
               <a:defRPr/>
             </a:pPr>
             <a:r>
-              <a:rPr kumimoji="0" lang="en-US" sz="4400" b="1" i="0" u="none" strike="noStrike" kern="1200" cap="none" spc="0" normalizeH="0" baseline="0" noProof="0" dirty="0">
+              <a:rPr kumimoji="0" lang="en-US" sz="5400" b="1" i="0" u="none" strike="noStrike" kern="1200" cap="none" spc="0" normalizeH="0" baseline="0" noProof="0" dirty="0">
                 <a:ln>
                   <a:noFill/>
                 </a:ln>
@@ -8047,7 +8049,7 @@
               <a:t>Peripheral groups: </a:t>
             </a:r>
             <a:r>
-              <a:rPr kumimoji="0" lang="en-US" sz="4400" b="0" i="0" u="none" strike="noStrike" kern="1200" cap="none" spc="0" normalizeH="0" baseline="0" noProof="0" dirty="0">
+              <a:rPr kumimoji="0" lang="en-US" sz="5400" b="0" i="0" u="none" strike="noStrike" kern="1200" cap="none" spc="0" normalizeH="0" baseline="0" noProof="0" dirty="0">
                 <a:ln>
                   <a:noFill/>
                 </a:ln>
@@ -8064,7 +8066,7 @@
               <a:t>SHAP highlights the benzothiazole (Bit 885, +5.39) as important, while </a:t>
             </a:r>
             <a:r>
-              <a:rPr kumimoji="0" lang="en-US" sz="4400" b="0" i="0" u="none" strike="noStrike" kern="1200" cap="none" spc="0" normalizeH="0" baseline="0" noProof="0" dirty="0" err="1">
+              <a:rPr kumimoji="0" lang="en-US" sz="5400" b="0" i="0" u="none" strike="noStrike" kern="1200" cap="none" spc="0" normalizeH="0" baseline="0" noProof="0" dirty="0" err="1">
                 <a:ln>
                   <a:noFill/>
                 </a:ln>
@@ -8081,7 +8083,7 @@
               <a:t>MolAnchor</a:t>
             </a:r>
             <a:r>
-              <a:rPr kumimoji="0" lang="en-US" sz="4400" b="0" i="0" u="none" strike="noStrike" kern="1200" cap="none" spc="0" normalizeH="0" baseline="0" noProof="0" dirty="0">
+              <a:rPr kumimoji="0" lang="en-US" sz="5400" b="0" i="0" u="none" strike="noStrike" kern="1200" cap="none" spc="0" normalizeH="0" baseline="0" noProof="0" dirty="0">
                 <a:ln>
                   <a:noFill/>
                 </a:ln>
@@ -8117,7 +8119,7 @@
               <a:defRPr/>
             </a:pPr>
             <a:r>
-              <a:rPr kumimoji="0" lang="en-US" sz="4400" b="1" i="0" u="none" strike="noStrike" kern="1200" cap="none" spc="0" normalizeH="0" baseline="0" noProof="0" dirty="0">
+              <a:rPr kumimoji="0" lang="en-US" sz="5400" b="1" i="0" u="none" strike="noStrike" kern="1200" cap="none" spc="0" normalizeH="0" baseline="0" noProof="0" dirty="0">
                 <a:ln>
                   <a:noFill/>
                 </a:ln>
@@ -8134,7 +8136,7 @@
               <a:t>Negative contribution:</a:t>
             </a:r>
             <a:r>
-              <a:rPr kumimoji="0" lang="en-US" sz="4400" b="0" i="0" u="none" strike="noStrike" kern="1200" cap="none" spc="0" normalizeH="0" baseline="0" noProof="0" dirty="0">
+              <a:rPr kumimoji="0" lang="en-US" sz="5400" b="0" i="0" u="none" strike="noStrike" kern="1200" cap="none" spc="0" normalizeH="0" baseline="0" noProof="0" dirty="0">
                 <a:ln>
                   <a:noFill/>
                 </a:ln>
@@ -8151,7 +8153,7 @@
               <a:t> SHAP identifies thiophene substructure (Bit 552, -5.37) as reducing activity—a nuance </a:t>
             </a:r>
             <a:r>
-              <a:rPr kumimoji="0" lang="en-US" sz="4400" b="0" i="0" u="none" strike="noStrike" kern="1200" cap="none" spc="0" normalizeH="0" baseline="0" noProof="0" dirty="0" err="1">
+              <a:rPr kumimoji="0" lang="en-US" sz="5400" b="0" i="0" u="none" strike="noStrike" kern="1200" cap="none" spc="0" normalizeH="0" baseline="0" noProof="0" dirty="0" err="1">
                 <a:ln>
                   <a:noFill/>
                 </a:ln>
@@ -8168,7 +8170,7 @@
               <a:t>MolAnchor</a:t>
             </a:r>
             <a:r>
-              <a:rPr kumimoji="0" lang="en-US" sz="4400" b="0" i="0" u="none" strike="noStrike" kern="1200" cap="none" spc="0" normalizeH="0" baseline="0" noProof="0" dirty="0">
+              <a:rPr kumimoji="0" lang="en-US" sz="5400" b="0" i="0" u="none" strike="noStrike" kern="1200" cap="none" spc="0" normalizeH="0" baseline="0" noProof="0" dirty="0">
                 <a:ln>
                   <a:noFill/>
                 </a:ln>
@@ -8201,7 +8203,7 @@
         </p:nvSpPr>
         <p:spPr>
           <a:xfrm>
-            <a:off x="16522078" y="28068830"/>
+            <a:off x="17092708" y="25474704"/>
             <a:ext cx="17157371" cy="923330"/>
           </a:xfrm>
           <a:prstGeom prst="rect">
@@ -8250,53 +8252,6 @@
               <a:effectLst/>
               <a:latin typeface="ui-sans-serif"/>
             </a:endParaRPr>
-          </a:p>
-        </p:txBody>
-      </p:sp>
-      <p:sp>
-        <p:nvSpPr>
-          <p:cNvPr id="88" name="Rectangle: Rounded Corners 87">
-            <a:extLst>
-              <a:ext uri="{FF2B5EF4-FFF2-40B4-BE49-F238E27FC236}">
-                <a16:creationId xmlns:a16="http://schemas.microsoft.com/office/drawing/2014/main" id="{682C432F-C7DF-608D-CD06-390CC306E433}"/>
-              </a:ext>
-            </a:extLst>
-          </p:cNvPr>
-          <p:cNvSpPr/>
-          <p:nvPr/>
-        </p:nvSpPr>
-        <p:spPr>
-          <a:xfrm>
-            <a:off x="6564918" y="29051222"/>
-            <a:ext cx="37071691" cy="13099376"/>
-          </a:xfrm>
-          <a:prstGeom prst="roundRect">
-            <a:avLst/>
-          </a:prstGeom>
-          <a:noFill/>
-        </p:spPr>
-        <p:style>
-          <a:lnRef idx="2">
-            <a:schemeClr val="accent1">
-              <a:shade val="15000"/>
-            </a:schemeClr>
-          </a:lnRef>
-          <a:fillRef idx="1">
-            <a:schemeClr val="accent1"/>
-          </a:fillRef>
-          <a:effectRef idx="0">
-            <a:schemeClr val="accent1"/>
-          </a:effectRef>
-          <a:fontRef idx="minor">
-            <a:schemeClr val="lt1"/>
-          </a:fontRef>
-        </p:style>
-        <p:txBody>
-          <a:bodyPr rtlCol="0" anchor="ctr"/>
-          <a:lstStyle/>
-          <a:p>
-            <a:pPr algn="ctr"/>
-            <a:endParaRPr lang="en-US" dirty="0"/>
           </a:p>
         </p:txBody>
       </p:sp>
@@ -8314,7 +8269,7 @@
         </p:nvSpPr>
         <p:spPr>
           <a:xfrm>
-            <a:off x="31448517" y="29149313"/>
+            <a:off x="33235830" y="26861234"/>
             <a:ext cx="6310257" cy="923330"/>
           </a:xfrm>
           <a:prstGeom prst="rect">
@@ -8351,7 +8306,7 @@
         </p:nvSpPr>
         <p:spPr>
           <a:xfrm>
-            <a:off x="12146227" y="29149313"/>
+            <a:off x="11591496" y="26861234"/>
             <a:ext cx="6603459" cy="923330"/>
           </a:xfrm>
           <a:prstGeom prst="rect">
@@ -8388,8 +8343,8 @@
         </p:nvSpPr>
         <p:spPr>
           <a:xfrm>
-            <a:off x="7218356" y="35652534"/>
-            <a:ext cx="16999638" cy="5970865"/>
+            <a:off x="5292025" y="35439903"/>
+            <a:ext cx="19202400" cy="8032968"/>
           </a:xfrm>
           <a:prstGeom prst="rect">
             <a:avLst/>
@@ -8408,13 +8363,13 @@
               </a:spcAft>
             </a:pPr>
             <a:r>
-              <a:rPr lang="en-US" sz="4400" b="1" dirty="0">
+              <a:rPr lang="en-US" sz="5400" b="1" dirty="0">
                 <a:latin typeface="Aptos" panose="020B0004020202020204" pitchFamily="34" charset="0"/>
               </a:rPr>
               <a:t>✅ AGREEMENTS (</a:t>
             </a:r>
             <a:r>
-              <a:rPr lang="en-US" sz="4400" b="1" i="0" dirty="0" err="1">
+              <a:rPr lang="en-US" sz="5400" b="1" i="0" dirty="0" err="1">
                 <a:solidFill>
                   <a:srgbClr val="0F0F0F"/>
                 </a:solidFill>
@@ -8424,7 +8379,7 @@
               <a:t>MolCE</a:t>
             </a:r>
             <a:r>
-              <a:rPr lang="en-US" sz="4400" b="1" i="0" dirty="0">
+              <a:rPr lang="en-US" sz="5400" b="1" i="0" dirty="0">
                 <a:solidFill>
                   <a:srgbClr val="0F0F0F"/>
                 </a:solidFill>
@@ -8434,7 +8389,7 @@
               <a:t> ↔ Counterfactuals</a:t>
             </a:r>
             <a:r>
-              <a:rPr lang="en-US" sz="4400" b="1" dirty="0">
+              <a:rPr lang="en-US" sz="5400" b="1" dirty="0">
                 <a:latin typeface="Aptos" panose="020B0004020202020204" pitchFamily="34" charset="0"/>
               </a:rPr>
               <a:t>)</a:t>
@@ -8449,7 +8404,7 @@
               <a:buAutoNum type="arabicPeriod"/>
             </a:pPr>
             <a:r>
-              <a:rPr lang="en-US" sz="4400" b="1" i="0" dirty="0">
+              <a:rPr lang="en-US" sz="5400" b="1" i="0" dirty="0">
                 <a:solidFill>
                   <a:srgbClr val="0F0F0F"/>
                 </a:solidFill>
@@ -8459,11 +8414,11 @@
               <a:t> </a:t>
             </a:r>
             <a:r>
-              <a:rPr lang="en-US" sz="4400" b="1" dirty="0"/>
+              <a:rPr lang="en-US" sz="5400" b="1" dirty="0"/>
               <a:t>Piperazine N as critical site: </a:t>
             </a:r>
             <a:r>
-              <a:rPr lang="en-US" sz="4400" dirty="0"/>
+              <a:rPr lang="en-US" sz="5400" dirty="0"/>
               <a:t>Both methods identify the piperazine nitrogen substituent as the most impactful site</a:t>
             </a:r>
           </a:p>
@@ -8476,11 +8431,11 @@
               <a:buAutoNum type="arabicPeriod"/>
             </a:pPr>
             <a:r>
-              <a:rPr lang="en-US" sz="4400" b="1" dirty="0"/>
+              <a:rPr lang="en-US" sz="5400" b="1" dirty="0"/>
               <a:t> Substituent sensitivity: </a:t>
             </a:r>
             <a:r>
-              <a:rPr lang="en-US" sz="4400" dirty="0"/>
+              <a:rPr lang="en-US" sz="5400" dirty="0"/>
               <a:t>Both confirm that modifying the piperazine N-substituent can flip the prediction</a:t>
             </a:r>
           </a:p>
@@ -8493,15 +8448,15 @@
               <a:buAutoNum type="arabicPeriod"/>
             </a:pPr>
             <a:r>
-              <a:rPr lang="en-US" sz="4400" b="1" dirty="0"/>
+              <a:rPr lang="en-US" sz="5400" b="1" dirty="0"/>
               <a:t> Polarity effect: </a:t>
             </a:r>
             <a:r>
-              <a:rPr lang="en-US" sz="4400" dirty="0" err="1"/>
+              <a:rPr lang="en-US" sz="5400" dirty="0" err="1"/>
               <a:t>MolCE's</a:t>
             </a:r>
             <a:r>
-              <a:rPr lang="en-US" sz="4400" dirty="0"/>
+              <a:rPr lang="en-US" sz="5400" dirty="0"/>
               <a:t> contrastive R-groups (polar/charged) align with Counterfactuals showing polar additions eliminate activity</a:t>
             </a:r>
           </a:p>
@@ -8521,8 +8476,8 @@
         </p:nvSpPr>
         <p:spPr>
           <a:xfrm>
-            <a:off x="26374045" y="35652534"/>
-            <a:ext cx="16767142" cy="5139869"/>
+            <a:off x="26789758" y="35439903"/>
+            <a:ext cx="19202400" cy="7048083"/>
           </a:xfrm>
           <a:prstGeom prst="rect">
             <a:avLst/>
@@ -8542,7 +8497,7 @@
               <a:defRPr/>
             </a:pPr>
             <a:r>
-              <a:rPr kumimoji="0" lang="en-US" sz="4400" b="1" i="0" u="none" strike="noStrike" kern="1200" cap="none" spc="0" normalizeH="0" baseline="0" noProof="0" dirty="0">
+              <a:rPr kumimoji="0" lang="en-US" sz="5400" b="1" i="0" u="none" strike="noStrike" kern="1200" cap="none" spc="0" normalizeH="0" baseline="0" noProof="0" dirty="0">
                 <a:ln>
                   <a:noFill/>
                 </a:ln>
@@ -8559,7 +8514,7 @@
               <a:t>❌ DISAGREEMENTS (</a:t>
             </a:r>
             <a:r>
-              <a:rPr lang="en-US" sz="4400" b="1" i="0" dirty="0" err="1">
+              <a:rPr lang="en-US" sz="5400" b="1" i="0" dirty="0" err="1">
                 <a:solidFill>
                   <a:srgbClr val="0F0F0F"/>
                 </a:solidFill>
@@ -8569,7 +8524,7 @@
               <a:t>MolCE</a:t>
             </a:r>
             <a:r>
-              <a:rPr lang="en-US" sz="4400" b="1" i="0" dirty="0">
+              <a:rPr lang="en-US" sz="5400" b="1" i="0" dirty="0">
                 <a:solidFill>
                   <a:srgbClr val="0F0F0F"/>
                 </a:solidFill>
@@ -8579,7 +8534,7 @@
               <a:t> ↔ Counterfactuals</a:t>
             </a:r>
             <a:r>
-              <a:rPr kumimoji="0" lang="en-US" sz="4400" b="1" i="0" u="none" strike="noStrike" kern="1200" cap="none" spc="0" normalizeH="0" baseline="0" noProof="0" dirty="0">
+              <a:rPr kumimoji="0" lang="en-US" sz="5400" b="1" i="0" u="none" strike="noStrike" kern="1200" cap="none" spc="0" normalizeH="0" baseline="0" noProof="0" dirty="0">
                 <a:ln>
                   <a:noFill/>
                 </a:ln>
@@ -8615,7 +8570,7 @@
               <a:defRPr/>
             </a:pPr>
             <a:r>
-              <a:rPr kumimoji="0" lang="en-US" sz="4400" b="1" i="0" u="none" strike="noStrike" kern="1200" cap="none" spc="0" normalizeH="0" baseline="0" noProof="0" dirty="0">
+              <a:rPr kumimoji="0" lang="en-US" sz="5400" b="1" i="0" u="none" strike="noStrike" kern="1200" cap="none" spc="0" normalizeH="0" baseline="0" noProof="0" dirty="0">
                 <a:ln>
                   <a:noFill/>
                 </a:ln>
@@ -8632,7 +8587,7 @@
               <a:t>Scaffold importance: </a:t>
             </a:r>
             <a:r>
-              <a:rPr kumimoji="0" lang="en-US" sz="4400" i="0" u="none" strike="noStrike" kern="1200" cap="none" spc="0" normalizeH="0" baseline="0" noProof="0" dirty="0" err="1">
+              <a:rPr kumimoji="0" lang="en-US" sz="5400" i="0" u="none" strike="noStrike" kern="1200" cap="none" spc="0" normalizeH="0" baseline="0" noProof="0" dirty="0" err="1">
                 <a:ln>
                   <a:noFill/>
                 </a:ln>
@@ -8649,7 +8604,7 @@
               <a:t>MolCE</a:t>
             </a:r>
             <a:r>
-              <a:rPr kumimoji="0" lang="en-US" sz="4400" i="0" u="none" strike="noStrike" kern="1200" cap="none" spc="0" normalizeH="0" baseline="0" noProof="0" dirty="0">
+              <a:rPr kumimoji="0" lang="en-US" sz="5400" i="0" u="none" strike="noStrike" kern="1200" cap="none" spc="0" normalizeH="0" baseline="0" noProof="0" dirty="0">
                 <a:ln>
                   <a:noFill/>
                 </a:ln>
@@ -8685,7 +8640,7 @@
               <a:defRPr/>
             </a:pPr>
             <a:r>
-              <a:rPr kumimoji="0" lang="en-US" sz="4400" b="1" i="0" u="none" strike="noStrike" kern="1200" cap="none" spc="0" normalizeH="0" baseline="0" noProof="0" dirty="0">
+              <a:rPr kumimoji="0" lang="en-US" sz="5400" b="1" i="0" u="none" strike="noStrike" kern="1200" cap="none" spc="0" normalizeH="0" baseline="0" noProof="0" dirty="0">
                 <a:ln>
                   <a:noFill/>
                 </a:ln>
@@ -8702,7 +8657,7 @@
               <a:t>Mechanism: </a:t>
             </a:r>
             <a:r>
-              <a:rPr kumimoji="0" lang="en-US" sz="4400" i="0" u="none" strike="noStrike" kern="1200" cap="none" spc="0" normalizeH="0" baseline="0" noProof="0" dirty="0" err="1">
+              <a:rPr kumimoji="0" lang="en-US" sz="5400" i="0" u="none" strike="noStrike" kern="1200" cap="none" spc="0" normalizeH="0" baseline="0" noProof="0" dirty="0" err="1">
                 <a:ln>
                   <a:noFill/>
                 </a:ln>
@@ -8719,7 +8674,7 @@
               <a:t>MolCE</a:t>
             </a:r>
             <a:r>
-              <a:rPr kumimoji="0" lang="en-US" sz="4400" i="0" u="none" strike="noStrike" kern="1200" cap="none" spc="0" normalizeH="0" baseline="0" noProof="0" dirty="0">
+              <a:rPr kumimoji="0" lang="en-US" sz="5400" i="0" u="none" strike="noStrike" kern="1200" cap="none" spc="0" normalizeH="0" baseline="0" noProof="0" dirty="0">
                 <a:ln>
                   <a:noFill/>
                 </a:ln>
@@ -8752,8 +8707,8 @@
         </p:nvGrpSpPr>
         <p:grpSpPr>
           <a:xfrm>
-            <a:off x="26135503" y="30203702"/>
-            <a:ext cx="16963406" cy="4094569"/>
+            <a:off x="25975019" y="28081024"/>
+            <a:ext cx="20831878" cy="4930638"/>
             <a:chOff x="25678303" y="34723809"/>
             <a:chExt cx="16963406" cy="4094569"/>
           </a:xfrm>
@@ -8843,8 +8798,8 @@
         </p:nvSpPr>
         <p:spPr>
           <a:xfrm>
-            <a:off x="27209875" y="34408132"/>
-            <a:ext cx="5713914" cy="1015663"/>
+            <a:off x="27485826" y="33322480"/>
+            <a:ext cx="8346300" cy="1446550"/>
           </a:xfrm>
           <a:prstGeom prst="rect">
             <a:avLst/>
@@ -8859,7 +8814,7 @@
           <a:p>
             <a:pPr algn="ctr"/>
             <a:r>
-              <a:rPr lang="en-US" sz="3000" b="1" i="0" dirty="0">
+              <a:rPr lang="en-US" sz="4400" b="1" i="0" dirty="0">
                 <a:solidFill>
                   <a:srgbClr val="0F0F0F"/>
                 </a:solidFill>
@@ -8872,7 +8827,7 @@
           <a:p>
             <a:pPr algn="ctr"/>
             <a:r>
-              <a:rPr lang="en-US" sz="3000" b="1" dirty="0">
+              <a:rPr lang="en-US" sz="4400" b="1" dirty="0">
                 <a:solidFill>
                   <a:srgbClr val="0F0F0F"/>
                 </a:solidFill>
@@ -8880,7 +8835,7 @@
               </a:rPr>
               <a:t>Predicted class: 0| Similarity: 0.68</a:t>
             </a:r>
-            <a:endParaRPr lang="en-US" sz="3000" dirty="0"/>
+            <a:endParaRPr lang="en-US" sz="4400" dirty="0"/>
           </a:p>
         </p:txBody>
       </p:sp>
@@ -8898,8 +8853,8 @@
         </p:nvSpPr>
         <p:spPr>
           <a:xfrm>
-            <a:off x="36183383" y="34408132"/>
-            <a:ext cx="5713914" cy="1015663"/>
+            <a:off x="37370684" y="33322480"/>
+            <a:ext cx="8346300" cy="1446550"/>
           </a:xfrm>
           <a:prstGeom prst="rect">
             <a:avLst/>
@@ -8914,7 +8869,7 @@
           <a:p>
             <a:pPr algn="ctr"/>
             <a:r>
-              <a:rPr lang="en-US" sz="3000" b="1" i="0" dirty="0">
+              <a:rPr lang="en-US" sz="4400" b="1" i="0" dirty="0">
                 <a:solidFill>
                   <a:srgbClr val="0F0F0F"/>
                 </a:solidFill>
@@ -8927,7 +8882,7 @@
           <a:p>
             <a:pPr algn="ctr"/>
             <a:r>
-              <a:rPr lang="en-US" sz="3000" b="1" dirty="0">
+              <a:rPr lang="en-US" sz="4400" b="1" dirty="0">
                 <a:solidFill>
                   <a:srgbClr val="0F0F0F"/>
                 </a:solidFill>
@@ -8935,7 +8890,7 @@
               </a:rPr>
               <a:t>Predicted class: 0| Similarity: 0.68</a:t>
             </a:r>
-            <a:endParaRPr lang="en-US" sz="3000" dirty="0"/>
+            <a:endParaRPr lang="en-US" sz="4400" dirty="0"/>
           </a:p>
         </p:txBody>
       </p:sp>
@@ -8953,8 +8908,8 @@
         </p:nvSpPr>
         <p:spPr>
           <a:xfrm>
-            <a:off x="8223531" y="34408132"/>
-            <a:ext cx="5414457" cy="1015663"/>
+            <a:off x="6857880" y="33322480"/>
+            <a:ext cx="5414457" cy="1446550"/>
           </a:xfrm>
           <a:prstGeom prst="rect">
             <a:avLst/>
@@ -8969,7 +8924,7 @@
           <a:p>
             <a:pPr algn="ctr"/>
             <a:r>
-              <a:rPr lang="en-US" sz="3000" b="1" i="0" dirty="0">
+              <a:rPr lang="en-US" sz="4400" b="1" i="0" dirty="0">
                 <a:solidFill>
                   <a:srgbClr val="0F0F0F"/>
                 </a:solidFill>
@@ -8982,7 +8937,7 @@
           <a:p>
             <a:pPr algn="ctr"/>
             <a:r>
-              <a:rPr lang="en-US" sz="3000" b="1" dirty="0">
+              <a:rPr lang="en-US" sz="4400" b="1" dirty="0">
                 <a:solidFill>
                   <a:srgbClr val="0F0F0F"/>
                 </a:solidFill>
@@ -8990,7 +8945,7 @@
               </a:rPr>
               <a:t>Contrast: 1.00</a:t>
             </a:r>
-            <a:endParaRPr lang="en-US" sz="3000" dirty="0"/>
+            <a:endParaRPr lang="en-US" sz="4400" dirty="0"/>
           </a:p>
         </p:txBody>
       </p:sp>
@@ -9008,8 +8963,8 @@
         </p:nvSpPr>
         <p:spPr>
           <a:xfrm>
-            <a:off x="16969252" y="34408132"/>
-            <a:ext cx="5453166" cy="1015663"/>
+            <a:off x="17739342" y="33322480"/>
+            <a:ext cx="5453166" cy="1446550"/>
           </a:xfrm>
           <a:prstGeom prst="rect">
             <a:avLst/>
@@ -9024,7 +8979,7 @@
           <a:p>
             <a:pPr algn="ctr"/>
             <a:r>
-              <a:rPr lang="en-US" sz="3000" b="1" i="0" dirty="0">
+              <a:rPr lang="en-US" sz="4400" b="1" i="0" dirty="0">
                 <a:solidFill>
                   <a:srgbClr val="0F0F0F"/>
                 </a:solidFill>
@@ -9037,7 +8992,7 @@
           <a:p>
             <a:pPr algn="ctr"/>
             <a:r>
-              <a:rPr lang="en-US" sz="3000" b="1" dirty="0">
+              <a:rPr lang="en-US" sz="4400" b="1" dirty="0">
                 <a:solidFill>
                   <a:srgbClr val="0F0F0F"/>
                 </a:solidFill>
@@ -9045,14 +9000,61 @@
               </a:rPr>
               <a:t>Contrast: 1.00</a:t>
             </a:r>
-            <a:endParaRPr lang="en-US" sz="3000" dirty="0"/>
+            <a:endParaRPr lang="en-US" sz="4400" dirty="0"/>
+          </a:p>
+        </p:txBody>
+      </p:sp>
+      <p:sp>
+        <p:nvSpPr>
+          <p:cNvPr id="88" name="Rectangle: Rounded Corners 87">
+            <a:extLst>
+              <a:ext uri="{FF2B5EF4-FFF2-40B4-BE49-F238E27FC236}">
+                <a16:creationId xmlns:a16="http://schemas.microsoft.com/office/drawing/2014/main" id="{682C432F-C7DF-608D-CD06-390CC306E433}"/>
+              </a:ext>
+            </a:extLst>
+          </p:cNvPr>
+          <p:cNvSpPr/>
+          <p:nvPr/>
+        </p:nvSpPr>
+        <p:spPr>
+          <a:xfrm>
+            <a:off x="4154224" y="26553256"/>
+            <a:ext cx="43034339" cy="16187596"/>
+          </a:xfrm>
+          <a:prstGeom prst="roundRect">
+            <a:avLst/>
+          </a:prstGeom>
+          <a:noFill/>
+        </p:spPr>
+        <p:style>
+          <a:lnRef idx="2">
+            <a:schemeClr val="accent1">
+              <a:shade val="15000"/>
+            </a:schemeClr>
+          </a:lnRef>
+          <a:fillRef idx="1">
+            <a:schemeClr val="accent1"/>
+          </a:fillRef>
+          <a:effectRef idx="0">
+            <a:schemeClr val="accent1"/>
+          </a:effectRef>
+          <a:fontRef idx="minor">
+            <a:schemeClr val="lt1"/>
+          </a:fontRef>
+        </p:style>
+        <p:txBody>
+          <a:bodyPr rtlCol="0" anchor="ctr"/>
+          <a:lstStyle/>
+          <a:p>
+            <a:pPr algn="ctr"/>
+            <a:endParaRPr lang="en-US" dirty="0"/>
           </a:p>
         </p:txBody>
       </p:sp>
     </p:spTree>
     <p:extLst>
       <p:ext uri="{BB962C8B-B14F-4D97-AF65-F5344CB8AC3E}">
-        <p14:creationId xmlns:p14="http://schemas.microsoft.com/office/powerpoint/2010/main" val="3074598117"/>
+        <p14:creationId xmlns:p14="http://schemas.microsoft.com/office/powerpoint/2010/main" val="557434596"/>
       </p:ext>
     </p:extLst>
   </p:cSld>
@@ -12537,6 +12539,3622 @@
 </file>
 
 <file path=ppt/slides/slide4.xml><?xml version="1.0" encoding="utf-8"?>
+<p:sld xmlns:a="http://schemas.openxmlformats.org/drawingml/2006/main" xmlns:r="http://schemas.openxmlformats.org/officeDocument/2006/relationships" xmlns:p="http://schemas.openxmlformats.org/presentationml/2006/main" show="0">
+  <p:cSld>
+    <p:spTree>
+      <p:nvGrpSpPr>
+        <p:cNvPr id="1" name=""/>
+        <p:cNvGrpSpPr/>
+        <p:nvPr/>
+      </p:nvGrpSpPr>
+      <p:grpSpPr>
+        <a:xfrm>
+          <a:off x="0" y="0"/>
+          <a:ext cx="0" cy="0"/>
+          <a:chOff x="0" y="0"/>
+          <a:chExt cx="0" cy="0"/>
+        </a:xfrm>
+      </p:grpSpPr>
+      <p:pic>
+        <p:nvPicPr>
+          <p:cNvPr id="98" name="Picture 97">
+            <a:extLst>
+              <a:ext uri="{FF2B5EF4-FFF2-40B4-BE49-F238E27FC236}">
+                <a16:creationId xmlns:a16="http://schemas.microsoft.com/office/drawing/2014/main" id="{A7F1FF81-F85B-AEE0-1DE8-5EB96DE47216}"/>
+              </a:ext>
+            </a:extLst>
+          </p:cNvPr>
+          <p:cNvPicPr>
+            <a:picLocks noChangeAspect="1"/>
+          </p:cNvPicPr>
+          <p:nvPr/>
+        </p:nvPicPr>
+        <p:blipFill>
+          <a:blip r:embed="rId2">
+            <a:extLst>
+              <a:ext uri="{28A0092B-C50C-407E-A947-70E740481C1C}">
+                <a14:useLocalDpi xmlns:a14="http://schemas.microsoft.com/office/drawing/2010/main" val="0"/>
+              </a:ext>
+            </a:extLst>
+          </a:blip>
+          <a:srcRect l="25671" t="16772" r="25601" b="34684"/>
+          <a:stretch/>
+        </p:blipFill>
+        <p:spPr>
+          <a:xfrm>
+            <a:off x="6677917" y="30348496"/>
+            <a:ext cx="16999639" cy="4019155"/>
+          </a:xfrm>
+          <a:prstGeom prst="rect">
+            <a:avLst/>
+          </a:prstGeom>
+        </p:spPr>
+      </p:pic>
+      <p:sp>
+        <p:nvSpPr>
+          <p:cNvPr id="14" name="Rectangle: Rounded Corners 13">
+            <a:extLst>
+              <a:ext uri="{FF2B5EF4-FFF2-40B4-BE49-F238E27FC236}">
+                <a16:creationId xmlns:a16="http://schemas.microsoft.com/office/drawing/2014/main" id="{DBF4675B-24DA-ECE6-C51C-65069789A359}"/>
+              </a:ext>
+            </a:extLst>
+          </p:cNvPr>
+          <p:cNvSpPr/>
+          <p:nvPr/>
+        </p:nvSpPr>
+        <p:spPr>
+          <a:xfrm>
+            <a:off x="6564917" y="7050566"/>
+            <a:ext cx="37071692" cy="5165792"/>
+          </a:xfrm>
+          <a:prstGeom prst="roundRect">
+            <a:avLst/>
+          </a:prstGeom>
+          <a:solidFill>
+            <a:schemeClr val="bg1">
+              <a:lumMod val="85000"/>
+            </a:schemeClr>
+          </a:solidFill>
+        </p:spPr>
+        <p:style>
+          <a:lnRef idx="2">
+            <a:schemeClr val="accent1">
+              <a:shade val="15000"/>
+            </a:schemeClr>
+          </a:lnRef>
+          <a:fillRef idx="1">
+            <a:schemeClr val="accent1"/>
+          </a:fillRef>
+          <a:effectRef idx="0">
+            <a:schemeClr val="accent1"/>
+          </a:effectRef>
+          <a:fontRef idx="minor">
+            <a:schemeClr val="lt1"/>
+          </a:fontRef>
+        </p:style>
+        <p:txBody>
+          <a:bodyPr rtlCol="0" anchor="ctr"/>
+          <a:lstStyle/>
+          <a:p>
+            <a:pPr algn="ctr"/>
+            <a:endParaRPr lang="en-US" dirty="0"/>
+          </a:p>
+        </p:txBody>
+      </p:sp>
+      <p:sp>
+        <p:nvSpPr>
+          <p:cNvPr id="53" name="TextBox 52">
+            <a:extLst>
+              <a:ext uri="{FF2B5EF4-FFF2-40B4-BE49-F238E27FC236}">
+                <a16:creationId xmlns:a16="http://schemas.microsoft.com/office/drawing/2014/main" id="{4D9CB3D1-7BFC-3386-B306-BDBBA5137ABA}"/>
+              </a:ext>
+            </a:extLst>
+          </p:cNvPr>
+          <p:cNvSpPr txBox="1"/>
+          <p:nvPr/>
+        </p:nvSpPr>
+        <p:spPr>
+          <a:xfrm>
+            <a:off x="16522078" y="12574083"/>
+            <a:ext cx="17157371" cy="923330"/>
+          </a:xfrm>
+          <a:prstGeom prst="rect">
+            <a:avLst/>
+          </a:prstGeom>
+          <a:noFill/>
+        </p:spPr>
+        <p:txBody>
+          <a:bodyPr wrap="square">
+            <a:spAutoFit/>
+          </a:bodyPr>
+          <a:lstStyle/>
+          <a:p>
+            <a:pPr algn="ctr"/>
+            <a:r>
+              <a:rPr lang="en-US" sz="5400" b="1" dirty="0">
+                <a:solidFill>
+                  <a:srgbClr val="0F0F0F"/>
+                </a:solidFill>
+                <a:latin typeface="ui-sans-serif"/>
+              </a:rPr>
+              <a:t>Pair 1: </a:t>
+            </a:r>
+            <a:r>
+              <a:rPr lang="en-US" sz="5400" b="1" dirty="0" err="1">
+                <a:solidFill>
+                  <a:srgbClr val="0F0F0F"/>
+                </a:solidFill>
+                <a:latin typeface="ui-sans-serif"/>
+              </a:rPr>
+              <a:t>MolAnchor</a:t>
+            </a:r>
+            <a:r>
+              <a:rPr lang="en-US" sz="5400" b="1" dirty="0">
+                <a:solidFill>
+                  <a:srgbClr val="0F0F0F"/>
+                </a:solidFill>
+                <a:latin typeface="ui-sans-serif"/>
+              </a:rPr>
+              <a:t> vs SHAP</a:t>
+            </a:r>
+            <a:endParaRPr lang="en-US" sz="5400" b="1" i="0" dirty="0">
+              <a:solidFill>
+                <a:srgbClr val="0F0F0F"/>
+              </a:solidFill>
+              <a:effectLst/>
+              <a:latin typeface="ui-sans-serif"/>
+            </a:endParaRPr>
+          </a:p>
+        </p:txBody>
+      </p:sp>
+      <p:sp>
+        <p:nvSpPr>
+          <p:cNvPr id="2" name="Rectangle: Top Corners Rounded 1">
+            <a:extLst>
+              <a:ext uri="{FF2B5EF4-FFF2-40B4-BE49-F238E27FC236}">
+                <a16:creationId xmlns:a16="http://schemas.microsoft.com/office/drawing/2014/main" id="{6C13FBF4-81B4-461D-A19D-5804EED023DD}"/>
+              </a:ext>
+            </a:extLst>
+          </p:cNvPr>
+          <p:cNvSpPr/>
+          <p:nvPr/>
+        </p:nvSpPr>
+        <p:spPr>
+          <a:xfrm>
+            <a:off x="6564918" y="492287"/>
+            <a:ext cx="37071691" cy="6053787"/>
+          </a:xfrm>
+          <a:prstGeom prst="round2SameRect">
+            <a:avLst/>
+          </a:prstGeom>
+          <a:solidFill>
+            <a:schemeClr val="tx2">
+              <a:lumMod val="25000"/>
+              <a:lumOff val="75000"/>
+            </a:schemeClr>
+          </a:solidFill>
+        </p:spPr>
+        <p:style>
+          <a:lnRef idx="2">
+            <a:schemeClr val="accent1">
+              <a:shade val="15000"/>
+            </a:schemeClr>
+          </a:lnRef>
+          <a:fillRef idx="1">
+            <a:schemeClr val="accent1"/>
+          </a:fillRef>
+          <a:effectRef idx="0">
+            <a:schemeClr val="accent1"/>
+          </a:effectRef>
+          <a:fontRef idx="minor">
+            <a:schemeClr val="lt1"/>
+          </a:fontRef>
+        </p:style>
+        <p:txBody>
+          <a:bodyPr rtlCol="0" anchor="ctr"/>
+          <a:lstStyle/>
+          <a:p>
+            <a:pPr algn="just"/>
+            <a:r>
+              <a:rPr lang="en-US" sz="6000" dirty="0">
+                <a:solidFill>
+                  <a:schemeClr val="tx1"/>
+                </a:solidFill>
+              </a:rPr>
+              <a:t>You are running an explainability benchmarking study for compound bioactivity prediction. The goal is to train a Deep Neural Network to distinguish compounds active against the D(2) dopamine receptor (</a:t>
+            </a:r>
+            <a:r>
+              <a:rPr lang="en-US" sz="6000" dirty="0" err="1">
+                <a:solidFill>
+                  <a:schemeClr val="tx1"/>
+                </a:solidFill>
+              </a:rPr>
+              <a:t>UniProt</a:t>
+            </a:r>
+            <a:r>
+              <a:rPr lang="en-US" sz="6000" dirty="0">
+                <a:solidFill>
+                  <a:schemeClr val="tx1"/>
+                </a:solidFill>
+              </a:rPr>
+              <a:t> P14416) from inactive compounds, evaluate its performance, and then directly compare two pairs of explainability methods on the same on the same correctly predicted active compound: </a:t>
+            </a:r>
+            <a:r>
+              <a:rPr lang="en-US" sz="6000" dirty="0" err="1">
+                <a:solidFill>
+                  <a:schemeClr val="tx1"/>
+                </a:solidFill>
+              </a:rPr>
+              <a:t>Molanchor</a:t>
+            </a:r>
+            <a:r>
+              <a:rPr lang="en-US" sz="6000" dirty="0">
+                <a:solidFill>
+                  <a:schemeClr val="tx1"/>
+                </a:solidFill>
+              </a:rPr>
+              <a:t> vs SHAP and </a:t>
+            </a:r>
+            <a:r>
+              <a:rPr lang="en-US" sz="6000" dirty="0" err="1">
+                <a:solidFill>
+                  <a:schemeClr val="tx1"/>
+                </a:solidFill>
+              </a:rPr>
+              <a:t>MolCE</a:t>
+            </a:r>
+            <a:r>
+              <a:rPr lang="en-US" sz="6000" dirty="0">
+                <a:solidFill>
+                  <a:schemeClr val="tx1"/>
+                </a:solidFill>
+              </a:rPr>
+              <a:t> vs Counterfactuals. Summarize where the methods agree on the structural determinants of the predictions and where they disagree</a:t>
+            </a:r>
+            <a:r>
+              <a:rPr lang="en-US" sz="1800" dirty="0">
+                <a:solidFill>
+                  <a:schemeClr val="tx1"/>
+                </a:solidFill>
+              </a:rPr>
+              <a:t>.</a:t>
+            </a:r>
+            <a:endParaRPr lang="en-US" sz="6000" dirty="0">
+              <a:solidFill>
+                <a:schemeClr val="tx1"/>
+              </a:solidFill>
+            </a:endParaRPr>
+          </a:p>
+        </p:txBody>
+      </p:sp>
+      <p:sp>
+        <p:nvSpPr>
+          <p:cNvPr id="49" name="Rectangle: Rounded Corners 48">
+            <a:extLst>
+              <a:ext uri="{FF2B5EF4-FFF2-40B4-BE49-F238E27FC236}">
+                <a16:creationId xmlns:a16="http://schemas.microsoft.com/office/drawing/2014/main" id="{1C29497D-2B90-2BE5-88BB-D67B8144BA05}"/>
+              </a:ext>
+            </a:extLst>
+          </p:cNvPr>
+          <p:cNvSpPr/>
+          <p:nvPr/>
+        </p:nvSpPr>
+        <p:spPr>
+          <a:xfrm>
+            <a:off x="6564918" y="13607274"/>
+            <a:ext cx="37071691" cy="14309967"/>
+          </a:xfrm>
+          <a:prstGeom prst="roundRect">
+            <a:avLst/>
+          </a:prstGeom>
+          <a:noFill/>
+        </p:spPr>
+        <p:style>
+          <a:lnRef idx="2">
+            <a:schemeClr val="accent1">
+              <a:shade val="15000"/>
+            </a:schemeClr>
+          </a:lnRef>
+          <a:fillRef idx="1">
+            <a:schemeClr val="accent1"/>
+          </a:fillRef>
+          <a:effectRef idx="0">
+            <a:schemeClr val="accent1"/>
+          </a:effectRef>
+          <a:fontRef idx="minor">
+            <a:schemeClr val="lt1"/>
+          </a:fontRef>
+        </p:style>
+        <p:txBody>
+          <a:bodyPr rtlCol="0" anchor="ctr"/>
+          <a:lstStyle/>
+          <a:p>
+            <a:pPr algn="ctr"/>
+            <a:endParaRPr lang="en-US" dirty="0"/>
+          </a:p>
+        </p:txBody>
+      </p:sp>
+      <p:sp>
+        <p:nvSpPr>
+          <p:cNvPr id="75" name="Rectangle: Top Corners Rounded 74">
+            <a:extLst>
+              <a:ext uri="{FF2B5EF4-FFF2-40B4-BE49-F238E27FC236}">
+                <a16:creationId xmlns:a16="http://schemas.microsoft.com/office/drawing/2014/main" id="{ADA389BC-6277-D00F-8843-FDFC3BF7E611}"/>
+              </a:ext>
+            </a:extLst>
+          </p:cNvPr>
+          <p:cNvSpPr/>
+          <p:nvPr/>
+        </p:nvSpPr>
+        <p:spPr>
+          <a:xfrm rot="10800000">
+            <a:off x="6594255" y="43149687"/>
+            <a:ext cx="37013016" cy="7781566"/>
+          </a:xfrm>
+          <a:prstGeom prst="round2SameRect">
+            <a:avLst/>
+          </a:prstGeom>
+          <a:solidFill>
+            <a:schemeClr val="accent6">
+              <a:lumMod val="40000"/>
+              <a:lumOff val="60000"/>
+            </a:schemeClr>
+          </a:solidFill>
+        </p:spPr>
+        <p:style>
+          <a:lnRef idx="2">
+            <a:schemeClr val="accent1">
+              <a:shade val="15000"/>
+            </a:schemeClr>
+          </a:lnRef>
+          <a:fillRef idx="1">
+            <a:schemeClr val="accent1"/>
+          </a:fillRef>
+          <a:effectRef idx="0">
+            <a:schemeClr val="accent1"/>
+          </a:effectRef>
+          <a:fontRef idx="minor">
+            <a:schemeClr val="lt1"/>
+          </a:fontRef>
+        </p:style>
+        <p:txBody>
+          <a:bodyPr rtlCol="0" anchor="ctr"/>
+          <a:lstStyle/>
+          <a:p>
+            <a:pPr algn="just"/>
+            <a:endParaRPr lang="en-US" sz="4400" dirty="0">
+              <a:solidFill>
+                <a:schemeClr val="tx1"/>
+              </a:solidFill>
+            </a:endParaRPr>
+          </a:p>
+        </p:txBody>
+      </p:sp>
+      <p:sp>
+        <p:nvSpPr>
+          <p:cNvPr id="77" name="TextBox 76">
+            <a:extLst>
+              <a:ext uri="{FF2B5EF4-FFF2-40B4-BE49-F238E27FC236}">
+                <a16:creationId xmlns:a16="http://schemas.microsoft.com/office/drawing/2014/main" id="{C9821E32-A8A6-C518-B031-E9D5E16F9A8D}"/>
+              </a:ext>
+            </a:extLst>
+          </p:cNvPr>
+          <p:cNvSpPr txBox="1"/>
+          <p:nvPr/>
+        </p:nvSpPr>
+        <p:spPr>
+          <a:xfrm>
+            <a:off x="6891932" y="43647051"/>
+            <a:ext cx="36417663" cy="8094524"/>
+          </a:xfrm>
+          <a:prstGeom prst="rect">
+            <a:avLst/>
+          </a:prstGeom>
+          <a:noFill/>
+        </p:spPr>
+        <p:txBody>
+          <a:bodyPr wrap="square">
+            <a:spAutoFit/>
+          </a:bodyPr>
+          <a:lstStyle/>
+          <a:p>
+            <a:pPr marL="228600" indent="-228600">
+              <a:spcAft>
+                <a:spcPts val="1200"/>
+              </a:spcAft>
+              <a:buFont typeface="+mj-lt"/>
+              <a:buAutoNum type="arabicPeriod"/>
+            </a:pPr>
+            <a:r>
+              <a:rPr lang="en-US" sz="4400" b="1" i="0" dirty="0">
+                <a:solidFill>
+                  <a:srgbClr val="0F0F0F"/>
+                </a:solidFill>
+                <a:effectLst/>
+                <a:latin typeface="ui-sans-serif"/>
+              </a:rPr>
+              <a:t> Convergent Pharmacophore: </a:t>
+            </a:r>
+            <a:r>
+              <a:rPr lang="en-US" sz="4400" i="0" dirty="0">
+                <a:solidFill>
+                  <a:srgbClr val="0F0F0F"/>
+                </a:solidFill>
+                <a:effectLst/>
+                <a:latin typeface="ui-sans-serif"/>
+              </a:rPr>
+              <a:t>All four methods agree that the piperazine-benzyl-morpholinone core is the essential pharmacophore for D2 receptor binding.</a:t>
+            </a:r>
+          </a:p>
+          <a:p>
+            <a:pPr marL="228600" indent="-228600">
+              <a:spcAft>
+                <a:spcPts val="1200"/>
+              </a:spcAft>
+              <a:buFont typeface="+mj-lt"/>
+              <a:buAutoNum type="arabicPeriod"/>
+            </a:pPr>
+            <a:r>
+              <a:rPr lang="en-US" sz="4400" b="1" i="0" dirty="0">
+                <a:solidFill>
+                  <a:srgbClr val="0F0F0F"/>
+                </a:solidFill>
+                <a:effectLst/>
+                <a:latin typeface="ui-sans-serif"/>
+              </a:rPr>
+              <a:t> Critical Switch: </a:t>
+            </a:r>
+            <a:r>
+              <a:rPr lang="en-US" sz="4400" i="0" dirty="0">
+                <a:solidFill>
+                  <a:srgbClr val="0F0F0F"/>
+                </a:solidFill>
+                <a:effectLst/>
+                <a:latin typeface="ui-sans-serif"/>
+              </a:rPr>
+              <a:t>The piperazine nitrogen substituent acts as an "on/off switch"—modifying it can eliminate activity even with the intact core scaffold intact.</a:t>
+            </a:r>
+          </a:p>
+          <a:p>
+            <a:pPr marL="228600" indent="-228600">
+              <a:spcAft>
+                <a:spcPts val="1200"/>
+              </a:spcAft>
+              <a:buFont typeface="+mj-lt"/>
+              <a:buAutoNum type="arabicPeriod"/>
+            </a:pPr>
+            <a:r>
+              <a:rPr lang="en-US" sz="4400" b="1" i="0" dirty="0">
+                <a:solidFill>
+                  <a:srgbClr val="0F0F0F"/>
+                </a:solidFill>
+                <a:effectLst/>
+                <a:latin typeface="ui-sans-serif"/>
+              </a:rPr>
+              <a:t> Method Complementarity:</a:t>
+            </a:r>
+          </a:p>
+          <a:p>
+            <a:pPr marL="571500" indent="-571500">
+              <a:spcAft>
+                <a:spcPts val="1200"/>
+              </a:spcAft>
+              <a:buFont typeface="Arial" panose="020B0604020202020204" pitchFamily="34" charset="0"/>
+              <a:buChar char="•"/>
+            </a:pPr>
+            <a:r>
+              <a:rPr lang="en-US" sz="4400" b="1" i="0" dirty="0" err="1">
+                <a:solidFill>
+                  <a:srgbClr val="0F0F0F"/>
+                </a:solidFill>
+                <a:effectLst/>
+                <a:latin typeface="ui-sans-serif"/>
+              </a:rPr>
+              <a:t>MolAnchor</a:t>
+            </a:r>
+            <a:r>
+              <a:rPr lang="en-US" sz="4400" b="1" i="0" dirty="0">
+                <a:solidFill>
+                  <a:srgbClr val="0F0F0F"/>
+                </a:solidFill>
+                <a:effectLst/>
+                <a:latin typeface="ui-sans-serif"/>
+              </a:rPr>
+              <a:t>: </a:t>
+            </a:r>
+            <a:r>
+              <a:rPr lang="en-US" sz="4400" i="0" dirty="0">
+                <a:solidFill>
+                  <a:srgbClr val="0F0F0F"/>
+                </a:solidFill>
+                <a:effectLst/>
+                <a:latin typeface="ui-sans-serif"/>
+              </a:rPr>
+              <a:t>Best for identifying dominant fragments with high precision</a:t>
+            </a:r>
+          </a:p>
+          <a:p>
+            <a:pPr marL="571500" indent="-571500">
+              <a:spcAft>
+                <a:spcPts val="1200"/>
+              </a:spcAft>
+              <a:buFont typeface="Arial" panose="020B0604020202020204" pitchFamily="34" charset="0"/>
+              <a:buChar char="•"/>
+            </a:pPr>
+            <a:r>
+              <a:rPr lang="en-US" sz="4400" b="1" i="0" dirty="0">
+                <a:solidFill>
+                  <a:srgbClr val="0F0F0F"/>
+                </a:solidFill>
+                <a:effectLst/>
+                <a:latin typeface="ui-sans-serif"/>
+              </a:rPr>
+              <a:t>SHAP: </a:t>
+            </a:r>
+            <a:r>
+              <a:rPr lang="en-US" sz="4400" i="0" dirty="0">
+                <a:solidFill>
+                  <a:srgbClr val="0F0F0F"/>
+                </a:solidFill>
+                <a:effectLst/>
+                <a:latin typeface="ui-sans-serif"/>
+              </a:rPr>
+              <a:t>Best for revealing distributed importance and negative contributions</a:t>
+            </a:r>
+          </a:p>
+          <a:p>
+            <a:pPr marL="571500" indent="-571500">
+              <a:spcAft>
+                <a:spcPts val="1200"/>
+              </a:spcAft>
+              <a:buFont typeface="Arial" panose="020B0604020202020204" pitchFamily="34" charset="0"/>
+              <a:buChar char="•"/>
+            </a:pPr>
+            <a:r>
+              <a:rPr lang="en-US" sz="4400" b="1" i="0" dirty="0" err="1">
+                <a:solidFill>
+                  <a:srgbClr val="0F0F0F"/>
+                </a:solidFill>
+                <a:effectLst/>
+                <a:latin typeface="ui-sans-serif"/>
+              </a:rPr>
+              <a:t>MolCE</a:t>
+            </a:r>
+            <a:r>
+              <a:rPr lang="en-US" sz="4400" i="0" dirty="0">
+                <a:solidFill>
+                  <a:srgbClr val="0F0F0F"/>
+                </a:solidFill>
+                <a:effectLst/>
+                <a:latin typeface="ui-sans-serif"/>
+              </a:rPr>
+              <a:t>: Best for identifying contrastive features (what distinguishes active from inactive)</a:t>
+            </a:r>
+          </a:p>
+          <a:p>
+            <a:pPr marL="571500" indent="-571500">
+              <a:spcAft>
+                <a:spcPts val="1200"/>
+              </a:spcAft>
+              <a:buFont typeface="Arial" panose="020B0604020202020204" pitchFamily="34" charset="0"/>
+              <a:buChar char="•"/>
+            </a:pPr>
+            <a:r>
+              <a:rPr lang="en-US" sz="4400" b="1" i="0" dirty="0">
+                <a:solidFill>
+                  <a:srgbClr val="0F0F0F"/>
+                </a:solidFill>
+                <a:effectLst/>
+                <a:latin typeface="ui-sans-serif"/>
+              </a:rPr>
+              <a:t>Counterfactuals: </a:t>
+            </a:r>
+            <a:r>
+              <a:rPr lang="en-US" sz="4400" i="0" dirty="0">
+                <a:solidFill>
+                  <a:srgbClr val="0F0F0F"/>
+                </a:solidFill>
+                <a:effectLst/>
+                <a:latin typeface="ui-sans-serif"/>
+              </a:rPr>
+              <a:t>Best for generating actionable structural modifications</a:t>
+            </a:r>
+          </a:p>
+          <a:p>
+            <a:pPr marL="742950" indent="-742950">
+              <a:spcAft>
+                <a:spcPts val="1200"/>
+              </a:spcAft>
+              <a:buFont typeface="+mj-lt"/>
+              <a:buAutoNum type="arabicPeriod" startAt="4"/>
+            </a:pPr>
+            <a:r>
+              <a:rPr lang="en-US" sz="4400" b="1" i="0" dirty="0">
+                <a:solidFill>
+                  <a:srgbClr val="0F0F0F"/>
+                </a:solidFill>
+                <a:effectLst/>
+                <a:latin typeface="ui-sans-serif"/>
+              </a:rPr>
+              <a:t>Limitation Insight: </a:t>
+            </a:r>
+            <a:r>
+              <a:rPr lang="en-US" sz="4400" i="0" dirty="0" err="1">
+                <a:solidFill>
+                  <a:srgbClr val="0F0F0F"/>
+                </a:solidFill>
+                <a:effectLst/>
+                <a:latin typeface="ui-sans-serif"/>
+              </a:rPr>
+              <a:t>MolAnchor's</a:t>
+            </a:r>
+            <a:r>
+              <a:rPr lang="en-US" sz="4400" i="0" dirty="0">
+                <a:solidFill>
+                  <a:srgbClr val="0F0F0F"/>
+                </a:solidFill>
+                <a:effectLst/>
+                <a:latin typeface="ui-sans-serif"/>
+              </a:rPr>
+              <a:t> single-anchor view may oversimplify; SHAP reveals the benzothiazole's positive contribution that </a:t>
+            </a:r>
+            <a:r>
+              <a:rPr lang="en-US" sz="4400" i="0" dirty="0" err="1">
+                <a:solidFill>
+                  <a:srgbClr val="0F0F0F"/>
+                </a:solidFill>
+                <a:effectLst/>
+                <a:latin typeface="ui-sans-serif"/>
+              </a:rPr>
+              <a:t>MolAnchor</a:t>
+            </a:r>
+            <a:r>
+              <a:rPr lang="en-US" sz="4400" i="0" dirty="0">
+                <a:solidFill>
+                  <a:srgbClr val="0F0F0F"/>
+                </a:solidFill>
+                <a:effectLst/>
+                <a:latin typeface="ui-sans-serif"/>
+              </a:rPr>
+              <a:t> misses. Counterfactuals show that the core scaffold alone is necessary but not sufficient—the N-substituent is the decisive factor.</a:t>
+            </a:r>
+          </a:p>
+          <a:p>
+            <a:pPr marL="228600" indent="-228600">
+              <a:buFont typeface="+mj-lt"/>
+              <a:buAutoNum type="arabicPeriod" startAt="4"/>
+            </a:pPr>
+            <a:endParaRPr lang="en-US" sz="4400" b="1" i="0" dirty="0">
+              <a:solidFill>
+                <a:srgbClr val="0F0F0F"/>
+              </a:solidFill>
+              <a:effectLst/>
+              <a:latin typeface="ui-sans-serif"/>
+            </a:endParaRPr>
+          </a:p>
+        </p:txBody>
+      </p:sp>
+      <p:sp>
+        <p:nvSpPr>
+          <p:cNvPr id="80" name="TextBox 79">
+            <a:extLst>
+              <a:ext uri="{FF2B5EF4-FFF2-40B4-BE49-F238E27FC236}">
+                <a16:creationId xmlns:a16="http://schemas.microsoft.com/office/drawing/2014/main" id="{4F75911C-6BD0-922D-B821-7CE96BED0CA3}"/>
+              </a:ext>
+            </a:extLst>
+          </p:cNvPr>
+          <p:cNvSpPr txBox="1"/>
+          <p:nvPr/>
+        </p:nvSpPr>
+        <p:spPr>
+          <a:xfrm>
+            <a:off x="16522078" y="42190355"/>
+            <a:ext cx="17157371" cy="923330"/>
+          </a:xfrm>
+          <a:prstGeom prst="rect">
+            <a:avLst/>
+          </a:prstGeom>
+          <a:noFill/>
+        </p:spPr>
+        <p:txBody>
+          <a:bodyPr wrap="square">
+            <a:spAutoFit/>
+          </a:bodyPr>
+          <a:lstStyle/>
+          <a:p>
+            <a:pPr algn="ctr"/>
+            <a:r>
+              <a:rPr lang="en-US" sz="5400" b="1" dirty="0">
+                <a:solidFill>
+                  <a:srgbClr val="0F0F0F"/>
+                </a:solidFill>
+                <a:latin typeface="ui-sans-serif"/>
+              </a:rPr>
+              <a:t>Key takeaways</a:t>
+            </a:r>
+            <a:endParaRPr lang="en-US" sz="5400" b="1" i="0" dirty="0">
+              <a:solidFill>
+                <a:srgbClr val="0F0F0F"/>
+              </a:solidFill>
+              <a:effectLst/>
+              <a:latin typeface="ui-sans-serif"/>
+            </a:endParaRPr>
+          </a:p>
+        </p:txBody>
+      </p:sp>
+      <p:grpSp>
+        <p:nvGrpSpPr>
+          <p:cNvPr id="7" name="Group 6">
+            <a:extLst>
+              <a:ext uri="{FF2B5EF4-FFF2-40B4-BE49-F238E27FC236}">
+                <a16:creationId xmlns:a16="http://schemas.microsoft.com/office/drawing/2014/main" id="{AE02D07E-FA83-46F7-FBED-29C7C8CFC31A}"/>
+              </a:ext>
+            </a:extLst>
+          </p:cNvPr>
+          <p:cNvGrpSpPr/>
+          <p:nvPr/>
+        </p:nvGrpSpPr>
+        <p:grpSpPr>
+          <a:xfrm>
+            <a:off x="11490222" y="51440427"/>
+            <a:ext cx="27221082" cy="923330"/>
+            <a:chOff x="13161742" y="35331084"/>
+            <a:chExt cx="27221082" cy="923330"/>
+          </a:xfrm>
+        </p:grpSpPr>
+        <p:sp>
+          <p:nvSpPr>
+            <p:cNvPr id="81" name="Rectangle 80">
+              <a:extLst>
+                <a:ext uri="{FF2B5EF4-FFF2-40B4-BE49-F238E27FC236}">
+                  <a16:creationId xmlns:a16="http://schemas.microsoft.com/office/drawing/2014/main" id="{72807964-5BD9-B45A-64B0-2645DF88EB3B}"/>
+                </a:ext>
+              </a:extLst>
+            </p:cNvPr>
+            <p:cNvSpPr/>
+            <p:nvPr/>
+          </p:nvSpPr>
+          <p:spPr>
+            <a:xfrm>
+              <a:off x="13161742" y="35440946"/>
+              <a:ext cx="1646814" cy="703607"/>
+            </a:xfrm>
+            <a:prstGeom prst="rect">
+              <a:avLst/>
+            </a:prstGeom>
+            <a:solidFill>
+              <a:srgbClr val="A6CAEC"/>
+            </a:solidFill>
+          </p:spPr>
+          <p:style>
+            <a:lnRef idx="2">
+              <a:schemeClr val="accent1">
+                <a:shade val="15000"/>
+              </a:schemeClr>
+            </a:lnRef>
+            <a:fillRef idx="1">
+              <a:schemeClr val="accent1"/>
+            </a:fillRef>
+            <a:effectRef idx="0">
+              <a:schemeClr val="accent1"/>
+            </a:effectRef>
+            <a:fontRef idx="minor">
+              <a:schemeClr val="lt1"/>
+            </a:fontRef>
+          </p:style>
+          <p:txBody>
+            <a:bodyPr rtlCol="0" anchor="ctr"/>
+            <a:lstStyle/>
+            <a:p>
+              <a:pPr algn="ctr"/>
+              <a:endParaRPr lang="en-US"/>
+            </a:p>
+          </p:txBody>
+        </p:sp>
+        <p:sp>
+          <p:nvSpPr>
+            <p:cNvPr id="82" name="TextBox 81">
+              <a:extLst>
+                <a:ext uri="{FF2B5EF4-FFF2-40B4-BE49-F238E27FC236}">
+                  <a16:creationId xmlns:a16="http://schemas.microsoft.com/office/drawing/2014/main" id="{EACA069E-8CED-5E8A-69B1-E9F4FC24041A}"/>
+                </a:ext>
+              </a:extLst>
+            </p:cNvPr>
+            <p:cNvSpPr txBox="1"/>
+            <p:nvPr/>
+          </p:nvSpPr>
+          <p:spPr>
+            <a:xfrm>
+              <a:off x="13960804" y="35331084"/>
+              <a:ext cx="6199523" cy="923330"/>
+            </a:xfrm>
+            <a:prstGeom prst="rect">
+              <a:avLst/>
+            </a:prstGeom>
+            <a:noFill/>
+          </p:spPr>
+          <p:txBody>
+            <a:bodyPr wrap="square" rtlCol="0">
+              <a:spAutoFit/>
+            </a:bodyPr>
+            <a:lstStyle/>
+            <a:p>
+              <a:pPr algn="ctr"/>
+              <a:r>
+                <a:rPr lang="en-US" sz="5400" dirty="0"/>
+                <a:t>User prompt</a:t>
+              </a:r>
+            </a:p>
+          </p:txBody>
+        </p:sp>
+        <p:sp>
+          <p:nvSpPr>
+            <p:cNvPr id="83" name="Rectangle 82">
+              <a:extLst>
+                <a:ext uri="{FF2B5EF4-FFF2-40B4-BE49-F238E27FC236}">
+                  <a16:creationId xmlns:a16="http://schemas.microsoft.com/office/drawing/2014/main" id="{083E7B6A-0D88-EE7A-862D-CD52DE210854}"/>
+                </a:ext>
+              </a:extLst>
+            </p:cNvPr>
+            <p:cNvSpPr/>
+            <p:nvPr/>
+          </p:nvSpPr>
+          <p:spPr>
+            <a:xfrm>
+              <a:off x="25749158" y="35440946"/>
+              <a:ext cx="1646814" cy="703607"/>
+            </a:xfrm>
+            <a:prstGeom prst="rect">
+              <a:avLst/>
+            </a:prstGeom>
+            <a:noFill/>
+          </p:spPr>
+          <p:style>
+            <a:lnRef idx="2">
+              <a:schemeClr val="accent1">
+                <a:shade val="15000"/>
+              </a:schemeClr>
+            </a:lnRef>
+            <a:fillRef idx="1">
+              <a:schemeClr val="accent1"/>
+            </a:fillRef>
+            <a:effectRef idx="0">
+              <a:schemeClr val="accent1"/>
+            </a:effectRef>
+            <a:fontRef idx="minor">
+              <a:schemeClr val="lt1"/>
+            </a:fontRef>
+          </p:style>
+          <p:txBody>
+            <a:bodyPr rtlCol="0" anchor="ctr"/>
+            <a:lstStyle/>
+            <a:p>
+              <a:pPr algn="ctr"/>
+              <a:endParaRPr lang="en-US"/>
+            </a:p>
+          </p:txBody>
+        </p:sp>
+        <p:sp>
+          <p:nvSpPr>
+            <p:cNvPr id="84" name="TextBox 83">
+              <a:extLst>
+                <a:ext uri="{FF2B5EF4-FFF2-40B4-BE49-F238E27FC236}">
+                  <a16:creationId xmlns:a16="http://schemas.microsoft.com/office/drawing/2014/main" id="{358AE044-1305-34FC-BBC0-450EF8C6264C}"/>
+                </a:ext>
+              </a:extLst>
+            </p:cNvPr>
+            <p:cNvSpPr txBox="1"/>
+            <p:nvPr/>
+          </p:nvSpPr>
+          <p:spPr>
+            <a:xfrm>
+              <a:off x="26376770" y="35331084"/>
+              <a:ext cx="8218539" cy="923330"/>
+            </a:xfrm>
+            <a:prstGeom prst="rect">
+              <a:avLst/>
+            </a:prstGeom>
+            <a:noFill/>
+          </p:spPr>
+          <p:txBody>
+            <a:bodyPr wrap="square" rtlCol="0">
+              <a:spAutoFit/>
+            </a:bodyPr>
+            <a:lstStyle/>
+            <a:p>
+              <a:pPr algn="ctr"/>
+              <a:r>
+                <a:rPr lang="en-US" sz="5400" dirty="0"/>
+                <a:t>Response &amp; output</a:t>
+              </a:r>
+            </a:p>
+          </p:txBody>
+        </p:sp>
+        <p:sp>
+          <p:nvSpPr>
+            <p:cNvPr id="86" name="Rectangle 85">
+              <a:extLst>
+                <a:ext uri="{FF2B5EF4-FFF2-40B4-BE49-F238E27FC236}">
+                  <a16:creationId xmlns:a16="http://schemas.microsoft.com/office/drawing/2014/main" id="{350C722C-59C7-EC1B-EC99-E1777E1494CE}"/>
+                </a:ext>
+              </a:extLst>
+            </p:cNvPr>
+            <p:cNvSpPr/>
+            <p:nvPr/>
+          </p:nvSpPr>
+          <p:spPr>
+            <a:xfrm>
+              <a:off x="34204757" y="35440946"/>
+              <a:ext cx="1646814" cy="703607"/>
+            </a:xfrm>
+            <a:prstGeom prst="rect">
+              <a:avLst/>
+            </a:prstGeom>
+            <a:solidFill>
+              <a:srgbClr val="B4E5A2"/>
+            </a:solidFill>
+          </p:spPr>
+          <p:style>
+            <a:lnRef idx="2">
+              <a:schemeClr val="accent1">
+                <a:shade val="15000"/>
+              </a:schemeClr>
+            </a:lnRef>
+            <a:fillRef idx="1">
+              <a:schemeClr val="accent1"/>
+            </a:fillRef>
+            <a:effectRef idx="0">
+              <a:schemeClr val="accent1"/>
+            </a:effectRef>
+            <a:fontRef idx="minor">
+              <a:schemeClr val="lt1"/>
+            </a:fontRef>
+          </p:style>
+          <p:txBody>
+            <a:bodyPr rtlCol="0" anchor="ctr"/>
+            <a:lstStyle/>
+            <a:p>
+              <a:pPr algn="ctr"/>
+              <a:endParaRPr lang="en-US"/>
+            </a:p>
+          </p:txBody>
+        </p:sp>
+        <p:sp>
+          <p:nvSpPr>
+            <p:cNvPr id="87" name="TextBox 86">
+              <a:extLst>
+                <a:ext uri="{FF2B5EF4-FFF2-40B4-BE49-F238E27FC236}">
+                  <a16:creationId xmlns:a16="http://schemas.microsoft.com/office/drawing/2014/main" id="{24FCF701-8B21-25B2-2AE4-BF962FF75654}"/>
+                </a:ext>
+              </a:extLst>
+            </p:cNvPr>
+            <p:cNvSpPr txBox="1"/>
+            <p:nvPr/>
+          </p:nvSpPr>
+          <p:spPr>
+            <a:xfrm>
+              <a:off x="35326982" y="35331084"/>
+              <a:ext cx="5055842" cy="923330"/>
+            </a:xfrm>
+            <a:prstGeom prst="rect">
+              <a:avLst/>
+            </a:prstGeom>
+            <a:noFill/>
+          </p:spPr>
+          <p:txBody>
+            <a:bodyPr wrap="square" rtlCol="0">
+              <a:spAutoFit/>
+            </a:bodyPr>
+            <a:lstStyle/>
+            <a:p>
+              <a:pPr algn="ctr"/>
+              <a:r>
+                <a:rPr lang="en-US" sz="5400" dirty="0"/>
+                <a:t>Discussion</a:t>
+              </a:r>
+            </a:p>
+          </p:txBody>
+        </p:sp>
+        <p:sp>
+          <p:nvSpPr>
+            <p:cNvPr id="5" name="Rectangle 4">
+              <a:extLst>
+                <a:ext uri="{FF2B5EF4-FFF2-40B4-BE49-F238E27FC236}">
+                  <a16:creationId xmlns:a16="http://schemas.microsoft.com/office/drawing/2014/main" id="{A2B5BA64-5C49-72B3-4807-202BB7511121}"/>
+                </a:ext>
+              </a:extLst>
+            </p:cNvPr>
+            <p:cNvSpPr/>
+            <p:nvPr/>
+          </p:nvSpPr>
+          <p:spPr>
+            <a:xfrm>
+              <a:off x="19941225" y="35440946"/>
+              <a:ext cx="1646814" cy="703607"/>
+            </a:xfrm>
+            <a:prstGeom prst="rect">
+              <a:avLst/>
+            </a:prstGeom>
+            <a:solidFill>
+              <a:srgbClr val="D9D9D9"/>
+            </a:solidFill>
+          </p:spPr>
+          <p:style>
+            <a:lnRef idx="2">
+              <a:schemeClr val="accent1">
+                <a:shade val="15000"/>
+              </a:schemeClr>
+            </a:lnRef>
+            <a:fillRef idx="1">
+              <a:schemeClr val="accent1"/>
+            </a:fillRef>
+            <a:effectRef idx="0">
+              <a:schemeClr val="accent1"/>
+            </a:effectRef>
+            <a:fontRef idx="minor">
+              <a:schemeClr val="lt1"/>
+            </a:fontRef>
+          </p:style>
+          <p:txBody>
+            <a:bodyPr rtlCol="0" anchor="ctr"/>
+            <a:lstStyle/>
+            <a:p>
+              <a:pPr algn="ctr"/>
+              <a:endParaRPr lang="en-US">
+                <a:solidFill>
+                  <a:srgbClr val="FFFFFF"/>
+                </a:solidFill>
+              </a:endParaRPr>
+            </a:p>
+          </p:txBody>
+        </p:sp>
+        <p:sp>
+          <p:nvSpPr>
+            <p:cNvPr id="6" name="TextBox 5">
+              <a:extLst>
+                <a:ext uri="{FF2B5EF4-FFF2-40B4-BE49-F238E27FC236}">
+                  <a16:creationId xmlns:a16="http://schemas.microsoft.com/office/drawing/2014/main" id="{0B838B24-BA64-D5F2-D98D-5C4BC2C2CAD6}"/>
+                </a:ext>
+              </a:extLst>
+            </p:cNvPr>
+            <p:cNvSpPr txBox="1"/>
+            <p:nvPr/>
+          </p:nvSpPr>
+          <p:spPr>
+            <a:xfrm>
+              <a:off x="20283087" y="35331084"/>
+              <a:ext cx="6199523" cy="923330"/>
+            </a:xfrm>
+            <a:prstGeom prst="rect">
+              <a:avLst/>
+            </a:prstGeom>
+            <a:noFill/>
+          </p:spPr>
+          <p:txBody>
+            <a:bodyPr wrap="square" rtlCol="0">
+              <a:spAutoFit/>
+            </a:bodyPr>
+            <a:lstStyle/>
+            <a:p>
+              <a:pPr algn="ctr"/>
+              <a:r>
+                <a:rPr lang="en-US" sz="5400" dirty="0"/>
+                <a:t>Tool calls</a:t>
+              </a:r>
+            </a:p>
+          </p:txBody>
+        </p:sp>
+      </p:grpSp>
+      <p:grpSp>
+        <p:nvGrpSpPr>
+          <p:cNvPr id="103" name="Group 102">
+            <a:extLst>
+              <a:ext uri="{FF2B5EF4-FFF2-40B4-BE49-F238E27FC236}">
+                <a16:creationId xmlns:a16="http://schemas.microsoft.com/office/drawing/2014/main" id="{686AEDAD-7926-E065-5CEF-0258F653ADAC}"/>
+              </a:ext>
+            </a:extLst>
+          </p:cNvPr>
+          <p:cNvGrpSpPr/>
+          <p:nvPr/>
+        </p:nvGrpSpPr>
+        <p:grpSpPr>
+          <a:xfrm>
+            <a:off x="7138763" y="7498381"/>
+            <a:ext cx="35924001" cy="4270163"/>
+            <a:chOff x="6759986" y="11876103"/>
+            <a:chExt cx="35924001" cy="4270163"/>
+          </a:xfrm>
+        </p:grpSpPr>
+        <p:sp>
+          <p:nvSpPr>
+            <p:cNvPr id="3" name="Rectangle: Rounded Corners 2">
+              <a:extLst>
+                <a:ext uri="{FF2B5EF4-FFF2-40B4-BE49-F238E27FC236}">
+                  <a16:creationId xmlns:a16="http://schemas.microsoft.com/office/drawing/2014/main" id="{465AE2D3-52C5-2D04-D846-EC865A9F4DC7}"/>
+                </a:ext>
+              </a:extLst>
+            </p:cNvPr>
+            <p:cNvSpPr/>
+            <p:nvPr/>
+          </p:nvSpPr>
+          <p:spPr>
+            <a:xfrm>
+              <a:off x="6759986" y="12124268"/>
+              <a:ext cx="6499225" cy="1338439"/>
+            </a:xfrm>
+            <a:prstGeom prst="roundRect">
+              <a:avLst/>
+            </a:prstGeom>
+            <a:solidFill>
+              <a:schemeClr val="bg1">
+                <a:lumMod val="65000"/>
+              </a:schemeClr>
+            </a:solidFill>
+          </p:spPr>
+          <p:style>
+            <a:lnRef idx="2">
+              <a:schemeClr val="accent1">
+                <a:shade val="15000"/>
+              </a:schemeClr>
+            </a:lnRef>
+            <a:fillRef idx="1">
+              <a:schemeClr val="accent1"/>
+            </a:fillRef>
+            <a:effectRef idx="0">
+              <a:schemeClr val="accent1"/>
+            </a:effectRef>
+            <a:fontRef idx="minor">
+              <a:schemeClr val="lt1"/>
+            </a:fontRef>
+          </p:style>
+          <p:txBody>
+            <a:bodyPr rtlCol="0" anchor="ctr"/>
+            <a:lstStyle/>
+            <a:p>
+              <a:pPr algn="ctr"/>
+              <a:r>
+                <a:rPr lang="en-US" sz="6000" dirty="0">
+                  <a:solidFill>
+                    <a:schemeClr val="tx1"/>
+                  </a:solidFill>
+                </a:rPr>
+                <a:t>Find dataset</a:t>
+              </a:r>
+            </a:p>
+          </p:txBody>
+        </p:sp>
+        <p:sp>
+          <p:nvSpPr>
+            <p:cNvPr id="4" name="Rectangle: Rounded Corners 3">
+              <a:extLst>
+                <a:ext uri="{FF2B5EF4-FFF2-40B4-BE49-F238E27FC236}">
+                  <a16:creationId xmlns:a16="http://schemas.microsoft.com/office/drawing/2014/main" id="{6DB85F9D-5273-DCFF-C989-7562C2561479}"/>
+                </a:ext>
+              </a:extLst>
+            </p:cNvPr>
+            <p:cNvSpPr/>
+            <p:nvPr/>
+          </p:nvSpPr>
+          <p:spPr>
+            <a:xfrm>
+              <a:off x="6759986" y="14558075"/>
+              <a:ext cx="6499225" cy="1338439"/>
+            </a:xfrm>
+            <a:prstGeom prst="roundRect">
+              <a:avLst/>
+            </a:prstGeom>
+            <a:solidFill>
+              <a:schemeClr val="bg1">
+                <a:lumMod val="65000"/>
+              </a:schemeClr>
+            </a:solidFill>
+          </p:spPr>
+          <p:style>
+            <a:lnRef idx="2">
+              <a:schemeClr val="accent1">
+                <a:shade val="15000"/>
+              </a:schemeClr>
+            </a:lnRef>
+            <a:fillRef idx="1">
+              <a:schemeClr val="accent1"/>
+            </a:fillRef>
+            <a:effectRef idx="0">
+              <a:schemeClr val="accent1"/>
+            </a:effectRef>
+            <a:fontRef idx="minor">
+              <a:schemeClr val="lt1"/>
+            </a:fontRef>
+          </p:style>
+          <p:txBody>
+            <a:bodyPr rtlCol="0" anchor="ctr"/>
+            <a:lstStyle/>
+            <a:p>
+              <a:pPr algn="ctr"/>
+              <a:r>
+                <a:rPr lang="en-US" sz="6000" dirty="0">
+                  <a:solidFill>
+                    <a:schemeClr val="tx1"/>
+                  </a:solidFill>
+                </a:rPr>
+                <a:t>Load dataset</a:t>
+              </a:r>
+            </a:p>
+          </p:txBody>
+        </p:sp>
+        <p:sp>
+          <p:nvSpPr>
+            <p:cNvPr id="8" name="Rectangle: Rounded Corners 7">
+              <a:extLst>
+                <a:ext uri="{FF2B5EF4-FFF2-40B4-BE49-F238E27FC236}">
+                  <a16:creationId xmlns:a16="http://schemas.microsoft.com/office/drawing/2014/main" id="{872B3574-1A6E-95E9-EEA3-C496E1B2F4CE}"/>
+                </a:ext>
+              </a:extLst>
+            </p:cNvPr>
+            <p:cNvSpPr/>
+            <p:nvPr/>
+          </p:nvSpPr>
+          <p:spPr>
+            <a:xfrm>
+              <a:off x="14116180" y="14558075"/>
+              <a:ext cx="6499225" cy="1338439"/>
+            </a:xfrm>
+            <a:prstGeom prst="roundRect">
+              <a:avLst/>
+            </a:prstGeom>
+            <a:solidFill>
+              <a:schemeClr val="bg1">
+                <a:lumMod val="65000"/>
+              </a:schemeClr>
+            </a:solidFill>
+          </p:spPr>
+          <p:style>
+            <a:lnRef idx="2">
+              <a:schemeClr val="accent1">
+                <a:shade val="15000"/>
+              </a:schemeClr>
+            </a:lnRef>
+            <a:fillRef idx="1">
+              <a:schemeClr val="accent1"/>
+            </a:fillRef>
+            <a:effectRef idx="0">
+              <a:schemeClr val="accent1"/>
+            </a:effectRef>
+            <a:fontRef idx="minor">
+              <a:schemeClr val="lt1"/>
+            </a:fontRef>
+          </p:style>
+          <p:txBody>
+            <a:bodyPr rtlCol="0" anchor="ctr"/>
+            <a:lstStyle/>
+            <a:p>
+              <a:pPr algn="ctr"/>
+              <a:r>
+                <a:rPr lang="en-US" sz="6000" dirty="0">
+                  <a:solidFill>
+                    <a:schemeClr val="tx1"/>
+                  </a:solidFill>
+                </a:rPr>
+                <a:t>Compute features</a:t>
+              </a:r>
+            </a:p>
+          </p:txBody>
+        </p:sp>
+        <p:sp>
+          <p:nvSpPr>
+            <p:cNvPr id="9" name="Rectangle: Rounded Corners 8">
+              <a:extLst>
+                <a:ext uri="{FF2B5EF4-FFF2-40B4-BE49-F238E27FC236}">
+                  <a16:creationId xmlns:a16="http://schemas.microsoft.com/office/drawing/2014/main" id="{AB67E2D9-9E9D-F863-4BAE-D1ACB7A59896}"/>
+                </a:ext>
+              </a:extLst>
+            </p:cNvPr>
+            <p:cNvSpPr/>
+            <p:nvPr/>
+          </p:nvSpPr>
+          <p:spPr>
+            <a:xfrm>
+              <a:off x="14116180" y="12124268"/>
+              <a:ext cx="6499225" cy="1338439"/>
+            </a:xfrm>
+            <a:prstGeom prst="roundRect">
+              <a:avLst/>
+            </a:prstGeom>
+            <a:solidFill>
+              <a:schemeClr val="bg1">
+                <a:lumMod val="65000"/>
+              </a:schemeClr>
+            </a:solidFill>
+          </p:spPr>
+          <p:style>
+            <a:lnRef idx="2">
+              <a:schemeClr val="accent1">
+                <a:shade val="15000"/>
+              </a:schemeClr>
+            </a:lnRef>
+            <a:fillRef idx="1">
+              <a:schemeClr val="accent1"/>
+            </a:fillRef>
+            <a:effectRef idx="0">
+              <a:schemeClr val="accent1"/>
+            </a:effectRef>
+            <a:fontRef idx="minor">
+              <a:schemeClr val="lt1"/>
+            </a:fontRef>
+          </p:style>
+          <p:txBody>
+            <a:bodyPr rtlCol="0" anchor="ctr"/>
+            <a:lstStyle/>
+            <a:p>
+              <a:pPr algn="ctr"/>
+              <a:r>
+                <a:rPr lang="en-US" sz="6000" dirty="0">
+                  <a:solidFill>
+                    <a:schemeClr val="tx1"/>
+                  </a:solidFill>
+                </a:rPr>
+                <a:t>Split dataset</a:t>
+              </a:r>
+            </a:p>
+          </p:txBody>
+        </p:sp>
+        <p:sp>
+          <p:nvSpPr>
+            <p:cNvPr id="10" name="Rectangle: Rounded Corners 9">
+              <a:extLst>
+                <a:ext uri="{FF2B5EF4-FFF2-40B4-BE49-F238E27FC236}">
+                  <a16:creationId xmlns:a16="http://schemas.microsoft.com/office/drawing/2014/main" id="{1344948B-9127-5D85-04AF-9E27623C51DB}"/>
+                </a:ext>
+              </a:extLst>
+            </p:cNvPr>
+            <p:cNvSpPr/>
+            <p:nvPr/>
+          </p:nvSpPr>
+          <p:spPr>
+            <a:xfrm>
+              <a:off x="21472374" y="12124268"/>
+              <a:ext cx="6499225" cy="1338439"/>
+            </a:xfrm>
+            <a:prstGeom prst="roundRect">
+              <a:avLst/>
+            </a:prstGeom>
+            <a:solidFill>
+              <a:schemeClr val="bg1">
+                <a:lumMod val="65000"/>
+              </a:schemeClr>
+            </a:solidFill>
+          </p:spPr>
+          <p:style>
+            <a:lnRef idx="2">
+              <a:schemeClr val="accent1">
+                <a:shade val="15000"/>
+              </a:schemeClr>
+            </a:lnRef>
+            <a:fillRef idx="1">
+              <a:schemeClr val="accent1"/>
+            </a:fillRef>
+            <a:effectRef idx="0">
+              <a:schemeClr val="accent1"/>
+            </a:effectRef>
+            <a:fontRef idx="minor">
+              <a:schemeClr val="lt1"/>
+            </a:fontRef>
+          </p:style>
+          <p:txBody>
+            <a:bodyPr rtlCol="0" anchor="ctr"/>
+            <a:lstStyle/>
+            <a:p>
+              <a:pPr algn="ctr"/>
+              <a:r>
+                <a:rPr lang="en-US" sz="6000" dirty="0">
+                  <a:solidFill>
+                    <a:schemeClr val="tx1"/>
+                  </a:solidFill>
+                </a:rPr>
+                <a:t>Train model</a:t>
+              </a:r>
+            </a:p>
+          </p:txBody>
+        </p:sp>
+        <p:sp>
+          <p:nvSpPr>
+            <p:cNvPr id="12" name="Rectangle: Rounded Corners 11">
+              <a:extLst>
+                <a:ext uri="{FF2B5EF4-FFF2-40B4-BE49-F238E27FC236}">
+                  <a16:creationId xmlns:a16="http://schemas.microsoft.com/office/drawing/2014/main" id="{9B31298B-CDEF-CDC2-2977-DCA4EAA13569}"/>
+                </a:ext>
+              </a:extLst>
+            </p:cNvPr>
+            <p:cNvSpPr/>
+            <p:nvPr/>
+          </p:nvSpPr>
+          <p:spPr>
+            <a:xfrm>
+              <a:off x="21472374" y="14309910"/>
+              <a:ext cx="6499225" cy="1834769"/>
+            </a:xfrm>
+            <a:prstGeom prst="roundRect">
+              <a:avLst/>
+            </a:prstGeom>
+            <a:solidFill>
+              <a:schemeClr val="bg1">
+                <a:lumMod val="65000"/>
+              </a:schemeClr>
+            </a:solidFill>
+          </p:spPr>
+          <p:style>
+            <a:lnRef idx="2">
+              <a:schemeClr val="accent1">
+                <a:shade val="15000"/>
+              </a:schemeClr>
+            </a:lnRef>
+            <a:fillRef idx="1">
+              <a:schemeClr val="accent1"/>
+            </a:fillRef>
+            <a:effectRef idx="0">
+              <a:schemeClr val="accent1"/>
+            </a:effectRef>
+            <a:fontRef idx="minor">
+              <a:schemeClr val="lt1"/>
+            </a:fontRef>
+          </p:style>
+          <p:txBody>
+            <a:bodyPr rtlCol="0" anchor="ctr"/>
+            <a:lstStyle/>
+            <a:p>
+              <a:pPr algn="ctr"/>
+              <a:r>
+                <a:rPr lang="en-US" sz="6000" dirty="0">
+                  <a:solidFill>
+                    <a:schemeClr val="tx1"/>
+                  </a:solidFill>
+                </a:rPr>
+                <a:t>Explain with </a:t>
+              </a:r>
+              <a:r>
+                <a:rPr lang="en-US" sz="6000" dirty="0" err="1">
+                  <a:solidFill>
+                    <a:schemeClr val="tx1"/>
+                  </a:solidFill>
+                </a:rPr>
+                <a:t>molanchor</a:t>
+              </a:r>
+              <a:endParaRPr lang="en-US" sz="6000" dirty="0">
+                <a:solidFill>
+                  <a:schemeClr val="tx1"/>
+                </a:solidFill>
+              </a:endParaRPr>
+            </a:p>
+          </p:txBody>
+        </p:sp>
+        <p:sp>
+          <p:nvSpPr>
+            <p:cNvPr id="13" name="Rectangle: Rounded Corners 12">
+              <a:extLst>
+                <a:ext uri="{FF2B5EF4-FFF2-40B4-BE49-F238E27FC236}">
+                  <a16:creationId xmlns:a16="http://schemas.microsoft.com/office/drawing/2014/main" id="{A2D69792-6240-2A88-CEB7-39F07C646BE7}"/>
+                </a:ext>
+              </a:extLst>
+            </p:cNvPr>
+            <p:cNvSpPr/>
+            <p:nvPr/>
+          </p:nvSpPr>
+          <p:spPr>
+            <a:xfrm>
+              <a:off x="28828568" y="14308322"/>
+              <a:ext cx="6499225" cy="1837944"/>
+            </a:xfrm>
+            <a:prstGeom prst="roundRect">
+              <a:avLst/>
+            </a:prstGeom>
+            <a:solidFill>
+              <a:schemeClr val="bg1">
+                <a:lumMod val="65000"/>
+              </a:schemeClr>
+            </a:solidFill>
+          </p:spPr>
+          <p:style>
+            <a:lnRef idx="2">
+              <a:schemeClr val="accent1">
+                <a:shade val="15000"/>
+              </a:schemeClr>
+            </a:lnRef>
+            <a:fillRef idx="1">
+              <a:schemeClr val="accent1"/>
+            </a:fillRef>
+            <a:effectRef idx="0">
+              <a:schemeClr val="accent1"/>
+            </a:effectRef>
+            <a:fontRef idx="minor">
+              <a:schemeClr val="lt1"/>
+            </a:fontRef>
+          </p:style>
+          <p:txBody>
+            <a:bodyPr rtlCol="0" anchor="ctr"/>
+            <a:lstStyle/>
+            <a:p>
+              <a:pPr algn="ctr"/>
+              <a:r>
+                <a:rPr lang="en-US" sz="6000" dirty="0">
+                  <a:solidFill>
+                    <a:schemeClr val="tx1"/>
+                  </a:solidFill>
+                </a:rPr>
+                <a:t>Explain smiles with SHAP</a:t>
+              </a:r>
+            </a:p>
+          </p:txBody>
+        </p:sp>
+        <p:cxnSp>
+          <p:nvCxnSpPr>
+            <p:cNvPr id="16" name="Straight Arrow Connector 15">
+              <a:extLst>
+                <a:ext uri="{FF2B5EF4-FFF2-40B4-BE49-F238E27FC236}">
+                  <a16:creationId xmlns:a16="http://schemas.microsoft.com/office/drawing/2014/main" id="{0EB09105-A603-3792-FA56-C202D530844E}"/>
+                </a:ext>
+              </a:extLst>
+            </p:cNvPr>
+            <p:cNvCxnSpPr>
+              <a:cxnSpLocks/>
+              <a:stCxn id="3" idx="2"/>
+              <a:endCxn id="4" idx="0"/>
+            </p:cNvCxnSpPr>
+            <p:nvPr/>
+          </p:nvCxnSpPr>
+          <p:spPr>
+            <a:xfrm>
+              <a:off x="10009599" y="13462707"/>
+              <a:ext cx="0" cy="1095368"/>
+            </a:xfrm>
+            <a:prstGeom prst="straightConnector1">
+              <a:avLst/>
+            </a:prstGeom>
+            <a:ln w="76200">
+              <a:solidFill>
+                <a:schemeClr val="tx1"/>
+              </a:solidFill>
+              <a:tailEnd type="triangle"/>
+            </a:ln>
+          </p:spPr>
+          <p:style>
+            <a:lnRef idx="2">
+              <a:schemeClr val="dk1"/>
+            </a:lnRef>
+            <a:fillRef idx="0">
+              <a:schemeClr val="dk1"/>
+            </a:fillRef>
+            <a:effectRef idx="1">
+              <a:schemeClr val="dk1"/>
+            </a:effectRef>
+            <a:fontRef idx="minor">
+              <a:schemeClr val="tx1"/>
+            </a:fontRef>
+          </p:style>
+        </p:cxnSp>
+        <p:cxnSp>
+          <p:nvCxnSpPr>
+            <p:cNvPr id="18" name="Straight Arrow Connector 17">
+              <a:extLst>
+                <a:ext uri="{FF2B5EF4-FFF2-40B4-BE49-F238E27FC236}">
+                  <a16:creationId xmlns:a16="http://schemas.microsoft.com/office/drawing/2014/main" id="{826109EB-84B7-25A1-4C4D-5E40E7C05280}"/>
+                </a:ext>
+              </a:extLst>
+            </p:cNvPr>
+            <p:cNvCxnSpPr>
+              <a:cxnSpLocks/>
+              <a:stCxn id="4" idx="3"/>
+              <a:endCxn id="8" idx="1"/>
+            </p:cNvCxnSpPr>
+            <p:nvPr/>
+          </p:nvCxnSpPr>
+          <p:spPr>
+            <a:xfrm>
+              <a:off x="13259211" y="15227295"/>
+              <a:ext cx="856969" cy="0"/>
+            </a:xfrm>
+            <a:prstGeom prst="straightConnector1">
+              <a:avLst/>
+            </a:prstGeom>
+            <a:ln w="76200">
+              <a:solidFill>
+                <a:schemeClr val="tx1"/>
+              </a:solidFill>
+              <a:tailEnd type="triangle"/>
+            </a:ln>
+          </p:spPr>
+          <p:style>
+            <a:lnRef idx="2">
+              <a:schemeClr val="dk1"/>
+            </a:lnRef>
+            <a:fillRef idx="0">
+              <a:schemeClr val="dk1"/>
+            </a:fillRef>
+            <a:effectRef idx="1">
+              <a:schemeClr val="dk1"/>
+            </a:effectRef>
+            <a:fontRef idx="minor">
+              <a:schemeClr val="tx1"/>
+            </a:fontRef>
+          </p:style>
+        </p:cxnSp>
+        <p:cxnSp>
+          <p:nvCxnSpPr>
+            <p:cNvPr id="26" name="Straight Arrow Connector 25">
+              <a:extLst>
+                <a:ext uri="{FF2B5EF4-FFF2-40B4-BE49-F238E27FC236}">
+                  <a16:creationId xmlns:a16="http://schemas.microsoft.com/office/drawing/2014/main" id="{FE9E200C-F61C-E3BC-C813-973305E697A5}"/>
+                </a:ext>
+              </a:extLst>
+            </p:cNvPr>
+            <p:cNvCxnSpPr>
+              <a:cxnSpLocks/>
+              <a:stCxn id="8" idx="0"/>
+              <a:endCxn id="9" idx="2"/>
+            </p:cNvCxnSpPr>
+            <p:nvPr/>
+          </p:nvCxnSpPr>
+          <p:spPr>
+            <a:xfrm flipV="1">
+              <a:off x="17365793" y="13462707"/>
+              <a:ext cx="0" cy="1095368"/>
+            </a:xfrm>
+            <a:prstGeom prst="straightConnector1">
+              <a:avLst/>
+            </a:prstGeom>
+            <a:ln w="76200">
+              <a:solidFill>
+                <a:schemeClr val="tx1"/>
+              </a:solidFill>
+              <a:tailEnd type="triangle"/>
+            </a:ln>
+          </p:spPr>
+          <p:style>
+            <a:lnRef idx="2">
+              <a:schemeClr val="dk1"/>
+            </a:lnRef>
+            <a:fillRef idx="0">
+              <a:schemeClr val="dk1"/>
+            </a:fillRef>
+            <a:effectRef idx="1">
+              <a:schemeClr val="dk1"/>
+            </a:effectRef>
+            <a:fontRef idx="minor">
+              <a:schemeClr val="tx1"/>
+            </a:fontRef>
+          </p:style>
+        </p:cxnSp>
+        <p:cxnSp>
+          <p:nvCxnSpPr>
+            <p:cNvPr id="32" name="Straight Arrow Connector 31">
+              <a:extLst>
+                <a:ext uri="{FF2B5EF4-FFF2-40B4-BE49-F238E27FC236}">
+                  <a16:creationId xmlns:a16="http://schemas.microsoft.com/office/drawing/2014/main" id="{6B958271-883F-8940-76BB-8AF8F00A9DC4}"/>
+                </a:ext>
+              </a:extLst>
+            </p:cNvPr>
+            <p:cNvCxnSpPr>
+              <a:cxnSpLocks/>
+              <a:stCxn id="9" idx="3"/>
+            </p:cNvCxnSpPr>
+            <p:nvPr/>
+          </p:nvCxnSpPr>
+          <p:spPr>
+            <a:xfrm flipV="1">
+              <a:off x="20615405" y="12793487"/>
+              <a:ext cx="856969" cy="1"/>
+            </a:xfrm>
+            <a:prstGeom prst="straightConnector1">
+              <a:avLst/>
+            </a:prstGeom>
+            <a:ln w="76200">
+              <a:solidFill>
+                <a:schemeClr val="tx1"/>
+              </a:solidFill>
+              <a:tailEnd type="triangle"/>
+            </a:ln>
+          </p:spPr>
+          <p:style>
+            <a:lnRef idx="2">
+              <a:schemeClr val="dk1"/>
+            </a:lnRef>
+            <a:fillRef idx="0">
+              <a:schemeClr val="dk1"/>
+            </a:fillRef>
+            <a:effectRef idx="1">
+              <a:schemeClr val="dk1"/>
+            </a:effectRef>
+            <a:fontRef idx="minor">
+              <a:schemeClr val="tx1"/>
+            </a:fontRef>
+          </p:style>
+        </p:cxnSp>
+        <p:cxnSp>
+          <p:nvCxnSpPr>
+            <p:cNvPr id="38" name="Straight Arrow Connector 37">
+              <a:extLst>
+                <a:ext uri="{FF2B5EF4-FFF2-40B4-BE49-F238E27FC236}">
+                  <a16:creationId xmlns:a16="http://schemas.microsoft.com/office/drawing/2014/main" id="{14B6177B-6EC6-A0F4-463E-CAAB2559ADE4}"/>
+                </a:ext>
+              </a:extLst>
+            </p:cNvPr>
+            <p:cNvCxnSpPr>
+              <a:cxnSpLocks/>
+              <a:stCxn id="10" idx="2"/>
+              <a:endCxn id="12" idx="0"/>
+            </p:cNvCxnSpPr>
+            <p:nvPr/>
+          </p:nvCxnSpPr>
+          <p:spPr>
+            <a:xfrm>
+              <a:off x="24721987" y="13462707"/>
+              <a:ext cx="0" cy="847203"/>
+            </a:xfrm>
+            <a:prstGeom prst="straightConnector1">
+              <a:avLst/>
+            </a:prstGeom>
+            <a:ln w="76200">
+              <a:solidFill>
+                <a:schemeClr val="tx1"/>
+              </a:solidFill>
+              <a:tailEnd type="triangle"/>
+            </a:ln>
+          </p:spPr>
+          <p:style>
+            <a:lnRef idx="2">
+              <a:schemeClr val="dk1"/>
+            </a:lnRef>
+            <a:fillRef idx="0">
+              <a:schemeClr val="dk1"/>
+            </a:fillRef>
+            <a:effectRef idx="1">
+              <a:schemeClr val="dk1"/>
+            </a:effectRef>
+            <a:fontRef idx="minor">
+              <a:schemeClr val="tx1"/>
+            </a:fontRef>
+          </p:style>
+        </p:cxnSp>
+        <p:cxnSp>
+          <p:nvCxnSpPr>
+            <p:cNvPr id="44" name="Straight Arrow Connector 43">
+              <a:extLst>
+                <a:ext uri="{FF2B5EF4-FFF2-40B4-BE49-F238E27FC236}">
+                  <a16:creationId xmlns:a16="http://schemas.microsoft.com/office/drawing/2014/main" id="{617806EB-FC1C-9A83-BF43-2E984DA88F27}"/>
+                </a:ext>
+              </a:extLst>
+            </p:cNvPr>
+            <p:cNvCxnSpPr>
+              <a:cxnSpLocks/>
+              <a:stCxn id="12" idx="3"/>
+              <a:endCxn id="13" idx="1"/>
+            </p:cNvCxnSpPr>
+            <p:nvPr/>
+          </p:nvCxnSpPr>
+          <p:spPr>
+            <a:xfrm flipV="1">
+              <a:off x="27971599" y="15227294"/>
+              <a:ext cx="856969" cy="1"/>
+            </a:xfrm>
+            <a:prstGeom prst="straightConnector1">
+              <a:avLst/>
+            </a:prstGeom>
+            <a:ln w="76200">
+              <a:solidFill>
+                <a:schemeClr val="tx1"/>
+              </a:solidFill>
+              <a:tailEnd type="triangle"/>
+            </a:ln>
+          </p:spPr>
+          <p:style>
+            <a:lnRef idx="2">
+              <a:schemeClr val="dk1"/>
+            </a:lnRef>
+            <a:fillRef idx="0">
+              <a:schemeClr val="dk1"/>
+            </a:fillRef>
+            <a:effectRef idx="1">
+              <a:schemeClr val="dk1"/>
+            </a:effectRef>
+            <a:fontRef idx="minor">
+              <a:schemeClr val="tx1"/>
+            </a:fontRef>
+          </p:style>
+        </p:cxnSp>
+        <p:sp>
+          <p:nvSpPr>
+            <p:cNvPr id="11" name="Rectangle: Rounded Corners 10">
+              <a:extLst>
+                <a:ext uri="{FF2B5EF4-FFF2-40B4-BE49-F238E27FC236}">
+                  <a16:creationId xmlns:a16="http://schemas.microsoft.com/office/drawing/2014/main" id="{B9E2F0D2-758C-ADDA-FB1D-86150C43DBFB}"/>
+                </a:ext>
+              </a:extLst>
+            </p:cNvPr>
+            <p:cNvSpPr/>
+            <p:nvPr/>
+          </p:nvSpPr>
+          <p:spPr>
+            <a:xfrm>
+              <a:off x="28828568" y="11876103"/>
+              <a:ext cx="6499225" cy="1834769"/>
+            </a:xfrm>
+            <a:prstGeom prst="roundRect">
+              <a:avLst/>
+            </a:prstGeom>
+            <a:solidFill>
+              <a:schemeClr val="bg1">
+                <a:lumMod val="65000"/>
+              </a:schemeClr>
+            </a:solidFill>
+          </p:spPr>
+          <p:style>
+            <a:lnRef idx="2">
+              <a:schemeClr val="accent1">
+                <a:shade val="15000"/>
+              </a:schemeClr>
+            </a:lnRef>
+            <a:fillRef idx="1">
+              <a:schemeClr val="accent1"/>
+            </a:fillRef>
+            <a:effectRef idx="0">
+              <a:schemeClr val="accent1"/>
+            </a:effectRef>
+            <a:fontRef idx="minor">
+              <a:schemeClr val="lt1"/>
+            </a:fontRef>
+          </p:style>
+          <p:txBody>
+            <a:bodyPr rtlCol="0" anchor="ctr"/>
+            <a:lstStyle/>
+            <a:p>
+              <a:pPr algn="ctr"/>
+              <a:r>
+                <a:rPr lang="en-US" sz="6000" dirty="0">
+                  <a:solidFill>
+                    <a:schemeClr val="tx1"/>
+                  </a:solidFill>
+                </a:rPr>
+                <a:t>Explain with </a:t>
+              </a:r>
+              <a:r>
+                <a:rPr lang="en-US" sz="6000" dirty="0" err="1">
+                  <a:solidFill>
+                    <a:schemeClr val="tx1"/>
+                  </a:solidFill>
+                </a:rPr>
+                <a:t>MolCE</a:t>
+              </a:r>
+              <a:endParaRPr lang="en-US" sz="6000" dirty="0">
+                <a:solidFill>
+                  <a:schemeClr val="tx1"/>
+                </a:solidFill>
+              </a:endParaRPr>
+            </a:p>
+          </p:txBody>
+        </p:sp>
+        <p:sp>
+          <p:nvSpPr>
+            <p:cNvPr id="15" name="Rectangle: Rounded Corners 14">
+              <a:extLst>
+                <a:ext uri="{FF2B5EF4-FFF2-40B4-BE49-F238E27FC236}">
+                  <a16:creationId xmlns:a16="http://schemas.microsoft.com/office/drawing/2014/main" id="{B8F65186-81B1-D1B8-C13F-3957238F2887}"/>
+                </a:ext>
+              </a:extLst>
+            </p:cNvPr>
+            <p:cNvSpPr/>
+            <p:nvPr/>
+          </p:nvSpPr>
+          <p:spPr>
+            <a:xfrm>
+              <a:off x="36184762" y="11876103"/>
+              <a:ext cx="6499225" cy="1834769"/>
+            </a:xfrm>
+            <a:prstGeom prst="roundRect">
+              <a:avLst/>
+            </a:prstGeom>
+            <a:solidFill>
+              <a:schemeClr val="bg1">
+                <a:lumMod val="65000"/>
+              </a:schemeClr>
+            </a:solidFill>
+          </p:spPr>
+          <p:style>
+            <a:lnRef idx="2">
+              <a:schemeClr val="accent1">
+                <a:shade val="15000"/>
+              </a:schemeClr>
+            </a:lnRef>
+            <a:fillRef idx="1">
+              <a:schemeClr val="accent1"/>
+            </a:fillRef>
+            <a:effectRef idx="0">
+              <a:schemeClr val="accent1"/>
+            </a:effectRef>
+            <a:fontRef idx="minor">
+              <a:schemeClr val="lt1"/>
+            </a:fontRef>
+          </p:style>
+          <p:txBody>
+            <a:bodyPr rtlCol="0" anchor="ctr"/>
+            <a:lstStyle/>
+            <a:p>
+              <a:pPr algn="ctr"/>
+              <a:r>
+                <a:rPr lang="en-US" sz="6000" dirty="0">
+                  <a:solidFill>
+                    <a:schemeClr val="tx1"/>
+                  </a:solidFill>
+                </a:rPr>
+                <a:t>Generate counterfactuals</a:t>
+              </a:r>
+            </a:p>
+          </p:txBody>
+        </p:sp>
+        <p:cxnSp>
+          <p:nvCxnSpPr>
+            <p:cNvPr id="21" name="Straight Arrow Connector 20">
+              <a:extLst>
+                <a:ext uri="{FF2B5EF4-FFF2-40B4-BE49-F238E27FC236}">
+                  <a16:creationId xmlns:a16="http://schemas.microsoft.com/office/drawing/2014/main" id="{C494FD80-29C3-EE6B-FDB2-9A808DC94B6F}"/>
+                </a:ext>
+              </a:extLst>
+            </p:cNvPr>
+            <p:cNvCxnSpPr>
+              <a:cxnSpLocks/>
+              <a:stCxn id="13" idx="0"/>
+              <a:endCxn id="11" idx="2"/>
+            </p:cNvCxnSpPr>
+            <p:nvPr/>
+          </p:nvCxnSpPr>
+          <p:spPr>
+            <a:xfrm flipV="1">
+              <a:off x="32078181" y="13710872"/>
+              <a:ext cx="0" cy="597450"/>
+            </a:xfrm>
+            <a:prstGeom prst="straightConnector1">
+              <a:avLst/>
+            </a:prstGeom>
+            <a:ln w="76200">
+              <a:solidFill>
+                <a:schemeClr val="tx1"/>
+              </a:solidFill>
+              <a:tailEnd type="triangle"/>
+            </a:ln>
+          </p:spPr>
+          <p:style>
+            <a:lnRef idx="2">
+              <a:schemeClr val="dk1"/>
+            </a:lnRef>
+            <a:fillRef idx="0">
+              <a:schemeClr val="dk1"/>
+            </a:fillRef>
+            <a:effectRef idx="1">
+              <a:schemeClr val="dk1"/>
+            </a:effectRef>
+            <a:fontRef idx="minor">
+              <a:schemeClr val="tx1"/>
+            </a:fontRef>
+          </p:style>
+        </p:cxnSp>
+        <p:sp>
+          <p:nvSpPr>
+            <p:cNvPr id="34" name="Rectangle: Rounded Corners 33">
+              <a:extLst>
+                <a:ext uri="{FF2B5EF4-FFF2-40B4-BE49-F238E27FC236}">
+                  <a16:creationId xmlns:a16="http://schemas.microsoft.com/office/drawing/2014/main" id="{87FD3E7C-BE4B-8079-4E21-3CAB73D84A8F}"/>
+                </a:ext>
+              </a:extLst>
+            </p:cNvPr>
+            <p:cNvSpPr/>
+            <p:nvPr/>
+          </p:nvSpPr>
+          <p:spPr>
+            <a:xfrm>
+              <a:off x="36184762" y="14308322"/>
+              <a:ext cx="6499225" cy="1837944"/>
+            </a:xfrm>
+            <a:prstGeom prst="roundRect">
+              <a:avLst/>
+            </a:prstGeom>
+            <a:solidFill>
+              <a:schemeClr val="bg1">
+                <a:lumMod val="65000"/>
+              </a:schemeClr>
+            </a:solidFill>
+          </p:spPr>
+          <p:style>
+            <a:lnRef idx="2">
+              <a:schemeClr val="accent1">
+                <a:shade val="15000"/>
+              </a:schemeClr>
+            </a:lnRef>
+            <a:fillRef idx="1">
+              <a:schemeClr val="accent1"/>
+            </a:fillRef>
+            <a:effectRef idx="0">
+              <a:schemeClr val="accent1"/>
+            </a:effectRef>
+            <a:fontRef idx="minor">
+              <a:schemeClr val="lt1"/>
+            </a:fontRef>
+          </p:style>
+          <p:txBody>
+            <a:bodyPr rtlCol="0" anchor="ctr"/>
+            <a:lstStyle/>
+            <a:p>
+              <a:pPr algn="ctr"/>
+              <a:r>
+                <a:rPr lang="en-US" sz="6000" dirty="0">
+                  <a:solidFill>
+                    <a:schemeClr val="tx1"/>
+                  </a:solidFill>
+                </a:rPr>
+                <a:t>Get top k bit environments</a:t>
+              </a:r>
+            </a:p>
+          </p:txBody>
+        </p:sp>
+        <p:cxnSp>
+          <p:nvCxnSpPr>
+            <p:cNvPr id="43" name="Straight Arrow Connector 42">
+              <a:extLst>
+                <a:ext uri="{FF2B5EF4-FFF2-40B4-BE49-F238E27FC236}">
+                  <a16:creationId xmlns:a16="http://schemas.microsoft.com/office/drawing/2014/main" id="{6B52E9F8-65B2-1599-AE34-E1A6FD0F09B4}"/>
+                </a:ext>
+              </a:extLst>
+            </p:cNvPr>
+            <p:cNvCxnSpPr>
+              <a:cxnSpLocks/>
+              <a:stCxn id="11" idx="3"/>
+              <a:endCxn id="15" idx="1"/>
+            </p:cNvCxnSpPr>
+            <p:nvPr/>
+          </p:nvCxnSpPr>
+          <p:spPr>
+            <a:xfrm>
+              <a:off x="35327793" y="12793488"/>
+              <a:ext cx="856969" cy="0"/>
+            </a:xfrm>
+            <a:prstGeom prst="straightConnector1">
+              <a:avLst/>
+            </a:prstGeom>
+            <a:ln w="76200">
+              <a:solidFill>
+                <a:schemeClr val="tx1"/>
+              </a:solidFill>
+              <a:tailEnd type="triangle"/>
+            </a:ln>
+          </p:spPr>
+          <p:style>
+            <a:lnRef idx="2">
+              <a:schemeClr val="dk1"/>
+            </a:lnRef>
+            <a:fillRef idx="0">
+              <a:schemeClr val="dk1"/>
+            </a:fillRef>
+            <a:effectRef idx="1">
+              <a:schemeClr val="dk1"/>
+            </a:effectRef>
+            <a:fontRef idx="minor">
+              <a:schemeClr val="tx1"/>
+            </a:fontRef>
+          </p:style>
+        </p:cxnSp>
+        <p:cxnSp>
+          <p:nvCxnSpPr>
+            <p:cNvPr id="47" name="Straight Arrow Connector 46">
+              <a:extLst>
+                <a:ext uri="{FF2B5EF4-FFF2-40B4-BE49-F238E27FC236}">
+                  <a16:creationId xmlns:a16="http://schemas.microsoft.com/office/drawing/2014/main" id="{1E37A21C-5BCA-35D4-54D6-C61119FAA409}"/>
+                </a:ext>
+              </a:extLst>
+            </p:cNvPr>
+            <p:cNvCxnSpPr>
+              <a:cxnSpLocks/>
+              <a:stCxn id="15" idx="2"/>
+              <a:endCxn id="34" idx="0"/>
+            </p:cNvCxnSpPr>
+            <p:nvPr/>
+          </p:nvCxnSpPr>
+          <p:spPr>
+            <a:xfrm>
+              <a:off x="39434375" y="13710872"/>
+              <a:ext cx="0" cy="597450"/>
+            </a:xfrm>
+            <a:prstGeom prst="straightConnector1">
+              <a:avLst/>
+            </a:prstGeom>
+            <a:ln w="76200">
+              <a:solidFill>
+                <a:schemeClr val="tx1"/>
+              </a:solidFill>
+              <a:tailEnd type="triangle"/>
+            </a:ln>
+          </p:spPr>
+          <p:style>
+            <a:lnRef idx="2">
+              <a:schemeClr val="dk1"/>
+            </a:lnRef>
+            <a:fillRef idx="0">
+              <a:schemeClr val="dk1"/>
+            </a:fillRef>
+            <a:effectRef idx="1">
+              <a:schemeClr val="dk1"/>
+            </a:effectRef>
+            <a:fontRef idx="minor">
+              <a:schemeClr val="tx1"/>
+            </a:fontRef>
+          </p:style>
+        </p:cxnSp>
+      </p:grpSp>
+      <p:sp>
+        <p:nvSpPr>
+          <p:cNvPr id="64" name="TextBox 63">
+            <a:extLst>
+              <a:ext uri="{FF2B5EF4-FFF2-40B4-BE49-F238E27FC236}">
+                <a16:creationId xmlns:a16="http://schemas.microsoft.com/office/drawing/2014/main" id="{375CDCAE-E997-6AB6-EE31-7EEA0E2E635E}"/>
+              </a:ext>
+            </a:extLst>
+          </p:cNvPr>
+          <p:cNvSpPr txBox="1"/>
+          <p:nvPr/>
+        </p:nvSpPr>
+        <p:spPr>
+          <a:xfrm>
+            <a:off x="31448517" y="13705366"/>
+            <a:ext cx="6310257" cy="923330"/>
+          </a:xfrm>
+          <a:prstGeom prst="rect">
+            <a:avLst/>
+          </a:prstGeom>
+          <a:noFill/>
+        </p:spPr>
+        <p:txBody>
+          <a:bodyPr wrap="square" rtlCol="0">
+            <a:spAutoFit/>
+          </a:bodyPr>
+          <a:lstStyle/>
+          <a:p>
+            <a:pPr algn="ctr"/>
+            <a:r>
+              <a:rPr lang="en-US" sz="5400" b="1" dirty="0"/>
+              <a:t>SHAP</a:t>
+            </a:r>
+            <a:endParaRPr lang="de-DE" sz="5400" b="1" dirty="0"/>
+          </a:p>
+        </p:txBody>
+      </p:sp>
+      <p:sp>
+        <p:nvSpPr>
+          <p:cNvPr id="63" name="TextBox 62">
+            <a:extLst>
+              <a:ext uri="{FF2B5EF4-FFF2-40B4-BE49-F238E27FC236}">
+                <a16:creationId xmlns:a16="http://schemas.microsoft.com/office/drawing/2014/main" id="{6A5C72D7-D885-252B-9D5B-8FCC3218E83B}"/>
+              </a:ext>
+            </a:extLst>
+          </p:cNvPr>
+          <p:cNvSpPr txBox="1"/>
+          <p:nvPr/>
+        </p:nvSpPr>
+        <p:spPr>
+          <a:xfrm>
+            <a:off x="12146227" y="13705366"/>
+            <a:ext cx="6603459" cy="923330"/>
+          </a:xfrm>
+          <a:prstGeom prst="rect">
+            <a:avLst/>
+          </a:prstGeom>
+          <a:noFill/>
+        </p:spPr>
+        <p:txBody>
+          <a:bodyPr wrap="square" rtlCol="0">
+            <a:spAutoFit/>
+          </a:bodyPr>
+          <a:lstStyle/>
+          <a:p>
+            <a:pPr algn="ctr"/>
+            <a:r>
+              <a:rPr lang="en-US" sz="5400" b="1" dirty="0" err="1"/>
+              <a:t>MolAnchor</a:t>
+            </a:r>
+            <a:endParaRPr lang="de-DE" sz="5400" b="1" dirty="0"/>
+          </a:p>
+        </p:txBody>
+      </p:sp>
+      <p:pic>
+        <p:nvPicPr>
+          <p:cNvPr id="52" name="Picture 51">
+            <a:extLst>
+              <a:ext uri="{FF2B5EF4-FFF2-40B4-BE49-F238E27FC236}">
+                <a16:creationId xmlns:a16="http://schemas.microsoft.com/office/drawing/2014/main" id="{205590DA-02DC-2BC3-5EB1-2191FD671C52}"/>
+              </a:ext>
+            </a:extLst>
+          </p:cNvPr>
+          <p:cNvPicPr>
+            <a:picLocks noChangeAspect="1"/>
+          </p:cNvPicPr>
+          <p:nvPr/>
+        </p:nvPicPr>
+        <p:blipFill>
+          <a:blip r:embed="rId3">
+            <a:extLst>
+              <a:ext uri="{28A0092B-C50C-407E-A947-70E740481C1C}">
+                <a14:useLocalDpi xmlns:a14="http://schemas.microsoft.com/office/drawing/2010/main" val="0"/>
+              </a:ext>
+            </a:extLst>
+          </a:blip>
+          <a:srcRect l="4656" t="21016" r="3144" b="22505"/>
+          <a:stretch/>
+        </p:blipFill>
+        <p:spPr>
+          <a:xfrm>
+            <a:off x="10113408" y="14740867"/>
+            <a:ext cx="10669097" cy="6535613"/>
+          </a:xfrm>
+          <a:prstGeom prst="rect">
+            <a:avLst/>
+          </a:prstGeom>
+        </p:spPr>
+      </p:pic>
+      <p:pic>
+        <p:nvPicPr>
+          <p:cNvPr id="55" name="Picture 54">
+            <a:extLst>
+              <a:ext uri="{FF2B5EF4-FFF2-40B4-BE49-F238E27FC236}">
+                <a16:creationId xmlns:a16="http://schemas.microsoft.com/office/drawing/2014/main" id="{377B645A-806B-0951-E881-FFC87314EA36}"/>
+              </a:ext>
+            </a:extLst>
+          </p:cNvPr>
+          <p:cNvPicPr>
+            <a:picLocks noChangeAspect="1"/>
+          </p:cNvPicPr>
+          <p:nvPr/>
+        </p:nvPicPr>
+        <p:blipFill>
+          <a:blip r:embed="rId4">
+            <a:extLst>
+              <a:ext uri="{28A0092B-C50C-407E-A947-70E740481C1C}">
+                <a14:useLocalDpi xmlns:a14="http://schemas.microsoft.com/office/drawing/2010/main" val="0"/>
+              </a:ext>
+            </a:extLst>
+          </a:blip>
+          <a:srcRect l="11525" t="17564" r="10242" b="16495"/>
+          <a:stretch/>
+        </p:blipFill>
+        <p:spPr>
+          <a:xfrm>
+            <a:off x="29190808" y="14586918"/>
+            <a:ext cx="10825674" cy="6843510"/>
+          </a:xfrm>
+          <a:prstGeom prst="rect">
+            <a:avLst/>
+          </a:prstGeom>
+        </p:spPr>
+      </p:pic>
+      <p:sp>
+        <p:nvSpPr>
+          <p:cNvPr id="70" name="TextBox 69">
+            <a:extLst>
+              <a:ext uri="{FF2B5EF4-FFF2-40B4-BE49-F238E27FC236}">
+                <a16:creationId xmlns:a16="http://schemas.microsoft.com/office/drawing/2014/main" id="{F75F65F4-FB7F-51FF-4984-C82E951ABDA0}"/>
+              </a:ext>
+            </a:extLst>
+          </p:cNvPr>
+          <p:cNvSpPr txBox="1"/>
+          <p:nvPr/>
+        </p:nvSpPr>
+        <p:spPr>
+          <a:xfrm>
+            <a:off x="7218356" y="21656089"/>
+            <a:ext cx="16459200" cy="5970865"/>
+          </a:xfrm>
+          <a:prstGeom prst="rect">
+            <a:avLst/>
+          </a:prstGeom>
+          <a:noFill/>
+        </p:spPr>
+        <p:txBody>
+          <a:bodyPr wrap="square">
+            <a:spAutoFit/>
+          </a:bodyPr>
+          <a:lstStyle/>
+          <a:p>
+            <a:pPr>
+              <a:spcAft>
+                <a:spcPts val="1200"/>
+              </a:spcAft>
+            </a:pPr>
+            <a:r>
+              <a:rPr lang="en-US" sz="4400" b="1" dirty="0"/>
+              <a:t>✅ AGREEMENTS (</a:t>
+            </a:r>
+            <a:r>
+              <a:rPr lang="en-US" sz="4400" b="1" dirty="0" err="1"/>
+              <a:t>MolAnchor</a:t>
+            </a:r>
+            <a:r>
+              <a:rPr lang="en-US" sz="4400" b="1" dirty="0"/>
+              <a:t> ↔ SHAP)</a:t>
+            </a:r>
+          </a:p>
+          <a:p>
+            <a:pPr marL="742950" indent="-742950" algn="just">
+              <a:spcAft>
+                <a:spcPts val="1200"/>
+              </a:spcAft>
+              <a:buFont typeface="+mj-lt"/>
+              <a:buAutoNum type="arabicPeriod"/>
+            </a:pPr>
+            <a:r>
+              <a:rPr lang="en-US" sz="4400" b="1" dirty="0"/>
+              <a:t>Core scaffold importance: </a:t>
+            </a:r>
+            <a:r>
+              <a:rPr lang="en-US" sz="4400" dirty="0"/>
+              <a:t>Both methods identify the piperazine/benzyl core as critical</a:t>
+            </a:r>
+          </a:p>
+          <a:p>
+            <a:pPr marL="742950" indent="-742950" algn="just">
+              <a:spcAft>
+                <a:spcPts val="1200"/>
+              </a:spcAft>
+              <a:buFont typeface="+mj-lt"/>
+              <a:buAutoNum type="arabicPeriod"/>
+            </a:pPr>
+            <a:r>
+              <a:rPr lang="en-US" sz="4400" b="1" dirty="0"/>
+              <a:t>N-methyl motif: </a:t>
+            </a:r>
+            <a:r>
+              <a:rPr lang="en-US" sz="4400" dirty="0"/>
+              <a:t>SHAP's top features (Bits 1280, 1791, 1792) all involve the N-methyl/benzyl-dimethylamine region captured by </a:t>
+            </a:r>
+            <a:r>
+              <a:rPr lang="en-US" sz="4400" dirty="0" err="1"/>
+              <a:t>MolAnchor's</a:t>
+            </a:r>
+            <a:r>
+              <a:rPr lang="en-US" sz="4400" dirty="0"/>
+              <a:t> anchor</a:t>
+            </a:r>
+          </a:p>
+          <a:p>
+            <a:pPr marL="742950" indent="-742950" algn="just">
+              <a:spcAft>
+                <a:spcPts val="1200"/>
+              </a:spcAft>
+              <a:buFont typeface="+mj-lt"/>
+              <a:buAutoNum type="arabicPeriod"/>
+            </a:pPr>
+            <a:r>
+              <a:rPr lang="en-US" sz="4400" b="1" dirty="0"/>
+              <a:t>Pharmacophore consensus</a:t>
+            </a:r>
+            <a:r>
+              <a:rPr lang="en-US" sz="4400" dirty="0"/>
+              <a:t>: Both confirm the morpholinone-piperazine-benzyl framework is essential for D2 binding</a:t>
+            </a:r>
+          </a:p>
+        </p:txBody>
+      </p:sp>
+      <p:sp>
+        <p:nvSpPr>
+          <p:cNvPr id="76" name="TextBox 75">
+            <a:extLst>
+              <a:ext uri="{FF2B5EF4-FFF2-40B4-BE49-F238E27FC236}">
+                <a16:creationId xmlns:a16="http://schemas.microsoft.com/office/drawing/2014/main" id="{7E7006D0-478E-9B07-8E29-CFFE8A3BC008}"/>
+              </a:ext>
+            </a:extLst>
+          </p:cNvPr>
+          <p:cNvSpPr txBox="1"/>
+          <p:nvPr/>
+        </p:nvSpPr>
+        <p:spPr>
+          <a:xfrm>
+            <a:off x="26374045" y="21656089"/>
+            <a:ext cx="16459200" cy="5970865"/>
+          </a:xfrm>
+          <a:prstGeom prst="rect">
+            <a:avLst/>
+          </a:prstGeom>
+          <a:noFill/>
+        </p:spPr>
+        <p:txBody>
+          <a:bodyPr wrap="square">
+            <a:spAutoFit/>
+          </a:bodyPr>
+          <a:lstStyle/>
+          <a:p>
+            <a:pPr marL="0" marR="0" lvl="0" indent="0" algn="l" defTabSz="457200" rtl="0" eaLnBrk="1" fontAlgn="auto" latinLnBrk="0" hangingPunct="1">
+              <a:lnSpc>
+                <a:spcPct val="100000"/>
+              </a:lnSpc>
+              <a:spcBef>
+                <a:spcPts val="0"/>
+              </a:spcBef>
+              <a:spcAft>
+                <a:spcPts val="1200"/>
+              </a:spcAft>
+              <a:buClrTx/>
+              <a:buSzTx/>
+              <a:buFontTx/>
+              <a:buNone/>
+              <a:tabLst/>
+              <a:defRPr/>
+            </a:pPr>
+            <a:r>
+              <a:rPr kumimoji="0" lang="en-US" sz="4400" b="1" i="0" u="none" strike="noStrike" kern="1200" cap="none" spc="0" normalizeH="0" baseline="0" noProof="0" dirty="0">
+                <a:ln>
+                  <a:noFill/>
+                </a:ln>
+                <a:solidFill>
+                  <a:prstClr val="black"/>
+                </a:solidFill>
+                <a:effectLst/>
+                <a:uLnTx/>
+                <a:uFillTx/>
+                <a:latin typeface="Aptos" panose="02110004020202020204"/>
+                <a:ea typeface="+mn-ea"/>
+                <a:cs typeface="+mn-cs"/>
+              </a:rPr>
+              <a:t>❌ DISAGREEMENTS (</a:t>
+            </a:r>
+            <a:r>
+              <a:rPr kumimoji="0" lang="en-US" sz="4400" b="1" i="0" u="none" strike="noStrike" kern="1200" cap="none" spc="0" normalizeH="0" baseline="0" noProof="0" dirty="0" err="1">
+                <a:ln>
+                  <a:noFill/>
+                </a:ln>
+                <a:solidFill>
+                  <a:prstClr val="black"/>
+                </a:solidFill>
+                <a:effectLst/>
+                <a:uLnTx/>
+                <a:uFillTx/>
+                <a:latin typeface="Aptos" panose="02110004020202020204"/>
+                <a:ea typeface="+mn-ea"/>
+                <a:cs typeface="+mn-cs"/>
+              </a:rPr>
+              <a:t>MolAnchor</a:t>
+            </a:r>
+            <a:r>
+              <a:rPr kumimoji="0" lang="en-US" sz="4400" b="1" i="0" u="none" strike="noStrike" kern="1200" cap="none" spc="0" normalizeH="0" baseline="0" noProof="0" dirty="0">
+                <a:ln>
+                  <a:noFill/>
+                </a:ln>
+                <a:solidFill>
+                  <a:prstClr val="black"/>
+                </a:solidFill>
+                <a:effectLst/>
+                <a:uLnTx/>
+                <a:uFillTx/>
+                <a:latin typeface="Aptos" panose="02110004020202020204"/>
+                <a:ea typeface="+mn-ea"/>
+                <a:cs typeface="+mn-cs"/>
+              </a:rPr>
+              <a:t> ↔ SHAP)</a:t>
+            </a:r>
+          </a:p>
+          <a:p>
+            <a:pPr marL="742950" marR="0" lvl="0" indent="-742950" algn="just" defTabSz="457200" rtl="0" eaLnBrk="1" fontAlgn="auto" latinLnBrk="0" hangingPunct="1">
+              <a:lnSpc>
+                <a:spcPct val="100000"/>
+              </a:lnSpc>
+              <a:spcBef>
+                <a:spcPts val="0"/>
+              </a:spcBef>
+              <a:spcAft>
+                <a:spcPts val="1200"/>
+              </a:spcAft>
+              <a:buClrTx/>
+              <a:buSzTx/>
+              <a:buFont typeface="+mj-lt"/>
+              <a:buAutoNum type="arabicPeriod"/>
+              <a:tabLst/>
+              <a:defRPr/>
+            </a:pPr>
+            <a:r>
+              <a:rPr kumimoji="0" lang="en-US" sz="4400" b="1" i="0" u="none" strike="noStrike" kern="1200" cap="none" spc="0" normalizeH="0" baseline="0" noProof="0" dirty="0">
+                <a:ln>
+                  <a:noFill/>
+                </a:ln>
+                <a:solidFill>
+                  <a:prstClr val="black"/>
+                </a:solidFill>
+                <a:effectLst/>
+                <a:uLnTx/>
+                <a:uFillTx/>
+                <a:latin typeface="Aptos" panose="02110004020202020204"/>
+                <a:ea typeface="+mn-ea"/>
+                <a:cs typeface="+mn-cs"/>
+              </a:rPr>
+              <a:t>Granularity: </a:t>
+            </a:r>
+            <a:r>
+              <a:rPr kumimoji="0" lang="en-US" sz="4400" b="0" i="0" u="none" strike="noStrike" kern="1200" cap="none" spc="0" normalizeH="0" baseline="0" noProof="0" dirty="0" err="1">
+                <a:ln>
+                  <a:noFill/>
+                </a:ln>
+                <a:solidFill>
+                  <a:prstClr val="black"/>
+                </a:solidFill>
+                <a:effectLst/>
+                <a:uLnTx/>
+                <a:uFillTx/>
+                <a:latin typeface="Aptos" panose="02110004020202020204"/>
+                <a:ea typeface="+mn-ea"/>
+                <a:cs typeface="+mn-cs"/>
+              </a:rPr>
+              <a:t>MolAnchor</a:t>
+            </a:r>
+            <a:r>
+              <a:rPr kumimoji="0" lang="en-US" sz="4400" b="0" i="0" u="none" strike="noStrike" kern="1200" cap="none" spc="0" normalizeH="0" baseline="0" noProof="0" dirty="0">
+                <a:ln>
+                  <a:noFill/>
+                </a:ln>
+                <a:solidFill>
+                  <a:prstClr val="black"/>
+                </a:solidFill>
+                <a:effectLst/>
+                <a:uLnTx/>
+                <a:uFillTx/>
+                <a:latin typeface="Aptos" panose="02110004020202020204"/>
+                <a:ea typeface="+mn-ea"/>
+                <a:cs typeface="+mn-cs"/>
+              </a:rPr>
+              <a:t> identifies ONE dominant anchor; SHAP reveals multiple contributing fragments</a:t>
+            </a:r>
+          </a:p>
+          <a:p>
+            <a:pPr marL="742950" marR="0" lvl="0" indent="-742950" algn="just" defTabSz="457200" rtl="0" eaLnBrk="1" fontAlgn="auto" latinLnBrk="0" hangingPunct="1">
+              <a:lnSpc>
+                <a:spcPct val="100000"/>
+              </a:lnSpc>
+              <a:spcBef>
+                <a:spcPts val="0"/>
+              </a:spcBef>
+              <a:spcAft>
+                <a:spcPts val="1200"/>
+              </a:spcAft>
+              <a:buClrTx/>
+              <a:buSzTx/>
+              <a:buFont typeface="+mj-lt"/>
+              <a:buAutoNum type="arabicPeriod"/>
+              <a:tabLst/>
+              <a:defRPr/>
+            </a:pPr>
+            <a:r>
+              <a:rPr kumimoji="0" lang="en-US" sz="4400" b="1" i="0" u="none" strike="noStrike" kern="1200" cap="none" spc="0" normalizeH="0" baseline="0" noProof="0" dirty="0">
+                <a:ln>
+                  <a:noFill/>
+                </a:ln>
+                <a:solidFill>
+                  <a:prstClr val="black"/>
+                </a:solidFill>
+                <a:effectLst/>
+                <a:uLnTx/>
+                <a:uFillTx/>
+                <a:latin typeface="Aptos" panose="02110004020202020204"/>
+                <a:ea typeface="+mn-ea"/>
+                <a:cs typeface="+mn-cs"/>
+              </a:rPr>
+              <a:t>Peripheral groups: </a:t>
+            </a:r>
+            <a:r>
+              <a:rPr kumimoji="0" lang="en-US" sz="4400" b="0" i="0" u="none" strike="noStrike" kern="1200" cap="none" spc="0" normalizeH="0" baseline="0" noProof="0" dirty="0">
+                <a:ln>
+                  <a:noFill/>
+                </a:ln>
+                <a:solidFill>
+                  <a:prstClr val="black"/>
+                </a:solidFill>
+                <a:effectLst/>
+                <a:uLnTx/>
+                <a:uFillTx/>
+                <a:latin typeface="Aptos" panose="02110004020202020204"/>
+                <a:ea typeface="+mn-ea"/>
+                <a:cs typeface="+mn-cs"/>
+              </a:rPr>
+              <a:t>SHAP highlights the benzothiazole (Bit 885, +5.39) as important, while </a:t>
+            </a:r>
+            <a:r>
+              <a:rPr kumimoji="0" lang="en-US" sz="4400" b="0" i="0" u="none" strike="noStrike" kern="1200" cap="none" spc="0" normalizeH="0" baseline="0" noProof="0" dirty="0" err="1">
+                <a:ln>
+                  <a:noFill/>
+                </a:ln>
+                <a:solidFill>
+                  <a:prstClr val="black"/>
+                </a:solidFill>
+                <a:effectLst/>
+                <a:uLnTx/>
+                <a:uFillTx/>
+                <a:latin typeface="Aptos" panose="02110004020202020204"/>
+                <a:ea typeface="+mn-ea"/>
+                <a:cs typeface="+mn-cs"/>
+              </a:rPr>
+              <a:t>MolAnchor</a:t>
+            </a:r>
+            <a:r>
+              <a:rPr kumimoji="0" lang="en-US" sz="4400" b="0" i="0" u="none" strike="noStrike" kern="1200" cap="none" spc="0" normalizeH="0" baseline="0" noProof="0" dirty="0">
+                <a:ln>
+                  <a:noFill/>
+                </a:ln>
+                <a:solidFill>
+                  <a:prstClr val="black"/>
+                </a:solidFill>
+                <a:effectLst/>
+                <a:uLnTx/>
+                <a:uFillTx/>
+                <a:latin typeface="Aptos" panose="02110004020202020204"/>
+                <a:ea typeface="+mn-ea"/>
+                <a:cs typeface="+mn-cs"/>
+              </a:rPr>
+              <a:t> doesn't single it out</a:t>
+            </a:r>
+          </a:p>
+          <a:p>
+            <a:pPr marL="742950" marR="0" lvl="0" indent="-742950" algn="just" defTabSz="457200" rtl="0" eaLnBrk="1" fontAlgn="auto" latinLnBrk="0" hangingPunct="1">
+              <a:lnSpc>
+                <a:spcPct val="100000"/>
+              </a:lnSpc>
+              <a:spcBef>
+                <a:spcPts val="0"/>
+              </a:spcBef>
+              <a:spcAft>
+                <a:spcPts val="1200"/>
+              </a:spcAft>
+              <a:buClrTx/>
+              <a:buSzTx/>
+              <a:buFont typeface="+mj-lt"/>
+              <a:buAutoNum type="arabicPeriod"/>
+              <a:tabLst/>
+              <a:defRPr/>
+            </a:pPr>
+            <a:r>
+              <a:rPr kumimoji="0" lang="en-US" sz="4400" b="1" i="0" u="none" strike="noStrike" kern="1200" cap="none" spc="0" normalizeH="0" baseline="0" noProof="0" dirty="0">
+                <a:ln>
+                  <a:noFill/>
+                </a:ln>
+                <a:solidFill>
+                  <a:prstClr val="black"/>
+                </a:solidFill>
+                <a:effectLst/>
+                <a:uLnTx/>
+                <a:uFillTx/>
+                <a:latin typeface="Aptos" panose="02110004020202020204"/>
+                <a:ea typeface="+mn-ea"/>
+                <a:cs typeface="+mn-cs"/>
+              </a:rPr>
+              <a:t>Negative contribution:</a:t>
+            </a:r>
+            <a:r>
+              <a:rPr kumimoji="0" lang="en-US" sz="4400" b="0" i="0" u="none" strike="noStrike" kern="1200" cap="none" spc="0" normalizeH="0" baseline="0" noProof="0" dirty="0">
+                <a:ln>
+                  <a:noFill/>
+                </a:ln>
+                <a:solidFill>
+                  <a:prstClr val="black"/>
+                </a:solidFill>
+                <a:effectLst/>
+                <a:uLnTx/>
+                <a:uFillTx/>
+                <a:latin typeface="Aptos" panose="02110004020202020204"/>
+                <a:ea typeface="+mn-ea"/>
+                <a:cs typeface="+mn-cs"/>
+              </a:rPr>
+              <a:t> SHAP identifies thiophene substructure (Bit 552, -5.37) as reducing activity—a nuance </a:t>
+            </a:r>
+            <a:r>
+              <a:rPr kumimoji="0" lang="en-US" sz="4400" b="0" i="0" u="none" strike="noStrike" kern="1200" cap="none" spc="0" normalizeH="0" baseline="0" noProof="0" dirty="0" err="1">
+                <a:ln>
+                  <a:noFill/>
+                </a:ln>
+                <a:solidFill>
+                  <a:prstClr val="black"/>
+                </a:solidFill>
+                <a:effectLst/>
+                <a:uLnTx/>
+                <a:uFillTx/>
+                <a:latin typeface="Aptos" panose="02110004020202020204"/>
+                <a:ea typeface="+mn-ea"/>
+                <a:cs typeface="+mn-cs"/>
+              </a:rPr>
+              <a:t>MolAnchor</a:t>
+            </a:r>
+            <a:r>
+              <a:rPr kumimoji="0" lang="en-US" sz="4400" b="0" i="0" u="none" strike="noStrike" kern="1200" cap="none" spc="0" normalizeH="0" baseline="0" noProof="0" dirty="0">
+                <a:ln>
+                  <a:noFill/>
+                </a:ln>
+                <a:solidFill>
+                  <a:prstClr val="black"/>
+                </a:solidFill>
+                <a:effectLst/>
+                <a:uLnTx/>
+                <a:uFillTx/>
+                <a:latin typeface="Aptos" panose="02110004020202020204"/>
+                <a:ea typeface="+mn-ea"/>
+                <a:cs typeface="+mn-cs"/>
+              </a:rPr>
+              <a:t> misses</a:t>
+            </a:r>
+          </a:p>
+        </p:txBody>
+      </p:sp>
+      <p:sp>
+        <p:nvSpPr>
+          <p:cNvPr id="85" name="TextBox 84">
+            <a:extLst>
+              <a:ext uri="{FF2B5EF4-FFF2-40B4-BE49-F238E27FC236}">
+                <a16:creationId xmlns:a16="http://schemas.microsoft.com/office/drawing/2014/main" id="{253B310A-4175-466E-82F8-A8F9C6BF4614}"/>
+              </a:ext>
+            </a:extLst>
+          </p:cNvPr>
+          <p:cNvSpPr txBox="1"/>
+          <p:nvPr/>
+        </p:nvSpPr>
+        <p:spPr>
+          <a:xfrm>
+            <a:off x="16522078" y="28068830"/>
+            <a:ext cx="17157371" cy="923330"/>
+          </a:xfrm>
+          <a:prstGeom prst="rect">
+            <a:avLst/>
+          </a:prstGeom>
+          <a:noFill/>
+        </p:spPr>
+        <p:txBody>
+          <a:bodyPr wrap="square">
+            <a:spAutoFit/>
+          </a:bodyPr>
+          <a:lstStyle/>
+          <a:p>
+            <a:pPr algn="ctr"/>
+            <a:r>
+              <a:rPr lang="en-US" sz="5400" b="1" dirty="0">
+                <a:solidFill>
+                  <a:srgbClr val="0F0F0F"/>
+                </a:solidFill>
+                <a:latin typeface="ui-sans-serif"/>
+              </a:rPr>
+              <a:t>Pair 2: </a:t>
+            </a:r>
+            <a:r>
+              <a:rPr lang="en-US" sz="5400" b="1" dirty="0" err="1">
+                <a:solidFill>
+                  <a:srgbClr val="0F0F0F"/>
+                </a:solidFill>
+                <a:latin typeface="ui-sans-serif"/>
+              </a:rPr>
+              <a:t>MolCE</a:t>
+            </a:r>
+            <a:r>
+              <a:rPr lang="en-US" sz="5400" b="1" dirty="0">
+                <a:solidFill>
+                  <a:srgbClr val="0F0F0F"/>
+                </a:solidFill>
+                <a:latin typeface="ui-sans-serif"/>
+              </a:rPr>
+              <a:t> vs Counterfactuals</a:t>
+            </a:r>
+            <a:endParaRPr lang="en-US" sz="5400" b="1" i="0" dirty="0">
+              <a:solidFill>
+                <a:srgbClr val="0F0F0F"/>
+              </a:solidFill>
+              <a:effectLst/>
+              <a:latin typeface="ui-sans-serif"/>
+            </a:endParaRPr>
+          </a:p>
+        </p:txBody>
+      </p:sp>
+      <p:sp>
+        <p:nvSpPr>
+          <p:cNvPr id="88" name="Rectangle: Rounded Corners 87">
+            <a:extLst>
+              <a:ext uri="{FF2B5EF4-FFF2-40B4-BE49-F238E27FC236}">
+                <a16:creationId xmlns:a16="http://schemas.microsoft.com/office/drawing/2014/main" id="{682C432F-C7DF-608D-CD06-390CC306E433}"/>
+              </a:ext>
+            </a:extLst>
+          </p:cNvPr>
+          <p:cNvSpPr/>
+          <p:nvPr/>
+        </p:nvSpPr>
+        <p:spPr>
+          <a:xfrm>
+            <a:off x="6564918" y="29051222"/>
+            <a:ext cx="37071691" cy="13099376"/>
+          </a:xfrm>
+          <a:prstGeom prst="roundRect">
+            <a:avLst/>
+          </a:prstGeom>
+          <a:noFill/>
+        </p:spPr>
+        <p:style>
+          <a:lnRef idx="2">
+            <a:schemeClr val="accent1">
+              <a:shade val="15000"/>
+            </a:schemeClr>
+          </a:lnRef>
+          <a:fillRef idx="1">
+            <a:schemeClr val="accent1"/>
+          </a:fillRef>
+          <a:effectRef idx="0">
+            <a:schemeClr val="accent1"/>
+          </a:effectRef>
+          <a:fontRef idx="minor">
+            <a:schemeClr val="lt1"/>
+          </a:fontRef>
+        </p:style>
+        <p:txBody>
+          <a:bodyPr rtlCol="0" anchor="ctr"/>
+          <a:lstStyle/>
+          <a:p>
+            <a:pPr algn="ctr"/>
+            <a:endParaRPr lang="en-US" dirty="0"/>
+          </a:p>
+        </p:txBody>
+      </p:sp>
+      <p:sp>
+        <p:nvSpPr>
+          <p:cNvPr id="89" name="TextBox 88">
+            <a:extLst>
+              <a:ext uri="{FF2B5EF4-FFF2-40B4-BE49-F238E27FC236}">
+                <a16:creationId xmlns:a16="http://schemas.microsoft.com/office/drawing/2014/main" id="{57BCAA73-24FE-3A3B-D1CF-4920116A858E}"/>
+              </a:ext>
+            </a:extLst>
+          </p:cNvPr>
+          <p:cNvSpPr txBox="1"/>
+          <p:nvPr/>
+        </p:nvSpPr>
+        <p:spPr>
+          <a:xfrm>
+            <a:off x="31448517" y="29149313"/>
+            <a:ext cx="6310257" cy="923330"/>
+          </a:xfrm>
+          <a:prstGeom prst="rect">
+            <a:avLst/>
+          </a:prstGeom>
+          <a:noFill/>
+        </p:spPr>
+        <p:txBody>
+          <a:bodyPr wrap="square" rtlCol="0">
+            <a:spAutoFit/>
+          </a:bodyPr>
+          <a:lstStyle/>
+          <a:p>
+            <a:pPr algn="ctr"/>
+            <a:r>
+              <a:rPr lang="en-US" sz="5400" b="1" dirty="0"/>
+              <a:t>Counterfactuals</a:t>
+            </a:r>
+            <a:endParaRPr lang="de-DE" sz="5400" b="1" dirty="0"/>
+          </a:p>
+        </p:txBody>
+      </p:sp>
+      <p:sp>
+        <p:nvSpPr>
+          <p:cNvPr id="90" name="TextBox 89">
+            <a:extLst>
+              <a:ext uri="{FF2B5EF4-FFF2-40B4-BE49-F238E27FC236}">
+                <a16:creationId xmlns:a16="http://schemas.microsoft.com/office/drawing/2014/main" id="{D161A347-D54E-4609-7680-93A714375D50}"/>
+              </a:ext>
+            </a:extLst>
+          </p:cNvPr>
+          <p:cNvSpPr txBox="1"/>
+          <p:nvPr/>
+        </p:nvSpPr>
+        <p:spPr>
+          <a:xfrm>
+            <a:off x="12146227" y="29149313"/>
+            <a:ext cx="6603459" cy="923330"/>
+          </a:xfrm>
+          <a:prstGeom prst="rect">
+            <a:avLst/>
+          </a:prstGeom>
+          <a:noFill/>
+        </p:spPr>
+        <p:txBody>
+          <a:bodyPr wrap="square" rtlCol="0">
+            <a:spAutoFit/>
+          </a:bodyPr>
+          <a:lstStyle/>
+          <a:p>
+            <a:pPr algn="ctr"/>
+            <a:r>
+              <a:rPr lang="en-US" sz="5400" b="1" dirty="0" err="1"/>
+              <a:t>MolCE</a:t>
+            </a:r>
+            <a:endParaRPr lang="de-DE" sz="5400" b="1" dirty="0"/>
+          </a:p>
+        </p:txBody>
+      </p:sp>
+      <p:sp>
+        <p:nvSpPr>
+          <p:cNvPr id="93" name="TextBox 92">
+            <a:extLst>
+              <a:ext uri="{FF2B5EF4-FFF2-40B4-BE49-F238E27FC236}">
+                <a16:creationId xmlns:a16="http://schemas.microsoft.com/office/drawing/2014/main" id="{FEECBCF4-1A29-9FAE-BC44-BE319FB16DC2}"/>
+              </a:ext>
+            </a:extLst>
+          </p:cNvPr>
+          <p:cNvSpPr txBox="1"/>
+          <p:nvPr/>
+        </p:nvSpPr>
+        <p:spPr>
+          <a:xfrm>
+            <a:off x="7218356" y="35652534"/>
+            <a:ext cx="16999638" cy="5970865"/>
+          </a:xfrm>
+          <a:prstGeom prst="rect">
+            <a:avLst/>
+          </a:prstGeom>
+          <a:noFill/>
+        </p:spPr>
+        <p:txBody>
+          <a:bodyPr wrap="square">
+            <a:spAutoFit/>
+          </a:bodyPr>
+          <a:lstStyle/>
+          <a:p>
+            <a:pPr>
+              <a:spcAft>
+                <a:spcPts val="1200"/>
+              </a:spcAft>
+            </a:pPr>
+            <a:r>
+              <a:rPr lang="en-US" sz="4400" b="1" dirty="0">
+                <a:latin typeface="Aptos" panose="020B0004020202020204" pitchFamily="34" charset="0"/>
+              </a:rPr>
+              <a:t>✅ AGREEMENTS (</a:t>
+            </a:r>
+            <a:r>
+              <a:rPr lang="en-US" sz="4400" b="1" i="0" dirty="0" err="1">
+                <a:solidFill>
+                  <a:srgbClr val="0F0F0F"/>
+                </a:solidFill>
+                <a:effectLst/>
+                <a:latin typeface="Aptos" panose="020B0004020202020204" pitchFamily="34" charset="0"/>
+              </a:rPr>
+              <a:t>MolCE</a:t>
+            </a:r>
+            <a:r>
+              <a:rPr lang="en-US" sz="4400" b="1" i="0" dirty="0">
+                <a:solidFill>
+                  <a:srgbClr val="0F0F0F"/>
+                </a:solidFill>
+                <a:effectLst/>
+                <a:latin typeface="Aptos" panose="020B0004020202020204" pitchFamily="34" charset="0"/>
+              </a:rPr>
+              <a:t> ↔ Counterfactuals</a:t>
+            </a:r>
+            <a:r>
+              <a:rPr lang="en-US" sz="4400" b="1" dirty="0">
+                <a:latin typeface="Aptos" panose="020B0004020202020204" pitchFamily="34" charset="0"/>
+              </a:rPr>
+              <a:t>)</a:t>
+            </a:r>
+          </a:p>
+          <a:p>
+            <a:pPr marL="742950" indent="-742950" algn="just">
+              <a:spcAft>
+                <a:spcPts val="1200"/>
+              </a:spcAft>
+              <a:buFont typeface="+mj-lt"/>
+              <a:buAutoNum type="arabicPeriod"/>
+            </a:pPr>
+            <a:r>
+              <a:rPr lang="en-US" sz="4400" b="1" i="0" dirty="0">
+                <a:solidFill>
+                  <a:srgbClr val="0F0F0F"/>
+                </a:solidFill>
+                <a:effectLst/>
+                <a:latin typeface="Aptos" panose="020B0004020202020204" pitchFamily="34" charset="0"/>
+              </a:rPr>
+              <a:t> </a:t>
+            </a:r>
+            <a:r>
+              <a:rPr lang="en-US" sz="4400" b="1" dirty="0"/>
+              <a:t>Piperazine N as critical site: </a:t>
+            </a:r>
+            <a:r>
+              <a:rPr lang="en-US" sz="4400" dirty="0"/>
+              <a:t>Both methods identify the piperazine nitrogen substituent as the most impactful site</a:t>
+            </a:r>
+          </a:p>
+          <a:p>
+            <a:pPr marL="742950" indent="-742950" algn="just">
+              <a:spcAft>
+                <a:spcPts val="1200"/>
+              </a:spcAft>
+              <a:buFont typeface="+mj-lt"/>
+              <a:buAutoNum type="arabicPeriod"/>
+            </a:pPr>
+            <a:r>
+              <a:rPr lang="en-US" sz="4400" b="1" dirty="0"/>
+              <a:t> Substituent sensitivity: </a:t>
+            </a:r>
+            <a:r>
+              <a:rPr lang="en-US" sz="4400" dirty="0"/>
+              <a:t>Both confirm that modifying the piperazine N-substituent can flip the prediction</a:t>
+            </a:r>
+          </a:p>
+          <a:p>
+            <a:pPr marL="742950" indent="-742950" algn="just">
+              <a:spcAft>
+                <a:spcPts val="1200"/>
+              </a:spcAft>
+              <a:buFont typeface="+mj-lt"/>
+              <a:buAutoNum type="arabicPeriod"/>
+            </a:pPr>
+            <a:r>
+              <a:rPr lang="en-US" sz="4400" b="1" dirty="0"/>
+              <a:t> Polarity effect: </a:t>
+            </a:r>
+            <a:r>
+              <a:rPr lang="en-US" sz="4400" dirty="0" err="1"/>
+              <a:t>MolCE's</a:t>
+            </a:r>
+            <a:r>
+              <a:rPr lang="en-US" sz="4400" dirty="0"/>
+              <a:t> contrastive R-groups (polar/charged) align with Counterfactuals showing polar additions eliminate activity</a:t>
+            </a:r>
+          </a:p>
+        </p:txBody>
+      </p:sp>
+      <p:sp>
+        <p:nvSpPr>
+          <p:cNvPr id="94" name="TextBox 93">
+            <a:extLst>
+              <a:ext uri="{FF2B5EF4-FFF2-40B4-BE49-F238E27FC236}">
+                <a16:creationId xmlns:a16="http://schemas.microsoft.com/office/drawing/2014/main" id="{CDE8FE82-D510-052C-FDC5-58E137B2D9BC}"/>
+              </a:ext>
+            </a:extLst>
+          </p:cNvPr>
+          <p:cNvSpPr txBox="1"/>
+          <p:nvPr/>
+        </p:nvSpPr>
+        <p:spPr>
+          <a:xfrm>
+            <a:off x="26374045" y="35652534"/>
+            <a:ext cx="16767142" cy="5139869"/>
+          </a:xfrm>
+          <a:prstGeom prst="rect">
+            <a:avLst/>
+          </a:prstGeom>
+          <a:noFill/>
+        </p:spPr>
+        <p:txBody>
+          <a:bodyPr wrap="square">
+            <a:spAutoFit/>
+          </a:bodyPr>
+          <a:lstStyle/>
+          <a:p>
+            <a:pPr>
+              <a:spcAft>
+                <a:spcPts val="1200"/>
+              </a:spcAft>
+              <a:defRPr/>
+            </a:pPr>
+            <a:r>
+              <a:rPr kumimoji="0" lang="en-US" sz="4400" b="1" i="0" u="none" strike="noStrike" kern="1200" cap="none" spc="0" normalizeH="0" baseline="0" noProof="0" dirty="0">
+                <a:ln>
+                  <a:noFill/>
+                </a:ln>
+                <a:solidFill>
+                  <a:prstClr val="black"/>
+                </a:solidFill>
+                <a:effectLst/>
+                <a:uLnTx/>
+                <a:uFillTx/>
+                <a:latin typeface="Aptos" panose="02110004020202020204"/>
+                <a:ea typeface="+mn-ea"/>
+                <a:cs typeface="+mn-cs"/>
+              </a:rPr>
+              <a:t>❌ DISAGREEMENTS (</a:t>
+            </a:r>
+            <a:r>
+              <a:rPr lang="en-US" sz="4400" b="1" i="0" dirty="0" err="1">
+                <a:solidFill>
+                  <a:srgbClr val="0F0F0F"/>
+                </a:solidFill>
+                <a:effectLst/>
+                <a:latin typeface="ui-sans-serif"/>
+              </a:rPr>
+              <a:t>MolCE</a:t>
+            </a:r>
+            <a:r>
+              <a:rPr lang="en-US" sz="4400" b="1" i="0" dirty="0">
+                <a:solidFill>
+                  <a:srgbClr val="0F0F0F"/>
+                </a:solidFill>
+                <a:effectLst/>
+                <a:latin typeface="ui-sans-serif"/>
+              </a:rPr>
+              <a:t> ↔ Counterfactuals</a:t>
+            </a:r>
+            <a:r>
+              <a:rPr kumimoji="0" lang="en-US" sz="4400" b="1" i="0" u="none" strike="noStrike" kern="1200" cap="none" spc="0" normalizeH="0" baseline="0" noProof="0" dirty="0">
+                <a:ln>
+                  <a:noFill/>
+                </a:ln>
+                <a:solidFill>
+                  <a:prstClr val="black"/>
+                </a:solidFill>
+                <a:effectLst/>
+                <a:uLnTx/>
+                <a:uFillTx/>
+                <a:latin typeface="Aptos" panose="02110004020202020204"/>
+                <a:ea typeface="+mn-ea"/>
+                <a:cs typeface="+mn-cs"/>
+              </a:rPr>
+              <a:t>)</a:t>
+            </a:r>
+          </a:p>
+          <a:p>
+            <a:pPr marL="742950" marR="0" lvl="0" indent="-742950" algn="just" defTabSz="457200" rtl="0" eaLnBrk="1" fontAlgn="auto" latinLnBrk="0" hangingPunct="1">
+              <a:lnSpc>
+                <a:spcPct val="100000"/>
+              </a:lnSpc>
+              <a:spcBef>
+                <a:spcPts val="0"/>
+              </a:spcBef>
+              <a:spcAft>
+                <a:spcPts val="1200"/>
+              </a:spcAft>
+              <a:buClrTx/>
+              <a:buSzTx/>
+              <a:buFont typeface="+mj-lt"/>
+              <a:buAutoNum type="arabicPeriod"/>
+              <a:tabLst/>
+              <a:defRPr/>
+            </a:pPr>
+            <a:r>
+              <a:rPr kumimoji="0" lang="en-US" sz="4400" b="1" i="0" u="none" strike="noStrike" kern="1200" cap="none" spc="0" normalizeH="0" baseline="0" noProof="0" dirty="0">
+                <a:ln>
+                  <a:noFill/>
+                </a:ln>
+                <a:solidFill>
+                  <a:prstClr val="black"/>
+                </a:solidFill>
+                <a:effectLst/>
+                <a:uLnTx/>
+                <a:uFillTx/>
+                <a:latin typeface="Aptos" panose="02110004020202020204"/>
+                <a:ea typeface="+mn-ea"/>
+                <a:cs typeface="+mn-cs"/>
+              </a:rPr>
+              <a:t>Scaffold importance: </a:t>
+            </a:r>
+            <a:r>
+              <a:rPr kumimoji="0" lang="en-US" sz="4400" i="0" u="none" strike="noStrike" kern="1200" cap="none" spc="0" normalizeH="0" baseline="0" noProof="0" dirty="0" err="1">
+                <a:ln>
+                  <a:noFill/>
+                </a:ln>
+                <a:solidFill>
+                  <a:prstClr val="black"/>
+                </a:solidFill>
+                <a:effectLst/>
+                <a:uLnTx/>
+                <a:uFillTx/>
+                <a:latin typeface="Aptos" panose="02110004020202020204"/>
+                <a:ea typeface="+mn-ea"/>
+                <a:cs typeface="+mn-cs"/>
+              </a:rPr>
+              <a:t>MolCE</a:t>
+            </a:r>
+            <a:r>
+              <a:rPr kumimoji="0" lang="en-US" sz="4400" i="0" u="none" strike="noStrike" kern="1200" cap="none" spc="0" normalizeH="0" baseline="0" noProof="0" dirty="0">
+                <a:ln>
+                  <a:noFill/>
+                </a:ln>
+                <a:solidFill>
+                  <a:prstClr val="black"/>
+                </a:solidFill>
+                <a:effectLst/>
+                <a:uLnTx/>
+                <a:uFillTx/>
+                <a:latin typeface="Aptos" panose="02110004020202020204"/>
+                <a:ea typeface="+mn-ea"/>
+                <a:cs typeface="+mn-cs"/>
+              </a:rPr>
+              <a:t> shows scaffold contrast score = 0.0 (scaffold changes don't matter), while Counterfactuals show substituent changes do matter</a:t>
+            </a:r>
+          </a:p>
+          <a:p>
+            <a:pPr marL="742950" marR="0" lvl="0" indent="-742950" algn="just" defTabSz="457200" rtl="0" eaLnBrk="1" fontAlgn="auto" latinLnBrk="0" hangingPunct="1">
+              <a:lnSpc>
+                <a:spcPct val="100000"/>
+              </a:lnSpc>
+              <a:spcBef>
+                <a:spcPts val="0"/>
+              </a:spcBef>
+              <a:spcAft>
+                <a:spcPts val="1200"/>
+              </a:spcAft>
+              <a:buClrTx/>
+              <a:buSzTx/>
+              <a:buFont typeface="+mj-lt"/>
+              <a:buAutoNum type="arabicPeriod"/>
+              <a:tabLst/>
+              <a:defRPr/>
+            </a:pPr>
+            <a:r>
+              <a:rPr kumimoji="0" lang="en-US" sz="4400" b="1" i="0" u="none" strike="noStrike" kern="1200" cap="none" spc="0" normalizeH="0" baseline="0" noProof="0" dirty="0">
+                <a:ln>
+                  <a:noFill/>
+                </a:ln>
+                <a:solidFill>
+                  <a:prstClr val="black"/>
+                </a:solidFill>
+                <a:effectLst/>
+                <a:uLnTx/>
+                <a:uFillTx/>
+                <a:latin typeface="Aptos" panose="02110004020202020204"/>
+                <a:ea typeface="+mn-ea"/>
+                <a:cs typeface="+mn-cs"/>
+              </a:rPr>
+              <a:t>Mechanism: </a:t>
+            </a:r>
+            <a:r>
+              <a:rPr kumimoji="0" lang="en-US" sz="4400" i="0" u="none" strike="noStrike" kern="1200" cap="none" spc="0" normalizeH="0" baseline="0" noProof="0" dirty="0" err="1">
+                <a:ln>
+                  <a:noFill/>
+                </a:ln>
+                <a:solidFill>
+                  <a:prstClr val="black"/>
+                </a:solidFill>
+                <a:effectLst/>
+                <a:uLnTx/>
+                <a:uFillTx/>
+                <a:latin typeface="Aptos" panose="02110004020202020204"/>
+                <a:ea typeface="+mn-ea"/>
+                <a:cs typeface="+mn-cs"/>
+              </a:rPr>
+              <a:t>MolCE</a:t>
+            </a:r>
+            <a:r>
+              <a:rPr kumimoji="0" lang="en-US" sz="4400" i="0" u="none" strike="noStrike" kern="1200" cap="none" spc="0" normalizeH="0" baseline="0" noProof="0" dirty="0">
+                <a:ln>
+                  <a:noFill/>
+                </a:ln>
+                <a:solidFill>
+                  <a:prstClr val="black"/>
+                </a:solidFill>
+                <a:effectLst/>
+                <a:uLnTx/>
+                <a:uFillTx/>
+                <a:latin typeface="Aptos" panose="02110004020202020204"/>
+                <a:ea typeface="+mn-ea"/>
+                <a:cs typeface="+mn-cs"/>
+              </a:rPr>
+              <a:t> focuses on contrast (why not inactive?), while Counterfactuals show transformation (how to become inactive?)</a:t>
+            </a:r>
+          </a:p>
+        </p:txBody>
+      </p:sp>
+      <p:grpSp>
+        <p:nvGrpSpPr>
+          <p:cNvPr id="102" name="Group 101">
+            <a:extLst>
+              <a:ext uri="{FF2B5EF4-FFF2-40B4-BE49-F238E27FC236}">
+                <a16:creationId xmlns:a16="http://schemas.microsoft.com/office/drawing/2014/main" id="{D6439D96-81F8-F222-FD0A-6CB3EEA18EBC}"/>
+              </a:ext>
+            </a:extLst>
+          </p:cNvPr>
+          <p:cNvGrpSpPr/>
+          <p:nvPr/>
+        </p:nvGrpSpPr>
+        <p:grpSpPr>
+          <a:xfrm>
+            <a:off x="26135503" y="30203702"/>
+            <a:ext cx="16963406" cy="4094569"/>
+            <a:chOff x="25678303" y="34723809"/>
+            <a:chExt cx="16963406" cy="4094569"/>
+          </a:xfrm>
+        </p:grpSpPr>
+        <p:pic>
+          <p:nvPicPr>
+            <p:cNvPr id="100" name="Picture 99">
+              <a:extLst>
+                <a:ext uri="{FF2B5EF4-FFF2-40B4-BE49-F238E27FC236}">
+                  <a16:creationId xmlns:a16="http://schemas.microsoft.com/office/drawing/2014/main" id="{B1F6B432-D2DB-A370-2458-530FF31A48DE}"/>
+                </a:ext>
+              </a:extLst>
+            </p:cNvPr>
+            <p:cNvPicPr>
+              <a:picLocks noChangeAspect="1"/>
+            </p:cNvPicPr>
+            <p:nvPr/>
+          </p:nvPicPr>
+          <p:blipFill>
+            <a:blip r:embed="rId5">
+              <a:extLst>
+                <a:ext uri="{28A0092B-C50C-407E-A947-70E740481C1C}">
+                  <a14:useLocalDpi xmlns:a14="http://schemas.microsoft.com/office/drawing/2010/main" val="0"/>
+                </a:ext>
+              </a:extLst>
+            </a:blip>
+            <a:srcRect l="28881" t="31485" r="52081" b="52476"/>
+            <a:stretch/>
+          </p:blipFill>
+          <p:spPr>
+            <a:xfrm>
+              <a:off x="25678303" y="34723809"/>
+              <a:ext cx="9202228" cy="4094569"/>
+            </a:xfrm>
+            <a:prstGeom prst="rect">
+              <a:avLst/>
+            </a:prstGeom>
+          </p:spPr>
+        </p:pic>
+        <p:pic>
+          <p:nvPicPr>
+            <p:cNvPr id="101" name="Picture 100">
+              <a:extLst>
+                <a:ext uri="{FF2B5EF4-FFF2-40B4-BE49-F238E27FC236}">
+                  <a16:creationId xmlns:a16="http://schemas.microsoft.com/office/drawing/2014/main" id="{02144A18-8CA9-B867-F30C-81AC5EE2D851}"/>
+                </a:ext>
+              </a:extLst>
+            </p:cNvPr>
+            <p:cNvPicPr>
+              <a:picLocks noChangeAspect="1"/>
+            </p:cNvPicPr>
+            <p:nvPr/>
+          </p:nvPicPr>
+          <p:blipFill>
+            <a:blip r:embed="rId5">
+              <a:extLst>
+                <a:ext uri="{28A0092B-C50C-407E-A947-70E740481C1C}">
+                  <a14:useLocalDpi xmlns:a14="http://schemas.microsoft.com/office/drawing/2010/main" val="0"/>
+                </a:ext>
+              </a:extLst>
+            </a:blip>
+            <a:srcRect l="54567" t="30675" r="27299" b="52476"/>
+            <a:stretch/>
+          </p:blipFill>
+          <p:spPr>
+            <a:xfrm>
+              <a:off x="35089246" y="35101923"/>
+              <a:ext cx="7552463" cy="3706321"/>
+            </a:xfrm>
+            <a:prstGeom prst="rect">
+              <a:avLst/>
+            </a:prstGeom>
+          </p:spPr>
+        </p:pic>
+      </p:grpSp>
+      <p:sp>
+        <p:nvSpPr>
+          <p:cNvPr id="104" name="TextBox 103">
+            <a:extLst>
+              <a:ext uri="{FF2B5EF4-FFF2-40B4-BE49-F238E27FC236}">
+                <a16:creationId xmlns:a16="http://schemas.microsoft.com/office/drawing/2014/main" id="{447066D7-B3FD-7386-0F15-CA073EB9CD5F}"/>
+              </a:ext>
+            </a:extLst>
+          </p:cNvPr>
+          <p:cNvSpPr txBox="1"/>
+          <p:nvPr/>
+        </p:nvSpPr>
+        <p:spPr>
+          <a:xfrm>
+            <a:off x="27209875" y="34408132"/>
+            <a:ext cx="5713914" cy="1015663"/>
+          </a:xfrm>
+          <a:prstGeom prst="rect">
+            <a:avLst/>
+          </a:prstGeom>
+          <a:noFill/>
+        </p:spPr>
+        <p:txBody>
+          <a:bodyPr wrap="square" rtlCol="0">
+            <a:spAutoFit/>
+          </a:bodyPr>
+          <a:lstStyle/>
+          <a:p>
+            <a:pPr algn="ctr"/>
+            <a:r>
+              <a:rPr lang="en-US" sz="3000" b="1" i="0" dirty="0">
+                <a:solidFill>
+                  <a:srgbClr val="0F0F0F"/>
+                </a:solidFill>
+                <a:effectLst/>
+                <a:latin typeface="ui-sans-serif"/>
+              </a:rPr>
+              <a:t>CF #1 (substituent)</a:t>
+            </a:r>
+          </a:p>
+          <a:p>
+            <a:pPr algn="ctr"/>
+            <a:r>
+              <a:rPr lang="en-US" sz="3000" b="1" dirty="0">
+                <a:solidFill>
+                  <a:srgbClr val="0F0F0F"/>
+                </a:solidFill>
+                <a:latin typeface="ui-sans-serif"/>
+              </a:rPr>
+              <a:t>Predicted class: 0| Similarity: 0.68</a:t>
+            </a:r>
+            <a:endParaRPr lang="en-US" sz="3000" dirty="0"/>
+          </a:p>
+        </p:txBody>
+      </p:sp>
+      <p:sp>
+        <p:nvSpPr>
+          <p:cNvPr id="105" name="TextBox 104">
+            <a:extLst>
+              <a:ext uri="{FF2B5EF4-FFF2-40B4-BE49-F238E27FC236}">
+                <a16:creationId xmlns:a16="http://schemas.microsoft.com/office/drawing/2014/main" id="{3340F736-7968-FDB4-A971-D1E03504210F}"/>
+              </a:ext>
+            </a:extLst>
+          </p:cNvPr>
+          <p:cNvSpPr txBox="1"/>
+          <p:nvPr/>
+        </p:nvSpPr>
+        <p:spPr>
+          <a:xfrm>
+            <a:off x="36183383" y="34408132"/>
+            <a:ext cx="5713914" cy="1015663"/>
+          </a:xfrm>
+          <a:prstGeom prst="rect">
+            <a:avLst/>
+          </a:prstGeom>
+          <a:noFill/>
+        </p:spPr>
+        <p:txBody>
+          <a:bodyPr wrap="square" rtlCol="0">
+            <a:spAutoFit/>
+          </a:bodyPr>
+          <a:lstStyle/>
+          <a:p>
+            <a:pPr algn="ctr"/>
+            <a:r>
+              <a:rPr lang="en-US" sz="3000" b="1" i="0" dirty="0">
+                <a:solidFill>
+                  <a:srgbClr val="0F0F0F"/>
+                </a:solidFill>
+                <a:effectLst/>
+                <a:latin typeface="ui-sans-serif"/>
+              </a:rPr>
+              <a:t>CF #2 (substituent)</a:t>
+            </a:r>
+          </a:p>
+          <a:p>
+            <a:pPr algn="ctr"/>
+            <a:r>
+              <a:rPr lang="en-US" sz="3000" b="1" dirty="0">
+                <a:solidFill>
+                  <a:srgbClr val="0F0F0F"/>
+                </a:solidFill>
+                <a:latin typeface="ui-sans-serif"/>
+              </a:rPr>
+              <a:t>Predicted class: 0| Similarity: 0.68</a:t>
+            </a:r>
+            <a:endParaRPr lang="en-US" sz="3000" dirty="0"/>
+          </a:p>
+        </p:txBody>
+      </p:sp>
+      <p:sp>
+        <p:nvSpPr>
+          <p:cNvPr id="106" name="TextBox 105">
+            <a:extLst>
+              <a:ext uri="{FF2B5EF4-FFF2-40B4-BE49-F238E27FC236}">
+                <a16:creationId xmlns:a16="http://schemas.microsoft.com/office/drawing/2014/main" id="{B8051128-A1DB-8545-0F40-55389E4B301D}"/>
+              </a:ext>
+            </a:extLst>
+          </p:cNvPr>
+          <p:cNvSpPr txBox="1"/>
+          <p:nvPr/>
+        </p:nvSpPr>
+        <p:spPr>
+          <a:xfrm>
+            <a:off x="8223531" y="34408132"/>
+            <a:ext cx="5414457" cy="1015663"/>
+          </a:xfrm>
+          <a:prstGeom prst="rect">
+            <a:avLst/>
+          </a:prstGeom>
+          <a:noFill/>
+        </p:spPr>
+        <p:txBody>
+          <a:bodyPr wrap="square" rtlCol="0">
+            <a:spAutoFit/>
+          </a:bodyPr>
+          <a:lstStyle/>
+          <a:p>
+            <a:pPr algn="ctr"/>
+            <a:r>
+              <a:rPr lang="en-US" sz="3000" b="1" i="0" dirty="0">
+                <a:solidFill>
+                  <a:srgbClr val="0F0F0F"/>
+                </a:solidFill>
+                <a:effectLst/>
+                <a:latin typeface="ui-sans-serif"/>
+              </a:rPr>
+              <a:t>Rank 1 | Site 1</a:t>
+            </a:r>
+          </a:p>
+          <a:p>
+            <a:pPr algn="ctr"/>
+            <a:r>
+              <a:rPr lang="en-US" sz="3000" b="1" dirty="0">
+                <a:solidFill>
+                  <a:srgbClr val="0F0F0F"/>
+                </a:solidFill>
+                <a:latin typeface="ui-sans-serif"/>
+              </a:rPr>
+              <a:t>Contrast: 1.00</a:t>
+            </a:r>
+            <a:endParaRPr lang="en-US" sz="3000" dirty="0"/>
+          </a:p>
+        </p:txBody>
+      </p:sp>
+      <p:sp>
+        <p:nvSpPr>
+          <p:cNvPr id="107" name="TextBox 106">
+            <a:extLst>
+              <a:ext uri="{FF2B5EF4-FFF2-40B4-BE49-F238E27FC236}">
+                <a16:creationId xmlns:a16="http://schemas.microsoft.com/office/drawing/2014/main" id="{F021D298-CD48-A056-2501-CA7203875916}"/>
+              </a:ext>
+            </a:extLst>
+          </p:cNvPr>
+          <p:cNvSpPr txBox="1"/>
+          <p:nvPr/>
+        </p:nvSpPr>
+        <p:spPr>
+          <a:xfrm>
+            <a:off x="16969252" y="34408132"/>
+            <a:ext cx="5453166" cy="1015663"/>
+          </a:xfrm>
+          <a:prstGeom prst="rect">
+            <a:avLst/>
+          </a:prstGeom>
+          <a:noFill/>
+        </p:spPr>
+        <p:txBody>
+          <a:bodyPr wrap="square" rtlCol="0">
+            <a:spAutoFit/>
+          </a:bodyPr>
+          <a:lstStyle/>
+          <a:p>
+            <a:pPr algn="ctr"/>
+            <a:r>
+              <a:rPr lang="en-US" sz="3000" b="1" i="0" dirty="0">
+                <a:solidFill>
+                  <a:srgbClr val="0F0F0F"/>
+                </a:solidFill>
+                <a:effectLst/>
+                <a:latin typeface="ui-sans-serif"/>
+              </a:rPr>
+              <a:t>Rank 2 | Site 1</a:t>
+            </a:r>
+          </a:p>
+          <a:p>
+            <a:pPr algn="ctr"/>
+            <a:r>
+              <a:rPr lang="en-US" sz="3000" b="1" dirty="0">
+                <a:solidFill>
+                  <a:srgbClr val="0F0F0F"/>
+                </a:solidFill>
+                <a:latin typeface="ui-sans-serif"/>
+              </a:rPr>
+              <a:t>Contrast: 1.00</a:t>
+            </a:r>
+            <a:endParaRPr lang="en-US" sz="3000" dirty="0"/>
+          </a:p>
+        </p:txBody>
+      </p:sp>
+    </p:spTree>
+    <p:extLst>
+      <p:ext uri="{BB962C8B-B14F-4D97-AF65-F5344CB8AC3E}">
+        <p14:creationId xmlns:p14="http://schemas.microsoft.com/office/powerpoint/2010/main" val="3074598117"/>
+      </p:ext>
+    </p:extLst>
+  </p:cSld>
+  <p:clrMapOvr>
+    <a:masterClrMapping/>
+  </p:clrMapOvr>
+</p:sld>
+</file>
+
+<file path=ppt/slides/slide5.xml><?xml version="1.0" encoding="utf-8"?>
 <p:sld xmlns:a="http://schemas.openxmlformats.org/drawingml/2006/main" xmlns:r="http://schemas.openxmlformats.org/officeDocument/2006/relationships" xmlns:p="http://schemas.openxmlformats.org/presentationml/2006/main" show="0">
   <p:cSld>
     <p:spTree>
@@ -15198,7 +18816,7 @@
 </p:sld>
 </file>
 
-<file path=ppt/slides/slide5.xml><?xml version="1.0" encoding="utf-8"?>
+<file path=ppt/slides/slide6.xml><?xml version="1.0" encoding="utf-8"?>
 <p:sld xmlns:a="http://schemas.openxmlformats.org/drawingml/2006/main" xmlns:r="http://schemas.openxmlformats.org/officeDocument/2006/relationships" xmlns:p="http://schemas.openxmlformats.org/presentationml/2006/main" show="0">
   <p:cSld>
     <p:spTree>
@@ -16938,7 +20556,7 @@
 </p:sld>
 </file>
 
-<file path=ppt/slides/slide6.xml><?xml version="1.0" encoding="utf-8"?>
+<file path=ppt/slides/slide7.xml><?xml version="1.0" encoding="utf-8"?>
 <p:sld xmlns:a="http://schemas.openxmlformats.org/drawingml/2006/main" xmlns:r="http://schemas.openxmlformats.org/officeDocument/2006/relationships" xmlns:p="http://schemas.openxmlformats.org/presentationml/2006/main" show="0">
   <p:cSld>
     <p:spTree>
@@ -19600,7 +23218,7 @@
 </p:sld>
 </file>
 
-<file path=ppt/slides/slide7.xml><?xml version="1.0" encoding="utf-8"?>
+<file path=ppt/slides/slide8.xml><?xml version="1.0" encoding="utf-8"?>
 <p:sld xmlns:a="http://schemas.openxmlformats.org/drawingml/2006/main" xmlns:r="http://schemas.openxmlformats.org/officeDocument/2006/relationships" xmlns:p="http://schemas.openxmlformats.org/presentationml/2006/main" show="0">
   <p:cSld>
     <p:spTree>
